--- a/downloads/presentations/modules/lesson-61-business-analysis-for-ai-enabled-public-health-systems.pptx
+++ b/downloads/presentations/modules/lesson-61-business-analysis-for-ai-enabled-public-health-systems.pptx
@@ -24,9 +24,11 @@
     <p:sldId id="272" r:id="rId18"/>
     <p:sldId id="273" r:id="rId19"/>
     <p:sldId id="274" r:id="rId20"/>
+    <p:sldId id="275" r:id="rId21"/>
+    <p:sldId id="276" r:id="rId22"/>
   </p:sldIdLst>
   <p:notesMasterIdLst>
-    <p:notesMasterId r:id="rId21"/>
+    <p:notesMasterId r:id="rId23"/>
   </p:notesMasterIdLst>
   <p:sldSz cx="12192000" cy="6858000"/>
   <p:notesSz cx="6858000" cy="12192000"/>
@@ -609,10 +611,10 @@
           <a:p>
             <a:r>
               <a:rPr lang="en-US" dirty="0"/>
-              <a:t>Topic Deep Dive
-Business analysis begins with problem definition. Teams should document the public health objective, the operational pain point, the affected users, the current workflow, the decision being supported, and the consequences of error. A vague goal such as “use AI to improve efficiency” is not sufficient for implementation.
-Requirements should be grounded in workflow. Analysts should define current-state and future-state processes, data inputs, outputs, decision points, exception handling, reporting needs, and approval steps. This helps prevent tools from being procured without a clear implementation pathway.
-AI business analysis also requires boundary setting. Teams should define intended uses, prohibited uses, users, data permissions, human review points, and escalation triggers. These boundaries should become requirements, training expectations, and governance criteria.</a:t>
+              <a:t>Core Concepts
+Business analysis clarifies the problem, workflow, users, requirements, constraints, and success criteria before technology decisions are made. AI projects often fail when teams start with a tool rather than a well-defined public health need.
+A user story describes what a user needs to do and why. In AI work, user stories should include human review, data requirements, documentation, and limitations. A user story should not simply say that the user wants AI; it should describe the task the AI is supporting.
+Acceptance criteria are testable conditions that determine whether a requirement has been met. For AI systems, acceptance criteria should include accuracy, workflow fit, usability, security, privacy, accessibility, and human oversight.</a:t>
             </a:r>
             <a:endParaRPr lang="en-US" dirty="0"/>
           </a:p>
@@ -700,10 +702,8 @@
           <a:p>
             <a:r>
               <a:rPr lang="en-US" dirty="0"/>
-              <a:t>Risks, Failure Modes, and Guardrails
-A common failure mode is treating the topic as a technical detail rather than a public health control. When staff do not connect technical decisions to authority, workflow, equity, privacy, security, and accountability, the agency may adopt a tool that appears useful but cannot be sustained or defended.
-Another risk is relying on vendor claims without agency-defined evidence. Vendors may provide demonstrations, dashboards, or summary metrics that do not match the agency workflow or data environment. A guardrail is to require documentation, test results, acceptance criteria, and agency-controlled review.
-A third risk is failing to plan for change. Public health data, policies, systems, and emergencies change. Any technical approach must include monitoring, review, versioning, escalation, and retirement pathways so the agency can respond when assumptions no longer hold.</a:t>
+              <a:t>Public Health Example
+A local health department may want AI to help classify community complaints. A business analyst would clarify whether the real problem is high complaint volume, inconsistent routing, delayed response, lack of category definitions, or insufficient staffing. The resulting requirements may call for classification support with human review rather than fully automated complaint resolution.</a:t>
             </a:r>
             <a:endParaRPr lang="en-US" dirty="0"/>
           </a:p>
@@ -791,9 +791,10 @@
           <a:p>
             <a:r>
               <a:rPr lang="en-US" dirty="0"/>
-              <a:t>Application to AI-Supported Workflows
-Generative AI, predictive analytics, RAG, automation, and agentic workflows all depend on the controls described in this module. The controls should be scaled to the risk of the use case. A tool that drafts internal training text may require lighter review than a tool that updates case records, prioritizes outreach, or supports public communication during an emergency.
-The module should be applied during readiness assessment, procurement, implementation planning, pilot testing, and post-deployment monitoring. Learners should document how the topic affects data, systems, users, safeguards, and decision-making for the selected workflow.</a:t>
+              <a:t>Topic Deep Dive
+Business analysis begins with problem definition. Teams should document the public health objective, the operational pain point, the affected users, the current workflow, the decision being supported, and the consequences of error. A vague goal such as “use AI to improve efficiency” is not sufficient for implementation.
+Requirements should be grounded in workflow. Analysts should define current-state and future-state processes, data inputs, outputs, decision points, exception handling, reporting needs, and approval steps. This helps prevent tools from being procured without a clear implementation pathway.
+AI business analysis also requires boundary setting. Teams should define intended uses, prohibited uses, users, data permissions, human review points, and escalation triggers. These boundaries should become requirements, training expectations, and governance criteria.</a:t>
             </a:r>
             <a:endParaRPr lang="en-US" dirty="0"/>
           </a:p>
@@ -881,10 +882,10 @@
           <a:p>
             <a:r>
               <a:rPr lang="en-US" dirty="0"/>
-              <a:t>Reflection Questions
-Where does this topic appear in one current or proposed AI workflow in your agency?
-What decisions, data sources, users, or partners would be affected if this area is poorly designed?
-What evidence would governance reviewers need before approving the workflow?</a:t>
+              <a:t>Risks, Failure Modes, and Guardrails
+A common failure mode is treating the topic as a technical detail rather than a public health control. When staff do not connect technical decisions to authority, workflow, equity, privacy, security, and accountability, the agency may adopt a tool that appears useful but cannot be sustained or defended.
+Another risk is relying on vendor claims without agency-defined evidence. Vendors may provide demonstrations, dashboards, or summary metrics that do not match the agency workflow or data environment. A guardrail is to require documentation, test results, acceptance criteria, and agency-controlled review.
+A third risk is failing to plan for change. Public health data, policies, systems, and emergencies change. Any technical approach must include monitoring, review, versioning, escalation, and retirement pathways so the agency can respond when assumptions no longer hold.</a:t>
             </a:r>
             <a:endParaRPr lang="en-US" dirty="0"/>
           </a:p>
@@ -972,9 +973,9 @@
           <a:p>
             <a:r>
               <a:rPr lang="en-US" dirty="0"/>
-              <a:t>Reflection Questions
-Which safeguards should be required before pilot testing?
-Who owns ongoing monitoring and review?</a:t>
+              <a:t>Application to AI-Supported Workflows
+Generative AI, predictive analytics, RAG, automation, and agentic workflows all depend on the controls described in this module. The controls should be scaled to the risk of the use case. A tool that drafts internal training text may require lighter review than a tool that updates case records, prioritizes outreach, or supports public communication during an emergency.
+The module should be applied during readiness assessment, procurement, implementation planning, pilot testing, and post-deployment monitoring. Learners should document how the topic affects data, systems, users, safeguards, and decision-making for the selected workflow.</a:t>
             </a:r>
             <a:endParaRPr lang="en-US" dirty="0"/>
           </a:p>
@@ -1062,9 +1063,10 @@
           <a:p>
             <a:r>
               <a:rPr lang="en-US" dirty="0"/>
-              <a:t>Practical Exercise
-Create a AI business analysis package for one real or realistic public health AI workflow. The artifact should describe the use case, affected users, data sources, system dependencies, risks, guardrails, review points, and unresolved questions.
-The exercise should produce a work product that could be used in a governance meeting, procurement review, implementation planning session, pilot evaluation, or monitoring review. Learners should document assumptions and identify which staff or partners need to be consulted.</a:t>
+              <a:t>Reflection Questions
+Where does this topic appear in one current or proposed AI workflow in your agency?
+What decisions, data sources, users, or partners would be affected if this area is poorly designed?
+What evidence would governance reviewers need before approving the workflow?</a:t>
             </a:r>
             <a:endParaRPr lang="en-US" dirty="0"/>
           </a:p>
@@ -1152,8 +1154,9 @@
           <a:p>
             <a:r>
               <a:rPr lang="en-US" dirty="0"/>
-              <a:t>Expected Artifact or Evidence
-The expected artifact is a completed AI business analysis package. It should be specific to a public health workflow and should include technical dependencies, governance questions, human review expectations, monitoring indicators, and unresolved risks.</a:t>
+              <a:t>Reflection Questions
+Which safeguards should be required before pilot testing?
+Who owns ongoing monitoring and review?</a:t>
             </a:r>
             <a:endParaRPr lang="en-US" dirty="0"/>
           </a:p>
@@ -1241,8 +1244,9 @@
           <a:p>
             <a:r>
               <a:rPr lang="en-US" dirty="0"/>
-              <a:t>Expected Assignment
-The expected artifact is a completed AI business analysis package. It should be specific to a public health workflow and should include technical dependencies, governance questions, human review expectations, monitoring indicators, and unresolved risks.</a:t>
+              <a:t>Practical Exercise
+Create a AI business analysis package for one real or realistic public health AI workflow. The artifact should describe the use case, affected users, data sources, system dependencies, risks, guardrails, review points, and unresolved questions.
+The exercise should produce a work product that could be used in a governance meeting, procurement review, implementation planning session, pilot evaluation, or monitoring review. Learners should document assumptions and identify which staff or partners need to be consulted.</a:t>
             </a:r>
             <a:endParaRPr lang="en-US" dirty="0"/>
           </a:p>
@@ -1330,12 +1334,8 @@
           <a:p>
             <a:r>
               <a:rPr lang="en-US" dirty="0"/>
-              <a:t>Knowledge Check
-1. What is the best reason to address business analysis for ai-enabled public health systems before deployment?
-2. Which practice best supports responsible implementation?
-3. Which statement best describes a common failure mode?
-4. What should be included in the practical artifact for this module?
-5. When should the issue be escalated for governance or leadership review?</a:t>
+              <a:t>Expected Artifact or Evidence
+The expected artifact is a completed AI business analysis package. It should be specific to a public health workflow and should include technical dependencies, governance questions, human review expectations, monitoring indicators, and unresolved risks.</a:t>
             </a:r>
             <a:endParaRPr lang="en-US" dirty="0"/>
           </a:p>
@@ -1423,12 +1423,8 @@
           <a:p>
             <a:r>
               <a:rPr lang="en-US" dirty="0"/>
-              <a:t>References and Resources
-NIST AI Risk Management Framework: https://www.nist.gov/itl/ai-risk-management-framework
-NIST Generative AI Profile: https://www.nist.gov/publications/artificial-intelligence-risk-management-framework-generative-artificial-intelligence
-CDC Public Health Data Strategy and Data Modernization resources: https://www.cdc.gov/public-health-data-strategy/php/about/index.html
-OWASP Top 10 for LLM Applications, when security or AI integrations are relevant
-Agency privacy, cybersecurity, data governance, procurement, and records management policies</a:t>
+              <a:t>Expected Assignment
+The expected artifact is a completed AI business analysis package. It should be specific to a public health workflow and should include technical dependencies, governance questions, human review expectations, monitoring indicators, and unresolved risks.</a:t>
             </a:r>
             <a:endParaRPr lang="en-US" dirty="0"/>
           </a:p>
@@ -1562,6 +1558,192 @@
 </p:notes>
 </file>
 
+<file path=ppt/notesSlides/notesSlide20.xml><?xml version="1.0" encoding="utf-8"?>
+<p:notes xmlns:a="http://schemas.openxmlformats.org/drawingml/2006/main" xmlns:r="http://schemas.openxmlformats.org/officeDocument/2006/relationships" xmlns:p="http://schemas.openxmlformats.org/presentationml/2006/main">
+  <p:cSld>
+    <p:spTree>
+      <p:nvGrpSpPr>
+        <p:cNvPr id="1" name=""/>
+        <p:cNvGrpSpPr/>
+        <p:nvPr/>
+      </p:nvGrpSpPr>
+      <p:grpSpPr>
+        <a:xfrm>
+          <a:off x="0" y="0"/>
+          <a:ext cx="0" cy="0"/>
+          <a:chOff x="0" y="0"/>
+          <a:chExt cx="0" cy="0"/>
+        </a:xfrm>
+      </p:grpSpPr>
+      <p:sp>
+        <p:nvSpPr>
+          <p:cNvPr id="2" name="Slide Image Placeholder 1"/>
+          <p:cNvSpPr>
+            <a:spLocks noGrp="1" noRot="1" noChangeAspect="1"/>
+          </p:cNvSpPr>
+          <p:nvPr>
+            <p:ph type="sldImg"/>
+          </p:nvPr>
+        </p:nvSpPr>
+        <p:spPr/>
+      </p:sp>
+      <p:sp>
+        <p:nvSpPr>
+          <p:cNvPr id="3" name="Notes Placeholder 2"/>
+          <p:cNvSpPr>
+            <a:spLocks noGrp="1"/>
+          </p:cNvSpPr>
+          <p:nvPr>
+            <p:ph type="body" idx="1"/>
+          </p:nvPr>
+        </p:nvSpPr>
+        <p:spPr/>
+        <p:txBody>
+          <a:bodyPr/>
+          <a:lstStyle/>
+          <a:p>
+            <a:r>
+              <a:rPr lang="en-US" dirty="0"/>
+              <a:t>Knowledge Check
+1. What is the best reason to address business analysis for ai-enabled public health systems before deployment?
+2. Which practice best supports responsible implementation?
+3. Which statement best describes a common failure mode?
+4. What should be included in the practical artifact for this module?
+5. When should the issue be escalated for governance or leadership review?</a:t>
+            </a:r>
+            <a:endParaRPr lang="en-US" dirty="0"/>
+          </a:p>
+        </p:txBody>
+      </p:sp>
+      <p:sp>
+        <p:nvSpPr>
+          <p:cNvPr id="4" name="Slide Number Placeholder 3"/>
+          <p:cNvSpPr>
+            <a:spLocks noGrp="1"/>
+          </p:cNvSpPr>
+          <p:nvPr>
+            <p:ph type="sldNum" sz="quarter" idx="10"/>
+          </p:nvPr>
+        </p:nvSpPr>
+        <p:spPr/>
+        <p:txBody>
+          <a:bodyPr/>
+          <a:lstStyle/>
+          <a:p>
+            <a:fld id="{F7021451-1387-4CA6-816F-3879F97B5CBC}" type="slidenum">
+              <a:rPr lang="en-US"/>
+              <a:t>20</a:t>
+            </a:fld>
+            <a:endParaRPr lang="en-US"/>
+          </a:p>
+        </p:txBody>
+      </p:sp>
+    </p:spTree>
+    <p:extLst>
+      <p:ext uri="{BB962C8B-B14F-4D97-AF65-F5344CB8AC3E}">
+        <p14:creationId xmlns:p14="http://schemas.microsoft.com/office/powerpoint/2010/main" val="1024086991"/>
+      </p:ext>
+    </p:extLst>
+  </p:cSld>
+  <p:clrMapOvr>
+    <a:masterClrMapping/>
+  </p:clrMapOvr>
+</p:notes>
+</file>
+
+<file path=ppt/notesSlides/notesSlide21.xml><?xml version="1.0" encoding="utf-8"?>
+<p:notes xmlns:a="http://schemas.openxmlformats.org/drawingml/2006/main" xmlns:r="http://schemas.openxmlformats.org/officeDocument/2006/relationships" xmlns:p="http://schemas.openxmlformats.org/presentationml/2006/main">
+  <p:cSld>
+    <p:spTree>
+      <p:nvGrpSpPr>
+        <p:cNvPr id="1" name=""/>
+        <p:cNvGrpSpPr/>
+        <p:nvPr/>
+      </p:nvGrpSpPr>
+      <p:grpSpPr>
+        <a:xfrm>
+          <a:off x="0" y="0"/>
+          <a:ext cx="0" cy="0"/>
+          <a:chOff x="0" y="0"/>
+          <a:chExt cx="0" cy="0"/>
+        </a:xfrm>
+      </p:grpSpPr>
+      <p:sp>
+        <p:nvSpPr>
+          <p:cNvPr id="2" name="Slide Image Placeholder 1"/>
+          <p:cNvSpPr>
+            <a:spLocks noGrp="1" noRot="1" noChangeAspect="1"/>
+          </p:cNvSpPr>
+          <p:nvPr>
+            <p:ph type="sldImg"/>
+          </p:nvPr>
+        </p:nvSpPr>
+        <p:spPr/>
+      </p:sp>
+      <p:sp>
+        <p:nvSpPr>
+          <p:cNvPr id="3" name="Notes Placeholder 2"/>
+          <p:cNvSpPr>
+            <a:spLocks noGrp="1"/>
+          </p:cNvSpPr>
+          <p:nvPr>
+            <p:ph type="body" idx="1"/>
+          </p:nvPr>
+        </p:nvSpPr>
+        <p:spPr/>
+        <p:txBody>
+          <a:bodyPr/>
+          <a:lstStyle/>
+          <a:p>
+            <a:r>
+              <a:rPr lang="en-US" dirty="0"/>
+              <a:t>References and Resources
+NIST AI Risk Management Framework: https://www.nist.gov/itl/ai-risk-management-framework
+NIST Generative AI Profile: https://www.nist.gov/publications/artificial-intelligence-risk-management-framework-generative-artificial-intelligence
+CDC Public Health Data Strategy and Data Modernization resources: https://www.cdc.gov/public-health-data-strategy/php/about/index.html
+OWASP Top 10 for LLM Applications, when security or AI integrations are relevant
+Agency privacy, cybersecurity, data governance, procurement, and records management policies</a:t>
+            </a:r>
+            <a:endParaRPr lang="en-US" dirty="0"/>
+          </a:p>
+        </p:txBody>
+      </p:sp>
+      <p:sp>
+        <p:nvSpPr>
+          <p:cNvPr id="4" name="Slide Number Placeholder 3"/>
+          <p:cNvSpPr>
+            <a:spLocks noGrp="1"/>
+          </p:cNvSpPr>
+          <p:nvPr>
+            <p:ph type="sldNum" sz="quarter" idx="10"/>
+          </p:nvPr>
+        </p:nvSpPr>
+        <p:spPr/>
+        <p:txBody>
+          <a:bodyPr/>
+          <a:lstStyle/>
+          <a:p>
+            <a:fld id="{F7021451-1387-4CA6-816F-3879F97B5CBC}" type="slidenum">
+              <a:rPr lang="en-US"/>
+              <a:t>21</a:t>
+            </a:fld>
+            <a:endParaRPr lang="en-US"/>
+          </a:p>
+        </p:txBody>
+      </p:sp>
+    </p:spTree>
+    <p:extLst>
+      <p:ext uri="{BB962C8B-B14F-4D97-AF65-F5344CB8AC3E}">
+        <p14:creationId xmlns:p14="http://schemas.microsoft.com/office/powerpoint/2010/main" val="1024086991"/>
+      </p:ext>
+    </p:extLst>
+  </p:cSld>
+  <p:clrMapOvr>
+    <a:masterClrMapping/>
+  </p:clrMapOvr>
+</p:notes>
+</file>
+
 <file path=ppt/notesSlides/notesSlide3.xml><?xml version="1.0" encoding="utf-8"?>
 <p:notes xmlns:a="http://schemas.openxmlformats.org/drawingml/2006/main" xmlns:r="http://schemas.openxmlformats.org/officeDocument/2006/relationships" xmlns:p="http://schemas.openxmlformats.org/presentationml/2006/main">
   <p:cSld>
@@ -1608,12 +1790,11 @@
           <a:p>
             <a:r>
               <a:rPr lang="en-US" dirty="0"/>
-              <a:t>Learning Objectives
-Explain the purpose of business analysis for ai-enabled public health systems in public health AI work.
-Identify the technical, operational, privacy, security, equity, and governance issues associated with the topic.
-Apply the topic to a real or realistic public health workflow, system, or implementation scenario.
-Recognize common failure modes that can affect safety, accuracy, trust, workflow fit, or sustainability.
-Identify practical guardrails that should be documented before implementation.</a:t>
+              <a:t>Related Playbook Plays
+Play 11: Build and Deploy AI Solutions - This lesson informs Play 11 by helping learners connect the lesson topic to build and deploy ai solutions work in the AI Playbook.
+Play 2: Readiness Assessment - This lesson informs Play 2 by helping learners connect the lesson topic to readiness assessment work in the AI Playbook sequence.
+Play 3: Establish AI Governance - This lesson informs Play 3 by helping learners connect the lesson topic to establish ai governance work in the AI Playbook sequence.
+Play 1: Vision &amp; Guardrails - This lesson informs Play 1 by helping learners connect the lesson topic to vision &amp; guardrails work in the AI Playbook sequence.</a:t>
             </a:r>
             <a:endParaRPr lang="en-US" dirty="0"/>
           </a:p>
@@ -1701,8 +1882,13 @@
           <a:p>
             <a:r>
               <a:rPr lang="en-US" dirty="0"/>
-              <a:t>Learning Objectives
-Produce a AI business analysis package that can support readiness assessment, governance review, procurement, implementation, or monitoring.</a:t>
+              <a:t>Related Toolkit Resources
+Tool 4: AI Policy Landscape Scan (Worksheet) - Use AI Policy Landscape Scan to translate this lesson into a documented public health AI planning, governance, implementation,.
+Tool 5: AI Environmental and Resource Impact Review (Checklist) - Use this tool to complete or strengthen the practical exercise for the module using fictional, de-identified, or generalized.
+Tool 6: Human-Centered AI Decision Rule Checklist (Checklist) - Use this tool to complete or strengthen the practical exercise for the module using fictional, de-identified, or generalized.
+Tool 8: AI Project Charter (Planning) - Use AI Project Charter to translate this lesson into a documented public health AI planning, governance, implementation, or.
+Tool 9: Data Quality Assessment Checklist (Checklist) - Use this tool to complete or strengthen the practical exercise for the module using fictional, de-identified, or generalized.
+Tool 10: Tiered Data Classification for AI Use (Worksheet) - Use this tool to complete or strengthen the practical exercise for the module using fictional, de-identified, or generalized.</a:t>
             </a:r>
             <a:endParaRPr lang="en-US" dirty="0"/>
           </a:p>
@@ -1790,8 +1976,12 @@
           <a:p>
             <a:r>
               <a:rPr lang="en-US" dirty="0"/>
-              <a:t>Module Overview
-Business analysis translates public health needs into clear requirements, workflows, user stories, acceptance criteria, data needs, and implementation decisions. AI projects often fail when technical teams, vendors, and program staff do not share a precise understanding of the problem to be solved. This module gives informaticians and program leads a disciplined approach to defining AI-supported workflows before technology choices are finalized.</a:t>
+              <a:t>Learning Objectives
+Explain the purpose of business analysis for ai-enabled public health systems in public health AI work.
+Identify the technical, operational, privacy, security, equity, and governance issues associated with the topic.
+Apply the topic to a real or realistic public health workflow, system, or implementation scenario.
+Recognize common failure modes that can affect safety, accuracy, trust, workflow fit, or sustainability.
+Identify practical guardrails that should be documented before implementation.</a:t>
             </a:r>
             <a:endParaRPr lang="en-US" dirty="0"/>
           </a:p>
@@ -1879,8 +2069,8 @@
           <a:p>
             <a:r>
               <a:rPr lang="en-US" dirty="0"/>
-              <a:t>Jurisdiction and Agency Policy Note
-This national-level module is intended for training and planning purposes. It does not replace legal, privacy, procurement, civil rights, records, or agency policy review. Learners should confirm applicable requirements in their own jurisdiction and organization before implementing AI-supported workflows.</a:t>
+              <a:t>Learning Objectives
+Produce a AI business analysis package that can support readiness assessment, governance review, procurement, implementation, or monitoring.</a:t>
             </a:r>
             <a:endParaRPr lang="en-US" dirty="0"/>
           </a:p>
@@ -1968,9 +2158,8 @@
           <a:p>
             <a:r>
               <a:rPr lang="en-US" dirty="0"/>
-              <a:t>Why This Topic Matters for Public Health AI
-Business Analysis for AI-Enabled Public Health Systems matters because AI systems are embedded in public health programs, data systems, and decision processes rather than operating in isolation. The topic affects whether AI outputs are accurate, explainable, safe, equitable, secure, and sustainable. Agencies that ignore this area may create tools that work in a demonstration but fail in actual practice.
-The topic also affects accountability. Public health agencies must be able to explain how data are used, why a tool was approved, what evidence supports the workflow, who reviews outputs, and what happens when the system fails. These responsibilities become more important as AI tools move from experimentation into operational use.</a:t>
+              <a:t>Module Overview
+Business analysis translates public health needs into clear requirements, workflows, user stories, acceptance criteria, data needs, and implementation decisions. AI projects often fail when technical teams, vendors, and program staff do not share a precise understanding of the problem to be solved. This module gives informaticians and program leads a disciplined approach to defining AI-supported workflows before technology choices are finalized.</a:t>
             </a:r>
             <a:endParaRPr lang="en-US" dirty="0"/>
           </a:p>
@@ -2058,10 +2247,8 @@
           <a:p>
             <a:r>
               <a:rPr lang="en-US" dirty="0"/>
-              <a:t>Core Concepts
-Business analysis clarifies the problem, workflow, users, requirements, constraints, and success criteria before technology decisions are made. AI projects often fail when teams start with a tool rather than a well-defined public health need.
-A user story describes what a user needs to do and why. In AI work, user stories should include human review, data requirements, documentation, and limitations. A user story should not simply say that the user wants AI; it should describe the task the AI is supporting.
-Acceptance criteria are testable conditions that determine whether a requirement has been met. For AI systems, acceptance criteria should include accuracy, workflow fit, usability, security, privacy, accessibility, and human oversight.</a:t>
+              <a:t>Jurisdiction and Agency Policy Note
+This national-level module is intended for training and planning purposes. It does not replace legal, privacy, procurement, civil rights, records, or agency policy review. Learners should confirm applicable requirements in their own jurisdiction and organization before implementing AI-supported workflows.</a:t>
             </a:r>
             <a:endParaRPr lang="en-US" dirty="0"/>
           </a:p>
@@ -2149,8 +2336,9 @@
           <a:p>
             <a:r>
               <a:rPr lang="en-US" dirty="0"/>
-              <a:t>Public Health Example
-A local health department may want AI to help classify community complaints. A business analyst would clarify whether the real problem is high complaint volume, inconsistent routing, delayed response, lack of category definitions, or insufficient staffing. The resulting requirements may call for classification support with human review rather than fully automated complaint resolution.</a:t>
+              <a:t>Why This Topic Matters for Public Health AI
+Business Analysis for AI-Enabled Public Health Systems matters because AI systems are embedded in public health programs, data systems, and decision processes rather than operating in isolation. The topic affects whether AI outputs are accurate, explainable, safe, equitable, secure, and sustainable. Agencies that ignore this area may create tools that work in a demonstration but fail in actual practice.
+The topic also affects accountability. Public health agencies must be able to explain how data are used, why a tool was approved, what evidence supports the workflow, who reviews outputs, and what happens when the system fails. These responsibilities become more important as AI tools move from experimentation into operational use.</a:t>
             </a:r>
             <a:endParaRPr lang="en-US" dirty="0"/>
           </a:p>
@@ -2773,7 +2961,32 @@
       </p:sp>
       <p:sp>
         <p:nvSpPr>
-          <p:cNvPr id="3" name="Text 1"/>
+          <p:cNvPr id="3" name="Shape 1"/>
+          <p:cNvSpPr/>
+          <p:nvPr/>
+        </p:nvSpPr>
+        <p:spPr>
+          <a:xfrm>
+            <a:off x="0" y="164592"/>
+            <a:ext cx="146304" cy="6693408"/>
+          </a:xfrm>
+          <a:prstGeom prst="rect">
+            <a:avLst/>
+          </a:prstGeom>
+          <a:solidFill>
+            <a:srgbClr val="2F8A28"/>
+          </a:solidFill>
+          <a:ln w="12700">
+            <a:solidFill>
+              <a:srgbClr val="2F8A28"/>
+            </a:solidFill>
+            <a:prstDash val="solid"/>
+          </a:ln>
+        </p:spPr>
+      </p:sp>
+      <p:sp>
+        <p:nvSpPr>
+          <p:cNvPr id="4" name="Text 2"/>
           <p:cNvSpPr/>
           <p:nvPr/>
         </p:nvSpPr>
@@ -2812,7 +3025,7 @@
       </p:sp>
       <p:sp>
         <p:nvSpPr>
-          <p:cNvPr id="4" name="Text 2"/>
+          <p:cNvPr id="5" name="Text 3"/>
           <p:cNvSpPr/>
           <p:nvPr/>
         </p:nvSpPr>
@@ -2851,7 +3064,7 @@
       </p:sp>
       <p:sp>
         <p:nvSpPr>
-          <p:cNvPr id="5" name="Text 3"/>
+          <p:cNvPr id="6" name="Text 4"/>
           <p:cNvSpPr/>
           <p:nvPr/>
         </p:nvSpPr>
@@ -2890,13 +3103,77 @@
       </p:sp>
       <p:sp>
         <p:nvSpPr>
-          <p:cNvPr id="6" name="Text 4"/>
+          <p:cNvPr id="7" name="Shape 5"/>
           <p:cNvSpPr/>
           <p:nvPr/>
         </p:nvSpPr>
         <p:spPr>
           <a:xfrm>
             <a:off x="640080" y="658368"/>
+            <a:ext cx="420624" cy="420624"/>
+          </a:xfrm>
+          <a:prstGeom prst="ellipse">
+            <a:avLst/>
+          </a:prstGeom>
+          <a:solidFill>
+            <a:srgbClr val="0068B7"/>
+          </a:solidFill>
+          <a:ln w="12700">
+            <a:solidFill>
+              <a:srgbClr val="0068B7"/>
+            </a:solidFill>
+            <a:prstDash val="solid"/>
+          </a:ln>
+        </p:spPr>
+      </p:sp>
+      <p:sp>
+        <p:nvSpPr>
+          <p:cNvPr id="8" name="Text 6"/>
+          <p:cNvSpPr/>
+          <p:nvPr/>
+        </p:nvSpPr>
+        <p:spPr>
+          <a:xfrm>
+            <a:off x="640080" y="731520"/>
+            <a:ext cx="420624" cy="164592"/>
+          </a:xfrm>
+          <a:prstGeom prst="rect">
+            <a:avLst/>
+          </a:prstGeom>
+          <a:noFill/>
+          <a:ln/>
+        </p:spPr>
+        <p:txBody>
+          <a:bodyPr wrap="square" lIns="0" tIns="0" rIns="0" bIns="0" rtlCol="0" anchor="ctr"/>
+          <a:lstStyle/>
+          <a:p>
+            <a:pPr algn="ctr" indent="0" marL="0">
+              <a:buNone/>
+            </a:pPr>
+            <a:r>
+              <a:rPr lang="en-US" sz="1100" b="1" dirty="0">
+                <a:solidFill>
+                  <a:srgbClr val="FFFFFF"/>
+                </a:solidFill>
+                <a:latin typeface="Aptos" pitchFamily="34" charset="0"/>
+                <a:ea typeface="Aptos" pitchFamily="34" charset="-122"/>
+                <a:cs typeface="Aptos" pitchFamily="34" charset="-120"/>
+              </a:rPr>
+              <a:t>5</a:t>
+            </a:r>
+            <a:endParaRPr lang="en-US" sz="1100" dirty="0"/>
+          </a:p>
+        </p:txBody>
+      </p:sp>
+      <p:sp>
+        <p:nvSpPr>
+          <p:cNvPr id="9" name="Text 7"/>
+          <p:cNvSpPr/>
+          <p:nvPr/>
+        </p:nvSpPr>
+        <p:spPr>
+          <a:xfrm>
+            <a:off x="640080" y="621792"/>
             <a:ext cx="10881360" cy="566928"/>
           </a:xfrm>
           <a:prstGeom prst="rect">
@@ -2923,7 +3200,7 @@
                 <a:ea typeface="Aptos Display" pitchFamily="34" charset="-122"/>
                 <a:cs typeface="Aptos Display" pitchFamily="34" charset="-120"/>
               </a:rPr>
-              <a:t>Topic Deep Dive</a:t>
+              <a:t>Core Concepts</a:t>
             </a:r>
             <a:endParaRPr lang="en-US" sz="2700" dirty="0"/>
           </a:p>
@@ -2931,32 +3208,178 @@
       </p:sp>
       <p:sp>
         <p:nvSpPr>
-          <p:cNvPr id="7" name="Text 5"/>
-          <p:cNvSpPr/>
-          <p:nvPr/>
-        </p:nvSpPr>
-        <p:spPr>
-          <a:xfrm>
-            <a:off x="822960" y="1325880"/>
-            <a:ext cx="10378440" cy="4800600"/>
-          </a:xfrm>
-          <a:prstGeom prst="rect">
-            <a:avLst/>
-          </a:prstGeom>
-          <a:noFill/>
-          <a:ln/>
-        </p:spPr>
-        <p:txBody>
-          <a:bodyPr wrap="square" lIns="1016" tIns="1016" rIns="1016" bIns="1016" rtlCol="0" anchor="t">
+          <p:cNvPr id="10" name="Text 8"/>
+          <p:cNvSpPr/>
+          <p:nvPr/>
+        </p:nvSpPr>
+        <p:spPr>
+          <a:xfrm>
+            <a:off x="868680" y="1417320"/>
+            <a:ext cx="6675120" cy="4434840"/>
+          </a:xfrm>
+          <a:prstGeom prst="rect">
+            <a:avLst/>
+          </a:prstGeom>
+          <a:noFill/>
+          <a:ln/>
+        </p:spPr>
+        <p:txBody>
+          <a:bodyPr wrap="square" lIns="635" tIns="635" rIns="635" bIns="635" rtlCol="0" anchor="t">
             <a:normAutofit/>
           </a:bodyPr>
           <a:lstStyle/>
           <a:p>
+            <a:r>
+              <a:rPr lang="en-US" sz="1700" dirty="0">
+                <a:solidFill>
+                  <a:srgbClr val="17364A"/>
+                </a:solidFill>
+                <a:latin typeface="Aptos" pitchFamily="34" charset="0"/>
+                <a:ea typeface="Aptos" pitchFamily="34" charset="-122"/>
+                <a:cs typeface="Aptos" pitchFamily="34" charset="-120"/>
+              </a:rPr>
+              <a:t>Business analysis clarifies the problem, workflow, users, requirements, constraints, and success criteria before technology.</a:t>
+            </a:r>
+            <a:endParaRPr lang="en-US" sz="1700" dirty="0"/>
+          </a:p>
+          <a:p>
+            <a:r>
+              <a:rPr lang="en-US" sz="1700" dirty="0">
+                <a:solidFill>
+                  <a:srgbClr val="17364A"/>
+                </a:solidFill>
+                <a:latin typeface="Aptos" pitchFamily="34" charset="0"/>
+                <a:ea typeface="Aptos" pitchFamily="34" charset="-122"/>
+                <a:cs typeface="Aptos" pitchFamily="34" charset="-120"/>
+              </a:rPr>
+              <a:t>AI projects often fail when teams start with a tool rather than a well-defined public health need.</a:t>
+            </a:r>
+            <a:endParaRPr lang="en-US" sz="1700" dirty="0"/>
+          </a:p>
+          <a:p>
+            <a:r>
+              <a:rPr lang="en-US" sz="1700" dirty="0">
+                <a:solidFill>
+                  <a:srgbClr val="17364A"/>
+                </a:solidFill>
+                <a:latin typeface="Aptos" pitchFamily="34" charset="0"/>
+                <a:ea typeface="Aptos" pitchFamily="34" charset="-122"/>
+                <a:cs typeface="Aptos" pitchFamily="34" charset="-120"/>
+              </a:rPr>
+              <a:t>A user story describes what a user needs to do and why.</a:t>
+            </a:r>
+            <a:endParaRPr lang="en-US" sz="1700" dirty="0"/>
+          </a:p>
+          <a:p>
+            <a:r>
+              <a:rPr lang="en-US" sz="1700" dirty="0">
+                <a:solidFill>
+                  <a:srgbClr val="17364A"/>
+                </a:solidFill>
+                <a:latin typeface="Aptos" pitchFamily="34" charset="0"/>
+                <a:ea typeface="Aptos" pitchFamily="34" charset="-122"/>
+                <a:cs typeface="Aptos" pitchFamily="34" charset="-120"/>
+              </a:rPr>
+              <a:t>In AI work, user stories should include human review, data requirements, documentation, and limitations.</a:t>
+            </a:r>
+            <a:endParaRPr lang="en-US" sz="1700" dirty="0"/>
+          </a:p>
+        </p:txBody>
+      </p:sp>
+      <p:sp>
+        <p:nvSpPr>
+          <p:cNvPr id="11" name="Shape 9"/>
+          <p:cNvSpPr/>
+          <p:nvPr/>
+        </p:nvSpPr>
+        <p:spPr>
+          <a:xfrm>
+            <a:off x="7909560" y="1417320"/>
+            <a:ext cx="3154680" cy="1828800"/>
+          </a:xfrm>
+          <a:prstGeom prst="roundRect">
+            <a:avLst>
+              <a:gd name="adj" fmla="val 6000"/>
+            </a:avLst>
+          </a:prstGeom>
+          <a:solidFill>
+            <a:srgbClr val="EEF8ED"/>
+          </a:solidFill>
+          <a:ln w="12700">
+            <a:solidFill>
+              <a:srgbClr val="B9D7E6"/>
+            </a:solidFill>
+            <a:prstDash val="solid"/>
+          </a:ln>
+        </p:spPr>
+      </p:sp>
+      <p:sp>
+        <p:nvSpPr>
+          <p:cNvPr id="12" name="Text 10"/>
+          <p:cNvSpPr/>
+          <p:nvPr/>
+        </p:nvSpPr>
+        <p:spPr>
+          <a:xfrm>
+            <a:off x="8074152" y="1563624"/>
+            <a:ext cx="2825496" cy="201168"/>
+          </a:xfrm>
+          <a:prstGeom prst="rect">
+            <a:avLst/>
+          </a:prstGeom>
+          <a:noFill/>
+          <a:ln/>
+        </p:spPr>
+        <p:txBody>
+          <a:bodyPr wrap="square" lIns="0" tIns="0" rIns="0" bIns="0" rtlCol="0" anchor="ctr"/>
+          <a:lstStyle/>
+          <a:p>
             <a:pPr indent="0" marL="0">
               <a:buNone/>
             </a:pPr>
             <a:r>
-              <a:rPr lang="en-US" sz="1420" dirty="0">
+              <a:rPr lang="en-US" sz="950" b="1" dirty="0">
+                <a:solidFill>
+                  <a:srgbClr val="0068B7"/>
+                </a:solidFill>
+                <a:latin typeface="Aptos" pitchFamily="34" charset="0"/>
+                <a:ea typeface="Aptos" pitchFamily="34" charset="-122"/>
+                <a:cs typeface="Aptos" pitchFamily="34" charset="-120"/>
+              </a:rPr>
+              <a:t>Key idea</a:t>
+            </a:r>
+            <a:endParaRPr lang="en-US" sz="950" dirty="0"/>
+          </a:p>
+        </p:txBody>
+      </p:sp>
+      <p:sp>
+        <p:nvSpPr>
+          <p:cNvPr id="13" name="Text 11"/>
+          <p:cNvSpPr/>
+          <p:nvPr/>
+        </p:nvSpPr>
+        <p:spPr>
+          <a:xfrm>
+            <a:off x="8074152" y="1856232"/>
+            <a:ext cx="2825496" cy="1261872"/>
+          </a:xfrm>
+          <a:prstGeom prst="rect">
+            <a:avLst/>
+          </a:prstGeom>
+          <a:noFill/>
+          <a:ln/>
+        </p:spPr>
+        <p:txBody>
+          <a:bodyPr wrap="square" lIns="0" tIns="0" rIns="0" bIns="0" rtlCol="0" anchor="t">
+            <a:normAutofit/>
+          </a:bodyPr>
+          <a:lstStyle/>
+          <a:p>
+            <a:pPr indent="0" marL="0">
+              <a:buNone/>
+            </a:pPr>
+            <a:r>
+              <a:rPr lang="en-US" sz="1250" dirty="0">
                 <a:solidFill>
                   <a:srgbClr val="17364A"/>
                 </a:solidFill>
@@ -2964,9 +3387,116 @@
                 <a:ea typeface="Aptos" pitchFamily="34" charset="-122"/>
                 <a:cs typeface="Aptos" pitchFamily="34" charset="-120"/>
               </a:rPr>
-              <a:t>Business analysis begins with problem definition. Teams should document the public health objective, the operational pain point, the affected users, the current workflow, the decision being supported, and the consequences of error. A vague goal such as “use AI to improve efficiency” is not sufficient for implementation. Requirements should be grounded in workflow. Analysts should define current-state and future-state processes, data inputs, outputs, decision points, exception handling, reporting needs, and approval steps. This helps prevent tools from being procured without a clear implementation pathway. AI business analysis also requires boundary setting. Teams should define intended uses, prohibited uses, users, data permissions, human review points, and escalation triggers. These boundaries should become requirements, training expectations, and governance criteria.</a:t>
-            </a:r>
-            <a:endParaRPr lang="en-US" sz="1420" dirty="0"/>
+              <a:t>Business analysis clarifies the problem, workflow, users, requirements, constraints, and success criteria before technology.</a:t>
+            </a:r>
+            <a:endParaRPr lang="en-US" sz="1250" dirty="0"/>
+          </a:p>
+        </p:txBody>
+      </p:sp>
+      <p:sp>
+        <p:nvSpPr>
+          <p:cNvPr id="14" name="Shape 12"/>
+          <p:cNvSpPr/>
+          <p:nvPr/>
+        </p:nvSpPr>
+        <p:spPr>
+          <a:xfrm>
+            <a:off x="7909560" y="3520440"/>
+            <a:ext cx="3154680" cy="1737360"/>
+          </a:xfrm>
+          <a:prstGeom prst="roundRect">
+            <a:avLst>
+              <a:gd name="adj" fmla="val 6316"/>
+            </a:avLst>
+          </a:prstGeom>
+          <a:solidFill>
+            <a:srgbClr val="EAF6F8"/>
+          </a:solidFill>
+          <a:ln w="12700">
+            <a:solidFill>
+              <a:srgbClr val="B9D7E6"/>
+            </a:solidFill>
+            <a:prstDash val="solid"/>
+          </a:ln>
+        </p:spPr>
+      </p:sp>
+      <p:sp>
+        <p:nvSpPr>
+          <p:cNvPr id="15" name="Text 13"/>
+          <p:cNvSpPr/>
+          <p:nvPr/>
+        </p:nvSpPr>
+        <p:spPr>
+          <a:xfrm>
+            <a:off x="8074152" y="3666744"/>
+            <a:ext cx="2825496" cy="201168"/>
+          </a:xfrm>
+          <a:prstGeom prst="rect">
+            <a:avLst/>
+          </a:prstGeom>
+          <a:noFill/>
+          <a:ln/>
+        </p:spPr>
+        <p:txBody>
+          <a:bodyPr wrap="square" lIns="0" tIns="0" rIns="0" bIns="0" rtlCol="0" anchor="ctr"/>
+          <a:lstStyle/>
+          <a:p>
+            <a:pPr indent="0" marL="0">
+              <a:buNone/>
+            </a:pPr>
+            <a:r>
+              <a:rPr lang="en-US" sz="950" b="1" dirty="0">
+                <a:solidFill>
+                  <a:srgbClr val="0068B7"/>
+                </a:solidFill>
+                <a:latin typeface="Aptos" pitchFamily="34" charset="0"/>
+                <a:ea typeface="Aptos" pitchFamily="34" charset="-122"/>
+                <a:cs typeface="Aptos" pitchFamily="34" charset="-120"/>
+              </a:rPr>
+              <a:t>Use this for</a:t>
+            </a:r>
+            <a:endParaRPr lang="en-US" sz="950" dirty="0"/>
+          </a:p>
+        </p:txBody>
+      </p:sp>
+      <p:sp>
+        <p:nvSpPr>
+          <p:cNvPr id="16" name="Text 14"/>
+          <p:cNvSpPr/>
+          <p:nvPr/>
+        </p:nvSpPr>
+        <p:spPr>
+          <a:xfrm>
+            <a:off x="8074152" y="3959352"/>
+            <a:ext cx="2825496" cy="1170432"/>
+          </a:xfrm>
+          <a:prstGeom prst="rect">
+            <a:avLst/>
+          </a:prstGeom>
+          <a:noFill/>
+          <a:ln/>
+        </p:spPr>
+        <p:txBody>
+          <a:bodyPr wrap="square" lIns="0" tIns="0" rIns="0" bIns="0" rtlCol="0" anchor="t">
+            <a:normAutofit/>
+          </a:bodyPr>
+          <a:lstStyle/>
+          <a:p>
+            <a:pPr indent="0" marL="0">
+              <a:buNone/>
+            </a:pPr>
+            <a:r>
+              <a:rPr lang="en-US" sz="1250" dirty="0">
+                <a:solidFill>
+                  <a:srgbClr val="17364A"/>
+                </a:solidFill>
+                <a:latin typeface="Aptos" pitchFamily="34" charset="0"/>
+                <a:ea typeface="Aptos" pitchFamily="34" charset="-122"/>
+                <a:cs typeface="Aptos" pitchFamily="34" charset="-120"/>
+              </a:rPr>
+              <a:t>Connect the concept to public health decisions, safeguards, documentation, or implementation work.</a:t>
+            </a:r>
+            <a:endParaRPr lang="en-US" sz="1250" dirty="0"/>
           </a:p>
         </p:txBody>
       </p:sp>
@@ -3029,7 +3559,32 @@
       </p:sp>
       <p:sp>
         <p:nvSpPr>
-          <p:cNvPr id="3" name="Text 1"/>
+          <p:cNvPr id="3" name="Shape 1"/>
+          <p:cNvSpPr/>
+          <p:nvPr/>
+        </p:nvSpPr>
+        <p:spPr>
+          <a:xfrm>
+            <a:off x="0" y="164592"/>
+            <a:ext cx="146304" cy="6693408"/>
+          </a:xfrm>
+          <a:prstGeom prst="rect">
+            <a:avLst/>
+          </a:prstGeom>
+          <a:solidFill>
+            <a:srgbClr val="2F8A28"/>
+          </a:solidFill>
+          <a:ln w="12700">
+            <a:solidFill>
+              <a:srgbClr val="2F8A28"/>
+            </a:solidFill>
+            <a:prstDash val="solid"/>
+          </a:ln>
+        </p:spPr>
+      </p:sp>
+      <p:sp>
+        <p:nvSpPr>
+          <p:cNvPr id="4" name="Text 2"/>
           <p:cNvSpPr/>
           <p:nvPr/>
         </p:nvSpPr>
@@ -3068,7 +3623,7 @@
       </p:sp>
       <p:sp>
         <p:nvSpPr>
-          <p:cNvPr id="4" name="Text 2"/>
+          <p:cNvPr id="5" name="Text 3"/>
           <p:cNvSpPr/>
           <p:nvPr/>
         </p:nvSpPr>
@@ -3107,7 +3662,7 @@
       </p:sp>
       <p:sp>
         <p:nvSpPr>
-          <p:cNvPr id="5" name="Text 3"/>
+          <p:cNvPr id="6" name="Text 4"/>
           <p:cNvSpPr/>
           <p:nvPr/>
         </p:nvSpPr>
@@ -3146,13 +3701,77 @@
       </p:sp>
       <p:sp>
         <p:nvSpPr>
-          <p:cNvPr id="6" name="Text 4"/>
+          <p:cNvPr id="7" name="Shape 5"/>
           <p:cNvSpPr/>
           <p:nvPr/>
         </p:nvSpPr>
         <p:spPr>
           <a:xfrm>
             <a:off x="640080" y="658368"/>
+            <a:ext cx="420624" cy="420624"/>
+          </a:xfrm>
+          <a:prstGeom prst="ellipse">
+            <a:avLst/>
+          </a:prstGeom>
+          <a:solidFill>
+            <a:srgbClr val="0068B7"/>
+          </a:solidFill>
+          <a:ln w="12700">
+            <a:solidFill>
+              <a:srgbClr val="0068B7"/>
+            </a:solidFill>
+            <a:prstDash val="solid"/>
+          </a:ln>
+        </p:spPr>
+      </p:sp>
+      <p:sp>
+        <p:nvSpPr>
+          <p:cNvPr id="8" name="Text 6"/>
+          <p:cNvSpPr/>
+          <p:nvPr/>
+        </p:nvSpPr>
+        <p:spPr>
+          <a:xfrm>
+            <a:off x="640080" y="731520"/>
+            <a:ext cx="420624" cy="164592"/>
+          </a:xfrm>
+          <a:prstGeom prst="rect">
+            <a:avLst/>
+          </a:prstGeom>
+          <a:noFill/>
+          <a:ln/>
+        </p:spPr>
+        <p:txBody>
+          <a:bodyPr wrap="square" lIns="0" tIns="0" rIns="0" bIns="0" rtlCol="0" anchor="ctr"/>
+          <a:lstStyle/>
+          <a:p>
+            <a:pPr algn="ctr" indent="0" marL="0">
+              <a:buNone/>
+            </a:pPr>
+            <a:r>
+              <a:rPr lang="en-US" sz="1100" b="1" dirty="0">
+                <a:solidFill>
+                  <a:srgbClr val="FFFFFF"/>
+                </a:solidFill>
+                <a:latin typeface="Aptos" pitchFamily="34" charset="0"/>
+                <a:ea typeface="Aptos" pitchFamily="34" charset="-122"/>
+                <a:cs typeface="Aptos" pitchFamily="34" charset="-120"/>
+              </a:rPr>
+              <a:t>6</a:t>
+            </a:r>
+            <a:endParaRPr lang="en-US" sz="1100" dirty="0"/>
+          </a:p>
+        </p:txBody>
+      </p:sp>
+      <p:sp>
+        <p:nvSpPr>
+          <p:cNvPr id="9" name="Text 7"/>
+          <p:cNvSpPr/>
+          <p:nvPr/>
+        </p:nvSpPr>
+        <p:spPr>
+          <a:xfrm>
+            <a:off x="640080" y="621792"/>
             <a:ext cx="10881360" cy="566928"/>
           </a:xfrm>
           <a:prstGeom prst="rect">
@@ -3179,7 +3798,7 @@
                 <a:ea typeface="Aptos Display" pitchFamily="34" charset="-122"/>
                 <a:cs typeface="Aptos Display" pitchFamily="34" charset="-120"/>
               </a:rPr>
-              <a:t>Risks, Failure Modes, and Guardrails</a:t>
+              <a:t>Public Health Example</a:t>
             </a:r>
             <a:endParaRPr lang="en-US" sz="2700" dirty="0"/>
           </a:p>
@@ -3187,32 +3806,164 @@
       </p:sp>
       <p:sp>
         <p:nvSpPr>
-          <p:cNvPr id="7" name="Text 5"/>
-          <p:cNvSpPr/>
-          <p:nvPr/>
-        </p:nvSpPr>
-        <p:spPr>
-          <a:xfrm>
-            <a:off x="822960" y="1325880"/>
-            <a:ext cx="10378440" cy="4800600"/>
-          </a:xfrm>
-          <a:prstGeom prst="rect">
-            <a:avLst/>
-          </a:prstGeom>
-          <a:noFill/>
-          <a:ln/>
-        </p:spPr>
-        <p:txBody>
-          <a:bodyPr wrap="square" lIns="1016" tIns="1016" rIns="1016" bIns="1016" rtlCol="0" anchor="t">
+          <p:cNvPr id="10" name="Text 8"/>
+          <p:cNvSpPr/>
+          <p:nvPr/>
+        </p:nvSpPr>
+        <p:spPr>
+          <a:xfrm>
+            <a:off x="868680" y="1417320"/>
+            <a:ext cx="6675120" cy="4434840"/>
+          </a:xfrm>
+          <a:prstGeom prst="rect">
+            <a:avLst/>
+          </a:prstGeom>
+          <a:noFill/>
+          <a:ln/>
+        </p:spPr>
+        <p:txBody>
+          <a:bodyPr wrap="square" lIns="635" tIns="635" rIns="635" bIns="635" rtlCol="0" anchor="t">
             <a:normAutofit/>
           </a:bodyPr>
           <a:lstStyle/>
           <a:p>
+            <a:r>
+              <a:rPr lang="en-US" sz="1700" dirty="0">
+                <a:solidFill>
+                  <a:srgbClr val="17364A"/>
+                </a:solidFill>
+                <a:latin typeface="Aptos" pitchFamily="34" charset="0"/>
+                <a:ea typeface="Aptos" pitchFamily="34" charset="-122"/>
+                <a:cs typeface="Aptos" pitchFamily="34" charset="-120"/>
+              </a:rPr>
+              <a:t>A local health department may want AI to help classify community complaints.</a:t>
+            </a:r>
+            <a:endParaRPr lang="en-US" sz="1700" dirty="0"/>
+          </a:p>
+          <a:p>
+            <a:r>
+              <a:rPr lang="en-US" sz="1700" dirty="0">
+                <a:solidFill>
+                  <a:srgbClr val="17364A"/>
+                </a:solidFill>
+                <a:latin typeface="Aptos" pitchFamily="34" charset="0"/>
+                <a:ea typeface="Aptos" pitchFamily="34" charset="-122"/>
+                <a:cs typeface="Aptos" pitchFamily="34" charset="-120"/>
+              </a:rPr>
+              <a:t>A business analyst would clarify whether the real problem is high complaint volume, inconsistent routing, delayed response,.</a:t>
+            </a:r>
+            <a:endParaRPr lang="en-US" sz="1700" dirty="0"/>
+          </a:p>
+          <a:p>
+            <a:r>
+              <a:rPr lang="en-US" sz="1700" dirty="0">
+                <a:solidFill>
+                  <a:srgbClr val="17364A"/>
+                </a:solidFill>
+                <a:latin typeface="Aptos" pitchFamily="34" charset="0"/>
+                <a:ea typeface="Aptos" pitchFamily="34" charset="-122"/>
+                <a:cs typeface="Aptos" pitchFamily="34" charset="-120"/>
+              </a:rPr>
+              <a:t>The resulting requirements may call for classification support with human review rather than fully automated complaint.</a:t>
+            </a:r>
+            <a:endParaRPr lang="en-US" sz="1700" dirty="0"/>
+          </a:p>
+        </p:txBody>
+      </p:sp>
+      <p:sp>
+        <p:nvSpPr>
+          <p:cNvPr id="11" name="Shape 9"/>
+          <p:cNvSpPr/>
+          <p:nvPr/>
+        </p:nvSpPr>
+        <p:spPr>
+          <a:xfrm>
+            <a:off x="7909560" y="1417320"/>
+            <a:ext cx="3154680" cy="1828800"/>
+          </a:xfrm>
+          <a:prstGeom prst="roundRect">
+            <a:avLst>
+              <a:gd name="adj" fmla="val 6000"/>
+            </a:avLst>
+          </a:prstGeom>
+          <a:solidFill>
+            <a:srgbClr val="EEF8ED"/>
+          </a:solidFill>
+          <a:ln w="12700">
+            <a:solidFill>
+              <a:srgbClr val="B9D7E6"/>
+            </a:solidFill>
+            <a:prstDash val="solid"/>
+          </a:ln>
+        </p:spPr>
+      </p:sp>
+      <p:sp>
+        <p:nvSpPr>
+          <p:cNvPr id="12" name="Text 10"/>
+          <p:cNvSpPr/>
+          <p:nvPr/>
+        </p:nvSpPr>
+        <p:spPr>
+          <a:xfrm>
+            <a:off x="8074152" y="1563624"/>
+            <a:ext cx="2825496" cy="201168"/>
+          </a:xfrm>
+          <a:prstGeom prst="rect">
+            <a:avLst/>
+          </a:prstGeom>
+          <a:noFill/>
+          <a:ln/>
+        </p:spPr>
+        <p:txBody>
+          <a:bodyPr wrap="square" lIns="0" tIns="0" rIns="0" bIns="0" rtlCol="0" anchor="ctr"/>
+          <a:lstStyle/>
+          <a:p>
             <a:pPr indent="0" marL="0">
               <a:buNone/>
             </a:pPr>
             <a:r>
-              <a:rPr lang="en-US" sz="1420" dirty="0">
+              <a:rPr lang="en-US" sz="950" b="1" dirty="0">
+                <a:solidFill>
+                  <a:srgbClr val="0068B7"/>
+                </a:solidFill>
+                <a:latin typeface="Aptos" pitchFamily="34" charset="0"/>
+                <a:ea typeface="Aptos" pitchFamily="34" charset="-122"/>
+                <a:cs typeface="Aptos" pitchFamily="34" charset="-120"/>
+              </a:rPr>
+              <a:t>Key idea</a:t>
+            </a:r>
+            <a:endParaRPr lang="en-US" sz="950" dirty="0"/>
+          </a:p>
+        </p:txBody>
+      </p:sp>
+      <p:sp>
+        <p:nvSpPr>
+          <p:cNvPr id="13" name="Text 11"/>
+          <p:cNvSpPr/>
+          <p:nvPr/>
+        </p:nvSpPr>
+        <p:spPr>
+          <a:xfrm>
+            <a:off x="8074152" y="1856232"/>
+            <a:ext cx="2825496" cy="1261872"/>
+          </a:xfrm>
+          <a:prstGeom prst="rect">
+            <a:avLst/>
+          </a:prstGeom>
+          <a:noFill/>
+          <a:ln/>
+        </p:spPr>
+        <p:txBody>
+          <a:bodyPr wrap="square" lIns="0" tIns="0" rIns="0" bIns="0" rtlCol="0" anchor="t">
+            <a:normAutofit/>
+          </a:bodyPr>
+          <a:lstStyle/>
+          <a:p>
+            <a:pPr indent="0" marL="0">
+              <a:buNone/>
+            </a:pPr>
+            <a:r>
+              <a:rPr lang="en-US" sz="1250" dirty="0">
                 <a:solidFill>
                   <a:srgbClr val="17364A"/>
                 </a:solidFill>
@@ -3220,9 +3971,116 @@
                 <a:ea typeface="Aptos" pitchFamily="34" charset="-122"/>
                 <a:cs typeface="Aptos" pitchFamily="34" charset="-120"/>
               </a:rPr>
-              <a:t>A common failure mode is treating the topic as a technical detail rather than a public health control. When staff do not connect technical decisions to authority, workflow, equity, privacy, security, and accountability, the agency may adopt a tool that appears useful but cannot be sustained or defended. Another risk is relying on vendor claims without agency-defined evidence. Vendors may provide demonstrations, dashboards, or summary metrics that do not match the agency workflow or data environment. A guardrail is to require documentation, test results, acceptance criteria, and agency-controlled review. A third risk is failing to plan for change. Public health data, policies, systems, and emergencies change. Any technical approach must include monitoring, review, versioning, escalation, and retirement pathways so the agency can respond when assumptions no longer hold.</a:t>
-            </a:r>
-            <a:endParaRPr lang="en-US" sz="1420" dirty="0"/>
+              <a:t>A local health department may want AI to help classify community complaints.</a:t>
+            </a:r>
+            <a:endParaRPr lang="en-US" sz="1250" dirty="0"/>
+          </a:p>
+        </p:txBody>
+      </p:sp>
+      <p:sp>
+        <p:nvSpPr>
+          <p:cNvPr id="14" name="Shape 12"/>
+          <p:cNvSpPr/>
+          <p:nvPr/>
+        </p:nvSpPr>
+        <p:spPr>
+          <a:xfrm>
+            <a:off x="7909560" y="3520440"/>
+            <a:ext cx="3154680" cy="1737360"/>
+          </a:xfrm>
+          <a:prstGeom prst="roundRect">
+            <a:avLst>
+              <a:gd name="adj" fmla="val 6316"/>
+            </a:avLst>
+          </a:prstGeom>
+          <a:solidFill>
+            <a:srgbClr val="EAF6F8"/>
+          </a:solidFill>
+          <a:ln w="12700">
+            <a:solidFill>
+              <a:srgbClr val="B9D7E6"/>
+            </a:solidFill>
+            <a:prstDash val="solid"/>
+          </a:ln>
+        </p:spPr>
+      </p:sp>
+      <p:sp>
+        <p:nvSpPr>
+          <p:cNvPr id="15" name="Text 13"/>
+          <p:cNvSpPr/>
+          <p:nvPr/>
+        </p:nvSpPr>
+        <p:spPr>
+          <a:xfrm>
+            <a:off x="8074152" y="3666744"/>
+            <a:ext cx="2825496" cy="201168"/>
+          </a:xfrm>
+          <a:prstGeom prst="rect">
+            <a:avLst/>
+          </a:prstGeom>
+          <a:noFill/>
+          <a:ln/>
+        </p:spPr>
+        <p:txBody>
+          <a:bodyPr wrap="square" lIns="0" tIns="0" rIns="0" bIns="0" rtlCol="0" anchor="ctr"/>
+          <a:lstStyle/>
+          <a:p>
+            <a:pPr indent="0" marL="0">
+              <a:buNone/>
+            </a:pPr>
+            <a:r>
+              <a:rPr lang="en-US" sz="950" b="1" dirty="0">
+                <a:solidFill>
+                  <a:srgbClr val="0068B7"/>
+                </a:solidFill>
+                <a:latin typeface="Aptos" pitchFamily="34" charset="0"/>
+                <a:ea typeface="Aptos" pitchFamily="34" charset="-122"/>
+                <a:cs typeface="Aptos" pitchFamily="34" charset="-120"/>
+              </a:rPr>
+              <a:t>Use this for</a:t>
+            </a:r>
+            <a:endParaRPr lang="en-US" sz="950" dirty="0"/>
+          </a:p>
+        </p:txBody>
+      </p:sp>
+      <p:sp>
+        <p:nvSpPr>
+          <p:cNvPr id="16" name="Text 14"/>
+          <p:cNvSpPr/>
+          <p:nvPr/>
+        </p:nvSpPr>
+        <p:spPr>
+          <a:xfrm>
+            <a:off x="8074152" y="3959352"/>
+            <a:ext cx="2825496" cy="1170432"/>
+          </a:xfrm>
+          <a:prstGeom prst="rect">
+            <a:avLst/>
+          </a:prstGeom>
+          <a:noFill/>
+          <a:ln/>
+        </p:spPr>
+        <p:txBody>
+          <a:bodyPr wrap="square" lIns="0" tIns="0" rIns="0" bIns="0" rtlCol="0" anchor="t">
+            <a:normAutofit/>
+          </a:bodyPr>
+          <a:lstStyle/>
+          <a:p>
+            <a:pPr indent="0" marL="0">
+              <a:buNone/>
+            </a:pPr>
+            <a:r>
+              <a:rPr lang="en-US" sz="1250" dirty="0">
+                <a:solidFill>
+                  <a:srgbClr val="17364A"/>
+                </a:solidFill>
+                <a:latin typeface="Aptos" pitchFamily="34" charset="0"/>
+                <a:ea typeface="Aptos" pitchFamily="34" charset="-122"/>
+                <a:cs typeface="Aptos" pitchFamily="34" charset="-120"/>
+              </a:rPr>
+              <a:t>Connect the concept to public health decisions, safeguards, documentation, or implementation work.</a:t>
+            </a:r>
+            <a:endParaRPr lang="en-US" sz="1250" dirty="0"/>
           </a:p>
         </p:txBody>
       </p:sp>
@@ -3285,7 +4143,32 @@
       </p:sp>
       <p:sp>
         <p:nvSpPr>
-          <p:cNvPr id="3" name="Text 1"/>
+          <p:cNvPr id="3" name="Shape 1"/>
+          <p:cNvSpPr/>
+          <p:nvPr/>
+        </p:nvSpPr>
+        <p:spPr>
+          <a:xfrm>
+            <a:off x="0" y="164592"/>
+            <a:ext cx="146304" cy="6693408"/>
+          </a:xfrm>
+          <a:prstGeom prst="rect">
+            <a:avLst/>
+          </a:prstGeom>
+          <a:solidFill>
+            <a:srgbClr val="2F8A28"/>
+          </a:solidFill>
+          <a:ln w="12700">
+            <a:solidFill>
+              <a:srgbClr val="2F8A28"/>
+            </a:solidFill>
+            <a:prstDash val="solid"/>
+          </a:ln>
+        </p:spPr>
+      </p:sp>
+      <p:sp>
+        <p:nvSpPr>
+          <p:cNvPr id="4" name="Text 2"/>
           <p:cNvSpPr/>
           <p:nvPr/>
         </p:nvSpPr>
@@ -3324,7 +4207,7 @@
       </p:sp>
       <p:sp>
         <p:nvSpPr>
-          <p:cNvPr id="4" name="Text 2"/>
+          <p:cNvPr id="5" name="Text 3"/>
           <p:cNvSpPr/>
           <p:nvPr/>
         </p:nvSpPr>
@@ -3363,7 +4246,7 @@
       </p:sp>
       <p:sp>
         <p:nvSpPr>
-          <p:cNvPr id="5" name="Text 3"/>
+          <p:cNvPr id="6" name="Text 4"/>
           <p:cNvSpPr/>
           <p:nvPr/>
         </p:nvSpPr>
@@ -3402,13 +4285,77 @@
       </p:sp>
       <p:sp>
         <p:nvSpPr>
-          <p:cNvPr id="6" name="Text 4"/>
+          <p:cNvPr id="7" name="Shape 5"/>
           <p:cNvSpPr/>
           <p:nvPr/>
         </p:nvSpPr>
         <p:spPr>
           <a:xfrm>
             <a:off x="640080" y="658368"/>
+            <a:ext cx="420624" cy="420624"/>
+          </a:xfrm>
+          <a:prstGeom prst="ellipse">
+            <a:avLst/>
+          </a:prstGeom>
+          <a:solidFill>
+            <a:srgbClr val="0068B7"/>
+          </a:solidFill>
+          <a:ln w="12700">
+            <a:solidFill>
+              <a:srgbClr val="0068B7"/>
+            </a:solidFill>
+            <a:prstDash val="solid"/>
+          </a:ln>
+        </p:spPr>
+      </p:sp>
+      <p:sp>
+        <p:nvSpPr>
+          <p:cNvPr id="8" name="Text 6"/>
+          <p:cNvSpPr/>
+          <p:nvPr/>
+        </p:nvSpPr>
+        <p:spPr>
+          <a:xfrm>
+            <a:off x="640080" y="731520"/>
+            <a:ext cx="420624" cy="164592"/>
+          </a:xfrm>
+          <a:prstGeom prst="rect">
+            <a:avLst/>
+          </a:prstGeom>
+          <a:noFill/>
+          <a:ln/>
+        </p:spPr>
+        <p:txBody>
+          <a:bodyPr wrap="square" lIns="0" tIns="0" rIns="0" bIns="0" rtlCol="0" anchor="ctr"/>
+          <a:lstStyle/>
+          <a:p>
+            <a:pPr algn="ctr" indent="0" marL="0">
+              <a:buNone/>
+            </a:pPr>
+            <a:r>
+              <a:rPr lang="en-US" sz="1100" b="1" dirty="0">
+                <a:solidFill>
+                  <a:srgbClr val="FFFFFF"/>
+                </a:solidFill>
+                <a:latin typeface="Aptos" pitchFamily="34" charset="0"/>
+                <a:ea typeface="Aptos" pitchFamily="34" charset="-122"/>
+                <a:cs typeface="Aptos" pitchFamily="34" charset="-120"/>
+              </a:rPr>
+              <a:t>7</a:t>
+            </a:r>
+            <a:endParaRPr lang="en-US" sz="1100" dirty="0"/>
+          </a:p>
+        </p:txBody>
+      </p:sp>
+      <p:sp>
+        <p:nvSpPr>
+          <p:cNvPr id="9" name="Text 7"/>
+          <p:cNvSpPr/>
+          <p:nvPr/>
+        </p:nvSpPr>
+        <p:spPr>
+          <a:xfrm>
+            <a:off x="640080" y="621792"/>
             <a:ext cx="10881360" cy="566928"/>
           </a:xfrm>
           <a:prstGeom prst="rect">
@@ -3435,7 +4382,7 @@
                 <a:ea typeface="Aptos Display" pitchFamily="34" charset="-122"/>
                 <a:cs typeface="Aptos Display" pitchFamily="34" charset="-120"/>
               </a:rPr>
-              <a:t>Application to AI-Supported Workflows</a:t>
+              <a:t>Topic Deep Dive</a:t>
             </a:r>
             <a:endParaRPr lang="en-US" sz="2700" dirty="0"/>
           </a:p>
@@ -3443,32 +4390,178 @@
       </p:sp>
       <p:sp>
         <p:nvSpPr>
-          <p:cNvPr id="7" name="Text 5"/>
-          <p:cNvSpPr/>
-          <p:nvPr/>
-        </p:nvSpPr>
-        <p:spPr>
-          <a:xfrm>
-            <a:off x="822960" y="1325880"/>
-            <a:ext cx="10378440" cy="4800600"/>
-          </a:xfrm>
-          <a:prstGeom prst="rect">
-            <a:avLst/>
-          </a:prstGeom>
-          <a:noFill/>
-          <a:ln/>
-        </p:spPr>
-        <p:txBody>
-          <a:bodyPr wrap="square" lIns="1016" tIns="1016" rIns="1016" bIns="1016" rtlCol="0" anchor="t">
+          <p:cNvPr id="10" name="Text 8"/>
+          <p:cNvSpPr/>
+          <p:nvPr/>
+        </p:nvSpPr>
+        <p:spPr>
+          <a:xfrm>
+            <a:off x="868680" y="1417320"/>
+            <a:ext cx="6675120" cy="4434840"/>
+          </a:xfrm>
+          <a:prstGeom prst="rect">
+            <a:avLst/>
+          </a:prstGeom>
+          <a:noFill/>
+          <a:ln/>
+        </p:spPr>
+        <p:txBody>
+          <a:bodyPr wrap="square" lIns="635" tIns="635" rIns="635" bIns="635" rtlCol="0" anchor="t">
             <a:normAutofit/>
           </a:bodyPr>
           <a:lstStyle/>
           <a:p>
+            <a:r>
+              <a:rPr lang="en-US" sz="1700" dirty="0">
+                <a:solidFill>
+                  <a:srgbClr val="17364A"/>
+                </a:solidFill>
+                <a:latin typeface="Aptos" pitchFamily="34" charset="0"/>
+                <a:ea typeface="Aptos" pitchFamily="34" charset="-122"/>
+                <a:cs typeface="Aptos" pitchFamily="34" charset="-120"/>
+              </a:rPr>
+              <a:t>Business analysis begins with problem definition.</a:t>
+            </a:r>
+            <a:endParaRPr lang="en-US" sz="1700" dirty="0"/>
+          </a:p>
+          <a:p>
+            <a:r>
+              <a:rPr lang="en-US" sz="1700" dirty="0">
+                <a:solidFill>
+                  <a:srgbClr val="17364A"/>
+                </a:solidFill>
+                <a:latin typeface="Aptos" pitchFamily="34" charset="0"/>
+                <a:ea typeface="Aptos" pitchFamily="34" charset="-122"/>
+                <a:cs typeface="Aptos" pitchFamily="34" charset="-120"/>
+              </a:rPr>
+              <a:t>Teams should document the public health objective, the operational pain point, the affected users, the current workflow,.</a:t>
+            </a:r>
+            <a:endParaRPr lang="en-US" sz="1700" dirty="0"/>
+          </a:p>
+          <a:p>
+            <a:r>
+              <a:rPr lang="en-US" sz="1700" dirty="0">
+                <a:solidFill>
+                  <a:srgbClr val="17364A"/>
+                </a:solidFill>
+                <a:latin typeface="Aptos" pitchFamily="34" charset="0"/>
+                <a:ea typeface="Aptos" pitchFamily="34" charset="-122"/>
+                <a:cs typeface="Aptos" pitchFamily="34" charset="-120"/>
+              </a:rPr>
+              <a:t>A vague goal such as “use AI to improve efficiency” is not sufficient for implementation.</a:t>
+            </a:r>
+            <a:endParaRPr lang="en-US" sz="1700" dirty="0"/>
+          </a:p>
+          <a:p>
+            <a:r>
+              <a:rPr lang="en-US" sz="1700" dirty="0">
+                <a:solidFill>
+                  <a:srgbClr val="17364A"/>
+                </a:solidFill>
+                <a:latin typeface="Aptos" pitchFamily="34" charset="0"/>
+                <a:ea typeface="Aptos" pitchFamily="34" charset="-122"/>
+                <a:cs typeface="Aptos" pitchFamily="34" charset="-120"/>
+              </a:rPr>
+              <a:t>Requirements should be grounded in workflow.</a:t>
+            </a:r>
+            <a:endParaRPr lang="en-US" sz="1700" dirty="0"/>
+          </a:p>
+        </p:txBody>
+      </p:sp>
+      <p:sp>
+        <p:nvSpPr>
+          <p:cNvPr id="11" name="Shape 9"/>
+          <p:cNvSpPr/>
+          <p:nvPr/>
+        </p:nvSpPr>
+        <p:spPr>
+          <a:xfrm>
+            <a:off x="7909560" y="1417320"/>
+            <a:ext cx="3154680" cy="1828800"/>
+          </a:xfrm>
+          <a:prstGeom prst="roundRect">
+            <a:avLst>
+              <a:gd name="adj" fmla="val 6000"/>
+            </a:avLst>
+          </a:prstGeom>
+          <a:solidFill>
+            <a:srgbClr val="EEF8ED"/>
+          </a:solidFill>
+          <a:ln w="12700">
+            <a:solidFill>
+              <a:srgbClr val="B9D7E6"/>
+            </a:solidFill>
+            <a:prstDash val="solid"/>
+          </a:ln>
+        </p:spPr>
+      </p:sp>
+      <p:sp>
+        <p:nvSpPr>
+          <p:cNvPr id="12" name="Text 10"/>
+          <p:cNvSpPr/>
+          <p:nvPr/>
+        </p:nvSpPr>
+        <p:spPr>
+          <a:xfrm>
+            <a:off x="8074152" y="1563624"/>
+            <a:ext cx="2825496" cy="201168"/>
+          </a:xfrm>
+          <a:prstGeom prst="rect">
+            <a:avLst/>
+          </a:prstGeom>
+          <a:noFill/>
+          <a:ln/>
+        </p:spPr>
+        <p:txBody>
+          <a:bodyPr wrap="square" lIns="0" tIns="0" rIns="0" bIns="0" rtlCol="0" anchor="ctr"/>
+          <a:lstStyle/>
+          <a:p>
             <a:pPr indent="0" marL="0">
               <a:buNone/>
             </a:pPr>
             <a:r>
-              <a:rPr lang="en-US" sz="1420" dirty="0">
+              <a:rPr lang="en-US" sz="950" b="1" dirty="0">
+                <a:solidFill>
+                  <a:srgbClr val="0068B7"/>
+                </a:solidFill>
+                <a:latin typeface="Aptos" pitchFamily="34" charset="0"/>
+                <a:ea typeface="Aptos" pitchFamily="34" charset="-122"/>
+                <a:cs typeface="Aptos" pitchFamily="34" charset="-120"/>
+              </a:rPr>
+              <a:t>Key idea</a:t>
+            </a:r>
+            <a:endParaRPr lang="en-US" sz="950" dirty="0"/>
+          </a:p>
+        </p:txBody>
+      </p:sp>
+      <p:sp>
+        <p:nvSpPr>
+          <p:cNvPr id="13" name="Text 11"/>
+          <p:cNvSpPr/>
+          <p:nvPr/>
+        </p:nvSpPr>
+        <p:spPr>
+          <a:xfrm>
+            <a:off x="8074152" y="1856232"/>
+            <a:ext cx="2825496" cy="1261872"/>
+          </a:xfrm>
+          <a:prstGeom prst="rect">
+            <a:avLst/>
+          </a:prstGeom>
+          <a:noFill/>
+          <a:ln/>
+        </p:spPr>
+        <p:txBody>
+          <a:bodyPr wrap="square" lIns="0" tIns="0" rIns="0" bIns="0" rtlCol="0" anchor="t">
+            <a:normAutofit/>
+          </a:bodyPr>
+          <a:lstStyle/>
+          <a:p>
+            <a:pPr indent="0" marL="0">
+              <a:buNone/>
+            </a:pPr>
+            <a:r>
+              <a:rPr lang="en-US" sz="1250" dirty="0">
                 <a:solidFill>
                   <a:srgbClr val="17364A"/>
                 </a:solidFill>
@@ -3476,9 +4569,116 @@
                 <a:ea typeface="Aptos" pitchFamily="34" charset="-122"/>
                 <a:cs typeface="Aptos" pitchFamily="34" charset="-120"/>
               </a:rPr>
-              <a:t>Generative AI, predictive analytics, RAG, automation, and agentic workflows all depend on the controls described in this module. The controls should be scaled to the risk of the use case. A tool that drafts internal training text may require lighter review than a tool that updates case records, prioritizes outreach, or supports public communication during an emergency. The module should be applied during readiness assessment, procurement, implementation planning, pilot testing, and post-deployment monitoring. Learners should document how the topic affects data, systems, users, safeguards, and decision-making for the selected workflow.</a:t>
-            </a:r>
-            <a:endParaRPr lang="en-US" sz="1420" dirty="0"/>
+              <a:t>Business analysis begins with problem definition.</a:t>
+            </a:r>
+            <a:endParaRPr lang="en-US" sz="1250" dirty="0"/>
+          </a:p>
+        </p:txBody>
+      </p:sp>
+      <p:sp>
+        <p:nvSpPr>
+          <p:cNvPr id="14" name="Shape 12"/>
+          <p:cNvSpPr/>
+          <p:nvPr/>
+        </p:nvSpPr>
+        <p:spPr>
+          <a:xfrm>
+            <a:off x="7909560" y="3520440"/>
+            <a:ext cx="3154680" cy="1737360"/>
+          </a:xfrm>
+          <a:prstGeom prst="roundRect">
+            <a:avLst>
+              <a:gd name="adj" fmla="val 6316"/>
+            </a:avLst>
+          </a:prstGeom>
+          <a:solidFill>
+            <a:srgbClr val="EAF6F8"/>
+          </a:solidFill>
+          <a:ln w="12700">
+            <a:solidFill>
+              <a:srgbClr val="B9D7E6"/>
+            </a:solidFill>
+            <a:prstDash val="solid"/>
+          </a:ln>
+        </p:spPr>
+      </p:sp>
+      <p:sp>
+        <p:nvSpPr>
+          <p:cNvPr id="15" name="Text 13"/>
+          <p:cNvSpPr/>
+          <p:nvPr/>
+        </p:nvSpPr>
+        <p:spPr>
+          <a:xfrm>
+            <a:off x="8074152" y="3666744"/>
+            <a:ext cx="2825496" cy="201168"/>
+          </a:xfrm>
+          <a:prstGeom prst="rect">
+            <a:avLst/>
+          </a:prstGeom>
+          <a:noFill/>
+          <a:ln/>
+        </p:spPr>
+        <p:txBody>
+          <a:bodyPr wrap="square" lIns="0" tIns="0" rIns="0" bIns="0" rtlCol="0" anchor="ctr"/>
+          <a:lstStyle/>
+          <a:p>
+            <a:pPr indent="0" marL="0">
+              <a:buNone/>
+            </a:pPr>
+            <a:r>
+              <a:rPr lang="en-US" sz="950" b="1" dirty="0">
+                <a:solidFill>
+                  <a:srgbClr val="0068B7"/>
+                </a:solidFill>
+                <a:latin typeface="Aptos" pitchFamily="34" charset="0"/>
+                <a:ea typeface="Aptos" pitchFamily="34" charset="-122"/>
+                <a:cs typeface="Aptos" pitchFamily="34" charset="-120"/>
+              </a:rPr>
+              <a:t>Use this for</a:t>
+            </a:r>
+            <a:endParaRPr lang="en-US" sz="950" dirty="0"/>
+          </a:p>
+        </p:txBody>
+      </p:sp>
+      <p:sp>
+        <p:nvSpPr>
+          <p:cNvPr id="16" name="Text 14"/>
+          <p:cNvSpPr/>
+          <p:nvPr/>
+        </p:nvSpPr>
+        <p:spPr>
+          <a:xfrm>
+            <a:off x="8074152" y="3959352"/>
+            <a:ext cx="2825496" cy="1170432"/>
+          </a:xfrm>
+          <a:prstGeom prst="rect">
+            <a:avLst/>
+          </a:prstGeom>
+          <a:noFill/>
+          <a:ln/>
+        </p:spPr>
+        <p:txBody>
+          <a:bodyPr wrap="square" lIns="0" tIns="0" rIns="0" bIns="0" rtlCol="0" anchor="t">
+            <a:normAutofit/>
+          </a:bodyPr>
+          <a:lstStyle/>
+          <a:p>
+            <a:pPr indent="0" marL="0">
+              <a:buNone/>
+            </a:pPr>
+            <a:r>
+              <a:rPr lang="en-US" sz="1250" dirty="0">
+                <a:solidFill>
+                  <a:srgbClr val="17364A"/>
+                </a:solidFill>
+                <a:latin typeface="Aptos" pitchFamily="34" charset="0"/>
+                <a:ea typeface="Aptos" pitchFamily="34" charset="-122"/>
+                <a:cs typeface="Aptos" pitchFamily="34" charset="-120"/>
+              </a:rPr>
+              <a:t>Connect the concept to public health decisions, safeguards, documentation, or implementation work.</a:t>
+            </a:r>
+            <a:endParaRPr lang="en-US" sz="1250" dirty="0"/>
           </a:p>
         </p:txBody>
       </p:sp>
@@ -3541,7 +4741,32 @@
       </p:sp>
       <p:sp>
         <p:nvSpPr>
-          <p:cNvPr id="3" name="Text 1"/>
+          <p:cNvPr id="3" name="Shape 1"/>
+          <p:cNvSpPr/>
+          <p:nvPr/>
+        </p:nvSpPr>
+        <p:spPr>
+          <a:xfrm>
+            <a:off x="0" y="164592"/>
+            <a:ext cx="146304" cy="6693408"/>
+          </a:xfrm>
+          <a:prstGeom prst="rect">
+            <a:avLst/>
+          </a:prstGeom>
+          <a:solidFill>
+            <a:srgbClr val="2F8A28"/>
+          </a:solidFill>
+          <a:ln w="12700">
+            <a:solidFill>
+              <a:srgbClr val="2F8A28"/>
+            </a:solidFill>
+            <a:prstDash val="solid"/>
+          </a:ln>
+        </p:spPr>
+      </p:sp>
+      <p:sp>
+        <p:nvSpPr>
+          <p:cNvPr id="4" name="Text 2"/>
           <p:cNvSpPr/>
           <p:nvPr/>
         </p:nvSpPr>
@@ -3580,7 +4805,7 @@
       </p:sp>
       <p:sp>
         <p:nvSpPr>
-          <p:cNvPr id="4" name="Text 2"/>
+          <p:cNvPr id="5" name="Text 3"/>
           <p:cNvSpPr/>
           <p:nvPr/>
         </p:nvSpPr>
@@ -3619,7 +4844,7 @@
       </p:sp>
       <p:sp>
         <p:nvSpPr>
-          <p:cNvPr id="5" name="Text 3"/>
+          <p:cNvPr id="6" name="Text 4"/>
           <p:cNvSpPr/>
           <p:nvPr/>
         </p:nvSpPr>
@@ -3658,13 +4883,77 @@
       </p:sp>
       <p:sp>
         <p:nvSpPr>
-          <p:cNvPr id="6" name="Text 4"/>
+          <p:cNvPr id="7" name="Shape 5"/>
           <p:cNvSpPr/>
           <p:nvPr/>
         </p:nvSpPr>
         <p:spPr>
           <a:xfrm>
             <a:off x="640080" y="658368"/>
+            <a:ext cx="420624" cy="420624"/>
+          </a:xfrm>
+          <a:prstGeom prst="ellipse">
+            <a:avLst/>
+          </a:prstGeom>
+          <a:solidFill>
+            <a:srgbClr val="0068B7"/>
+          </a:solidFill>
+          <a:ln w="12700">
+            <a:solidFill>
+              <a:srgbClr val="0068B7"/>
+            </a:solidFill>
+            <a:prstDash val="solid"/>
+          </a:ln>
+        </p:spPr>
+      </p:sp>
+      <p:sp>
+        <p:nvSpPr>
+          <p:cNvPr id="8" name="Text 6"/>
+          <p:cNvSpPr/>
+          <p:nvPr/>
+        </p:nvSpPr>
+        <p:spPr>
+          <a:xfrm>
+            <a:off x="640080" y="731520"/>
+            <a:ext cx="420624" cy="164592"/>
+          </a:xfrm>
+          <a:prstGeom prst="rect">
+            <a:avLst/>
+          </a:prstGeom>
+          <a:noFill/>
+          <a:ln/>
+        </p:spPr>
+        <p:txBody>
+          <a:bodyPr wrap="square" lIns="0" tIns="0" rIns="0" bIns="0" rtlCol="0" anchor="ctr"/>
+          <a:lstStyle/>
+          <a:p>
+            <a:pPr algn="ctr" indent="0" marL="0">
+              <a:buNone/>
+            </a:pPr>
+            <a:r>
+              <a:rPr lang="en-US" sz="1100" b="1" dirty="0">
+                <a:solidFill>
+                  <a:srgbClr val="FFFFFF"/>
+                </a:solidFill>
+                <a:latin typeface="Aptos" pitchFamily="34" charset="0"/>
+                <a:ea typeface="Aptos" pitchFamily="34" charset="-122"/>
+                <a:cs typeface="Aptos" pitchFamily="34" charset="-120"/>
+              </a:rPr>
+              <a:t>8</a:t>
+            </a:r>
+            <a:endParaRPr lang="en-US" sz="1100" dirty="0"/>
+          </a:p>
+        </p:txBody>
+      </p:sp>
+      <p:sp>
+        <p:nvSpPr>
+          <p:cNvPr id="9" name="Text 7"/>
+          <p:cNvSpPr/>
+          <p:nvPr/>
+        </p:nvSpPr>
+        <p:spPr>
+          <a:xfrm>
+            <a:off x="640080" y="621792"/>
             <a:ext cx="10881360" cy="566928"/>
           </a:xfrm>
           <a:prstGeom prst="rect">
@@ -3691,7 +4980,7 @@
                 <a:ea typeface="Aptos Display" pitchFamily="34" charset="-122"/>
                 <a:cs typeface="Aptos Display" pitchFamily="34" charset="-120"/>
               </a:rPr>
-              <a:t>Reflection Questions</a:t>
+              <a:t>Risks, Failure Modes, and Guardrails</a:t>
             </a:r>
             <a:endParaRPr lang="en-US" sz="2700" dirty="0"/>
           </a:p>
@@ -3699,32 +4988,178 @@
       </p:sp>
       <p:sp>
         <p:nvSpPr>
-          <p:cNvPr id="7" name="Text 5"/>
-          <p:cNvSpPr/>
-          <p:nvPr/>
-        </p:nvSpPr>
-        <p:spPr>
-          <a:xfrm>
-            <a:off x="822960" y="1325880"/>
-            <a:ext cx="10378440" cy="4800600"/>
-          </a:xfrm>
-          <a:prstGeom prst="rect">
-            <a:avLst/>
-          </a:prstGeom>
-          <a:noFill/>
-          <a:ln/>
-        </p:spPr>
-        <p:txBody>
-          <a:bodyPr wrap="square" lIns="1016" tIns="1016" rIns="1016" bIns="1016" rtlCol="0" anchor="t">
+          <p:cNvPr id="10" name="Text 8"/>
+          <p:cNvSpPr/>
+          <p:nvPr/>
+        </p:nvSpPr>
+        <p:spPr>
+          <a:xfrm>
+            <a:off x="868680" y="1417320"/>
+            <a:ext cx="6675120" cy="4434840"/>
+          </a:xfrm>
+          <a:prstGeom prst="rect">
+            <a:avLst/>
+          </a:prstGeom>
+          <a:noFill/>
+          <a:ln/>
+        </p:spPr>
+        <p:txBody>
+          <a:bodyPr wrap="square" lIns="635" tIns="635" rIns="635" bIns="635" rtlCol="0" anchor="t">
             <a:normAutofit/>
           </a:bodyPr>
           <a:lstStyle/>
           <a:p>
+            <a:r>
+              <a:rPr lang="en-US" sz="1700" dirty="0">
+                <a:solidFill>
+                  <a:srgbClr val="17364A"/>
+                </a:solidFill>
+                <a:latin typeface="Aptos" pitchFamily="34" charset="0"/>
+                <a:ea typeface="Aptos" pitchFamily="34" charset="-122"/>
+                <a:cs typeface="Aptos" pitchFamily="34" charset="-120"/>
+              </a:rPr>
+              <a:t>A common failure mode is treating the topic as a technical detail rather than a public health control.</a:t>
+            </a:r>
+            <a:endParaRPr lang="en-US" sz="1700" dirty="0"/>
+          </a:p>
+          <a:p>
+            <a:r>
+              <a:rPr lang="en-US" sz="1700" dirty="0">
+                <a:solidFill>
+                  <a:srgbClr val="17364A"/>
+                </a:solidFill>
+                <a:latin typeface="Aptos" pitchFamily="34" charset="0"/>
+                <a:ea typeface="Aptos" pitchFamily="34" charset="-122"/>
+                <a:cs typeface="Aptos" pitchFamily="34" charset="-120"/>
+              </a:rPr>
+              <a:t>When staff do not connect technical decisions to authority, workflow, equity, privacy, security, and accountability, the.</a:t>
+            </a:r>
+            <a:endParaRPr lang="en-US" sz="1700" dirty="0"/>
+          </a:p>
+          <a:p>
+            <a:r>
+              <a:rPr lang="en-US" sz="1700" dirty="0">
+                <a:solidFill>
+                  <a:srgbClr val="17364A"/>
+                </a:solidFill>
+                <a:latin typeface="Aptos" pitchFamily="34" charset="0"/>
+                <a:ea typeface="Aptos" pitchFamily="34" charset="-122"/>
+                <a:cs typeface="Aptos" pitchFamily="34" charset="-120"/>
+              </a:rPr>
+              <a:t>Another risk is relying on vendor claims without agency-defined evidence.</a:t>
+            </a:r>
+            <a:endParaRPr lang="en-US" sz="1700" dirty="0"/>
+          </a:p>
+          <a:p>
+            <a:r>
+              <a:rPr lang="en-US" sz="1700" dirty="0">
+                <a:solidFill>
+                  <a:srgbClr val="17364A"/>
+                </a:solidFill>
+                <a:latin typeface="Aptos" pitchFamily="34" charset="0"/>
+                <a:ea typeface="Aptos" pitchFamily="34" charset="-122"/>
+                <a:cs typeface="Aptos" pitchFamily="34" charset="-120"/>
+              </a:rPr>
+              <a:t>Vendors may provide demonstrations, dashboards, or summary metrics that do not match the agency workflow or data environment.</a:t>
+            </a:r>
+            <a:endParaRPr lang="en-US" sz="1700" dirty="0"/>
+          </a:p>
+        </p:txBody>
+      </p:sp>
+      <p:sp>
+        <p:nvSpPr>
+          <p:cNvPr id="11" name="Shape 9"/>
+          <p:cNvSpPr/>
+          <p:nvPr/>
+        </p:nvSpPr>
+        <p:spPr>
+          <a:xfrm>
+            <a:off x="7909560" y="1417320"/>
+            <a:ext cx="3154680" cy="1828800"/>
+          </a:xfrm>
+          <a:prstGeom prst="roundRect">
+            <a:avLst>
+              <a:gd name="adj" fmla="val 6000"/>
+            </a:avLst>
+          </a:prstGeom>
+          <a:solidFill>
+            <a:srgbClr val="EEF8ED"/>
+          </a:solidFill>
+          <a:ln w="12700">
+            <a:solidFill>
+              <a:srgbClr val="B9D7E6"/>
+            </a:solidFill>
+            <a:prstDash val="solid"/>
+          </a:ln>
+        </p:spPr>
+      </p:sp>
+      <p:sp>
+        <p:nvSpPr>
+          <p:cNvPr id="12" name="Text 10"/>
+          <p:cNvSpPr/>
+          <p:nvPr/>
+        </p:nvSpPr>
+        <p:spPr>
+          <a:xfrm>
+            <a:off x="8074152" y="1563624"/>
+            <a:ext cx="2825496" cy="201168"/>
+          </a:xfrm>
+          <a:prstGeom prst="rect">
+            <a:avLst/>
+          </a:prstGeom>
+          <a:noFill/>
+          <a:ln/>
+        </p:spPr>
+        <p:txBody>
+          <a:bodyPr wrap="square" lIns="0" tIns="0" rIns="0" bIns="0" rtlCol="0" anchor="ctr"/>
+          <a:lstStyle/>
+          <a:p>
             <a:pPr indent="0" marL="0">
               <a:buNone/>
             </a:pPr>
             <a:r>
-              <a:rPr lang="en-US" sz="1420" dirty="0">
+              <a:rPr lang="en-US" sz="950" b="1" dirty="0">
+                <a:solidFill>
+                  <a:srgbClr val="0068B7"/>
+                </a:solidFill>
+                <a:latin typeface="Aptos" pitchFamily="34" charset="0"/>
+                <a:ea typeface="Aptos" pitchFamily="34" charset="-122"/>
+                <a:cs typeface="Aptos" pitchFamily="34" charset="-120"/>
+              </a:rPr>
+              <a:t>Key idea</a:t>
+            </a:r>
+            <a:endParaRPr lang="en-US" sz="950" dirty="0"/>
+          </a:p>
+        </p:txBody>
+      </p:sp>
+      <p:sp>
+        <p:nvSpPr>
+          <p:cNvPr id="13" name="Text 11"/>
+          <p:cNvSpPr/>
+          <p:nvPr/>
+        </p:nvSpPr>
+        <p:spPr>
+          <a:xfrm>
+            <a:off x="8074152" y="1856232"/>
+            <a:ext cx="2825496" cy="1261872"/>
+          </a:xfrm>
+          <a:prstGeom prst="rect">
+            <a:avLst/>
+          </a:prstGeom>
+          <a:noFill/>
+          <a:ln/>
+        </p:spPr>
+        <p:txBody>
+          <a:bodyPr wrap="square" lIns="0" tIns="0" rIns="0" bIns="0" rtlCol="0" anchor="t">
+            <a:normAutofit/>
+          </a:bodyPr>
+          <a:lstStyle/>
+          <a:p>
+            <a:pPr indent="0" marL="0">
+              <a:buNone/>
+            </a:pPr>
+            <a:r>
+              <a:rPr lang="en-US" sz="1250" dirty="0">
                 <a:solidFill>
                   <a:srgbClr val="17364A"/>
                 </a:solidFill>
@@ -3732,9 +5167,116 @@
                 <a:ea typeface="Aptos" pitchFamily="34" charset="-122"/>
                 <a:cs typeface="Aptos" pitchFamily="34" charset="-120"/>
               </a:rPr>
-              <a:t>Where does this topic appear in one current or proposed AI workflow in your agency? What decisions, data sources, users, or partners would be affected if this area is poorly designed? What evidence would governance reviewers need before approving the workflow?</a:t>
-            </a:r>
-            <a:endParaRPr lang="en-US" sz="1420" dirty="0"/>
+              <a:t>A common failure mode is treating the topic as a technical detail rather than a public health control.</a:t>
+            </a:r>
+            <a:endParaRPr lang="en-US" sz="1250" dirty="0"/>
+          </a:p>
+        </p:txBody>
+      </p:sp>
+      <p:sp>
+        <p:nvSpPr>
+          <p:cNvPr id="14" name="Shape 12"/>
+          <p:cNvSpPr/>
+          <p:nvPr/>
+        </p:nvSpPr>
+        <p:spPr>
+          <a:xfrm>
+            <a:off x="7909560" y="3520440"/>
+            <a:ext cx="3154680" cy="1737360"/>
+          </a:xfrm>
+          <a:prstGeom prst="roundRect">
+            <a:avLst>
+              <a:gd name="adj" fmla="val 6316"/>
+            </a:avLst>
+          </a:prstGeom>
+          <a:solidFill>
+            <a:srgbClr val="EAF6F8"/>
+          </a:solidFill>
+          <a:ln w="12700">
+            <a:solidFill>
+              <a:srgbClr val="B9D7E6"/>
+            </a:solidFill>
+            <a:prstDash val="solid"/>
+          </a:ln>
+        </p:spPr>
+      </p:sp>
+      <p:sp>
+        <p:nvSpPr>
+          <p:cNvPr id="15" name="Text 13"/>
+          <p:cNvSpPr/>
+          <p:nvPr/>
+        </p:nvSpPr>
+        <p:spPr>
+          <a:xfrm>
+            <a:off x="8074152" y="3666744"/>
+            <a:ext cx="2825496" cy="201168"/>
+          </a:xfrm>
+          <a:prstGeom prst="rect">
+            <a:avLst/>
+          </a:prstGeom>
+          <a:noFill/>
+          <a:ln/>
+        </p:spPr>
+        <p:txBody>
+          <a:bodyPr wrap="square" lIns="0" tIns="0" rIns="0" bIns="0" rtlCol="0" anchor="ctr"/>
+          <a:lstStyle/>
+          <a:p>
+            <a:pPr indent="0" marL="0">
+              <a:buNone/>
+            </a:pPr>
+            <a:r>
+              <a:rPr lang="en-US" sz="950" b="1" dirty="0">
+                <a:solidFill>
+                  <a:srgbClr val="0068B7"/>
+                </a:solidFill>
+                <a:latin typeface="Aptos" pitchFamily="34" charset="0"/>
+                <a:ea typeface="Aptos" pitchFamily="34" charset="-122"/>
+                <a:cs typeface="Aptos" pitchFamily="34" charset="-120"/>
+              </a:rPr>
+              <a:t>Use this for</a:t>
+            </a:r>
+            <a:endParaRPr lang="en-US" sz="950" dirty="0"/>
+          </a:p>
+        </p:txBody>
+      </p:sp>
+      <p:sp>
+        <p:nvSpPr>
+          <p:cNvPr id="16" name="Text 14"/>
+          <p:cNvSpPr/>
+          <p:nvPr/>
+        </p:nvSpPr>
+        <p:spPr>
+          <a:xfrm>
+            <a:off x="8074152" y="3959352"/>
+            <a:ext cx="2825496" cy="1170432"/>
+          </a:xfrm>
+          <a:prstGeom prst="rect">
+            <a:avLst/>
+          </a:prstGeom>
+          <a:noFill/>
+          <a:ln/>
+        </p:spPr>
+        <p:txBody>
+          <a:bodyPr wrap="square" lIns="0" tIns="0" rIns="0" bIns="0" rtlCol="0" anchor="t">
+            <a:normAutofit/>
+          </a:bodyPr>
+          <a:lstStyle/>
+          <a:p>
+            <a:pPr indent="0" marL="0">
+              <a:buNone/>
+            </a:pPr>
+            <a:r>
+              <a:rPr lang="en-US" sz="1250" dirty="0">
+                <a:solidFill>
+                  <a:srgbClr val="17364A"/>
+                </a:solidFill>
+                <a:latin typeface="Aptos" pitchFamily="34" charset="0"/>
+                <a:ea typeface="Aptos" pitchFamily="34" charset="-122"/>
+                <a:cs typeface="Aptos" pitchFamily="34" charset="-120"/>
+              </a:rPr>
+              <a:t>Connect the concept to public health decisions, safeguards, documentation, or implementation work.</a:t>
+            </a:r>
+            <a:endParaRPr lang="en-US" sz="1250" dirty="0"/>
           </a:p>
         </p:txBody>
       </p:sp>
@@ -3797,7 +5339,32 @@
       </p:sp>
       <p:sp>
         <p:nvSpPr>
-          <p:cNvPr id="3" name="Text 1"/>
+          <p:cNvPr id="3" name="Shape 1"/>
+          <p:cNvSpPr/>
+          <p:nvPr/>
+        </p:nvSpPr>
+        <p:spPr>
+          <a:xfrm>
+            <a:off x="0" y="164592"/>
+            <a:ext cx="146304" cy="6693408"/>
+          </a:xfrm>
+          <a:prstGeom prst="rect">
+            <a:avLst/>
+          </a:prstGeom>
+          <a:solidFill>
+            <a:srgbClr val="2F8A28"/>
+          </a:solidFill>
+          <a:ln w="12700">
+            <a:solidFill>
+              <a:srgbClr val="2F8A28"/>
+            </a:solidFill>
+            <a:prstDash val="solid"/>
+          </a:ln>
+        </p:spPr>
+      </p:sp>
+      <p:sp>
+        <p:nvSpPr>
+          <p:cNvPr id="4" name="Text 2"/>
           <p:cNvSpPr/>
           <p:nvPr/>
         </p:nvSpPr>
@@ -3836,7 +5403,7 @@
       </p:sp>
       <p:sp>
         <p:nvSpPr>
-          <p:cNvPr id="4" name="Text 2"/>
+          <p:cNvPr id="5" name="Text 3"/>
           <p:cNvSpPr/>
           <p:nvPr/>
         </p:nvSpPr>
@@ -3875,7 +5442,7 @@
       </p:sp>
       <p:sp>
         <p:nvSpPr>
-          <p:cNvPr id="5" name="Text 3"/>
+          <p:cNvPr id="6" name="Text 4"/>
           <p:cNvSpPr/>
           <p:nvPr/>
         </p:nvSpPr>
@@ -3914,13 +5481,77 @@
       </p:sp>
       <p:sp>
         <p:nvSpPr>
-          <p:cNvPr id="6" name="Text 4"/>
+          <p:cNvPr id="7" name="Shape 5"/>
           <p:cNvSpPr/>
           <p:nvPr/>
         </p:nvSpPr>
         <p:spPr>
           <a:xfrm>
             <a:off x="640080" y="658368"/>
+            <a:ext cx="420624" cy="420624"/>
+          </a:xfrm>
+          <a:prstGeom prst="ellipse">
+            <a:avLst/>
+          </a:prstGeom>
+          <a:solidFill>
+            <a:srgbClr val="0068B7"/>
+          </a:solidFill>
+          <a:ln w="12700">
+            <a:solidFill>
+              <a:srgbClr val="0068B7"/>
+            </a:solidFill>
+            <a:prstDash val="solid"/>
+          </a:ln>
+        </p:spPr>
+      </p:sp>
+      <p:sp>
+        <p:nvSpPr>
+          <p:cNvPr id="8" name="Text 6"/>
+          <p:cNvSpPr/>
+          <p:nvPr/>
+        </p:nvSpPr>
+        <p:spPr>
+          <a:xfrm>
+            <a:off x="640080" y="731520"/>
+            <a:ext cx="420624" cy="164592"/>
+          </a:xfrm>
+          <a:prstGeom prst="rect">
+            <a:avLst/>
+          </a:prstGeom>
+          <a:noFill/>
+          <a:ln/>
+        </p:spPr>
+        <p:txBody>
+          <a:bodyPr wrap="square" lIns="0" tIns="0" rIns="0" bIns="0" rtlCol="0" anchor="ctr"/>
+          <a:lstStyle/>
+          <a:p>
+            <a:pPr algn="ctr" indent="0" marL="0">
+              <a:buNone/>
+            </a:pPr>
+            <a:r>
+              <a:rPr lang="en-US" sz="1100" b="1" dirty="0">
+                <a:solidFill>
+                  <a:srgbClr val="FFFFFF"/>
+                </a:solidFill>
+                <a:latin typeface="Aptos" pitchFamily="34" charset="0"/>
+                <a:ea typeface="Aptos" pitchFamily="34" charset="-122"/>
+                <a:cs typeface="Aptos" pitchFamily="34" charset="-120"/>
+              </a:rPr>
+              <a:t>9</a:t>
+            </a:r>
+            <a:endParaRPr lang="en-US" sz="1100" dirty="0"/>
+          </a:p>
+        </p:txBody>
+      </p:sp>
+      <p:sp>
+        <p:nvSpPr>
+          <p:cNvPr id="9" name="Text 7"/>
+          <p:cNvSpPr/>
+          <p:nvPr/>
+        </p:nvSpPr>
+        <p:spPr>
+          <a:xfrm>
+            <a:off x="640080" y="621792"/>
             <a:ext cx="10881360" cy="566928"/>
           </a:xfrm>
           <a:prstGeom prst="rect">
@@ -3947,7 +5578,7 @@
                 <a:ea typeface="Aptos Display" pitchFamily="34" charset="-122"/>
                 <a:cs typeface="Aptos Display" pitchFamily="34" charset="-120"/>
               </a:rPr>
-              <a:t>Reflection Questions Continued</a:t>
+              <a:t>Application to AI-Supported Workflows</a:t>
             </a:r>
             <a:endParaRPr lang="en-US" sz="2700" dirty="0"/>
           </a:p>
@@ -3955,32 +5586,178 @@
       </p:sp>
       <p:sp>
         <p:nvSpPr>
-          <p:cNvPr id="7" name="Text 5"/>
-          <p:cNvSpPr/>
-          <p:nvPr/>
-        </p:nvSpPr>
-        <p:spPr>
-          <a:xfrm>
-            <a:off x="822960" y="1325880"/>
-            <a:ext cx="10378440" cy="4800600"/>
-          </a:xfrm>
-          <a:prstGeom prst="rect">
-            <a:avLst/>
-          </a:prstGeom>
-          <a:noFill/>
-          <a:ln/>
-        </p:spPr>
-        <p:txBody>
-          <a:bodyPr wrap="square" lIns="1016" tIns="1016" rIns="1016" bIns="1016" rtlCol="0" anchor="t">
+          <p:cNvPr id="10" name="Text 8"/>
+          <p:cNvSpPr/>
+          <p:nvPr/>
+        </p:nvSpPr>
+        <p:spPr>
+          <a:xfrm>
+            <a:off x="868680" y="1417320"/>
+            <a:ext cx="6675120" cy="4434840"/>
+          </a:xfrm>
+          <a:prstGeom prst="rect">
+            <a:avLst/>
+          </a:prstGeom>
+          <a:noFill/>
+          <a:ln/>
+        </p:spPr>
+        <p:txBody>
+          <a:bodyPr wrap="square" lIns="635" tIns="635" rIns="635" bIns="635" rtlCol="0" anchor="t">
             <a:normAutofit/>
           </a:bodyPr>
           <a:lstStyle/>
           <a:p>
+            <a:r>
+              <a:rPr lang="en-US" sz="1700" dirty="0">
+                <a:solidFill>
+                  <a:srgbClr val="17364A"/>
+                </a:solidFill>
+                <a:latin typeface="Aptos" pitchFamily="34" charset="0"/>
+                <a:ea typeface="Aptos" pitchFamily="34" charset="-122"/>
+                <a:cs typeface="Aptos" pitchFamily="34" charset="-120"/>
+              </a:rPr>
+              <a:t>Generative AI, predictive analytics, RAG, automation, and agentic workflows all depend on the controls described in this.</a:t>
+            </a:r>
+            <a:endParaRPr lang="en-US" sz="1700" dirty="0"/>
+          </a:p>
+          <a:p>
+            <a:r>
+              <a:rPr lang="en-US" sz="1700" dirty="0">
+                <a:solidFill>
+                  <a:srgbClr val="17364A"/>
+                </a:solidFill>
+                <a:latin typeface="Aptos" pitchFamily="34" charset="0"/>
+                <a:ea typeface="Aptos" pitchFamily="34" charset="-122"/>
+                <a:cs typeface="Aptos" pitchFamily="34" charset="-120"/>
+              </a:rPr>
+              <a:t>The controls should be scaled to the risk of the use case.</a:t>
+            </a:r>
+            <a:endParaRPr lang="en-US" sz="1700" dirty="0"/>
+          </a:p>
+          <a:p>
+            <a:r>
+              <a:rPr lang="en-US" sz="1700" dirty="0">
+                <a:solidFill>
+                  <a:srgbClr val="17364A"/>
+                </a:solidFill>
+                <a:latin typeface="Aptos" pitchFamily="34" charset="0"/>
+                <a:ea typeface="Aptos" pitchFamily="34" charset="-122"/>
+                <a:cs typeface="Aptos" pitchFamily="34" charset="-120"/>
+              </a:rPr>
+              <a:t>A tool that drafts internal training text may require lighter review than a tool that updates case records, prioritizes.</a:t>
+            </a:r>
+            <a:endParaRPr lang="en-US" sz="1700" dirty="0"/>
+          </a:p>
+          <a:p>
+            <a:r>
+              <a:rPr lang="en-US" sz="1700" dirty="0">
+                <a:solidFill>
+                  <a:srgbClr val="17364A"/>
+                </a:solidFill>
+                <a:latin typeface="Aptos" pitchFamily="34" charset="0"/>
+                <a:ea typeface="Aptos" pitchFamily="34" charset="-122"/>
+                <a:cs typeface="Aptos" pitchFamily="34" charset="-120"/>
+              </a:rPr>
+              <a:t>The module should be applied during readiness assessment, procurement, implementation planning, pilot testing, and.</a:t>
+            </a:r>
+            <a:endParaRPr lang="en-US" sz="1700" dirty="0"/>
+          </a:p>
+        </p:txBody>
+      </p:sp>
+      <p:sp>
+        <p:nvSpPr>
+          <p:cNvPr id="11" name="Shape 9"/>
+          <p:cNvSpPr/>
+          <p:nvPr/>
+        </p:nvSpPr>
+        <p:spPr>
+          <a:xfrm>
+            <a:off x="7909560" y="1417320"/>
+            <a:ext cx="3154680" cy="1828800"/>
+          </a:xfrm>
+          <a:prstGeom prst="roundRect">
+            <a:avLst>
+              <a:gd name="adj" fmla="val 6000"/>
+            </a:avLst>
+          </a:prstGeom>
+          <a:solidFill>
+            <a:srgbClr val="EEF8ED"/>
+          </a:solidFill>
+          <a:ln w="12700">
+            <a:solidFill>
+              <a:srgbClr val="B9D7E6"/>
+            </a:solidFill>
+            <a:prstDash val="solid"/>
+          </a:ln>
+        </p:spPr>
+      </p:sp>
+      <p:sp>
+        <p:nvSpPr>
+          <p:cNvPr id="12" name="Text 10"/>
+          <p:cNvSpPr/>
+          <p:nvPr/>
+        </p:nvSpPr>
+        <p:spPr>
+          <a:xfrm>
+            <a:off x="8074152" y="1563624"/>
+            <a:ext cx="2825496" cy="201168"/>
+          </a:xfrm>
+          <a:prstGeom prst="rect">
+            <a:avLst/>
+          </a:prstGeom>
+          <a:noFill/>
+          <a:ln/>
+        </p:spPr>
+        <p:txBody>
+          <a:bodyPr wrap="square" lIns="0" tIns="0" rIns="0" bIns="0" rtlCol="0" anchor="ctr"/>
+          <a:lstStyle/>
+          <a:p>
             <a:pPr indent="0" marL="0">
               <a:buNone/>
             </a:pPr>
             <a:r>
-              <a:rPr lang="en-US" sz="1420" dirty="0">
+              <a:rPr lang="en-US" sz="950" b="1" dirty="0">
+                <a:solidFill>
+                  <a:srgbClr val="0068B7"/>
+                </a:solidFill>
+                <a:latin typeface="Aptos" pitchFamily="34" charset="0"/>
+                <a:ea typeface="Aptos" pitchFamily="34" charset="-122"/>
+                <a:cs typeface="Aptos" pitchFamily="34" charset="-120"/>
+              </a:rPr>
+              <a:t>Key idea</a:t>
+            </a:r>
+            <a:endParaRPr lang="en-US" sz="950" dirty="0"/>
+          </a:p>
+        </p:txBody>
+      </p:sp>
+      <p:sp>
+        <p:nvSpPr>
+          <p:cNvPr id="13" name="Text 11"/>
+          <p:cNvSpPr/>
+          <p:nvPr/>
+        </p:nvSpPr>
+        <p:spPr>
+          <a:xfrm>
+            <a:off x="8074152" y="1856232"/>
+            <a:ext cx="2825496" cy="1261872"/>
+          </a:xfrm>
+          <a:prstGeom prst="rect">
+            <a:avLst/>
+          </a:prstGeom>
+          <a:noFill/>
+          <a:ln/>
+        </p:spPr>
+        <p:txBody>
+          <a:bodyPr wrap="square" lIns="0" tIns="0" rIns="0" bIns="0" rtlCol="0" anchor="t">
+            <a:normAutofit/>
+          </a:bodyPr>
+          <a:lstStyle/>
+          <a:p>
+            <a:pPr indent="0" marL="0">
+              <a:buNone/>
+            </a:pPr>
+            <a:r>
+              <a:rPr lang="en-US" sz="1250" dirty="0">
                 <a:solidFill>
                   <a:srgbClr val="17364A"/>
                 </a:solidFill>
@@ -3988,9 +5765,116 @@
                 <a:ea typeface="Aptos" pitchFamily="34" charset="-122"/>
                 <a:cs typeface="Aptos" pitchFamily="34" charset="-120"/>
               </a:rPr>
-              <a:t>Which safeguards should be required before pilot testing? Who owns ongoing monitoring and review?</a:t>
-            </a:r>
-            <a:endParaRPr lang="en-US" sz="1420" dirty="0"/>
+              <a:t>Generative AI, predictive analytics, RAG, automation, and agentic workflows all depend on the controls described in this.</a:t>
+            </a:r>
+            <a:endParaRPr lang="en-US" sz="1250" dirty="0"/>
+          </a:p>
+        </p:txBody>
+      </p:sp>
+      <p:sp>
+        <p:nvSpPr>
+          <p:cNvPr id="14" name="Shape 12"/>
+          <p:cNvSpPr/>
+          <p:nvPr/>
+        </p:nvSpPr>
+        <p:spPr>
+          <a:xfrm>
+            <a:off x="7909560" y="3520440"/>
+            <a:ext cx="3154680" cy="1737360"/>
+          </a:xfrm>
+          <a:prstGeom prst="roundRect">
+            <a:avLst>
+              <a:gd name="adj" fmla="val 6316"/>
+            </a:avLst>
+          </a:prstGeom>
+          <a:solidFill>
+            <a:srgbClr val="EAF6F8"/>
+          </a:solidFill>
+          <a:ln w="12700">
+            <a:solidFill>
+              <a:srgbClr val="B9D7E6"/>
+            </a:solidFill>
+            <a:prstDash val="solid"/>
+          </a:ln>
+        </p:spPr>
+      </p:sp>
+      <p:sp>
+        <p:nvSpPr>
+          <p:cNvPr id="15" name="Text 13"/>
+          <p:cNvSpPr/>
+          <p:nvPr/>
+        </p:nvSpPr>
+        <p:spPr>
+          <a:xfrm>
+            <a:off x="8074152" y="3666744"/>
+            <a:ext cx="2825496" cy="201168"/>
+          </a:xfrm>
+          <a:prstGeom prst="rect">
+            <a:avLst/>
+          </a:prstGeom>
+          <a:noFill/>
+          <a:ln/>
+        </p:spPr>
+        <p:txBody>
+          <a:bodyPr wrap="square" lIns="0" tIns="0" rIns="0" bIns="0" rtlCol="0" anchor="ctr"/>
+          <a:lstStyle/>
+          <a:p>
+            <a:pPr indent="0" marL="0">
+              <a:buNone/>
+            </a:pPr>
+            <a:r>
+              <a:rPr lang="en-US" sz="950" b="1" dirty="0">
+                <a:solidFill>
+                  <a:srgbClr val="0068B7"/>
+                </a:solidFill>
+                <a:latin typeface="Aptos" pitchFamily="34" charset="0"/>
+                <a:ea typeface="Aptos" pitchFamily="34" charset="-122"/>
+                <a:cs typeface="Aptos" pitchFamily="34" charset="-120"/>
+              </a:rPr>
+              <a:t>Use this for</a:t>
+            </a:r>
+            <a:endParaRPr lang="en-US" sz="950" dirty="0"/>
+          </a:p>
+        </p:txBody>
+      </p:sp>
+      <p:sp>
+        <p:nvSpPr>
+          <p:cNvPr id="16" name="Text 14"/>
+          <p:cNvSpPr/>
+          <p:nvPr/>
+        </p:nvSpPr>
+        <p:spPr>
+          <a:xfrm>
+            <a:off x="8074152" y="3959352"/>
+            <a:ext cx="2825496" cy="1170432"/>
+          </a:xfrm>
+          <a:prstGeom prst="rect">
+            <a:avLst/>
+          </a:prstGeom>
+          <a:noFill/>
+          <a:ln/>
+        </p:spPr>
+        <p:txBody>
+          <a:bodyPr wrap="square" lIns="0" tIns="0" rIns="0" bIns="0" rtlCol="0" anchor="t">
+            <a:normAutofit/>
+          </a:bodyPr>
+          <a:lstStyle/>
+          <a:p>
+            <a:pPr indent="0" marL="0">
+              <a:buNone/>
+            </a:pPr>
+            <a:r>
+              <a:rPr lang="en-US" sz="1250" dirty="0">
+                <a:solidFill>
+                  <a:srgbClr val="17364A"/>
+                </a:solidFill>
+                <a:latin typeface="Aptos" pitchFamily="34" charset="0"/>
+                <a:ea typeface="Aptos" pitchFamily="34" charset="-122"/>
+                <a:cs typeface="Aptos" pitchFamily="34" charset="-120"/>
+              </a:rPr>
+              <a:t>Connect the concept to public health decisions, safeguards, documentation, or implementation work.</a:t>
+            </a:r>
+            <a:endParaRPr lang="en-US" sz="1250" dirty="0"/>
           </a:p>
         </p:txBody>
       </p:sp>
@@ -4053,7 +5937,32 @@
       </p:sp>
       <p:sp>
         <p:nvSpPr>
-          <p:cNvPr id="3" name="Text 1"/>
+          <p:cNvPr id="3" name="Shape 1"/>
+          <p:cNvSpPr/>
+          <p:nvPr/>
+        </p:nvSpPr>
+        <p:spPr>
+          <a:xfrm>
+            <a:off x="0" y="164592"/>
+            <a:ext cx="146304" cy="6693408"/>
+          </a:xfrm>
+          <a:prstGeom prst="rect">
+            <a:avLst/>
+          </a:prstGeom>
+          <a:solidFill>
+            <a:srgbClr val="2F8A28"/>
+          </a:solidFill>
+          <a:ln w="12700">
+            <a:solidFill>
+              <a:srgbClr val="2F8A28"/>
+            </a:solidFill>
+            <a:prstDash val="solid"/>
+          </a:ln>
+        </p:spPr>
+      </p:sp>
+      <p:sp>
+        <p:nvSpPr>
+          <p:cNvPr id="4" name="Text 2"/>
           <p:cNvSpPr/>
           <p:nvPr/>
         </p:nvSpPr>
@@ -4092,7 +6001,7 @@
       </p:sp>
       <p:sp>
         <p:nvSpPr>
-          <p:cNvPr id="4" name="Text 2"/>
+          <p:cNvPr id="5" name="Text 3"/>
           <p:cNvSpPr/>
           <p:nvPr/>
         </p:nvSpPr>
@@ -4131,7 +6040,7 @@
       </p:sp>
       <p:sp>
         <p:nvSpPr>
-          <p:cNvPr id="5" name="Text 3"/>
+          <p:cNvPr id="6" name="Text 4"/>
           <p:cNvSpPr/>
           <p:nvPr/>
         </p:nvSpPr>
@@ -4170,13 +6079,77 @@
       </p:sp>
       <p:sp>
         <p:nvSpPr>
-          <p:cNvPr id="6" name="Text 4"/>
+          <p:cNvPr id="7" name="Shape 5"/>
           <p:cNvSpPr/>
           <p:nvPr/>
         </p:nvSpPr>
         <p:spPr>
           <a:xfrm>
             <a:off x="640080" y="658368"/>
+            <a:ext cx="420624" cy="420624"/>
+          </a:xfrm>
+          <a:prstGeom prst="ellipse">
+            <a:avLst/>
+          </a:prstGeom>
+          <a:solidFill>
+            <a:srgbClr val="0068B7"/>
+          </a:solidFill>
+          <a:ln w="12700">
+            <a:solidFill>
+              <a:srgbClr val="0068B7"/>
+            </a:solidFill>
+            <a:prstDash val="solid"/>
+          </a:ln>
+        </p:spPr>
+      </p:sp>
+      <p:sp>
+        <p:nvSpPr>
+          <p:cNvPr id="8" name="Text 6"/>
+          <p:cNvSpPr/>
+          <p:nvPr/>
+        </p:nvSpPr>
+        <p:spPr>
+          <a:xfrm>
+            <a:off x="640080" y="731520"/>
+            <a:ext cx="420624" cy="164592"/>
+          </a:xfrm>
+          <a:prstGeom prst="rect">
+            <a:avLst/>
+          </a:prstGeom>
+          <a:noFill/>
+          <a:ln/>
+        </p:spPr>
+        <p:txBody>
+          <a:bodyPr wrap="square" lIns="0" tIns="0" rIns="0" bIns="0" rtlCol="0" anchor="ctr"/>
+          <a:lstStyle/>
+          <a:p>
+            <a:pPr algn="ctr" indent="0" marL="0">
+              <a:buNone/>
+            </a:pPr>
+            <a:r>
+              <a:rPr lang="en-US" sz="1100" b="1" dirty="0">
+                <a:solidFill>
+                  <a:srgbClr val="FFFFFF"/>
+                </a:solidFill>
+                <a:latin typeface="Aptos" pitchFamily="34" charset="0"/>
+                <a:ea typeface="Aptos" pitchFamily="34" charset="-122"/>
+                <a:cs typeface="Aptos" pitchFamily="34" charset="-120"/>
+              </a:rPr>
+              <a:t>10</a:t>
+            </a:r>
+            <a:endParaRPr lang="en-US" sz="1100" dirty="0"/>
+          </a:p>
+        </p:txBody>
+      </p:sp>
+      <p:sp>
+        <p:nvSpPr>
+          <p:cNvPr id="9" name="Text 7"/>
+          <p:cNvSpPr/>
+          <p:nvPr/>
+        </p:nvSpPr>
+        <p:spPr>
+          <a:xfrm>
+            <a:off x="640080" y="621792"/>
             <a:ext cx="10881360" cy="566928"/>
           </a:xfrm>
           <a:prstGeom prst="rect">
@@ -4203,7 +6176,7 @@
                 <a:ea typeface="Aptos Display" pitchFamily="34" charset="-122"/>
                 <a:cs typeface="Aptos Display" pitchFamily="34" charset="-120"/>
               </a:rPr>
-              <a:t>Practical Exercise</a:t>
+              <a:t>Reflection Questions</a:t>
             </a:r>
             <a:endParaRPr lang="en-US" sz="2700" dirty="0"/>
           </a:p>
@@ -4211,32 +6184,164 @@
       </p:sp>
       <p:sp>
         <p:nvSpPr>
-          <p:cNvPr id="7" name="Text 5"/>
-          <p:cNvSpPr/>
-          <p:nvPr/>
-        </p:nvSpPr>
-        <p:spPr>
-          <a:xfrm>
-            <a:off x="822960" y="1325880"/>
-            <a:ext cx="10378440" cy="4800600"/>
-          </a:xfrm>
-          <a:prstGeom prst="rect">
-            <a:avLst/>
-          </a:prstGeom>
-          <a:noFill/>
-          <a:ln/>
-        </p:spPr>
-        <p:txBody>
-          <a:bodyPr wrap="square" lIns="1016" tIns="1016" rIns="1016" bIns="1016" rtlCol="0" anchor="t">
+          <p:cNvPr id="10" name="Text 8"/>
+          <p:cNvSpPr/>
+          <p:nvPr/>
+        </p:nvSpPr>
+        <p:spPr>
+          <a:xfrm>
+            <a:off x="868680" y="1417320"/>
+            <a:ext cx="6675120" cy="4434840"/>
+          </a:xfrm>
+          <a:prstGeom prst="rect">
+            <a:avLst/>
+          </a:prstGeom>
+          <a:noFill/>
+          <a:ln/>
+        </p:spPr>
+        <p:txBody>
+          <a:bodyPr wrap="square" lIns="635" tIns="635" rIns="635" bIns="635" rtlCol="0" anchor="t">
             <a:normAutofit/>
           </a:bodyPr>
           <a:lstStyle/>
           <a:p>
+            <a:r>
+              <a:rPr lang="en-US" sz="1700" dirty="0">
+                <a:solidFill>
+                  <a:srgbClr val="17364A"/>
+                </a:solidFill>
+                <a:latin typeface="Aptos" pitchFamily="34" charset="0"/>
+                <a:ea typeface="Aptos" pitchFamily="34" charset="-122"/>
+                <a:cs typeface="Aptos" pitchFamily="34" charset="-120"/>
+              </a:rPr>
+              <a:t>Where does this topic appear in one current or proposed AI workflow in your agency?</a:t>
+            </a:r>
+            <a:endParaRPr lang="en-US" sz="1700" dirty="0"/>
+          </a:p>
+          <a:p>
+            <a:r>
+              <a:rPr lang="en-US" sz="1700" dirty="0">
+                <a:solidFill>
+                  <a:srgbClr val="17364A"/>
+                </a:solidFill>
+                <a:latin typeface="Aptos" pitchFamily="34" charset="0"/>
+                <a:ea typeface="Aptos" pitchFamily="34" charset="-122"/>
+                <a:cs typeface="Aptos" pitchFamily="34" charset="-120"/>
+              </a:rPr>
+              <a:t>What decisions, data sources, users, or partners would be affected if this area is poorly designed?</a:t>
+            </a:r>
+            <a:endParaRPr lang="en-US" sz="1700" dirty="0"/>
+          </a:p>
+          <a:p>
+            <a:r>
+              <a:rPr lang="en-US" sz="1700" dirty="0">
+                <a:solidFill>
+                  <a:srgbClr val="17364A"/>
+                </a:solidFill>
+                <a:latin typeface="Aptos" pitchFamily="34" charset="0"/>
+                <a:ea typeface="Aptos" pitchFamily="34" charset="-122"/>
+                <a:cs typeface="Aptos" pitchFamily="34" charset="-120"/>
+              </a:rPr>
+              <a:t>What evidence would governance reviewers need before approving the workflow?</a:t>
+            </a:r>
+            <a:endParaRPr lang="en-US" sz="1700" dirty="0"/>
+          </a:p>
+        </p:txBody>
+      </p:sp>
+      <p:sp>
+        <p:nvSpPr>
+          <p:cNvPr id="11" name="Shape 9"/>
+          <p:cNvSpPr/>
+          <p:nvPr/>
+        </p:nvSpPr>
+        <p:spPr>
+          <a:xfrm>
+            <a:off x="7909560" y="1417320"/>
+            <a:ext cx="3154680" cy="1828800"/>
+          </a:xfrm>
+          <a:prstGeom prst="roundRect">
+            <a:avLst>
+              <a:gd name="adj" fmla="val 6000"/>
+            </a:avLst>
+          </a:prstGeom>
+          <a:solidFill>
+            <a:srgbClr val="EEF8ED"/>
+          </a:solidFill>
+          <a:ln w="12700">
+            <a:solidFill>
+              <a:srgbClr val="B9D7E6"/>
+            </a:solidFill>
+            <a:prstDash val="solid"/>
+          </a:ln>
+        </p:spPr>
+      </p:sp>
+      <p:sp>
+        <p:nvSpPr>
+          <p:cNvPr id="12" name="Text 10"/>
+          <p:cNvSpPr/>
+          <p:nvPr/>
+        </p:nvSpPr>
+        <p:spPr>
+          <a:xfrm>
+            <a:off x="8074152" y="1563624"/>
+            <a:ext cx="2825496" cy="201168"/>
+          </a:xfrm>
+          <a:prstGeom prst="rect">
+            <a:avLst/>
+          </a:prstGeom>
+          <a:noFill/>
+          <a:ln/>
+        </p:spPr>
+        <p:txBody>
+          <a:bodyPr wrap="square" lIns="0" tIns="0" rIns="0" bIns="0" rtlCol="0" anchor="ctr"/>
+          <a:lstStyle/>
+          <a:p>
             <a:pPr indent="0" marL="0">
               <a:buNone/>
             </a:pPr>
             <a:r>
-              <a:rPr lang="en-US" sz="1420" dirty="0">
+              <a:rPr lang="en-US" sz="950" b="1" dirty="0">
+                <a:solidFill>
+                  <a:srgbClr val="0068B7"/>
+                </a:solidFill>
+                <a:latin typeface="Aptos" pitchFamily="34" charset="0"/>
+                <a:ea typeface="Aptos" pitchFamily="34" charset="-122"/>
+                <a:cs typeface="Aptos" pitchFamily="34" charset="-120"/>
+              </a:rPr>
+              <a:t>Key idea</a:t>
+            </a:r>
+            <a:endParaRPr lang="en-US" sz="950" dirty="0"/>
+          </a:p>
+        </p:txBody>
+      </p:sp>
+      <p:sp>
+        <p:nvSpPr>
+          <p:cNvPr id="13" name="Text 11"/>
+          <p:cNvSpPr/>
+          <p:nvPr/>
+        </p:nvSpPr>
+        <p:spPr>
+          <a:xfrm>
+            <a:off x="8074152" y="1856232"/>
+            <a:ext cx="2825496" cy="1261872"/>
+          </a:xfrm>
+          <a:prstGeom prst="rect">
+            <a:avLst/>
+          </a:prstGeom>
+          <a:noFill/>
+          <a:ln/>
+        </p:spPr>
+        <p:txBody>
+          <a:bodyPr wrap="square" lIns="0" tIns="0" rIns="0" bIns="0" rtlCol="0" anchor="t">
+            <a:normAutofit/>
+          </a:bodyPr>
+          <a:lstStyle/>
+          <a:p>
+            <a:pPr indent="0" marL="0">
+              <a:buNone/>
+            </a:pPr>
+            <a:r>
+              <a:rPr lang="en-US" sz="1250" dirty="0">
                 <a:solidFill>
                   <a:srgbClr val="17364A"/>
                 </a:solidFill>
@@ -4244,9 +6349,116 @@
                 <a:ea typeface="Aptos" pitchFamily="34" charset="-122"/>
                 <a:cs typeface="Aptos" pitchFamily="34" charset="-120"/>
               </a:rPr>
-              <a:t>Create a AI business analysis package for one real or realistic public health AI workflow. The artifact should describe the use case, affected users, data sources, system dependencies, risks, guardrails, review points, and unresolved questions. The exercise should produce a work product that could be used in a governance meeting, procurement review, implementation planning session, pilot evaluation, or monitoring review. Learners should document assumptions and identify which staff or partners need to be consulted.</a:t>
-            </a:r>
-            <a:endParaRPr lang="en-US" sz="1420" dirty="0"/>
+              <a:t>Where does this topic appear in one current or proposed AI workflow in your agency?</a:t>
+            </a:r>
+            <a:endParaRPr lang="en-US" sz="1250" dirty="0"/>
+          </a:p>
+        </p:txBody>
+      </p:sp>
+      <p:sp>
+        <p:nvSpPr>
+          <p:cNvPr id="14" name="Shape 12"/>
+          <p:cNvSpPr/>
+          <p:nvPr/>
+        </p:nvSpPr>
+        <p:spPr>
+          <a:xfrm>
+            <a:off x="7909560" y="3520440"/>
+            <a:ext cx="3154680" cy="1737360"/>
+          </a:xfrm>
+          <a:prstGeom prst="roundRect">
+            <a:avLst>
+              <a:gd name="adj" fmla="val 6316"/>
+            </a:avLst>
+          </a:prstGeom>
+          <a:solidFill>
+            <a:srgbClr val="EAF6F8"/>
+          </a:solidFill>
+          <a:ln w="12700">
+            <a:solidFill>
+              <a:srgbClr val="B9D7E6"/>
+            </a:solidFill>
+            <a:prstDash val="solid"/>
+          </a:ln>
+        </p:spPr>
+      </p:sp>
+      <p:sp>
+        <p:nvSpPr>
+          <p:cNvPr id="15" name="Text 13"/>
+          <p:cNvSpPr/>
+          <p:nvPr/>
+        </p:nvSpPr>
+        <p:spPr>
+          <a:xfrm>
+            <a:off x="8074152" y="3666744"/>
+            <a:ext cx="2825496" cy="201168"/>
+          </a:xfrm>
+          <a:prstGeom prst="rect">
+            <a:avLst/>
+          </a:prstGeom>
+          <a:noFill/>
+          <a:ln/>
+        </p:spPr>
+        <p:txBody>
+          <a:bodyPr wrap="square" lIns="0" tIns="0" rIns="0" bIns="0" rtlCol="0" anchor="ctr"/>
+          <a:lstStyle/>
+          <a:p>
+            <a:pPr indent="0" marL="0">
+              <a:buNone/>
+            </a:pPr>
+            <a:r>
+              <a:rPr lang="en-US" sz="950" b="1" dirty="0">
+                <a:solidFill>
+                  <a:srgbClr val="0068B7"/>
+                </a:solidFill>
+                <a:latin typeface="Aptos" pitchFamily="34" charset="0"/>
+                <a:ea typeface="Aptos" pitchFamily="34" charset="-122"/>
+                <a:cs typeface="Aptos" pitchFamily="34" charset="-120"/>
+              </a:rPr>
+              <a:t>Use this for</a:t>
+            </a:r>
+            <a:endParaRPr lang="en-US" sz="950" dirty="0"/>
+          </a:p>
+        </p:txBody>
+      </p:sp>
+      <p:sp>
+        <p:nvSpPr>
+          <p:cNvPr id="16" name="Text 14"/>
+          <p:cNvSpPr/>
+          <p:nvPr/>
+        </p:nvSpPr>
+        <p:spPr>
+          <a:xfrm>
+            <a:off x="8074152" y="3959352"/>
+            <a:ext cx="2825496" cy="1170432"/>
+          </a:xfrm>
+          <a:prstGeom prst="rect">
+            <a:avLst/>
+          </a:prstGeom>
+          <a:noFill/>
+          <a:ln/>
+        </p:spPr>
+        <p:txBody>
+          <a:bodyPr wrap="square" lIns="0" tIns="0" rIns="0" bIns="0" rtlCol="0" anchor="t">
+            <a:normAutofit/>
+          </a:bodyPr>
+          <a:lstStyle/>
+          <a:p>
+            <a:pPr indent="0" marL="0">
+              <a:buNone/>
+            </a:pPr>
+            <a:r>
+              <a:rPr lang="en-US" sz="1250" dirty="0">
+                <a:solidFill>
+                  <a:srgbClr val="17364A"/>
+                </a:solidFill>
+                <a:latin typeface="Aptos" pitchFamily="34" charset="0"/>
+                <a:ea typeface="Aptos" pitchFamily="34" charset="-122"/>
+                <a:cs typeface="Aptos" pitchFamily="34" charset="-120"/>
+              </a:rPr>
+              <a:t>Connect the concept to public health decisions, safeguards, documentation, or implementation work.</a:t>
+            </a:r>
+            <a:endParaRPr lang="en-US" sz="1250" dirty="0"/>
           </a:p>
         </p:txBody>
       </p:sp>
@@ -4309,7 +6521,32 @@
       </p:sp>
       <p:sp>
         <p:nvSpPr>
-          <p:cNvPr id="3" name="Text 1"/>
+          <p:cNvPr id="3" name="Shape 1"/>
+          <p:cNvSpPr/>
+          <p:nvPr/>
+        </p:nvSpPr>
+        <p:spPr>
+          <a:xfrm>
+            <a:off x="0" y="164592"/>
+            <a:ext cx="146304" cy="6693408"/>
+          </a:xfrm>
+          <a:prstGeom prst="rect">
+            <a:avLst/>
+          </a:prstGeom>
+          <a:solidFill>
+            <a:srgbClr val="2F8A28"/>
+          </a:solidFill>
+          <a:ln w="12700">
+            <a:solidFill>
+              <a:srgbClr val="2F8A28"/>
+            </a:solidFill>
+            <a:prstDash val="solid"/>
+          </a:ln>
+        </p:spPr>
+      </p:sp>
+      <p:sp>
+        <p:nvSpPr>
+          <p:cNvPr id="4" name="Text 2"/>
           <p:cNvSpPr/>
           <p:nvPr/>
         </p:nvSpPr>
@@ -4348,7 +6585,7 @@
       </p:sp>
       <p:sp>
         <p:nvSpPr>
-          <p:cNvPr id="4" name="Text 2"/>
+          <p:cNvPr id="5" name="Text 3"/>
           <p:cNvSpPr/>
           <p:nvPr/>
         </p:nvSpPr>
@@ -4387,7 +6624,7 @@
       </p:sp>
       <p:sp>
         <p:nvSpPr>
-          <p:cNvPr id="5" name="Text 3"/>
+          <p:cNvPr id="6" name="Text 4"/>
           <p:cNvSpPr/>
           <p:nvPr/>
         </p:nvSpPr>
@@ -4426,7 +6663,7 @@
       </p:sp>
       <p:sp>
         <p:nvSpPr>
-          <p:cNvPr id="6" name="Text 4"/>
+          <p:cNvPr id="7" name="Text 5"/>
           <p:cNvSpPr/>
           <p:nvPr/>
         </p:nvSpPr>
@@ -4459,7 +6696,7 @@
                 <a:ea typeface="Aptos Display" pitchFamily="34" charset="-122"/>
                 <a:cs typeface="Aptos Display" pitchFamily="34" charset="-120"/>
               </a:rPr>
-              <a:t>Expected Artifact or Evidence</a:t>
+              <a:t>Reflection Questions Continued</a:t>
             </a:r>
             <a:endParaRPr lang="en-US" sz="2700" dirty="0"/>
           </a:p>
@@ -4467,32 +6704,150 @@
       </p:sp>
       <p:sp>
         <p:nvSpPr>
-          <p:cNvPr id="7" name="Text 5"/>
-          <p:cNvSpPr/>
-          <p:nvPr/>
-        </p:nvSpPr>
-        <p:spPr>
-          <a:xfrm>
-            <a:off x="822960" y="1325880"/>
-            <a:ext cx="10378440" cy="4800600"/>
-          </a:xfrm>
-          <a:prstGeom prst="rect">
-            <a:avLst/>
-          </a:prstGeom>
-          <a:noFill/>
-          <a:ln/>
-        </p:spPr>
-        <p:txBody>
-          <a:bodyPr wrap="square" lIns="1016" tIns="1016" rIns="1016" bIns="1016" rtlCol="0" anchor="t">
+          <p:cNvPr id="8" name="Text 6"/>
+          <p:cNvSpPr/>
+          <p:nvPr/>
+        </p:nvSpPr>
+        <p:spPr>
+          <a:xfrm>
+            <a:off x="868680" y="1417320"/>
+            <a:ext cx="6675120" cy="4434840"/>
+          </a:xfrm>
+          <a:prstGeom prst="rect">
+            <a:avLst/>
+          </a:prstGeom>
+          <a:noFill/>
+          <a:ln/>
+        </p:spPr>
+        <p:txBody>
+          <a:bodyPr wrap="square" lIns="635" tIns="635" rIns="635" bIns="635" rtlCol="0" anchor="t">
             <a:normAutofit/>
           </a:bodyPr>
           <a:lstStyle/>
           <a:p>
+            <a:r>
+              <a:rPr lang="en-US" sz="1700" dirty="0">
+                <a:solidFill>
+                  <a:srgbClr val="17364A"/>
+                </a:solidFill>
+                <a:latin typeface="Aptos" pitchFamily="34" charset="0"/>
+                <a:ea typeface="Aptos" pitchFamily="34" charset="-122"/>
+                <a:cs typeface="Aptos" pitchFamily="34" charset="-120"/>
+              </a:rPr>
+              <a:t>Which safeguards should be required before pilot testing?</a:t>
+            </a:r>
+            <a:endParaRPr lang="en-US" sz="1700" dirty="0"/>
+          </a:p>
+          <a:p>
+            <a:r>
+              <a:rPr lang="en-US" sz="1700" dirty="0">
+                <a:solidFill>
+                  <a:srgbClr val="17364A"/>
+                </a:solidFill>
+                <a:latin typeface="Aptos" pitchFamily="34" charset="0"/>
+                <a:ea typeface="Aptos" pitchFamily="34" charset="-122"/>
+                <a:cs typeface="Aptos" pitchFamily="34" charset="-120"/>
+              </a:rPr>
+              <a:t>Who owns ongoing monitoring and review?</a:t>
+            </a:r>
+            <a:endParaRPr lang="en-US" sz="1700" dirty="0"/>
+          </a:p>
+        </p:txBody>
+      </p:sp>
+      <p:sp>
+        <p:nvSpPr>
+          <p:cNvPr id="9" name="Shape 7"/>
+          <p:cNvSpPr/>
+          <p:nvPr/>
+        </p:nvSpPr>
+        <p:spPr>
+          <a:xfrm>
+            <a:off x="7909560" y="1417320"/>
+            <a:ext cx="3154680" cy="1828800"/>
+          </a:xfrm>
+          <a:prstGeom prst="roundRect">
+            <a:avLst>
+              <a:gd name="adj" fmla="val 6000"/>
+            </a:avLst>
+          </a:prstGeom>
+          <a:solidFill>
+            <a:srgbClr val="EEF8ED"/>
+          </a:solidFill>
+          <a:ln w="12700">
+            <a:solidFill>
+              <a:srgbClr val="B9D7E6"/>
+            </a:solidFill>
+            <a:prstDash val="solid"/>
+          </a:ln>
+        </p:spPr>
+      </p:sp>
+      <p:sp>
+        <p:nvSpPr>
+          <p:cNvPr id="10" name="Text 8"/>
+          <p:cNvSpPr/>
+          <p:nvPr/>
+        </p:nvSpPr>
+        <p:spPr>
+          <a:xfrm>
+            <a:off x="8074152" y="1563624"/>
+            <a:ext cx="2825496" cy="201168"/>
+          </a:xfrm>
+          <a:prstGeom prst="rect">
+            <a:avLst/>
+          </a:prstGeom>
+          <a:noFill/>
+          <a:ln/>
+        </p:spPr>
+        <p:txBody>
+          <a:bodyPr wrap="square" lIns="0" tIns="0" rIns="0" bIns="0" rtlCol="0" anchor="ctr"/>
+          <a:lstStyle/>
+          <a:p>
             <a:pPr indent="0" marL="0">
               <a:buNone/>
             </a:pPr>
             <a:r>
-              <a:rPr lang="en-US" sz="1420" dirty="0">
+              <a:rPr lang="en-US" sz="950" b="1" dirty="0">
+                <a:solidFill>
+                  <a:srgbClr val="0068B7"/>
+                </a:solidFill>
+                <a:latin typeface="Aptos" pitchFamily="34" charset="0"/>
+                <a:ea typeface="Aptos" pitchFamily="34" charset="-122"/>
+                <a:cs typeface="Aptos" pitchFamily="34" charset="-120"/>
+              </a:rPr>
+              <a:t>Key idea</a:t>
+            </a:r>
+            <a:endParaRPr lang="en-US" sz="950" dirty="0"/>
+          </a:p>
+        </p:txBody>
+      </p:sp>
+      <p:sp>
+        <p:nvSpPr>
+          <p:cNvPr id="11" name="Text 9"/>
+          <p:cNvSpPr/>
+          <p:nvPr/>
+        </p:nvSpPr>
+        <p:spPr>
+          <a:xfrm>
+            <a:off x="8074152" y="1856232"/>
+            <a:ext cx="2825496" cy="1261872"/>
+          </a:xfrm>
+          <a:prstGeom prst="rect">
+            <a:avLst/>
+          </a:prstGeom>
+          <a:noFill/>
+          <a:ln/>
+        </p:spPr>
+        <p:txBody>
+          <a:bodyPr wrap="square" lIns="0" tIns="0" rIns="0" bIns="0" rtlCol="0" anchor="t">
+            <a:normAutofit/>
+          </a:bodyPr>
+          <a:lstStyle/>
+          <a:p>
+            <a:pPr indent="0" marL="0">
+              <a:buNone/>
+            </a:pPr>
+            <a:r>
+              <a:rPr lang="en-US" sz="1250" dirty="0">
                 <a:solidFill>
                   <a:srgbClr val="17364A"/>
                 </a:solidFill>
@@ -4500,9 +6855,116 @@
                 <a:ea typeface="Aptos" pitchFamily="34" charset="-122"/>
                 <a:cs typeface="Aptos" pitchFamily="34" charset="-120"/>
               </a:rPr>
-              <a:t>The expected artifact is a completed AI business analysis package. It should be specific to a public health workflow and should include technical dependencies, governance questions, human review expectations, monitoring indicators, and unresolved risks.</a:t>
-            </a:r>
-            <a:endParaRPr lang="en-US" sz="1420" dirty="0"/>
+              <a:t>Which safeguards should be required before pilot testing?</a:t>
+            </a:r>
+            <a:endParaRPr lang="en-US" sz="1250" dirty="0"/>
+          </a:p>
+        </p:txBody>
+      </p:sp>
+      <p:sp>
+        <p:nvSpPr>
+          <p:cNvPr id="12" name="Shape 10"/>
+          <p:cNvSpPr/>
+          <p:nvPr/>
+        </p:nvSpPr>
+        <p:spPr>
+          <a:xfrm>
+            <a:off x="7909560" y="3520440"/>
+            <a:ext cx="3154680" cy="1737360"/>
+          </a:xfrm>
+          <a:prstGeom prst="roundRect">
+            <a:avLst>
+              <a:gd name="adj" fmla="val 6316"/>
+            </a:avLst>
+          </a:prstGeom>
+          <a:solidFill>
+            <a:srgbClr val="EAF6F8"/>
+          </a:solidFill>
+          <a:ln w="12700">
+            <a:solidFill>
+              <a:srgbClr val="B9D7E6"/>
+            </a:solidFill>
+            <a:prstDash val="solid"/>
+          </a:ln>
+        </p:spPr>
+      </p:sp>
+      <p:sp>
+        <p:nvSpPr>
+          <p:cNvPr id="13" name="Text 11"/>
+          <p:cNvSpPr/>
+          <p:nvPr/>
+        </p:nvSpPr>
+        <p:spPr>
+          <a:xfrm>
+            <a:off x="8074152" y="3666744"/>
+            <a:ext cx="2825496" cy="201168"/>
+          </a:xfrm>
+          <a:prstGeom prst="rect">
+            <a:avLst/>
+          </a:prstGeom>
+          <a:noFill/>
+          <a:ln/>
+        </p:spPr>
+        <p:txBody>
+          <a:bodyPr wrap="square" lIns="0" tIns="0" rIns="0" bIns="0" rtlCol="0" anchor="ctr"/>
+          <a:lstStyle/>
+          <a:p>
+            <a:pPr indent="0" marL="0">
+              <a:buNone/>
+            </a:pPr>
+            <a:r>
+              <a:rPr lang="en-US" sz="950" b="1" dirty="0">
+                <a:solidFill>
+                  <a:srgbClr val="0068B7"/>
+                </a:solidFill>
+                <a:latin typeface="Aptos" pitchFamily="34" charset="0"/>
+                <a:ea typeface="Aptos" pitchFamily="34" charset="-122"/>
+                <a:cs typeface="Aptos" pitchFamily="34" charset="-120"/>
+              </a:rPr>
+              <a:t>Use this for</a:t>
+            </a:r>
+            <a:endParaRPr lang="en-US" sz="950" dirty="0"/>
+          </a:p>
+        </p:txBody>
+      </p:sp>
+      <p:sp>
+        <p:nvSpPr>
+          <p:cNvPr id="14" name="Text 12"/>
+          <p:cNvSpPr/>
+          <p:nvPr/>
+        </p:nvSpPr>
+        <p:spPr>
+          <a:xfrm>
+            <a:off x="8074152" y="3959352"/>
+            <a:ext cx="2825496" cy="1170432"/>
+          </a:xfrm>
+          <a:prstGeom prst="rect">
+            <a:avLst/>
+          </a:prstGeom>
+          <a:noFill/>
+          <a:ln/>
+        </p:spPr>
+        <p:txBody>
+          <a:bodyPr wrap="square" lIns="0" tIns="0" rIns="0" bIns="0" rtlCol="0" anchor="t">
+            <a:normAutofit/>
+          </a:bodyPr>
+          <a:lstStyle/>
+          <a:p>
+            <a:pPr indent="0" marL="0">
+              <a:buNone/>
+            </a:pPr>
+            <a:r>
+              <a:rPr lang="en-US" sz="1250" dirty="0">
+                <a:solidFill>
+                  <a:srgbClr val="17364A"/>
+                </a:solidFill>
+                <a:latin typeface="Aptos" pitchFamily="34" charset="0"/>
+                <a:ea typeface="Aptos" pitchFamily="34" charset="-122"/>
+                <a:cs typeface="Aptos" pitchFamily="34" charset="-120"/>
+              </a:rPr>
+              <a:t>Connect the concept to public health decisions, safeguards, documentation, or implementation work.</a:t>
+            </a:r>
+            <a:endParaRPr lang="en-US" sz="1250" dirty="0"/>
           </a:p>
         </p:txBody>
       </p:sp>
@@ -4565,7 +7027,32 @@
       </p:sp>
       <p:sp>
         <p:nvSpPr>
-          <p:cNvPr id="3" name="Text 1"/>
+          <p:cNvPr id="3" name="Shape 1"/>
+          <p:cNvSpPr/>
+          <p:nvPr/>
+        </p:nvSpPr>
+        <p:spPr>
+          <a:xfrm>
+            <a:off x="0" y="164592"/>
+            <a:ext cx="146304" cy="6693408"/>
+          </a:xfrm>
+          <a:prstGeom prst="rect">
+            <a:avLst/>
+          </a:prstGeom>
+          <a:solidFill>
+            <a:srgbClr val="2F8A28"/>
+          </a:solidFill>
+          <a:ln w="12700">
+            <a:solidFill>
+              <a:srgbClr val="2F8A28"/>
+            </a:solidFill>
+            <a:prstDash val="solid"/>
+          </a:ln>
+        </p:spPr>
+      </p:sp>
+      <p:sp>
+        <p:nvSpPr>
+          <p:cNvPr id="4" name="Text 2"/>
           <p:cNvSpPr/>
           <p:nvPr/>
         </p:nvSpPr>
@@ -4604,7 +7091,7 @@
       </p:sp>
       <p:sp>
         <p:nvSpPr>
-          <p:cNvPr id="4" name="Text 2"/>
+          <p:cNvPr id="5" name="Text 3"/>
           <p:cNvSpPr/>
           <p:nvPr/>
         </p:nvSpPr>
@@ -4643,7 +7130,7 @@
       </p:sp>
       <p:sp>
         <p:nvSpPr>
-          <p:cNvPr id="5" name="Text 3"/>
+          <p:cNvPr id="6" name="Text 4"/>
           <p:cNvSpPr/>
           <p:nvPr/>
         </p:nvSpPr>
@@ -4682,13 +7169,77 @@
       </p:sp>
       <p:sp>
         <p:nvSpPr>
-          <p:cNvPr id="6" name="Text 4"/>
+          <p:cNvPr id="7" name="Shape 5"/>
           <p:cNvSpPr/>
           <p:nvPr/>
         </p:nvSpPr>
         <p:spPr>
           <a:xfrm>
             <a:off x="640080" y="658368"/>
+            <a:ext cx="420624" cy="420624"/>
+          </a:xfrm>
+          <a:prstGeom prst="ellipse">
+            <a:avLst/>
+          </a:prstGeom>
+          <a:solidFill>
+            <a:srgbClr val="0068B7"/>
+          </a:solidFill>
+          <a:ln w="12700">
+            <a:solidFill>
+              <a:srgbClr val="0068B7"/>
+            </a:solidFill>
+            <a:prstDash val="solid"/>
+          </a:ln>
+        </p:spPr>
+      </p:sp>
+      <p:sp>
+        <p:nvSpPr>
+          <p:cNvPr id="8" name="Text 6"/>
+          <p:cNvSpPr/>
+          <p:nvPr/>
+        </p:nvSpPr>
+        <p:spPr>
+          <a:xfrm>
+            <a:off x="640080" y="731520"/>
+            <a:ext cx="420624" cy="164592"/>
+          </a:xfrm>
+          <a:prstGeom prst="rect">
+            <a:avLst/>
+          </a:prstGeom>
+          <a:noFill/>
+          <a:ln/>
+        </p:spPr>
+        <p:txBody>
+          <a:bodyPr wrap="square" lIns="0" tIns="0" rIns="0" bIns="0" rtlCol="0" anchor="ctr"/>
+          <a:lstStyle/>
+          <a:p>
+            <a:pPr algn="ctr" indent="0" marL="0">
+              <a:buNone/>
+            </a:pPr>
+            <a:r>
+              <a:rPr lang="en-US" sz="1100" b="1" dirty="0">
+                <a:solidFill>
+                  <a:srgbClr val="FFFFFF"/>
+                </a:solidFill>
+                <a:latin typeface="Aptos" pitchFamily="34" charset="0"/>
+                <a:ea typeface="Aptos" pitchFamily="34" charset="-122"/>
+                <a:cs typeface="Aptos" pitchFamily="34" charset="-120"/>
+              </a:rPr>
+              <a:t>11</a:t>
+            </a:r>
+            <a:endParaRPr lang="en-US" sz="1100" dirty="0"/>
+          </a:p>
+        </p:txBody>
+      </p:sp>
+      <p:sp>
+        <p:nvSpPr>
+          <p:cNvPr id="9" name="Text 7"/>
+          <p:cNvSpPr/>
+          <p:nvPr/>
+        </p:nvSpPr>
+        <p:spPr>
+          <a:xfrm>
+            <a:off x="640080" y="621792"/>
             <a:ext cx="10881360" cy="566928"/>
           </a:xfrm>
           <a:prstGeom prst="rect">
@@ -4715,7 +7266,7 @@
                 <a:ea typeface="Aptos Display" pitchFamily="34" charset="-122"/>
                 <a:cs typeface="Aptos Display" pitchFamily="34" charset="-120"/>
               </a:rPr>
-              <a:t>Expected Assignment</a:t>
+              <a:t>Practical Exercise</a:t>
             </a:r>
             <a:endParaRPr lang="en-US" sz="2700" dirty="0"/>
           </a:p>
@@ -4723,14 +7274,14 @@
       </p:sp>
       <p:sp>
         <p:nvSpPr>
-          <p:cNvPr id="7" name="Text 5"/>
-          <p:cNvSpPr/>
-          <p:nvPr/>
-        </p:nvSpPr>
-        <p:spPr>
-          <a:xfrm>
-            <a:off x="822960" y="1325880"/>
-            <a:ext cx="10378440" cy="4800600"/>
+          <p:cNvPr id="10" name="Text 8"/>
+          <p:cNvSpPr/>
+          <p:nvPr/>
+        </p:nvSpPr>
+        <p:spPr>
+          <a:xfrm>
+            <a:off x="868680" y="1417320"/>
+            <a:ext cx="6675120" cy="4434840"/>
           </a:xfrm>
           <a:prstGeom prst="rect">
             <a:avLst/>
@@ -4745,7 +7296,7 @@
           <a:lstStyle/>
           <a:p>
             <a:r>
-              <a:rPr lang="en-US" sz="1450" dirty="0">
+              <a:rPr lang="en-US" sz="1700" dirty="0">
                 <a:solidFill>
                   <a:srgbClr val="17364A"/>
                 </a:solidFill>
@@ -4753,9 +7304,265 @@
                 <a:ea typeface="Aptos" pitchFamily="34" charset="-122"/>
                 <a:cs typeface="Aptos" pitchFamily="34" charset="-120"/>
               </a:rPr>
-              <a:t>The expected artifact is a completed AI business analysis package. It should be specific to a public health workflow and should include technical dependencies, governance questions, human review expectations, monitoring indicators, and unresolved.</a:t>
-            </a:r>
-            <a:endParaRPr lang="en-US" sz="1450" dirty="0"/>
+              <a:t>Create a AI business analysis package for one real or realistic public health AI workflow.</a:t>
+            </a:r>
+            <a:endParaRPr lang="en-US" sz="1700" dirty="0"/>
+          </a:p>
+          <a:p>
+            <a:r>
+              <a:rPr lang="en-US" sz="1700" dirty="0">
+                <a:solidFill>
+                  <a:srgbClr val="17364A"/>
+                </a:solidFill>
+                <a:latin typeface="Aptos" pitchFamily="34" charset="0"/>
+                <a:ea typeface="Aptos" pitchFamily="34" charset="-122"/>
+                <a:cs typeface="Aptos" pitchFamily="34" charset="-120"/>
+              </a:rPr>
+              <a:t>The artifact should describe the use case, affected users, data sources, system dependencies, risks, guardrails, review.</a:t>
+            </a:r>
+            <a:endParaRPr lang="en-US" sz="1700" dirty="0"/>
+          </a:p>
+          <a:p>
+            <a:r>
+              <a:rPr lang="en-US" sz="1700" dirty="0">
+                <a:solidFill>
+                  <a:srgbClr val="17364A"/>
+                </a:solidFill>
+                <a:latin typeface="Aptos" pitchFamily="34" charset="0"/>
+                <a:ea typeface="Aptos" pitchFamily="34" charset="-122"/>
+                <a:cs typeface="Aptos" pitchFamily="34" charset="-120"/>
+              </a:rPr>
+              <a:t>The exercise should produce a work product that could be used in a governance meeting, procurement review, implementation.</a:t>
+            </a:r>
+            <a:endParaRPr lang="en-US" sz="1700" dirty="0"/>
+          </a:p>
+          <a:p>
+            <a:r>
+              <a:rPr lang="en-US" sz="1700" dirty="0">
+                <a:solidFill>
+                  <a:srgbClr val="17364A"/>
+                </a:solidFill>
+                <a:latin typeface="Aptos" pitchFamily="34" charset="0"/>
+                <a:ea typeface="Aptos" pitchFamily="34" charset="-122"/>
+                <a:cs typeface="Aptos" pitchFamily="34" charset="-120"/>
+              </a:rPr>
+              <a:t>Learners should document assumptions and identify which staff or partners need to be consulted.</a:t>
+            </a:r>
+            <a:endParaRPr lang="en-US" sz="1700" dirty="0"/>
+          </a:p>
+        </p:txBody>
+      </p:sp>
+      <p:sp>
+        <p:nvSpPr>
+          <p:cNvPr id="11" name="Shape 9"/>
+          <p:cNvSpPr/>
+          <p:nvPr/>
+        </p:nvSpPr>
+        <p:spPr>
+          <a:xfrm>
+            <a:off x="7909560" y="1417320"/>
+            <a:ext cx="3154680" cy="1828800"/>
+          </a:xfrm>
+          <a:prstGeom prst="roundRect">
+            <a:avLst>
+              <a:gd name="adj" fmla="val 6000"/>
+            </a:avLst>
+          </a:prstGeom>
+          <a:solidFill>
+            <a:srgbClr val="EEF8ED"/>
+          </a:solidFill>
+          <a:ln w="12700">
+            <a:solidFill>
+              <a:srgbClr val="B9D7E6"/>
+            </a:solidFill>
+            <a:prstDash val="solid"/>
+          </a:ln>
+        </p:spPr>
+      </p:sp>
+      <p:sp>
+        <p:nvSpPr>
+          <p:cNvPr id="12" name="Text 10"/>
+          <p:cNvSpPr/>
+          <p:nvPr/>
+        </p:nvSpPr>
+        <p:spPr>
+          <a:xfrm>
+            <a:off x="8074152" y="1563624"/>
+            <a:ext cx="2825496" cy="201168"/>
+          </a:xfrm>
+          <a:prstGeom prst="rect">
+            <a:avLst/>
+          </a:prstGeom>
+          <a:noFill/>
+          <a:ln/>
+        </p:spPr>
+        <p:txBody>
+          <a:bodyPr wrap="square" lIns="0" tIns="0" rIns="0" bIns="0" rtlCol="0" anchor="ctr"/>
+          <a:lstStyle/>
+          <a:p>
+            <a:pPr indent="0" marL="0">
+              <a:buNone/>
+            </a:pPr>
+            <a:r>
+              <a:rPr lang="en-US" sz="950" b="1" dirty="0">
+                <a:solidFill>
+                  <a:srgbClr val="0068B7"/>
+                </a:solidFill>
+                <a:latin typeface="Aptos" pitchFamily="34" charset="0"/>
+                <a:ea typeface="Aptos" pitchFamily="34" charset="-122"/>
+                <a:cs typeface="Aptos" pitchFamily="34" charset="-120"/>
+              </a:rPr>
+              <a:t>Key idea</a:t>
+            </a:r>
+            <a:endParaRPr lang="en-US" sz="950" dirty="0"/>
+          </a:p>
+        </p:txBody>
+      </p:sp>
+      <p:sp>
+        <p:nvSpPr>
+          <p:cNvPr id="13" name="Text 11"/>
+          <p:cNvSpPr/>
+          <p:nvPr/>
+        </p:nvSpPr>
+        <p:spPr>
+          <a:xfrm>
+            <a:off x="8074152" y="1856232"/>
+            <a:ext cx="2825496" cy="1261872"/>
+          </a:xfrm>
+          <a:prstGeom prst="rect">
+            <a:avLst/>
+          </a:prstGeom>
+          <a:noFill/>
+          <a:ln/>
+        </p:spPr>
+        <p:txBody>
+          <a:bodyPr wrap="square" lIns="0" tIns="0" rIns="0" bIns="0" rtlCol="0" anchor="t">
+            <a:normAutofit/>
+          </a:bodyPr>
+          <a:lstStyle/>
+          <a:p>
+            <a:pPr indent="0" marL="0">
+              <a:buNone/>
+            </a:pPr>
+            <a:r>
+              <a:rPr lang="en-US" sz="1250" dirty="0">
+                <a:solidFill>
+                  <a:srgbClr val="17364A"/>
+                </a:solidFill>
+                <a:latin typeface="Aptos" pitchFamily="34" charset="0"/>
+                <a:ea typeface="Aptos" pitchFamily="34" charset="-122"/>
+                <a:cs typeface="Aptos" pitchFamily="34" charset="-120"/>
+              </a:rPr>
+              <a:t>Create a AI business analysis package for one real or realistic public health AI workflow.</a:t>
+            </a:r>
+            <a:endParaRPr lang="en-US" sz="1250" dirty="0"/>
+          </a:p>
+        </p:txBody>
+      </p:sp>
+      <p:sp>
+        <p:nvSpPr>
+          <p:cNvPr id="14" name="Shape 12"/>
+          <p:cNvSpPr/>
+          <p:nvPr/>
+        </p:nvSpPr>
+        <p:spPr>
+          <a:xfrm>
+            <a:off x="7909560" y="3520440"/>
+            <a:ext cx="3154680" cy="1737360"/>
+          </a:xfrm>
+          <a:prstGeom prst="roundRect">
+            <a:avLst>
+              <a:gd name="adj" fmla="val 6316"/>
+            </a:avLst>
+          </a:prstGeom>
+          <a:solidFill>
+            <a:srgbClr val="EAF6F8"/>
+          </a:solidFill>
+          <a:ln w="12700">
+            <a:solidFill>
+              <a:srgbClr val="B9D7E6"/>
+            </a:solidFill>
+            <a:prstDash val="solid"/>
+          </a:ln>
+        </p:spPr>
+      </p:sp>
+      <p:sp>
+        <p:nvSpPr>
+          <p:cNvPr id="15" name="Text 13"/>
+          <p:cNvSpPr/>
+          <p:nvPr/>
+        </p:nvSpPr>
+        <p:spPr>
+          <a:xfrm>
+            <a:off x="8074152" y="3666744"/>
+            <a:ext cx="2825496" cy="201168"/>
+          </a:xfrm>
+          <a:prstGeom prst="rect">
+            <a:avLst/>
+          </a:prstGeom>
+          <a:noFill/>
+          <a:ln/>
+        </p:spPr>
+        <p:txBody>
+          <a:bodyPr wrap="square" lIns="0" tIns="0" rIns="0" bIns="0" rtlCol="0" anchor="ctr"/>
+          <a:lstStyle/>
+          <a:p>
+            <a:pPr indent="0" marL="0">
+              <a:buNone/>
+            </a:pPr>
+            <a:r>
+              <a:rPr lang="en-US" sz="950" b="1" dirty="0">
+                <a:solidFill>
+                  <a:srgbClr val="0068B7"/>
+                </a:solidFill>
+                <a:latin typeface="Aptos" pitchFamily="34" charset="0"/>
+                <a:ea typeface="Aptos" pitchFamily="34" charset="-122"/>
+                <a:cs typeface="Aptos" pitchFamily="34" charset="-120"/>
+              </a:rPr>
+              <a:t>Use this for</a:t>
+            </a:r>
+            <a:endParaRPr lang="en-US" sz="950" dirty="0"/>
+          </a:p>
+        </p:txBody>
+      </p:sp>
+      <p:sp>
+        <p:nvSpPr>
+          <p:cNvPr id="16" name="Text 14"/>
+          <p:cNvSpPr/>
+          <p:nvPr/>
+        </p:nvSpPr>
+        <p:spPr>
+          <a:xfrm>
+            <a:off x="8074152" y="3959352"/>
+            <a:ext cx="2825496" cy="1170432"/>
+          </a:xfrm>
+          <a:prstGeom prst="rect">
+            <a:avLst/>
+          </a:prstGeom>
+          <a:noFill/>
+          <a:ln/>
+        </p:spPr>
+        <p:txBody>
+          <a:bodyPr wrap="square" lIns="0" tIns="0" rIns="0" bIns="0" rtlCol="0" anchor="t">
+            <a:normAutofit/>
+          </a:bodyPr>
+          <a:lstStyle/>
+          <a:p>
+            <a:pPr indent="0" marL="0">
+              <a:buNone/>
+            </a:pPr>
+            <a:r>
+              <a:rPr lang="en-US" sz="1250" dirty="0">
+                <a:solidFill>
+                  <a:srgbClr val="17364A"/>
+                </a:solidFill>
+                <a:latin typeface="Aptos" pitchFamily="34" charset="0"/>
+                <a:ea typeface="Aptos" pitchFamily="34" charset="-122"/>
+                <a:cs typeface="Aptos" pitchFamily="34" charset="-120"/>
+              </a:rPr>
+              <a:t>Connect the concept to public health decisions, safeguards, documentation, or implementation work.</a:t>
+            </a:r>
+            <a:endParaRPr lang="en-US" sz="1250" dirty="0"/>
           </a:p>
         </p:txBody>
       </p:sp>
@@ -4818,7 +7625,32 @@
       </p:sp>
       <p:sp>
         <p:nvSpPr>
-          <p:cNvPr id="3" name="Text 1"/>
+          <p:cNvPr id="3" name="Shape 1"/>
+          <p:cNvSpPr/>
+          <p:nvPr/>
+        </p:nvSpPr>
+        <p:spPr>
+          <a:xfrm>
+            <a:off x="0" y="164592"/>
+            <a:ext cx="146304" cy="6693408"/>
+          </a:xfrm>
+          <a:prstGeom prst="rect">
+            <a:avLst/>
+          </a:prstGeom>
+          <a:solidFill>
+            <a:srgbClr val="2F8A28"/>
+          </a:solidFill>
+          <a:ln w="12700">
+            <a:solidFill>
+              <a:srgbClr val="2F8A28"/>
+            </a:solidFill>
+            <a:prstDash val="solid"/>
+          </a:ln>
+        </p:spPr>
+      </p:sp>
+      <p:sp>
+        <p:nvSpPr>
+          <p:cNvPr id="4" name="Text 2"/>
           <p:cNvSpPr/>
           <p:nvPr/>
         </p:nvSpPr>
@@ -4857,7 +7689,7 @@
       </p:sp>
       <p:sp>
         <p:nvSpPr>
-          <p:cNvPr id="4" name="Text 2"/>
+          <p:cNvPr id="5" name="Text 3"/>
           <p:cNvSpPr/>
           <p:nvPr/>
         </p:nvSpPr>
@@ -4896,7 +7728,7 @@
       </p:sp>
       <p:sp>
         <p:nvSpPr>
-          <p:cNvPr id="5" name="Text 3"/>
+          <p:cNvPr id="6" name="Text 4"/>
           <p:cNvSpPr/>
           <p:nvPr/>
         </p:nvSpPr>
@@ -4935,13 +7767,77 @@
       </p:sp>
       <p:sp>
         <p:nvSpPr>
-          <p:cNvPr id="6" name="Text 4"/>
+          <p:cNvPr id="7" name="Shape 5"/>
           <p:cNvSpPr/>
           <p:nvPr/>
         </p:nvSpPr>
         <p:spPr>
           <a:xfrm>
             <a:off x="640080" y="658368"/>
+            <a:ext cx="420624" cy="420624"/>
+          </a:xfrm>
+          <a:prstGeom prst="ellipse">
+            <a:avLst/>
+          </a:prstGeom>
+          <a:solidFill>
+            <a:srgbClr val="0068B7"/>
+          </a:solidFill>
+          <a:ln w="12700">
+            <a:solidFill>
+              <a:srgbClr val="0068B7"/>
+            </a:solidFill>
+            <a:prstDash val="solid"/>
+          </a:ln>
+        </p:spPr>
+      </p:sp>
+      <p:sp>
+        <p:nvSpPr>
+          <p:cNvPr id="8" name="Text 6"/>
+          <p:cNvSpPr/>
+          <p:nvPr/>
+        </p:nvSpPr>
+        <p:spPr>
+          <a:xfrm>
+            <a:off x="640080" y="731520"/>
+            <a:ext cx="420624" cy="164592"/>
+          </a:xfrm>
+          <a:prstGeom prst="rect">
+            <a:avLst/>
+          </a:prstGeom>
+          <a:noFill/>
+          <a:ln/>
+        </p:spPr>
+        <p:txBody>
+          <a:bodyPr wrap="square" lIns="0" tIns="0" rIns="0" bIns="0" rtlCol="0" anchor="ctr"/>
+          <a:lstStyle/>
+          <a:p>
+            <a:pPr algn="ctr" indent="0" marL="0">
+              <a:buNone/>
+            </a:pPr>
+            <a:r>
+              <a:rPr lang="en-US" sz="1100" b="1" dirty="0">
+                <a:solidFill>
+                  <a:srgbClr val="FFFFFF"/>
+                </a:solidFill>
+                <a:latin typeface="Aptos" pitchFamily="34" charset="0"/>
+                <a:ea typeface="Aptos" pitchFamily="34" charset="-122"/>
+                <a:cs typeface="Aptos" pitchFamily="34" charset="-120"/>
+              </a:rPr>
+              <a:t>12</a:t>
+            </a:r>
+            <a:endParaRPr lang="en-US" sz="1100" dirty="0"/>
+          </a:p>
+        </p:txBody>
+      </p:sp>
+      <p:sp>
+        <p:nvSpPr>
+          <p:cNvPr id="9" name="Text 7"/>
+          <p:cNvSpPr/>
+          <p:nvPr/>
+        </p:nvSpPr>
+        <p:spPr>
+          <a:xfrm>
+            <a:off x="640080" y="621792"/>
             <a:ext cx="10881360" cy="566928"/>
           </a:xfrm>
           <a:prstGeom prst="rect">
@@ -4968,7 +7864,7 @@
                 <a:ea typeface="Aptos Display" pitchFamily="34" charset="-122"/>
                 <a:cs typeface="Aptos Display" pitchFamily="34" charset="-120"/>
               </a:rPr>
-              <a:t>Knowledge Check</a:t>
+              <a:t>Expected Artifact or Evidence</a:t>
             </a:r>
             <a:endParaRPr lang="en-US" sz="2700" dirty="0"/>
           </a:p>
@@ -4976,14 +7872,14 @@
       </p:sp>
       <p:sp>
         <p:nvSpPr>
-          <p:cNvPr id="7" name="Text 5"/>
-          <p:cNvSpPr/>
-          <p:nvPr/>
-        </p:nvSpPr>
-        <p:spPr>
-          <a:xfrm>
-            <a:off x="822960" y="1325880"/>
-            <a:ext cx="10378440" cy="4800600"/>
+          <p:cNvPr id="10" name="Text 8"/>
+          <p:cNvSpPr/>
+          <p:nvPr/>
+        </p:nvSpPr>
+        <p:spPr>
+          <a:xfrm>
+            <a:off x="868680" y="1417320"/>
+            <a:ext cx="6675120" cy="4434840"/>
           </a:xfrm>
           <a:prstGeom prst="rect">
             <a:avLst/>
@@ -4998,7 +7894,7 @@
           <a:lstStyle/>
           <a:p>
             <a:r>
-              <a:rPr lang="en-US" sz="1450" dirty="0">
+              <a:rPr lang="en-US" sz="1700" dirty="0">
                 <a:solidFill>
                   <a:srgbClr val="17364A"/>
                 </a:solidFill>
@@ -5006,13 +7902,13 @@
                 <a:ea typeface="Aptos" pitchFamily="34" charset="-122"/>
                 <a:cs typeface="Aptos" pitchFamily="34" charset="-120"/>
               </a:rPr>
-              <a:t>1. What is the best reason to address business analysis for ai-enabled public health systems before deployment?</a:t>
-            </a:r>
-            <a:endParaRPr lang="en-US" sz="1450" dirty="0"/>
-          </a:p>
-          <a:p>
-            <a:r>
-              <a:rPr lang="en-US" sz="1450" dirty="0">
+              <a:t>The expected artifact is a completed AI business analysis package.</a:t>
+            </a:r>
+            <a:endParaRPr lang="en-US" sz="1700" dirty="0"/>
+          </a:p>
+          <a:p>
+            <a:r>
+              <a:rPr lang="en-US" sz="1700" dirty="0">
                 <a:solidFill>
                   <a:srgbClr val="17364A"/>
                 </a:solidFill>
@@ -5020,13 +7916,106 @@
                 <a:ea typeface="Aptos" pitchFamily="34" charset="-122"/>
                 <a:cs typeface="Aptos" pitchFamily="34" charset="-120"/>
               </a:rPr>
-              <a:t>2. Which practice best supports responsible implementation?</a:t>
-            </a:r>
-            <a:endParaRPr lang="en-US" sz="1450" dirty="0"/>
-          </a:p>
-          <a:p>
-            <a:r>
-              <a:rPr lang="en-US" sz="1450" dirty="0">
+              <a:t>It should be specific to a public health workflow and should include technical dependencies, governance questions, human.</a:t>
+            </a:r>
+            <a:endParaRPr lang="en-US" sz="1700" dirty="0"/>
+          </a:p>
+        </p:txBody>
+      </p:sp>
+      <p:sp>
+        <p:nvSpPr>
+          <p:cNvPr id="11" name="Shape 9"/>
+          <p:cNvSpPr/>
+          <p:nvPr/>
+        </p:nvSpPr>
+        <p:spPr>
+          <a:xfrm>
+            <a:off x="7909560" y="1417320"/>
+            <a:ext cx="3154680" cy="1828800"/>
+          </a:xfrm>
+          <a:prstGeom prst="roundRect">
+            <a:avLst>
+              <a:gd name="adj" fmla="val 6000"/>
+            </a:avLst>
+          </a:prstGeom>
+          <a:solidFill>
+            <a:srgbClr val="EEF8ED"/>
+          </a:solidFill>
+          <a:ln w="12700">
+            <a:solidFill>
+              <a:srgbClr val="B9D7E6"/>
+            </a:solidFill>
+            <a:prstDash val="solid"/>
+          </a:ln>
+        </p:spPr>
+      </p:sp>
+      <p:sp>
+        <p:nvSpPr>
+          <p:cNvPr id="12" name="Text 10"/>
+          <p:cNvSpPr/>
+          <p:nvPr/>
+        </p:nvSpPr>
+        <p:spPr>
+          <a:xfrm>
+            <a:off x="8074152" y="1563624"/>
+            <a:ext cx="2825496" cy="201168"/>
+          </a:xfrm>
+          <a:prstGeom prst="rect">
+            <a:avLst/>
+          </a:prstGeom>
+          <a:noFill/>
+          <a:ln/>
+        </p:spPr>
+        <p:txBody>
+          <a:bodyPr wrap="square" lIns="0" tIns="0" rIns="0" bIns="0" rtlCol="0" anchor="ctr"/>
+          <a:lstStyle/>
+          <a:p>
+            <a:pPr indent="0" marL="0">
+              <a:buNone/>
+            </a:pPr>
+            <a:r>
+              <a:rPr lang="en-US" sz="950" b="1" dirty="0">
+                <a:solidFill>
+                  <a:srgbClr val="0068B7"/>
+                </a:solidFill>
+                <a:latin typeface="Aptos" pitchFamily="34" charset="0"/>
+                <a:ea typeface="Aptos" pitchFamily="34" charset="-122"/>
+                <a:cs typeface="Aptos" pitchFamily="34" charset="-120"/>
+              </a:rPr>
+              <a:t>Key idea</a:t>
+            </a:r>
+            <a:endParaRPr lang="en-US" sz="950" dirty="0"/>
+          </a:p>
+        </p:txBody>
+      </p:sp>
+      <p:sp>
+        <p:nvSpPr>
+          <p:cNvPr id="13" name="Text 11"/>
+          <p:cNvSpPr/>
+          <p:nvPr/>
+        </p:nvSpPr>
+        <p:spPr>
+          <a:xfrm>
+            <a:off x="8074152" y="1856232"/>
+            <a:ext cx="2825496" cy="1261872"/>
+          </a:xfrm>
+          <a:prstGeom prst="rect">
+            <a:avLst/>
+          </a:prstGeom>
+          <a:noFill/>
+          <a:ln/>
+        </p:spPr>
+        <p:txBody>
+          <a:bodyPr wrap="square" lIns="0" tIns="0" rIns="0" bIns="0" rtlCol="0" anchor="t">
+            <a:normAutofit/>
+          </a:bodyPr>
+          <a:lstStyle/>
+          <a:p>
+            <a:pPr indent="0" marL="0">
+              <a:buNone/>
+            </a:pPr>
+            <a:r>
+              <a:rPr lang="en-US" sz="1250" dirty="0">
                 <a:solidFill>
                   <a:srgbClr val="17364A"/>
                 </a:solidFill>
@@ -5034,13 +8023,106 @@
                 <a:ea typeface="Aptos" pitchFamily="34" charset="-122"/>
                 <a:cs typeface="Aptos" pitchFamily="34" charset="-120"/>
               </a:rPr>
-              <a:t>3. Which statement best describes a common failure mode?</a:t>
-            </a:r>
-            <a:endParaRPr lang="en-US" sz="1450" dirty="0"/>
-          </a:p>
-          <a:p>
-            <a:r>
-              <a:rPr lang="en-US" sz="1450" dirty="0">
+              <a:t>The expected artifact is a completed AI business analysis package.</a:t>
+            </a:r>
+            <a:endParaRPr lang="en-US" sz="1250" dirty="0"/>
+          </a:p>
+        </p:txBody>
+      </p:sp>
+      <p:sp>
+        <p:nvSpPr>
+          <p:cNvPr id="14" name="Shape 12"/>
+          <p:cNvSpPr/>
+          <p:nvPr/>
+        </p:nvSpPr>
+        <p:spPr>
+          <a:xfrm>
+            <a:off x="7909560" y="3520440"/>
+            <a:ext cx="3154680" cy="1737360"/>
+          </a:xfrm>
+          <a:prstGeom prst="roundRect">
+            <a:avLst>
+              <a:gd name="adj" fmla="val 6316"/>
+            </a:avLst>
+          </a:prstGeom>
+          <a:solidFill>
+            <a:srgbClr val="EAF6F8"/>
+          </a:solidFill>
+          <a:ln w="12700">
+            <a:solidFill>
+              <a:srgbClr val="B9D7E6"/>
+            </a:solidFill>
+            <a:prstDash val="solid"/>
+          </a:ln>
+        </p:spPr>
+      </p:sp>
+      <p:sp>
+        <p:nvSpPr>
+          <p:cNvPr id="15" name="Text 13"/>
+          <p:cNvSpPr/>
+          <p:nvPr/>
+        </p:nvSpPr>
+        <p:spPr>
+          <a:xfrm>
+            <a:off x="8074152" y="3666744"/>
+            <a:ext cx="2825496" cy="201168"/>
+          </a:xfrm>
+          <a:prstGeom prst="rect">
+            <a:avLst/>
+          </a:prstGeom>
+          <a:noFill/>
+          <a:ln/>
+        </p:spPr>
+        <p:txBody>
+          <a:bodyPr wrap="square" lIns="0" tIns="0" rIns="0" bIns="0" rtlCol="0" anchor="ctr"/>
+          <a:lstStyle/>
+          <a:p>
+            <a:pPr indent="0" marL="0">
+              <a:buNone/>
+            </a:pPr>
+            <a:r>
+              <a:rPr lang="en-US" sz="950" b="1" dirty="0">
+                <a:solidFill>
+                  <a:srgbClr val="0068B7"/>
+                </a:solidFill>
+                <a:latin typeface="Aptos" pitchFamily="34" charset="0"/>
+                <a:ea typeface="Aptos" pitchFamily="34" charset="-122"/>
+                <a:cs typeface="Aptos" pitchFamily="34" charset="-120"/>
+              </a:rPr>
+              <a:t>Use this for</a:t>
+            </a:r>
+            <a:endParaRPr lang="en-US" sz="950" dirty="0"/>
+          </a:p>
+        </p:txBody>
+      </p:sp>
+      <p:sp>
+        <p:nvSpPr>
+          <p:cNvPr id="16" name="Text 14"/>
+          <p:cNvSpPr/>
+          <p:nvPr/>
+        </p:nvSpPr>
+        <p:spPr>
+          <a:xfrm>
+            <a:off x="8074152" y="3959352"/>
+            <a:ext cx="2825496" cy="1170432"/>
+          </a:xfrm>
+          <a:prstGeom prst="rect">
+            <a:avLst/>
+          </a:prstGeom>
+          <a:noFill/>
+          <a:ln/>
+        </p:spPr>
+        <p:txBody>
+          <a:bodyPr wrap="square" lIns="0" tIns="0" rIns="0" bIns="0" rtlCol="0" anchor="t">
+            <a:normAutofit/>
+          </a:bodyPr>
+          <a:lstStyle/>
+          <a:p>
+            <a:pPr indent="0" marL="0">
+              <a:buNone/>
+            </a:pPr>
+            <a:r>
+              <a:rPr lang="en-US" sz="1250" dirty="0">
                 <a:solidFill>
                   <a:srgbClr val="17364A"/>
                 </a:solidFill>
@@ -5048,23 +8130,9 @@
                 <a:ea typeface="Aptos" pitchFamily="34" charset="-122"/>
                 <a:cs typeface="Aptos" pitchFamily="34" charset="-120"/>
               </a:rPr>
-              <a:t>4. What should be included in the practical artifact for this module?</a:t>
-            </a:r>
-            <a:endParaRPr lang="en-US" sz="1450" dirty="0"/>
-          </a:p>
-          <a:p>
-            <a:r>
-              <a:rPr lang="en-US" sz="1450" dirty="0">
-                <a:solidFill>
-                  <a:srgbClr val="17364A"/>
-                </a:solidFill>
-                <a:latin typeface="Aptos" pitchFamily="34" charset="0"/>
-                <a:ea typeface="Aptos" pitchFamily="34" charset="-122"/>
-                <a:cs typeface="Aptos" pitchFamily="34" charset="-120"/>
-              </a:rPr>
-              <a:t>5. When should the issue be escalated for governance or leadership review?</a:t>
-            </a:r>
-            <a:endParaRPr lang="en-US" sz="1450" dirty="0"/>
+              <a:t>Connect the concept to public health decisions, safeguards, documentation, or implementation work.</a:t>
+            </a:r>
+            <a:endParaRPr lang="en-US" sz="1250" dirty="0"/>
           </a:p>
         </p:txBody>
       </p:sp>
@@ -5127,7 +8195,32 @@
       </p:sp>
       <p:sp>
         <p:nvSpPr>
-          <p:cNvPr id="3" name="Text 1"/>
+          <p:cNvPr id="3" name="Shape 1"/>
+          <p:cNvSpPr/>
+          <p:nvPr/>
+        </p:nvSpPr>
+        <p:spPr>
+          <a:xfrm>
+            <a:off x="0" y="164592"/>
+            <a:ext cx="146304" cy="6693408"/>
+          </a:xfrm>
+          <a:prstGeom prst="rect">
+            <a:avLst/>
+          </a:prstGeom>
+          <a:solidFill>
+            <a:srgbClr val="2F8A28"/>
+          </a:solidFill>
+          <a:ln w="12700">
+            <a:solidFill>
+              <a:srgbClr val="2F8A28"/>
+            </a:solidFill>
+            <a:prstDash val="solid"/>
+          </a:ln>
+        </p:spPr>
+      </p:sp>
+      <p:sp>
+        <p:nvSpPr>
+          <p:cNvPr id="4" name="Text 2"/>
           <p:cNvSpPr/>
           <p:nvPr/>
         </p:nvSpPr>
@@ -5166,7 +8259,7 @@
       </p:sp>
       <p:sp>
         <p:nvSpPr>
-          <p:cNvPr id="4" name="Text 2"/>
+          <p:cNvPr id="5" name="Text 3"/>
           <p:cNvSpPr/>
           <p:nvPr/>
         </p:nvSpPr>
@@ -5205,7 +8298,7 @@
       </p:sp>
       <p:sp>
         <p:nvSpPr>
-          <p:cNvPr id="5" name="Text 3"/>
+          <p:cNvPr id="6" name="Text 4"/>
           <p:cNvSpPr/>
           <p:nvPr/>
         </p:nvSpPr>
@@ -5244,13 +8337,77 @@
       </p:sp>
       <p:sp>
         <p:nvSpPr>
-          <p:cNvPr id="6" name="Text 4"/>
+          <p:cNvPr id="7" name="Shape 5"/>
           <p:cNvSpPr/>
           <p:nvPr/>
         </p:nvSpPr>
         <p:spPr>
           <a:xfrm>
             <a:off x="640080" y="658368"/>
+            <a:ext cx="420624" cy="420624"/>
+          </a:xfrm>
+          <a:prstGeom prst="ellipse">
+            <a:avLst/>
+          </a:prstGeom>
+          <a:solidFill>
+            <a:srgbClr val="0068B7"/>
+          </a:solidFill>
+          <a:ln w="12700">
+            <a:solidFill>
+              <a:srgbClr val="0068B7"/>
+            </a:solidFill>
+            <a:prstDash val="solid"/>
+          </a:ln>
+        </p:spPr>
+      </p:sp>
+      <p:sp>
+        <p:nvSpPr>
+          <p:cNvPr id="8" name="Text 6"/>
+          <p:cNvSpPr/>
+          <p:nvPr/>
+        </p:nvSpPr>
+        <p:spPr>
+          <a:xfrm>
+            <a:off x="640080" y="731520"/>
+            <a:ext cx="420624" cy="164592"/>
+          </a:xfrm>
+          <a:prstGeom prst="rect">
+            <a:avLst/>
+          </a:prstGeom>
+          <a:noFill/>
+          <a:ln/>
+        </p:spPr>
+        <p:txBody>
+          <a:bodyPr wrap="square" lIns="0" tIns="0" rIns="0" bIns="0" rtlCol="0" anchor="ctr"/>
+          <a:lstStyle/>
+          <a:p>
+            <a:pPr algn="ctr" indent="0" marL="0">
+              <a:buNone/>
+            </a:pPr>
+            <a:r>
+              <a:rPr lang="en-US" sz="1100" b="1" dirty="0">
+                <a:solidFill>
+                  <a:srgbClr val="FFFFFF"/>
+                </a:solidFill>
+                <a:latin typeface="Aptos" pitchFamily="34" charset="0"/>
+                <a:ea typeface="Aptos" pitchFamily="34" charset="-122"/>
+                <a:cs typeface="Aptos" pitchFamily="34" charset="-120"/>
+              </a:rPr>
+              <a:t>13</a:t>
+            </a:r>
+            <a:endParaRPr lang="en-US" sz="1100" dirty="0"/>
+          </a:p>
+        </p:txBody>
+      </p:sp>
+      <p:sp>
+        <p:nvSpPr>
+          <p:cNvPr id="9" name="Text 7"/>
+          <p:cNvSpPr/>
+          <p:nvPr/>
+        </p:nvSpPr>
+        <p:spPr>
+          <a:xfrm>
+            <a:off x="640080" y="621792"/>
             <a:ext cx="10881360" cy="566928"/>
           </a:xfrm>
           <a:prstGeom prst="rect">
@@ -5277,7 +8434,7 @@
                 <a:ea typeface="Aptos Display" pitchFamily="34" charset="-122"/>
                 <a:cs typeface="Aptos Display" pitchFamily="34" charset="-120"/>
               </a:rPr>
-              <a:t>References and Resources</a:t>
+              <a:t>Expected Assignment</a:t>
             </a:r>
             <a:endParaRPr lang="en-US" sz="2700" dirty="0"/>
           </a:p>
@@ -5285,14 +8442,14 @@
       </p:sp>
       <p:sp>
         <p:nvSpPr>
-          <p:cNvPr id="7" name="Text 5"/>
-          <p:cNvSpPr/>
-          <p:nvPr/>
-        </p:nvSpPr>
-        <p:spPr>
-          <a:xfrm>
-            <a:off x="822960" y="1325880"/>
-            <a:ext cx="10378440" cy="4800600"/>
+          <p:cNvPr id="10" name="Text 8"/>
+          <p:cNvSpPr/>
+          <p:nvPr/>
+        </p:nvSpPr>
+        <p:spPr>
+          <a:xfrm>
+            <a:off x="868680" y="1417320"/>
+            <a:ext cx="6675120" cy="4434840"/>
           </a:xfrm>
           <a:prstGeom prst="rect">
             <a:avLst/>
@@ -5307,7 +8464,7 @@
           <a:lstStyle/>
           <a:p>
             <a:r>
-              <a:rPr lang="en-US" sz="1450" dirty="0">
+              <a:rPr lang="en-US" sz="1700" dirty="0">
                 <a:solidFill>
                   <a:srgbClr val="17364A"/>
                 </a:solidFill>
@@ -5315,13 +8472,106 @@
                 <a:ea typeface="Aptos" pitchFamily="34" charset="-122"/>
                 <a:cs typeface="Aptos" pitchFamily="34" charset="-120"/>
               </a:rPr>
-              <a:t>NIST AI Risk Management Framework: https://www.nist.gov/itl/ai-risk-management-framework</a:t>
-            </a:r>
-            <a:endParaRPr lang="en-US" sz="1450" dirty="0"/>
-          </a:p>
-          <a:p>
-            <a:r>
-              <a:rPr lang="en-US" sz="1450" dirty="0">
+              <a:t>The expected artifact is a completed AI business analysis package. It should be specific to a public health workflow and.</a:t>
+            </a:r>
+            <a:endParaRPr lang="en-US" sz="1700" dirty="0"/>
+          </a:p>
+        </p:txBody>
+      </p:sp>
+      <p:sp>
+        <p:nvSpPr>
+          <p:cNvPr id="11" name="Shape 9"/>
+          <p:cNvSpPr/>
+          <p:nvPr/>
+        </p:nvSpPr>
+        <p:spPr>
+          <a:xfrm>
+            <a:off x="7909560" y="1417320"/>
+            <a:ext cx="3154680" cy="1828800"/>
+          </a:xfrm>
+          <a:prstGeom prst="roundRect">
+            <a:avLst>
+              <a:gd name="adj" fmla="val 6000"/>
+            </a:avLst>
+          </a:prstGeom>
+          <a:solidFill>
+            <a:srgbClr val="EEF8ED"/>
+          </a:solidFill>
+          <a:ln w="12700">
+            <a:solidFill>
+              <a:srgbClr val="B9D7E6"/>
+            </a:solidFill>
+            <a:prstDash val="solid"/>
+          </a:ln>
+        </p:spPr>
+      </p:sp>
+      <p:sp>
+        <p:nvSpPr>
+          <p:cNvPr id="12" name="Text 10"/>
+          <p:cNvSpPr/>
+          <p:nvPr/>
+        </p:nvSpPr>
+        <p:spPr>
+          <a:xfrm>
+            <a:off x="8074152" y="1563624"/>
+            <a:ext cx="2825496" cy="201168"/>
+          </a:xfrm>
+          <a:prstGeom prst="rect">
+            <a:avLst/>
+          </a:prstGeom>
+          <a:noFill/>
+          <a:ln/>
+        </p:spPr>
+        <p:txBody>
+          <a:bodyPr wrap="square" lIns="0" tIns="0" rIns="0" bIns="0" rtlCol="0" anchor="ctr"/>
+          <a:lstStyle/>
+          <a:p>
+            <a:pPr indent="0" marL="0">
+              <a:buNone/>
+            </a:pPr>
+            <a:r>
+              <a:rPr lang="en-US" sz="950" b="1" dirty="0">
+                <a:solidFill>
+                  <a:srgbClr val="0068B7"/>
+                </a:solidFill>
+                <a:latin typeface="Aptos" pitchFamily="34" charset="0"/>
+                <a:ea typeface="Aptos" pitchFamily="34" charset="-122"/>
+                <a:cs typeface="Aptos" pitchFamily="34" charset="-120"/>
+              </a:rPr>
+              <a:t>Key idea</a:t>
+            </a:r>
+            <a:endParaRPr lang="en-US" sz="950" dirty="0"/>
+          </a:p>
+        </p:txBody>
+      </p:sp>
+      <p:sp>
+        <p:nvSpPr>
+          <p:cNvPr id="13" name="Text 11"/>
+          <p:cNvSpPr/>
+          <p:nvPr/>
+        </p:nvSpPr>
+        <p:spPr>
+          <a:xfrm>
+            <a:off x="8074152" y="1856232"/>
+            <a:ext cx="2825496" cy="1261872"/>
+          </a:xfrm>
+          <a:prstGeom prst="rect">
+            <a:avLst/>
+          </a:prstGeom>
+          <a:noFill/>
+          <a:ln/>
+        </p:spPr>
+        <p:txBody>
+          <a:bodyPr wrap="square" lIns="0" tIns="0" rIns="0" bIns="0" rtlCol="0" anchor="t">
+            <a:normAutofit/>
+          </a:bodyPr>
+          <a:lstStyle/>
+          <a:p>
+            <a:pPr indent="0" marL="0">
+              <a:buNone/>
+            </a:pPr>
+            <a:r>
+              <a:rPr lang="en-US" sz="1250" dirty="0">
                 <a:solidFill>
                   <a:srgbClr val="17364A"/>
                 </a:solidFill>
@@ -5329,13 +8579,106 @@
                 <a:ea typeface="Aptos" pitchFamily="34" charset="-122"/>
                 <a:cs typeface="Aptos" pitchFamily="34" charset="-120"/>
               </a:rPr>
-              <a:t>NIST Generative AI Profile: https://www.nist.gov/publications/artificial-intelligence-risk-management-framework-generative-artificial-intelligence</a:t>
-            </a:r>
-            <a:endParaRPr lang="en-US" sz="1450" dirty="0"/>
-          </a:p>
-          <a:p>
-            <a:r>
-              <a:rPr lang="en-US" sz="1450" dirty="0">
+              <a:t>The expected artifact is a completed AI business analysis package. It should be specific to a public health workflow and.</a:t>
+            </a:r>
+            <a:endParaRPr lang="en-US" sz="1250" dirty="0"/>
+          </a:p>
+        </p:txBody>
+      </p:sp>
+      <p:sp>
+        <p:nvSpPr>
+          <p:cNvPr id="14" name="Shape 12"/>
+          <p:cNvSpPr/>
+          <p:nvPr/>
+        </p:nvSpPr>
+        <p:spPr>
+          <a:xfrm>
+            <a:off x="7909560" y="3520440"/>
+            <a:ext cx="3154680" cy="1737360"/>
+          </a:xfrm>
+          <a:prstGeom prst="roundRect">
+            <a:avLst>
+              <a:gd name="adj" fmla="val 6316"/>
+            </a:avLst>
+          </a:prstGeom>
+          <a:solidFill>
+            <a:srgbClr val="EAF6F8"/>
+          </a:solidFill>
+          <a:ln w="12700">
+            <a:solidFill>
+              <a:srgbClr val="B9D7E6"/>
+            </a:solidFill>
+            <a:prstDash val="solid"/>
+          </a:ln>
+        </p:spPr>
+      </p:sp>
+      <p:sp>
+        <p:nvSpPr>
+          <p:cNvPr id="15" name="Text 13"/>
+          <p:cNvSpPr/>
+          <p:nvPr/>
+        </p:nvSpPr>
+        <p:spPr>
+          <a:xfrm>
+            <a:off x="8074152" y="3666744"/>
+            <a:ext cx="2825496" cy="201168"/>
+          </a:xfrm>
+          <a:prstGeom prst="rect">
+            <a:avLst/>
+          </a:prstGeom>
+          <a:noFill/>
+          <a:ln/>
+        </p:spPr>
+        <p:txBody>
+          <a:bodyPr wrap="square" lIns="0" tIns="0" rIns="0" bIns="0" rtlCol="0" anchor="ctr"/>
+          <a:lstStyle/>
+          <a:p>
+            <a:pPr indent="0" marL="0">
+              <a:buNone/>
+            </a:pPr>
+            <a:r>
+              <a:rPr lang="en-US" sz="950" b="1" dirty="0">
+                <a:solidFill>
+                  <a:srgbClr val="0068B7"/>
+                </a:solidFill>
+                <a:latin typeface="Aptos" pitchFamily="34" charset="0"/>
+                <a:ea typeface="Aptos" pitchFamily="34" charset="-122"/>
+                <a:cs typeface="Aptos" pitchFamily="34" charset="-120"/>
+              </a:rPr>
+              <a:t>Use this for</a:t>
+            </a:r>
+            <a:endParaRPr lang="en-US" sz="950" dirty="0"/>
+          </a:p>
+        </p:txBody>
+      </p:sp>
+      <p:sp>
+        <p:nvSpPr>
+          <p:cNvPr id="16" name="Text 14"/>
+          <p:cNvSpPr/>
+          <p:nvPr/>
+        </p:nvSpPr>
+        <p:spPr>
+          <a:xfrm>
+            <a:off x="8074152" y="3959352"/>
+            <a:ext cx="2825496" cy="1170432"/>
+          </a:xfrm>
+          <a:prstGeom prst="rect">
+            <a:avLst/>
+          </a:prstGeom>
+          <a:noFill/>
+          <a:ln/>
+        </p:spPr>
+        <p:txBody>
+          <a:bodyPr wrap="square" lIns="0" tIns="0" rIns="0" bIns="0" rtlCol="0" anchor="t">
+            <a:normAutofit/>
+          </a:bodyPr>
+          <a:lstStyle/>
+          <a:p>
+            <a:pPr indent="0" marL="0">
+              <a:buNone/>
+            </a:pPr>
+            <a:r>
+              <a:rPr lang="en-US" sz="1250" dirty="0">
                 <a:solidFill>
                   <a:srgbClr val="17364A"/>
                 </a:solidFill>
@@ -5343,37 +8686,9 @@
                 <a:ea typeface="Aptos" pitchFamily="34" charset="-122"/>
                 <a:cs typeface="Aptos" pitchFamily="34" charset="-120"/>
               </a:rPr>
-              <a:t>CDC Public Health Data Strategy and Data Modernization resources: https://www.cdc.gov/public-health-data-strategy/php/about/index.html</a:t>
-            </a:r>
-            <a:endParaRPr lang="en-US" sz="1450" dirty="0"/>
-          </a:p>
-          <a:p>
-            <a:r>
-              <a:rPr lang="en-US" sz="1450" dirty="0">
-                <a:solidFill>
-                  <a:srgbClr val="17364A"/>
-                </a:solidFill>
-                <a:latin typeface="Aptos" pitchFamily="34" charset="0"/>
-                <a:ea typeface="Aptos" pitchFamily="34" charset="-122"/>
-                <a:cs typeface="Aptos" pitchFamily="34" charset="-120"/>
-              </a:rPr>
-              <a:t>OWASP Top 10 for LLM Applications, when security or AI integrations are relevant</a:t>
-            </a:r>
-            <a:endParaRPr lang="en-US" sz="1450" dirty="0"/>
-          </a:p>
-          <a:p>
-            <a:r>
-              <a:rPr lang="en-US" sz="1450" dirty="0">
-                <a:solidFill>
-                  <a:srgbClr val="17364A"/>
-                </a:solidFill>
-                <a:latin typeface="Aptos" pitchFamily="34" charset="0"/>
-                <a:ea typeface="Aptos" pitchFamily="34" charset="-122"/>
-                <a:cs typeface="Aptos" pitchFamily="34" charset="-120"/>
-              </a:rPr>
-              <a:t>Agency privacy, cybersecurity, data governance, procurement, and records management policies</a:t>
-            </a:r>
-            <a:endParaRPr lang="en-US" sz="1450" dirty="0"/>
+              <a:t>Connect the concept to public health decisions, safeguards, documentation, or implementation work.</a:t>
+            </a:r>
+            <a:endParaRPr lang="en-US" sz="1250" dirty="0"/>
           </a:p>
         </p:txBody>
       </p:sp>
@@ -5436,7 +8751,32 @@
       </p:sp>
       <p:sp>
         <p:nvSpPr>
-          <p:cNvPr id="3" name="Text 1"/>
+          <p:cNvPr id="3" name="Shape 1"/>
+          <p:cNvSpPr/>
+          <p:nvPr/>
+        </p:nvSpPr>
+        <p:spPr>
+          <a:xfrm>
+            <a:off x="0" y="164592"/>
+            <a:ext cx="146304" cy="6693408"/>
+          </a:xfrm>
+          <a:prstGeom prst="rect">
+            <a:avLst/>
+          </a:prstGeom>
+          <a:solidFill>
+            <a:srgbClr val="2F8A28"/>
+          </a:solidFill>
+          <a:ln w="12700">
+            <a:solidFill>
+              <a:srgbClr val="2F8A28"/>
+            </a:solidFill>
+            <a:prstDash val="solid"/>
+          </a:ln>
+        </p:spPr>
+      </p:sp>
+      <p:sp>
+        <p:nvSpPr>
+          <p:cNvPr id="4" name="Text 2"/>
           <p:cNvSpPr/>
           <p:nvPr/>
         </p:nvSpPr>
@@ -5475,7 +8815,7 @@
       </p:sp>
       <p:sp>
         <p:nvSpPr>
-          <p:cNvPr id="4" name="Text 2"/>
+          <p:cNvPr id="5" name="Text 3"/>
           <p:cNvSpPr/>
           <p:nvPr/>
         </p:nvSpPr>
@@ -5514,7 +8854,7 @@
       </p:sp>
       <p:sp>
         <p:nvSpPr>
-          <p:cNvPr id="5" name="Text 3"/>
+          <p:cNvPr id="6" name="Text 4"/>
           <p:cNvSpPr/>
           <p:nvPr/>
         </p:nvSpPr>
@@ -5553,7 +8893,7 @@
       </p:sp>
       <p:sp>
         <p:nvSpPr>
-          <p:cNvPr id="6" name="Text 4"/>
+          <p:cNvPr id="7" name="Text 5"/>
           <p:cNvSpPr/>
           <p:nvPr/>
         </p:nvSpPr>
@@ -5586,7 +8926,7 @@
                 <a:ea typeface="Aptos Display" pitchFamily="34" charset="-122"/>
                 <a:cs typeface="Aptos Display" pitchFamily="34" charset="-120"/>
               </a:rPr>
-              <a:t>Module Context</a:t>
+              <a:t>What this module helps you do</a:t>
             </a:r>
             <a:endParaRPr lang="en-US" sz="2700" dirty="0"/>
           </a:p>
@@ -5594,14 +8934,14 @@
       </p:sp>
       <p:sp>
         <p:nvSpPr>
-          <p:cNvPr id="7" name="Text 5"/>
-          <p:cNvSpPr/>
-          <p:nvPr/>
-        </p:nvSpPr>
-        <p:spPr>
-          <a:xfrm>
-            <a:off x="822960" y="1325880"/>
-            <a:ext cx="10378440" cy="1371600"/>
+          <p:cNvPr id="8" name="Text 6"/>
+          <p:cNvSpPr/>
+          <p:nvPr/>
+        </p:nvSpPr>
+        <p:spPr>
+          <a:xfrm>
+            <a:off x="868680" y="1417320"/>
+            <a:ext cx="6675120" cy="3291840"/>
           </a:xfrm>
           <a:prstGeom prst="rect">
             <a:avLst/>
@@ -5616,7 +8956,7 @@
           <a:lstStyle/>
           <a:p>
             <a:r>
-              <a:rPr lang="en-US" sz="1600" dirty="0">
+              <a:rPr lang="en-US" sz="1700" dirty="0">
                 <a:solidFill>
                   <a:srgbClr val="17364A"/>
                 </a:solidFill>
@@ -5624,13 +8964,13 @@
                 <a:ea typeface="Aptos" pitchFamily="34" charset="-122"/>
                 <a:cs typeface="Aptos" pitchFamily="34" charset="-120"/>
               </a:rPr>
-              <a:t>Level: applied/foundational</a:t>
-            </a:r>
-            <a:endParaRPr lang="en-US" sz="1600" dirty="0"/>
-          </a:p>
-          <a:p>
-            <a:r>
-              <a:rPr lang="en-US" sz="1600" dirty="0">
+              <a:t>Business analysis translates public health needs into clear requirements, workflows, user stories, acceptance criteria, data needs, and.</a:t>
+            </a:r>
+            <a:endParaRPr lang="en-US" sz="1700" dirty="0"/>
+          </a:p>
+          <a:p>
+            <a:r>
+              <a:rPr lang="en-US" sz="1700" dirty="0">
                 <a:solidFill>
                   <a:srgbClr val="17364A"/>
                 </a:solidFill>
@@ -5638,13 +8978,13 @@
                 <a:ea typeface="Aptos" pitchFamily="34" charset="-122"/>
                 <a:cs typeface="Aptos" pitchFamily="34" charset="-120"/>
               </a:rPr>
-              <a:t>Primary track: Program Management Role-Based Track</a:t>
-            </a:r>
-            <a:endParaRPr lang="en-US" sz="1600" dirty="0"/>
-          </a:p>
-          <a:p>
-            <a:r>
-              <a:rPr lang="en-US" sz="1600" dirty="0">
+              <a:t>AI projects often fail when technical teams, vendors, and program staff do not share a precise understanding of the problem to be solved.</a:t>
+            </a:r>
+            <a:endParaRPr lang="en-US" sz="1700" dirty="0"/>
+          </a:p>
+          <a:p>
+            <a:r>
+              <a:rPr lang="en-US" sz="1700" dirty="0">
                 <a:solidFill>
                   <a:srgbClr val="17364A"/>
                 </a:solidFill>
@@ -5652,31 +8992,97 @@
                 <a:ea typeface="Aptos" pitchFamily="34" charset="-122"/>
                 <a:cs typeface="Aptos" pitchFamily="34" charset="-120"/>
               </a:rPr>
-              <a:t>Appears in tracks: operations-data-quality</a:t>
-            </a:r>
-            <a:endParaRPr lang="en-US" sz="1600" dirty="0"/>
-          </a:p>
-        </p:txBody>
-      </p:sp>
-      <p:sp>
-        <p:nvSpPr>
-          <p:cNvPr id="8" name="Text 6"/>
-          <p:cNvSpPr/>
-          <p:nvPr/>
-        </p:nvSpPr>
-        <p:spPr>
-          <a:xfrm>
-            <a:off x="822960" y="2743200"/>
-            <a:ext cx="10378440" cy="2834640"/>
-          </a:xfrm>
-          <a:prstGeom prst="rect">
-            <a:avLst/>
-          </a:prstGeom>
-          <a:noFill/>
-          <a:ln/>
-        </p:spPr>
-        <p:txBody>
-          <a:bodyPr wrap="square" lIns="1016" tIns="1016" rIns="1016" bIns="1016" rtlCol="0" anchor="t">
+              <a:t>This module gives informaticians and program leads a disciplined approach to defining AI-supported workflows before technology choices are finalized.</a:t>
+            </a:r>
+            <a:endParaRPr lang="en-US" sz="1700" dirty="0"/>
+          </a:p>
+        </p:txBody>
+      </p:sp>
+      <p:sp>
+        <p:nvSpPr>
+          <p:cNvPr id="9" name="Shape 7"/>
+          <p:cNvSpPr/>
+          <p:nvPr/>
+        </p:nvSpPr>
+        <p:spPr>
+          <a:xfrm>
+            <a:off x="7909560" y="1417320"/>
+            <a:ext cx="3154680" cy="1920240"/>
+          </a:xfrm>
+          <a:prstGeom prst="roundRect">
+            <a:avLst>
+              <a:gd name="adj" fmla="val 5714"/>
+            </a:avLst>
+          </a:prstGeom>
+          <a:solidFill>
+            <a:srgbClr val="EAF6F8"/>
+          </a:solidFill>
+          <a:ln w="12700">
+            <a:solidFill>
+              <a:srgbClr val="B9D7E6"/>
+            </a:solidFill>
+            <a:prstDash val="solid"/>
+          </a:ln>
+        </p:spPr>
+      </p:sp>
+      <p:sp>
+        <p:nvSpPr>
+          <p:cNvPr id="10" name="Text 8"/>
+          <p:cNvSpPr/>
+          <p:nvPr/>
+        </p:nvSpPr>
+        <p:spPr>
+          <a:xfrm>
+            <a:off x="8074152" y="1563624"/>
+            <a:ext cx="2825496" cy="201168"/>
+          </a:xfrm>
+          <a:prstGeom prst="rect">
+            <a:avLst/>
+          </a:prstGeom>
+          <a:noFill/>
+          <a:ln/>
+        </p:spPr>
+        <p:txBody>
+          <a:bodyPr wrap="square" lIns="0" tIns="0" rIns="0" bIns="0" rtlCol="0" anchor="ctr"/>
+          <a:lstStyle/>
+          <a:p>
+            <a:pPr indent="0" marL="0">
+              <a:buNone/>
+            </a:pPr>
+            <a:r>
+              <a:rPr lang="en-US" sz="950" b="1" dirty="0">
+                <a:solidFill>
+                  <a:srgbClr val="0068B7"/>
+                </a:solidFill>
+                <a:latin typeface="Aptos" pitchFamily="34" charset="0"/>
+                <a:ea typeface="Aptos" pitchFamily="34" charset="-122"/>
+                <a:cs typeface="Aptos" pitchFamily="34" charset="-120"/>
+              </a:rPr>
+              <a:t>Module details</a:t>
+            </a:r>
+            <a:endParaRPr lang="en-US" sz="950" dirty="0"/>
+          </a:p>
+        </p:txBody>
+      </p:sp>
+      <p:sp>
+        <p:nvSpPr>
+          <p:cNvPr id="11" name="Text 9"/>
+          <p:cNvSpPr/>
+          <p:nvPr/>
+        </p:nvSpPr>
+        <p:spPr>
+          <a:xfrm>
+            <a:off x="8074152" y="1856232"/>
+            <a:ext cx="2825496" cy="1353312"/>
+          </a:xfrm>
+          <a:prstGeom prst="rect">
+            <a:avLst/>
+          </a:prstGeom>
+          <a:noFill/>
+          <a:ln/>
+        </p:spPr>
+        <p:txBody>
+          <a:bodyPr wrap="square" lIns="0" tIns="0" rIns="0" bIns="0" rtlCol="0" anchor="t">
             <a:normAutofit/>
           </a:bodyPr>
           <a:lstStyle/>
@@ -5685,7 +9091,7 @@
               <a:buNone/>
             </a:pPr>
             <a:r>
-              <a:rPr lang="en-US" sz="1400" dirty="0">
+              <a:rPr lang="en-US" sz="1250" dirty="0">
                 <a:solidFill>
                   <a:srgbClr val="17364A"/>
                 </a:solidFill>
@@ -5693,9 +9099,1346 @@
                 <a:ea typeface="Aptos" pitchFamily="34" charset="-122"/>
                 <a:cs typeface="Aptos" pitchFamily="34" charset="-120"/>
               </a:rPr>
-              <a:t>Business analysis translates public health needs into clear requirements, workflows, user stories, acceptance criteria, data needs, and implementation decisions. AI projects often fail when technical teams, vendors, and program staff do not share a precise understanding of the problem to be solved. This module gives informaticians and program leads a disciplined approach to defining AI-supported workflows before technology choices are finalized.</a:t>
-            </a:r>
-            <a:endParaRPr lang="en-US" sz="1400" dirty="0"/>
+              <a:t>Level: applied/foundational</a:t>
+            </a:r>
+            <a:endParaRPr lang="en-US" sz="1250" dirty="0"/>
+          </a:p>
+          <a:p>
+            <a:pPr indent="0" marL="0">
+              <a:buNone/>
+            </a:pPr>
+            <a:r>
+              <a:rPr lang="en-US" sz="1250" dirty="0">
+                <a:solidFill>
+                  <a:srgbClr val="17364A"/>
+                </a:solidFill>
+                <a:latin typeface="Aptos" pitchFamily="34" charset="0"/>
+                <a:ea typeface="Aptos" pitchFamily="34" charset="-122"/>
+                <a:cs typeface="Aptos" pitchFamily="34" charset="-120"/>
+              </a:rPr>
+              <a:t>Primary track: Program Management Role-Based Track</a:t>
+            </a:r>
+            <a:endParaRPr lang="en-US" sz="1250" dirty="0"/>
+          </a:p>
+          <a:p>
+            <a:pPr indent="0" marL="0">
+              <a:buNone/>
+            </a:pPr>
+            <a:r>
+              <a:rPr lang="en-US" sz="1250" dirty="0">
+                <a:solidFill>
+                  <a:srgbClr val="17364A"/>
+                </a:solidFill>
+                <a:latin typeface="Aptos" pitchFamily="34" charset="0"/>
+                <a:ea typeface="Aptos" pitchFamily="34" charset="-122"/>
+                <a:cs typeface="Aptos" pitchFamily="34" charset="-120"/>
+              </a:rPr>
+              <a:t>Appears in tracks: operations-data-quality</a:t>
+            </a:r>
+            <a:endParaRPr lang="en-US" sz="1250" dirty="0"/>
+          </a:p>
+        </p:txBody>
+      </p:sp>
+      <p:sp>
+        <p:nvSpPr>
+          <p:cNvPr id="12" name="Shape 10"/>
+          <p:cNvSpPr/>
+          <p:nvPr/>
+        </p:nvSpPr>
+        <p:spPr>
+          <a:xfrm>
+            <a:off x="7909560" y="3611880"/>
+            <a:ext cx="3154680" cy="1783080"/>
+          </a:xfrm>
+          <a:prstGeom prst="roundRect">
+            <a:avLst>
+              <a:gd name="adj" fmla="val 6154"/>
+            </a:avLst>
+          </a:prstGeom>
+          <a:solidFill>
+            <a:srgbClr val="EEF8ED"/>
+          </a:solidFill>
+          <a:ln w="12700">
+            <a:solidFill>
+              <a:srgbClr val="B9D7E6"/>
+            </a:solidFill>
+            <a:prstDash val="solid"/>
+          </a:ln>
+        </p:spPr>
+      </p:sp>
+      <p:sp>
+        <p:nvSpPr>
+          <p:cNvPr id="13" name="Text 11"/>
+          <p:cNvSpPr/>
+          <p:nvPr/>
+        </p:nvSpPr>
+        <p:spPr>
+          <a:xfrm>
+            <a:off x="8074152" y="3758184"/>
+            <a:ext cx="2825496" cy="201168"/>
+          </a:xfrm>
+          <a:prstGeom prst="rect">
+            <a:avLst/>
+          </a:prstGeom>
+          <a:noFill/>
+          <a:ln/>
+        </p:spPr>
+        <p:txBody>
+          <a:bodyPr wrap="square" lIns="0" tIns="0" rIns="0" bIns="0" rtlCol="0" anchor="ctr"/>
+          <a:lstStyle/>
+          <a:p>
+            <a:pPr indent="0" marL="0">
+              <a:buNone/>
+            </a:pPr>
+            <a:r>
+              <a:rPr lang="en-US" sz="950" b="1" dirty="0">
+                <a:solidFill>
+                  <a:srgbClr val="0068B7"/>
+                </a:solidFill>
+                <a:latin typeface="Aptos" pitchFamily="34" charset="0"/>
+                <a:ea typeface="Aptos" pitchFamily="34" charset="-122"/>
+                <a:cs typeface="Aptos" pitchFamily="34" charset="-120"/>
+              </a:rPr>
+              <a:t>Learning approach</a:t>
+            </a:r>
+            <a:endParaRPr lang="en-US" sz="950" dirty="0"/>
+          </a:p>
+        </p:txBody>
+      </p:sp>
+      <p:sp>
+        <p:nvSpPr>
+          <p:cNvPr id="14" name="Text 12"/>
+          <p:cNvSpPr/>
+          <p:nvPr/>
+        </p:nvSpPr>
+        <p:spPr>
+          <a:xfrm>
+            <a:off x="8074152" y="4050792"/>
+            <a:ext cx="2825496" cy="1216152"/>
+          </a:xfrm>
+          <a:prstGeom prst="rect">
+            <a:avLst/>
+          </a:prstGeom>
+          <a:noFill/>
+          <a:ln/>
+        </p:spPr>
+        <p:txBody>
+          <a:bodyPr wrap="square" lIns="0" tIns="0" rIns="0" bIns="0" rtlCol="0" anchor="t">
+            <a:normAutofit/>
+          </a:bodyPr>
+          <a:lstStyle/>
+          <a:p>
+            <a:pPr indent="0" marL="0">
+              <a:buNone/>
+            </a:pPr>
+            <a:r>
+              <a:rPr lang="en-US" sz="1250" dirty="0">
+                <a:solidFill>
+                  <a:srgbClr val="17364A"/>
+                </a:solidFill>
+                <a:latin typeface="Aptos" pitchFamily="34" charset="0"/>
+                <a:ea typeface="Aptos" pitchFamily="34" charset="-122"/>
+                <a:cs typeface="Aptos" pitchFamily="34" charset="-120"/>
+              </a:rPr>
+              <a:t>Review the core ideas, complete the practical exercise, check your understanding, and use the related plays and tools to apply the lesson.</a:t>
+            </a:r>
+            <a:endParaRPr lang="en-US" sz="1250" dirty="0"/>
+          </a:p>
+        </p:txBody>
+      </p:sp>
+    </p:spTree>
+  </p:cSld>
+  <p:clrMapOvr>
+    <a:masterClrMapping/>
+  </p:clrMapOvr>
+</p:sld>
+</file>
+
+<file path=ppt/slides/slide20.xml><?xml version="1.0" encoding="utf-8"?>
+<p:sld xmlns:a="http://schemas.openxmlformats.org/drawingml/2006/main" xmlns:r="http://schemas.openxmlformats.org/officeDocument/2006/relationships" xmlns:p="http://schemas.openxmlformats.org/presentationml/2006/main">
+  <p:cSld name="Slide 20">
+    <p:bg>
+      <p:bgPr>
+        <a:solidFill>
+          <a:srgbClr val="F7FBFD"/>
+        </a:solidFill>
+      </p:bgPr>
+    </p:bg>
+    <p:spTree>
+      <p:nvGrpSpPr>
+        <p:cNvPr id="1" name=""/>
+        <p:cNvGrpSpPr/>
+        <p:nvPr/>
+      </p:nvGrpSpPr>
+      <p:grpSpPr>
+        <a:xfrm>
+          <a:off x="0" y="0"/>
+          <a:ext cx="0" cy="0"/>
+          <a:chOff x="0" y="0"/>
+          <a:chExt cx="0" cy="0"/>
+        </a:xfrm>
+      </p:grpSpPr>
+      <p:sp>
+        <p:nvSpPr>
+          <p:cNvPr id="2" name="Shape 0"/>
+          <p:cNvSpPr/>
+          <p:nvPr/>
+        </p:nvSpPr>
+        <p:spPr>
+          <a:xfrm>
+            <a:off x="0" y="0"/>
+            <a:ext cx="12191695" cy="164592"/>
+          </a:xfrm>
+          <a:prstGeom prst="rect">
+            <a:avLst/>
+          </a:prstGeom>
+          <a:solidFill>
+            <a:srgbClr val="0068B7"/>
+          </a:solidFill>
+          <a:ln w="12700">
+            <a:solidFill>
+              <a:srgbClr val="0068B7"/>
+            </a:solidFill>
+            <a:prstDash val="solid"/>
+          </a:ln>
+        </p:spPr>
+      </p:sp>
+      <p:sp>
+        <p:nvSpPr>
+          <p:cNvPr id="3" name="Shape 1"/>
+          <p:cNvSpPr/>
+          <p:nvPr/>
+        </p:nvSpPr>
+        <p:spPr>
+          <a:xfrm>
+            <a:off x="0" y="164592"/>
+            <a:ext cx="146304" cy="6693408"/>
+          </a:xfrm>
+          <a:prstGeom prst="rect">
+            <a:avLst/>
+          </a:prstGeom>
+          <a:solidFill>
+            <a:srgbClr val="2F8A28"/>
+          </a:solidFill>
+          <a:ln w="12700">
+            <a:solidFill>
+              <a:srgbClr val="2F8A28"/>
+            </a:solidFill>
+            <a:prstDash val="solid"/>
+          </a:ln>
+        </p:spPr>
+      </p:sp>
+      <p:sp>
+        <p:nvSpPr>
+          <p:cNvPr id="4" name="Text 2"/>
+          <p:cNvSpPr/>
+          <p:nvPr/>
+        </p:nvSpPr>
+        <p:spPr>
+          <a:xfrm>
+            <a:off x="502920" y="292608"/>
+            <a:ext cx="10149840" cy="256032"/>
+          </a:xfrm>
+          <a:prstGeom prst="rect">
+            <a:avLst/>
+          </a:prstGeom>
+          <a:noFill/>
+          <a:ln/>
+        </p:spPr>
+        <p:txBody>
+          <a:bodyPr wrap="square" lIns="0" tIns="0" rIns="0" bIns="0" rtlCol="0" anchor="ctr"/>
+          <a:lstStyle/>
+          <a:p>
+            <a:pPr indent="0" marL="0">
+              <a:buNone/>
+            </a:pPr>
+            <a:r>
+              <a:rPr lang="en-US" sz="900" b="1" dirty="0">
+                <a:solidFill>
+                  <a:srgbClr val="5F7181"/>
+                </a:solidFill>
+                <a:latin typeface="Aptos" pitchFamily="34" charset="0"/>
+                <a:ea typeface="Aptos" pitchFamily="34" charset="-122"/>
+                <a:cs typeface="Aptos" pitchFamily="34" charset="-120"/>
+              </a:rPr>
+              <a:t>Business Analysis for AI-Enabled Public Health Systems</a:t>
+            </a:r>
+            <a:endParaRPr lang="en-US" sz="900" dirty="0"/>
+          </a:p>
+        </p:txBody>
+      </p:sp>
+      <p:sp>
+        <p:nvSpPr>
+          <p:cNvPr id="5" name="Text 3"/>
+          <p:cNvSpPr/>
+          <p:nvPr/>
+        </p:nvSpPr>
+        <p:spPr>
+          <a:xfrm>
+            <a:off x="502920" y="6537960"/>
+            <a:ext cx="7772400" cy="201168"/>
+          </a:xfrm>
+          <a:prstGeom prst="rect">
+            <a:avLst/>
+          </a:prstGeom>
+          <a:noFill/>
+          <a:ln/>
+        </p:spPr>
+        <p:txBody>
+          <a:bodyPr wrap="square" lIns="0" tIns="0" rIns="0" bIns="0" rtlCol="0" anchor="ctr"/>
+          <a:lstStyle/>
+          <a:p>
+            <a:pPr indent="0" marL="0">
+              <a:buNone/>
+            </a:pPr>
+            <a:r>
+              <a:rPr lang="en-US" sz="800" dirty="0">
+                <a:solidFill>
+                  <a:srgbClr val="5F7181"/>
+                </a:solidFill>
+                <a:latin typeface="Aptos" pitchFamily="34" charset="0"/>
+                <a:ea typeface="Aptos" pitchFamily="34" charset="-122"/>
+                <a:cs typeface="Aptos" pitchFamily="34" charset="-120"/>
+              </a:rPr>
+              <a:t>AI Playbook and Toolkit for Public Health Departments</a:t>
+            </a:r>
+            <a:endParaRPr lang="en-US" sz="800" dirty="0"/>
+          </a:p>
+        </p:txBody>
+      </p:sp>
+      <p:sp>
+        <p:nvSpPr>
+          <p:cNvPr id="6" name="Text 4"/>
+          <p:cNvSpPr/>
+          <p:nvPr/>
+        </p:nvSpPr>
+        <p:spPr>
+          <a:xfrm>
+            <a:off x="9966960" y="6537960"/>
+            <a:ext cx="1645920" cy="201168"/>
+          </a:xfrm>
+          <a:prstGeom prst="rect">
+            <a:avLst/>
+          </a:prstGeom>
+          <a:noFill/>
+          <a:ln/>
+        </p:spPr>
+        <p:txBody>
+          <a:bodyPr wrap="square" lIns="0" tIns="0" rIns="0" bIns="0" rtlCol="0" anchor="ctr"/>
+          <a:lstStyle/>
+          <a:p>
+            <a:pPr algn="r" indent="0" marL="0">
+              <a:buNone/>
+            </a:pPr>
+            <a:r>
+              <a:rPr lang="en-US" sz="800" dirty="0">
+                <a:solidFill>
+                  <a:srgbClr val="5F7181"/>
+                </a:solidFill>
+                <a:latin typeface="Aptos" pitchFamily="34" charset="0"/>
+                <a:ea typeface="Aptos" pitchFamily="34" charset="-122"/>
+                <a:cs typeface="Aptos" pitchFamily="34" charset="-120"/>
+              </a:rPr>
+              <a:t>© Paula Soper</a:t>
+            </a:r>
+            <a:endParaRPr lang="en-US" sz="800" dirty="0"/>
+          </a:p>
+        </p:txBody>
+      </p:sp>
+      <p:sp>
+        <p:nvSpPr>
+          <p:cNvPr id="7" name="Shape 5"/>
+          <p:cNvSpPr/>
+          <p:nvPr/>
+        </p:nvSpPr>
+        <p:spPr>
+          <a:xfrm>
+            <a:off x="640080" y="658368"/>
+            <a:ext cx="420624" cy="420624"/>
+          </a:xfrm>
+          <a:prstGeom prst="ellipse">
+            <a:avLst/>
+          </a:prstGeom>
+          <a:solidFill>
+            <a:srgbClr val="0068B7"/>
+          </a:solidFill>
+          <a:ln w="12700">
+            <a:solidFill>
+              <a:srgbClr val="0068B7"/>
+            </a:solidFill>
+            <a:prstDash val="solid"/>
+          </a:ln>
+        </p:spPr>
+      </p:sp>
+      <p:sp>
+        <p:nvSpPr>
+          <p:cNvPr id="8" name="Text 6"/>
+          <p:cNvSpPr/>
+          <p:nvPr/>
+        </p:nvSpPr>
+        <p:spPr>
+          <a:xfrm>
+            <a:off x="640080" y="731520"/>
+            <a:ext cx="420624" cy="164592"/>
+          </a:xfrm>
+          <a:prstGeom prst="rect">
+            <a:avLst/>
+          </a:prstGeom>
+          <a:noFill/>
+          <a:ln/>
+        </p:spPr>
+        <p:txBody>
+          <a:bodyPr wrap="square" lIns="0" tIns="0" rIns="0" bIns="0" rtlCol="0" anchor="ctr"/>
+          <a:lstStyle/>
+          <a:p>
+            <a:pPr algn="ctr" indent="0" marL="0">
+              <a:buNone/>
+            </a:pPr>
+            <a:r>
+              <a:rPr lang="en-US" sz="1100" b="1" dirty="0">
+                <a:solidFill>
+                  <a:srgbClr val="FFFFFF"/>
+                </a:solidFill>
+                <a:latin typeface="Aptos" pitchFamily="34" charset="0"/>
+                <a:ea typeface="Aptos" pitchFamily="34" charset="-122"/>
+                <a:cs typeface="Aptos" pitchFamily="34" charset="-120"/>
+              </a:rPr>
+              <a:t>14</a:t>
+            </a:r>
+            <a:endParaRPr lang="en-US" sz="1100" dirty="0"/>
+          </a:p>
+        </p:txBody>
+      </p:sp>
+      <p:sp>
+        <p:nvSpPr>
+          <p:cNvPr id="9" name="Text 7"/>
+          <p:cNvSpPr/>
+          <p:nvPr/>
+        </p:nvSpPr>
+        <p:spPr>
+          <a:xfrm>
+            <a:off x="640080" y="621792"/>
+            <a:ext cx="10881360" cy="566928"/>
+          </a:xfrm>
+          <a:prstGeom prst="rect">
+            <a:avLst/>
+          </a:prstGeom>
+          <a:noFill/>
+          <a:ln/>
+        </p:spPr>
+        <p:txBody>
+          <a:bodyPr wrap="square" lIns="0" tIns="0" rIns="0" bIns="0" rtlCol="0" anchor="ctr">
+            <a:normAutofit/>
+          </a:bodyPr>
+          <a:lstStyle/>
+          <a:p>
+            <a:pPr indent="0" marL="0">
+              <a:buNone/>
+            </a:pPr>
+            <a:r>
+              <a:rPr lang="en-US" sz="2700" b="1" dirty="0">
+                <a:solidFill>
+                  <a:srgbClr val="003A63"/>
+                </a:solidFill>
+                <a:latin typeface="Aptos Display" pitchFamily="34" charset="0"/>
+                <a:ea typeface="Aptos Display" pitchFamily="34" charset="-122"/>
+                <a:cs typeface="Aptos Display" pitchFamily="34" charset="-120"/>
+              </a:rPr>
+              <a:t>Knowledge Check</a:t>
+            </a:r>
+            <a:endParaRPr lang="en-US" sz="2700" dirty="0"/>
+          </a:p>
+        </p:txBody>
+      </p:sp>
+      <p:sp>
+        <p:nvSpPr>
+          <p:cNvPr id="10" name="Text 8"/>
+          <p:cNvSpPr/>
+          <p:nvPr/>
+        </p:nvSpPr>
+        <p:spPr>
+          <a:xfrm>
+            <a:off x="868680" y="1417320"/>
+            <a:ext cx="6675120" cy="4434840"/>
+          </a:xfrm>
+          <a:prstGeom prst="rect">
+            <a:avLst/>
+          </a:prstGeom>
+          <a:noFill/>
+          <a:ln/>
+        </p:spPr>
+        <p:txBody>
+          <a:bodyPr wrap="square" lIns="635" tIns="635" rIns="635" bIns="635" rtlCol="0" anchor="t">
+            <a:normAutofit/>
+          </a:bodyPr>
+          <a:lstStyle/>
+          <a:p>
+            <a:r>
+              <a:rPr lang="en-US" sz="1700" dirty="0">
+                <a:solidFill>
+                  <a:srgbClr val="17364A"/>
+                </a:solidFill>
+                <a:latin typeface="Aptos" pitchFamily="34" charset="0"/>
+                <a:ea typeface="Aptos" pitchFamily="34" charset="-122"/>
+                <a:cs typeface="Aptos" pitchFamily="34" charset="-120"/>
+              </a:rPr>
+              <a:t>1. What is the best reason to address business analysis for ai-enabled public health systems before deployment?</a:t>
+            </a:r>
+            <a:endParaRPr lang="en-US" sz="1700" dirty="0"/>
+          </a:p>
+          <a:p>
+            <a:r>
+              <a:rPr lang="en-US" sz="1700" dirty="0">
+                <a:solidFill>
+                  <a:srgbClr val="17364A"/>
+                </a:solidFill>
+                <a:latin typeface="Aptos" pitchFamily="34" charset="0"/>
+                <a:ea typeface="Aptos" pitchFamily="34" charset="-122"/>
+                <a:cs typeface="Aptos" pitchFamily="34" charset="-120"/>
+              </a:rPr>
+              <a:t>2. Which practice best supports responsible implementation?</a:t>
+            </a:r>
+            <a:endParaRPr lang="en-US" sz="1700" dirty="0"/>
+          </a:p>
+          <a:p>
+            <a:r>
+              <a:rPr lang="en-US" sz="1700" dirty="0">
+                <a:solidFill>
+                  <a:srgbClr val="17364A"/>
+                </a:solidFill>
+                <a:latin typeface="Aptos" pitchFamily="34" charset="0"/>
+                <a:ea typeface="Aptos" pitchFamily="34" charset="-122"/>
+                <a:cs typeface="Aptos" pitchFamily="34" charset="-120"/>
+              </a:rPr>
+              <a:t>3. Which statement best describes a common failure mode?</a:t>
+            </a:r>
+            <a:endParaRPr lang="en-US" sz="1700" dirty="0"/>
+          </a:p>
+          <a:p>
+            <a:r>
+              <a:rPr lang="en-US" sz="1700" dirty="0">
+                <a:solidFill>
+                  <a:srgbClr val="17364A"/>
+                </a:solidFill>
+                <a:latin typeface="Aptos" pitchFamily="34" charset="0"/>
+                <a:ea typeface="Aptos" pitchFamily="34" charset="-122"/>
+                <a:cs typeface="Aptos" pitchFamily="34" charset="-120"/>
+              </a:rPr>
+              <a:t>4. What should be included in the practical artifact for this module?</a:t>
+            </a:r>
+            <a:endParaRPr lang="en-US" sz="1700" dirty="0"/>
+          </a:p>
+        </p:txBody>
+      </p:sp>
+      <p:sp>
+        <p:nvSpPr>
+          <p:cNvPr id="11" name="Shape 9"/>
+          <p:cNvSpPr/>
+          <p:nvPr/>
+        </p:nvSpPr>
+        <p:spPr>
+          <a:xfrm>
+            <a:off x="7909560" y="1417320"/>
+            <a:ext cx="3154680" cy="1828800"/>
+          </a:xfrm>
+          <a:prstGeom prst="roundRect">
+            <a:avLst>
+              <a:gd name="adj" fmla="val 6000"/>
+            </a:avLst>
+          </a:prstGeom>
+          <a:solidFill>
+            <a:srgbClr val="EEF8ED"/>
+          </a:solidFill>
+          <a:ln w="12700">
+            <a:solidFill>
+              <a:srgbClr val="B9D7E6"/>
+            </a:solidFill>
+            <a:prstDash val="solid"/>
+          </a:ln>
+        </p:spPr>
+      </p:sp>
+      <p:sp>
+        <p:nvSpPr>
+          <p:cNvPr id="12" name="Text 10"/>
+          <p:cNvSpPr/>
+          <p:nvPr/>
+        </p:nvSpPr>
+        <p:spPr>
+          <a:xfrm>
+            <a:off x="8074152" y="1563624"/>
+            <a:ext cx="2825496" cy="201168"/>
+          </a:xfrm>
+          <a:prstGeom prst="rect">
+            <a:avLst/>
+          </a:prstGeom>
+          <a:noFill/>
+          <a:ln/>
+        </p:spPr>
+        <p:txBody>
+          <a:bodyPr wrap="square" lIns="0" tIns="0" rIns="0" bIns="0" rtlCol="0" anchor="ctr"/>
+          <a:lstStyle/>
+          <a:p>
+            <a:pPr indent="0" marL="0">
+              <a:buNone/>
+            </a:pPr>
+            <a:r>
+              <a:rPr lang="en-US" sz="950" b="1" dirty="0">
+                <a:solidFill>
+                  <a:srgbClr val="0068B7"/>
+                </a:solidFill>
+                <a:latin typeface="Aptos" pitchFamily="34" charset="0"/>
+                <a:ea typeface="Aptos" pitchFamily="34" charset="-122"/>
+                <a:cs typeface="Aptos" pitchFamily="34" charset="-120"/>
+              </a:rPr>
+              <a:t>Key idea</a:t>
+            </a:r>
+            <a:endParaRPr lang="en-US" sz="950" dirty="0"/>
+          </a:p>
+        </p:txBody>
+      </p:sp>
+      <p:sp>
+        <p:nvSpPr>
+          <p:cNvPr id="13" name="Text 11"/>
+          <p:cNvSpPr/>
+          <p:nvPr/>
+        </p:nvSpPr>
+        <p:spPr>
+          <a:xfrm>
+            <a:off x="8074152" y="1856232"/>
+            <a:ext cx="2825496" cy="1261872"/>
+          </a:xfrm>
+          <a:prstGeom prst="rect">
+            <a:avLst/>
+          </a:prstGeom>
+          <a:noFill/>
+          <a:ln/>
+        </p:spPr>
+        <p:txBody>
+          <a:bodyPr wrap="square" lIns="0" tIns="0" rIns="0" bIns="0" rtlCol="0" anchor="t">
+            <a:normAutofit/>
+          </a:bodyPr>
+          <a:lstStyle/>
+          <a:p>
+            <a:pPr indent="0" marL="0">
+              <a:buNone/>
+            </a:pPr>
+            <a:r>
+              <a:rPr lang="en-US" sz="1250" dirty="0">
+                <a:solidFill>
+                  <a:srgbClr val="17364A"/>
+                </a:solidFill>
+                <a:latin typeface="Aptos" pitchFamily="34" charset="0"/>
+                <a:ea typeface="Aptos" pitchFamily="34" charset="-122"/>
+                <a:cs typeface="Aptos" pitchFamily="34" charset="-120"/>
+              </a:rPr>
+              <a:t>1. What is the best reason to address business analysis for ai-enabled public health systems before deployment?</a:t>
+            </a:r>
+            <a:endParaRPr lang="en-US" sz="1250" dirty="0"/>
+          </a:p>
+        </p:txBody>
+      </p:sp>
+      <p:sp>
+        <p:nvSpPr>
+          <p:cNvPr id="14" name="Shape 12"/>
+          <p:cNvSpPr/>
+          <p:nvPr/>
+        </p:nvSpPr>
+        <p:spPr>
+          <a:xfrm>
+            <a:off x="7909560" y="3520440"/>
+            <a:ext cx="3154680" cy="1737360"/>
+          </a:xfrm>
+          <a:prstGeom prst="roundRect">
+            <a:avLst>
+              <a:gd name="adj" fmla="val 6316"/>
+            </a:avLst>
+          </a:prstGeom>
+          <a:solidFill>
+            <a:srgbClr val="EAF6F8"/>
+          </a:solidFill>
+          <a:ln w="12700">
+            <a:solidFill>
+              <a:srgbClr val="B9D7E6"/>
+            </a:solidFill>
+            <a:prstDash val="solid"/>
+          </a:ln>
+        </p:spPr>
+      </p:sp>
+      <p:sp>
+        <p:nvSpPr>
+          <p:cNvPr id="15" name="Text 13"/>
+          <p:cNvSpPr/>
+          <p:nvPr/>
+        </p:nvSpPr>
+        <p:spPr>
+          <a:xfrm>
+            <a:off x="8074152" y="3666744"/>
+            <a:ext cx="2825496" cy="201168"/>
+          </a:xfrm>
+          <a:prstGeom prst="rect">
+            <a:avLst/>
+          </a:prstGeom>
+          <a:noFill/>
+          <a:ln/>
+        </p:spPr>
+        <p:txBody>
+          <a:bodyPr wrap="square" lIns="0" tIns="0" rIns="0" bIns="0" rtlCol="0" anchor="ctr"/>
+          <a:lstStyle/>
+          <a:p>
+            <a:pPr indent="0" marL="0">
+              <a:buNone/>
+            </a:pPr>
+            <a:r>
+              <a:rPr lang="en-US" sz="950" b="1" dirty="0">
+                <a:solidFill>
+                  <a:srgbClr val="0068B7"/>
+                </a:solidFill>
+                <a:latin typeface="Aptos" pitchFamily="34" charset="0"/>
+                <a:ea typeface="Aptos" pitchFamily="34" charset="-122"/>
+                <a:cs typeface="Aptos" pitchFamily="34" charset="-120"/>
+              </a:rPr>
+              <a:t>Use this for</a:t>
+            </a:r>
+            <a:endParaRPr lang="en-US" sz="950" dirty="0"/>
+          </a:p>
+        </p:txBody>
+      </p:sp>
+      <p:sp>
+        <p:nvSpPr>
+          <p:cNvPr id="16" name="Text 14"/>
+          <p:cNvSpPr/>
+          <p:nvPr/>
+        </p:nvSpPr>
+        <p:spPr>
+          <a:xfrm>
+            <a:off x="8074152" y="3959352"/>
+            <a:ext cx="2825496" cy="1170432"/>
+          </a:xfrm>
+          <a:prstGeom prst="rect">
+            <a:avLst/>
+          </a:prstGeom>
+          <a:noFill/>
+          <a:ln/>
+        </p:spPr>
+        <p:txBody>
+          <a:bodyPr wrap="square" lIns="0" tIns="0" rIns="0" bIns="0" rtlCol="0" anchor="t">
+            <a:normAutofit/>
+          </a:bodyPr>
+          <a:lstStyle/>
+          <a:p>
+            <a:pPr indent="0" marL="0">
+              <a:buNone/>
+            </a:pPr>
+            <a:r>
+              <a:rPr lang="en-US" sz="1250" dirty="0">
+                <a:solidFill>
+                  <a:srgbClr val="17364A"/>
+                </a:solidFill>
+                <a:latin typeface="Aptos" pitchFamily="34" charset="0"/>
+                <a:ea typeface="Aptos" pitchFamily="34" charset="-122"/>
+                <a:cs typeface="Aptos" pitchFamily="34" charset="-120"/>
+              </a:rPr>
+              <a:t>Connect the concept to public health decisions, safeguards, documentation, or implementation work.</a:t>
+            </a:r>
+            <a:endParaRPr lang="en-US" sz="1250" dirty="0"/>
+          </a:p>
+        </p:txBody>
+      </p:sp>
+    </p:spTree>
+  </p:cSld>
+  <p:clrMapOvr>
+    <a:masterClrMapping/>
+  </p:clrMapOvr>
+</p:sld>
+</file>
+
+<file path=ppt/slides/slide21.xml><?xml version="1.0" encoding="utf-8"?>
+<p:sld xmlns:a="http://schemas.openxmlformats.org/drawingml/2006/main" xmlns:r="http://schemas.openxmlformats.org/officeDocument/2006/relationships" xmlns:p="http://schemas.openxmlformats.org/presentationml/2006/main">
+  <p:cSld name="Slide 21">
+    <p:bg>
+      <p:bgPr>
+        <a:solidFill>
+          <a:srgbClr val="F7FBFD"/>
+        </a:solidFill>
+      </p:bgPr>
+    </p:bg>
+    <p:spTree>
+      <p:nvGrpSpPr>
+        <p:cNvPr id="1" name=""/>
+        <p:cNvGrpSpPr/>
+        <p:nvPr/>
+      </p:nvGrpSpPr>
+      <p:grpSpPr>
+        <a:xfrm>
+          <a:off x="0" y="0"/>
+          <a:ext cx="0" cy="0"/>
+          <a:chOff x="0" y="0"/>
+          <a:chExt cx="0" cy="0"/>
+        </a:xfrm>
+      </p:grpSpPr>
+      <p:sp>
+        <p:nvSpPr>
+          <p:cNvPr id="2" name="Shape 0"/>
+          <p:cNvSpPr/>
+          <p:nvPr/>
+        </p:nvSpPr>
+        <p:spPr>
+          <a:xfrm>
+            <a:off x="0" y="0"/>
+            <a:ext cx="12191695" cy="164592"/>
+          </a:xfrm>
+          <a:prstGeom prst="rect">
+            <a:avLst/>
+          </a:prstGeom>
+          <a:solidFill>
+            <a:srgbClr val="0068B7"/>
+          </a:solidFill>
+          <a:ln w="12700">
+            <a:solidFill>
+              <a:srgbClr val="0068B7"/>
+            </a:solidFill>
+            <a:prstDash val="solid"/>
+          </a:ln>
+        </p:spPr>
+      </p:sp>
+      <p:sp>
+        <p:nvSpPr>
+          <p:cNvPr id="3" name="Shape 1"/>
+          <p:cNvSpPr/>
+          <p:nvPr/>
+        </p:nvSpPr>
+        <p:spPr>
+          <a:xfrm>
+            <a:off x="0" y="164592"/>
+            <a:ext cx="146304" cy="6693408"/>
+          </a:xfrm>
+          <a:prstGeom prst="rect">
+            <a:avLst/>
+          </a:prstGeom>
+          <a:solidFill>
+            <a:srgbClr val="2F8A28"/>
+          </a:solidFill>
+          <a:ln w="12700">
+            <a:solidFill>
+              <a:srgbClr val="2F8A28"/>
+            </a:solidFill>
+            <a:prstDash val="solid"/>
+          </a:ln>
+        </p:spPr>
+      </p:sp>
+      <p:sp>
+        <p:nvSpPr>
+          <p:cNvPr id="4" name="Text 2"/>
+          <p:cNvSpPr/>
+          <p:nvPr/>
+        </p:nvSpPr>
+        <p:spPr>
+          <a:xfrm>
+            <a:off x="502920" y="292608"/>
+            <a:ext cx="10149840" cy="256032"/>
+          </a:xfrm>
+          <a:prstGeom prst="rect">
+            <a:avLst/>
+          </a:prstGeom>
+          <a:noFill/>
+          <a:ln/>
+        </p:spPr>
+        <p:txBody>
+          <a:bodyPr wrap="square" lIns="0" tIns="0" rIns="0" bIns="0" rtlCol="0" anchor="ctr"/>
+          <a:lstStyle/>
+          <a:p>
+            <a:pPr indent="0" marL="0">
+              <a:buNone/>
+            </a:pPr>
+            <a:r>
+              <a:rPr lang="en-US" sz="900" b="1" dirty="0">
+                <a:solidFill>
+                  <a:srgbClr val="5F7181"/>
+                </a:solidFill>
+                <a:latin typeface="Aptos" pitchFamily="34" charset="0"/>
+                <a:ea typeface="Aptos" pitchFamily="34" charset="-122"/>
+                <a:cs typeface="Aptos" pitchFamily="34" charset="-120"/>
+              </a:rPr>
+              <a:t>Business Analysis for AI-Enabled Public Health Systems</a:t>
+            </a:r>
+            <a:endParaRPr lang="en-US" sz="900" dirty="0"/>
+          </a:p>
+        </p:txBody>
+      </p:sp>
+      <p:sp>
+        <p:nvSpPr>
+          <p:cNvPr id="5" name="Text 3"/>
+          <p:cNvSpPr/>
+          <p:nvPr/>
+        </p:nvSpPr>
+        <p:spPr>
+          <a:xfrm>
+            <a:off x="502920" y="6537960"/>
+            <a:ext cx="7772400" cy="201168"/>
+          </a:xfrm>
+          <a:prstGeom prst="rect">
+            <a:avLst/>
+          </a:prstGeom>
+          <a:noFill/>
+          <a:ln/>
+        </p:spPr>
+        <p:txBody>
+          <a:bodyPr wrap="square" lIns="0" tIns="0" rIns="0" bIns="0" rtlCol="0" anchor="ctr"/>
+          <a:lstStyle/>
+          <a:p>
+            <a:pPr indent="0" marL="0">
+              <a:buNone/>
+            </a:pPr>
+            <a:r>
+              <a:rPr lang="en-US" sz="800" dirty="0">
+                <a:solidFill>
+                  <a:srgbClr val="5F7181"/>
+                </a:solidFill>
+                <a:latin typeface="Aptos" pitchFamily="34" charset="0"/>
+                <a:ea typeface="Aptos" pitchFamily="34" charset="-122"/>
+                <a:cs typeface="Aptos" pitchFamily="34" charset="-120"/>
+              </a:rPr>
+              <a:t>AI Playbook and Toolkit for Public Health Departments</a:t>
+            </a:r>
+            <a:endParaRPr lang="en-US" sz="800" dirty="0"/>
+          </a:p>
+        </p:txBody>
+      </p:sp>
+      <p:sp>
+        <p:nvSpPr>
+          <p:cNvPr id="6" name="Text 4"/>
+          <p:cNvSpPr/>
+          <p:nvPr/>
+        </p:nvSpPr>
+        <p:spPr>
+          <a:xfrm>
+            <a:off x="9966960" y="6537960"/>
+            <a:ext cx="1645920" cy="201168"/>
+          </a:xfrm>
+          <a:prstGeom prst="rect">
+            <a:avLst/>
+          </a:prstGeom>
+          <a:noFill/>
+          <a:ln/>
+        </p:spPr>
+        <p:txBody>
+          <a:bodyPr wrap="square" lIns="0" tIns="0" rIns="0" bIns="0" rtlCol="0" anchor="ctr"/>
+          <a:lstStyle/>
+          <a:p>
+            <a:pPr algn="r" indent="0" marL="0">
+              <a:buNone/>
+            </a:pPr>
+            <a:r>
+              <a:rPr lang="en-US" sz="800" dirty="0">
+                <a:solidFill>
+                  <a:srgbClr val="5F7181"/>
+                </a:solidFill>
+                <a:latin typeface="Aptos" pitchFamily="34" charset="0"/>
+                <a:ea typeface="Aptos" pitchFamily="34" charset="-122"/>
+                <a:cs typeface="Aptos" pitchFamily="34" charset="-120"/>
+              </a:rPr>
+              <a:t>© Paula Soper</a:t>
+            </a:r>
+            <a:endParaRPr lang="en-US" sz="800" dirty="0"/>
+          </a:p>
+        </p:txBody>
+      </p:sp>
+      <p:sp>
+        <p:nvSpPr>
+          <p:cNvPr id="7" name="Shape 5"/>
+          <p:cNvSpPr/>
+          <p:nvPr/>
+        </p:nvSpPr>
+        <p:spPr>
+          <a:xfrm>
+            <a:off x="640080" y="658368"/>
+            <a:ext cx="420624" cy="420624"/>
+          </a:xfrm>
+          <a:prstGeom prst="ellipse">
+            <a:avLst/>
+          </a:prstGeom>
+          <a:solidFill>
+            <a:srgbClr val="0068B7"/>
+          </a:solidFill>
+          <a:ln w="12700">
+            <a:solidFill>
+              <a:srgbClr val="0068B7"/>
+            </a:solidFill>
+            <a:prstDash val="solid"/>
+          </a:ln>
+        </p:spPr>
+      </p:sp>
+      <p:sp>
+        <p:nvSpPr>
+          <p:cNvPr id="8" name="Text 6"/>
+          <p:cNvSpPr/>
+          <p:nvPr/>
+        </p:nvSpPr>
+        <p:spPr>
+          <a:xfrm>
+            <a:off x="640080" y="731520"/>
+            <a:ext cx="420624" cy="164592"/>
+          </a:xfrm>
+          <a:prstGeom prst="rect">
+            <a:avLst/>
+          </a:prstGeom>
+          <a:noFill/>
+          <a:ln/>
+        </p:spPr>
+        <p:txBody>
+          <a:bodyPr wrap="square" lIns="0" tIns="0" rIns="0" bIns="0" rtlCol="0" anchor="ctr"/>
+          <a:lstStyle/>
+          <a:p>
+            <a:pPr algn="ctr" indent="0" marL="0">
+              <a:buNone/>
+            </a:pPr>
+            <a:r>
+              <a:rPr lang="en-US" sz="1100" b="1" dirty="0">
+                <a:solidFill>
+                  <a:srgbClr val="FFFFFF"/>
+                </a:solidFill>
+                <a:latin typeface="Aptos" pitchFamily="34" charset="0"/>
+                <a:ea typeface="Aptos" pitchFamily="34" charset="-122"/>
+                <a:cs typeface="Aptos" pitchFamily="34" charset="-120"/>
+              </a:rPr>
+              <a:t>15</a:t>
+            </a:r>
+            <a:endParaRPr lang="en-US" sz="1100" dirty="0"/>
+          </a:p>
+        </p:txBody>
+      </p:sp>
+      <p:sp>
+        <p:nvSpPr>
+          <p:cNvPr id="9" name="Text 7"/>
+          <p:cNvSpPr/>
+          <p:nvPr/>
+        </p:nvSpPr>
+        <p:spPr>
+          <a:xfrm>
+            <a:off x="640080" y="621792"/>
+            <a:ext cx="10881360" cy="566928"/>
+          </a:xfrm>
+          <a:prstGeom prst="rect">
+            <a:avLst/>
+          </a:prstGeom>
+          <a:noFill/>
+          <a:ln/>
+        </p:spPr>
+        <p:txBody>
+          <a:bodyPr wrap="square" lIns="0" tIns="0" rIns="0" bIns="0" rtlCol="0" anchor="ctr">
+            <a:normAutofit/>
+          </a:bodyPr>
+          <a:lstStyle/>
+          <a:p>
+            <a:pPr indent="0" marL="0">
+              <a:buNone/>
+            </a:pPr>
+            <a:r>
+              <a:rPr lang="en-US" sz="2700" b="1" dirty="0">
+                <a:solidFill>
+                  <a:srgbClr val="003A63"/>
+                </a:solidFill>
+                <a:latin typeface="Aptos Display" pitchFamily="34" charset="0"/>
+                <a:ea typeface="Aptos Display" pitchFamily="34" charset="-122"/>
+                <a:cs typeface="Aptos Display" pitchFamily="34" charset="-120"/>
+              </a:rPr>
+              <a:t>References and Resources</a:t>
+            </a:r>
+            <a:endParaRPr lang="en-US" sz="2700" dirty="0"/>
+          </a:p>
+        </p:txBody>
+      </p:sp>
+      <p:sp>
+        <p:nvSpPr>
+          <p:cNvPr id="10" name="Text 8"/>
+          <p:cNvSpPr/>
+          <p:nvPr/>
+        </p:nvSpPr>
+        <p:spPr>
+          <a:xfrm>
+            <a:off x="868680" y="1417320"/>
+            <a:ext cx="6675120" cy="4434840"/>
+          </a:xfrm>
+          <a:prstGeom prst="rect">
+            <a:avLst/>
+          </a:prstGeom>
+          <a:noFill/>
+          <a:ln/>
+        </p:spPr>
+        <p:txBody>
+          <a:bodyPr wrap="square" lIns="635" tIns="635" rIns="635" bIns="635" rtlCol="0" anchor="t">
+            <a:normAutofit/>
+          </a:bodyPr>
+          <a:lstStyle/>
+          <a:p>
+            <a:r>
+              <a:rPr lang="en-US" sz="1700" dirty="0">
+                <a:solidFill>
+                  <a:srgbClr val="17364A"/>
+                </a:solidFill>
+                <a:latin typeface="Aptos" pitchFamily="34" charset="0"/>
+                <a:ea typeface="Aptos" pitchFamily="34" charset="-122"/>
+                <a:cs typeface="Aptos" pitchFamily="34" charset="-120"/>
+              </a:rPr>
+              <a:t>NIST AI Risk Management Framework: https://www.nist.gov/itl/ai-risk-management-framework</a:t>
+            </a:r>
+            <a:endParaRPr lang="en-US" sz="1700" dirty="0"/>
+          </a:p>
+          <a:p>
+            <a:r>
+              <a:rPr lang="en-US" sz="1700" dirty="0">
+                <a:solidFill>
+                  <a:srgbClr val="17364A"/>
+                </a:solidFill>
+                <a:latin typeface="Aptos" pitchFamily="34" charset="0"/>
+                <a:ea typeface="Aptos" pitchFamily="34" charset="-122"/>
+                <a:cs typeface="Aptos" pitchFamily="34" charset="-120"/>
+              </a:rPr>
+              <a:t>NIST Generative AI Profile:.</a:t>
+            </a:r>
+            <a:endParaRPr lang="en-US" sz="1700" dirty="0"/>
+          </a:p>
+          <a:p>
+            <a:r>
+              <a:rPr lang="en-US" sz="1700" dirty="0">
+                <a:solidFill>
+                  <a:srgbClr val="17364A"/>
+                </a:solidFill>
+                <a:latin typeface="Aptos" pitchFamily="34" charset="0"/>
+                <a:ea typeface="Aptos" pitchFamily="34" charset="-122"/>
+                <a:cs typeface="Aptos" pitchFamily="34" charset="-120"/>
+              </a:rPr>
+              <a:t>CDC Public Health Data Strategy and Data Modernization resources:.</a:t>
+            </a:r>
+            <a:endParaRPr lang="en-US" sz="1700" dirty="0"/>
+          </a:p>
+          <a:p>
+            <a:r>
+              <a:rPr lang="en-US" sz="1700" dirty="0">
+                <a:solidFill>
+                  <a:srgbClr val="17364A"/>
+                </a:solidFill>
+                <a:latin typeface="Aptos" pitchFamily="34" charset="0"/>
+                <a:ea typeface="Aptos" pitchFamily="34" charset="-122"/>
+                <a:cs typeface="Aptos" pitchFamily="34" charset="-120"/>
+              </a:rPr>
+              <a:t>OWASP Top 10 for LLM Applications, when security or AI integrations are relevant</a:t>
+            </a:r>
+            <a:endParaRPr lang="en-US" sz="1700" dirty="0"/>
+          </a:p>
+        </p:txBody>
+      </p:sp>
+      <p:sp>
+        <p:nvSpPr>
+          <p:cNvPr id="11" name="Shape 9"/>
+          <p:cNvSpPr/>
+          <p:nvPr/>
+        </p:nvSpPr>
+        <p:spPr>
+          <a:xfrm>
+            <a:off x="7909560" y="1417320"/>
+            <a:ext cx="3154680" cy="1828800"/>
+          </a:xfrm>
+          <a:prstGeom prst="roundRect">
+            <a:avLst>
+              <a:gd name="adj" fmla="val 6000"/>
+            </a:avLst>
+          </a:prstGeom>
+          <a:solidFill>
+            <a:srgbClr val="EEF8ED"/>
+          </a:solidFill>
+          <a:ln w="12700">
+            <a:solidFill>
+              <a:srgbClr val="B9D7E6"/>
+            </a:solidFill>
+            <a:prstDash val="solid"/>
+          </a:ln>
+        </p:spPr>
+      </p:sp>
+      <p:sp>
+        <p:nvSpPr>
+          <p:cNvPr id="12" name="Text 10"/>
+          <p:cNvSpPr/>
+          <p:nvPr/>
+        </p:nvSpPr>
+        <p:spPr>
+          <a:xfrm>
+            <a:off x="8074152" y="1563624"/>
+            <a:ext cx="2825496" cy="201168"/>
+          </a:xfrm>
+          <a:prstGeom prst="rect">
+            <a:avLst/>
+          </a:prstGeom>
+          <a:noFill/>
+          <a:ln/>
+        </p:spPr>
+        <p:txBody>
+          <a:bodyPr wrap="square" lIns="0" tIns="0" rIns="0" bIns="0" rtlCol="0" anchor="ctr"/>
+          <a:lstStyle/>
+          <a:p>
+            <a:pPr indent="0" marL="0">
+              <a:buNone/>
+            </a:pPr>
+            <a:r>
+              <a:rPr lang="en-US" sz="950" b="1" dirty="0">
+                <a:solidFill>
+                  <a:srgbClr val="0068B7"/>
+                </a:solidFill>
+                <a:latin typeface="Aptos" pitchFamily="34" charset="0"/>
+                <a:ea typeface="Aptos" pitchFamily="34" charset="-122"/>
+                <a:cs typeface="Aptos" pitchFamily="34" charset="-120"/>
+              </a:rPr>
+              <a:t>Key idea</a:t>
+            </a:r>
+            <a:endParaRPr lang="en-US" sz="950" dirty="0"/>
+          </a:p>
+        </p:txBody>
+      </p:sp>
+      <p:sp>
+        <p:nvSpPr>
+          <p:cNvPr id="13" name="Text 11"/>
+          <p:cNvSpPr/>
+          <p:nvPr/>
+        </p:nvSpPr>
+        <p:spPr>
+          <a:xfrm>
+            <a:off x="8074152" y="1856232"/>
+            <a:ext cx="2825496" cy="1261872"/>
+          </a:xfrm>
+          <a:prstGeom prst="rect">
+            <a:avLst/>
+          </a:prstGeom>
+          <a:noFill/>
+          <a:ln/>
+        </p:spPr>
+        <p:txBody>
+          <a:bodyPr wrap="square" lIns="0" tIns="0" rIns="0" bIns="0" rtlCol="0" anchor="t">
+            <a:normAutofit/>
+          </a:bodyPr>
+          <a:lstStyle/>
+          <a:p>
+            <a:pPr indent="0" marL="0">
+              <a:buNone/>
+            </a:pPr>
+            <a:r>
+              <a:rPr lang="en-US" sz="1250" dirty="0">
+                <a:solidFill>
+                  <a:srgbClr val="17364A"/>
+                </a:solidFill>
+                <a:latin typeface="Aptos" pitchFamily="34" charset="0"/>
+                <a:ea typeface="Aptos" pitchFamily="34" charset="-122"/>
+                <a:cs typeface="Aptos" pitchFamily="34" charset="-120"/>
+              </a:rPr>
+              <a:t>NIST AI Risk Management Framework: https://www.nist.gov/itl/ai-risk-management-framework</a:t>
+            </a:r>
+            <a:endParaRPr lang="en-US" sz="1250" dirty="0"/>
+          </a:p>
+        </p:txBody>
+      </p:sp>
+      <p:sp>
+        <p:nvSpPr>
+          <p:cNvPr id="14" name="Shape 12"/>
+          <p:cNvSpPr/>
+          <p:nvPr/>
+        </p:nvSpPr>
+        <p:spPr>
+          <a:xfrm>
+            <a:off x="7909560" y="3520440"/>
+            <a:ext cx="3154680" cy="1737360"/>
+          </a:xfrm>
+          <a:prstGeom prst="roundRect">
+            <a:avLst>
+              <a:gd name="adj" fmla="val 6316"/>
+            </a:avLst>
+          </a:prstGeom>
+          <a:solidFill>
+            <a:srgbClr val="EAF6F8"/>
+          </a:solidFill>
+          <a:ln w="12700">
+            <a:solidFill>
+              <a:srgbClr val="B9D7E6"/>
+            </a:solidFill>
+            <a:prstDash val="solid"/>
+          </a:ln>
+        </p:spPr>
+      </p:sp>
+      <p:sp>
+        <p:nvSpPr>
+          <p:cNvPr id="15" name="Text 13"/>
+          <p:cNvSpPr/>
+          <p:nvPr/>
+        </p:nvSpPr>
+        <p:spPr>
+          <a:xfrm>
+            <a:off x="8074152" y="3666744"/>
+            <a:ext cx="2825496" cy="201168"/>
+          </a:xfrm>
+          <a:prstGeom prst="rect">
+            <a:avLst/>
+          </a:prstGeom>
+          <a:noFill/>
+          <a:ln/>
+        </p:spPr>
+        <p:txBody>
+          <a:bodyPr wrap="square" lIns="0" tIns="0" rIns="0" bIns="0" rtlCol="0" anchor="ctr"/>
+          <a:lstStyle/>
+          <a:p>
+            <a:pPr indent="0" marL="0">
+              <a:buNone/>
+            </a:pPr>
+            <a:r>
+              <a:rPr lang="en-US" sz="950" b="1" dirty="0">
+                <a:solidFill>
+                  <a:srgbClr val="0068B7"/>
+                </a:solidFill>
+                <a:latin typeface="Aptos" pitchFamily="34" charset="0"/>
+                <a:ea typeface="Aptos" pitchFamily="34" charset="-122"/>
+                <a:cs typeface="Aptos" pitchFamily="34" charset="-120"/>
+              </a:rPr>
+              <a:t>Use this for</a:t>
+            </a:r>
+            <a:endParaRPr lang="en-US" sz="950" dirty="0"/>
+          </a:p>
+        </p:txBody>
+      </p:sp>
+      <p:sp>
+        <p:nvSpPr>
+          <p:cNvPr id="16" name="Text 14"/>
+          <p:cNvSpPr/>
+          <p:nvPr/>
+        </p:nvSpPr>
+        <p:spPr>
+          <a:xfrm>
+            <a:off x="8074152" y="3959352"/>
+            <a:ext cx="2825496" cy="1170432"/>
+          </a:xfrm>
+          <a:prstGeom prst="rect">
+            <a:avLst/>
+          </a:prstGeom>
+          <a:noFill/>
+          <a:ln/>
+        </p:spPr>
+        <p:txBody>
+          <a:bodyPr wrap="square" lIns="0" tIns="0" rIns="0" bIns="0" rtlCol="0" anchor="t">
+            <a:normAutofit/>
+          </a:bodyPr>
+          <a:lstStyle/>
+          <a:p>
+            <a:pPr indent="0" marL="0">
+              <a:buNone/>
+            </a:pPr>
+            <a:r>
+              <a:rPr lang="en-US" sz="1250" dirty="0">
+                <a:solidFill>
+                  <a:srgbClr val="17364A"/>
+                </a:solidFill>
+                <a:latin typeface="Aptos" pitchFamily="34" charset="0"/>
+                <a:ea typeface="Aptos" pitchFamily="34" charset="-122"/>
+                <a:cs typeface="Aptos" pitchFamily="34" charset="-120"/>
+              </a:rPr>
+              <a:t>Connect the concept to public health decisions, safeguards, documentation, or implementation work.</a:t>
+            </a:r>
+            <a:endParaRPr lang="en-US" sz="1250" dirty="0"/>
           </a:p>
         </p:txBody>
       </p:sp>
@@ -5758,7 +10501,32 @@
       </p:sp>
       <p:sp>
         <p:nvSpPr>
-          <p:cNvPr id="3" name="Text 1"/>
+          <p:cNvPr id="3" name="Shape 1"/>
+          <p:cNvSpPr/>
+          <p:nvPr/>
+        </p:nvSpPr>
+        <p:spPr>
+          <a:xfrm>
+            <a:off x="0" y="164592"/>
+            <a:ext cx="146304" cy="6693408"/>
+          </a:xfrm>
+          <a:prstGeom prst="rect">
+            <a:avLst/>
+          </a:prstGeom>
+          <a:solidFill>
+            <a:srgbClr val="2F8A28"/>
+          </a:solidFill>
+          <a:ln w="12700">
+            <a:solidFill>
+              <a:srgbClr val="2F8A28"/>
+            </a:solidFill>
+            <a:prstDash val="solid"/>
+          </a:ln>
+        </p:spPr>
+      </p:sp>
+      <p:sp>
+        <p:nvSpPr>
+          <p:cNvPr id="4" name="Text 2"/>
           <p:cNvSpPr/>
           <p:nvPr/>
         </p:nvSpPr>
@@ -5797,7 +10565,7 @@
       </p:sp>
       <p:sp>
         <p:nvSpPr>
-          <p:cNvPr id="4" name="Text 2"/>
+          <p:cNvPr id="5" name="Text 3"/>
           <p:cNvSpPr/>
           <p:nvPr/>
         </p:nvSpPr>
@@ -5836,7 +10604,7 @@
       </p:sp>
       <p:sp>
         <p:nvSpPr>
-          <p:cNvPr id="5" name="Text 3"/>
+          <p:cNvPr id="6" name="Text 4"/>
           <p:cNvSpPr/>
           <p:nvPr/>
         </p:nvSpPr>
@@ -5875,7 +10643,7 @@
       </p:sp>
       <p:sp>
         <p:nvSpPr>
-          <p:cNvPr id="6" name="Text 4"/>
+          <p:cNvPr id="7" name="Text 5"/>
           <p:cNvSpPr/>
           <p:nvPr/>
         </p:nvSpPr>
@@ -5908,7 +10676,7 @@
                 <a:ea typeface="Aptos Display" pitchFamily="34" charset="-122"/>
                 <a:cs typeface="Aptos Display" pitchFamily="34" charset="-120"/>
               </a:rPr>
-              <a:t>Learning Objectives</a:t>
+              <a:t>How this module connects to the playbook</a:t>
             </a:r>
             <a:endParaRPr lang="en-US" sz="2700" dirty="0"/>
           </a:p>
@@ -5916,14 +10684,14 @@
       </p:sp>
       <p:sp>
         <p:nvSpPr>
-          <p:cNvPr id="7" name="Text 5"/>
-          <p:cNvSpPr/>
-          <p:nvPr/>
-        </p:nvSpPr>
-        <p:spPr>
-          <a:xfrm>
-            <a:off x="822960" y="1325880"/>
-            <a:ext cx="10378440" cy="4800600"/>
+          <p:cNvPr id="8" name="Text 6"/>
+          <p:cNvSpPr/>
+          <p:nvPr/>
+        </p:nvSpPr>
+        <p:spPr>
+          <a:xfrm>
+            <a:off x="868680" y="1417320"/>
+            <a:ext cx="6903720" cy="4480560"/>
           </a:xfrm>
           <a:prstGeom prst="rect">
             <a:avLst/>
@@ -5938,7 +10706,7 @@
           <a:lstStyle/>
           <a:p>
             <a:r>
-              <a:rPr lang="en-US" sz="1450" dirty="0">
+              <a:rPr lang="en-US" sz="1540" dirty="0">
                 <a:solidFill>
                   <a:srgbClr val="17364A"/>
                 </a:solidFill>
@@ -5946,13 +10714,13 @@
                 <a:ea typeface="Aptos" pitchFamily="34" charset="-122"/>
                 <a:cs typeface="Aptos" pitchFamily="34" charset="-120"/>
               </a:rPr>
-              <a:t>Explain the purpose of business analysis for ai-enabled public health systems in public health AI work.</a:t>
-            </a:r>
-            <a:endParaRPr lang="en-US" sz="1450" dirty="0"/>
-          </a:p>
-          <a:p>
-            <a:r>
-              <a:rPr lang="en-US" sz="1450" dirty="0">
+              <a:t>Play 11: Build and Deploy AI Solutions - This lesson informs Play 11 by helping learners connect the lesson topic to build and deploy.</a:t>
+            </a:r>
+            <a:endParaRPr lang="en-US" sz="1540" dirty="0"/>
+          </a:p>
+          <a:p>
+            <a:r>
+              <a:rPr lang="en-US" sz="1540" dirty="0">
                 <a:solidFill>
                   <a:srgbClr val="17364A"/>
                 </a:solidFill>
@@ -5960,13 +10728,13 @@
                 <a:ea typeface="Aptos" pitchFamily="34" charset="-122"/>
                 <a:cs typeface="Aptos" pitchFamily="34" charset="-120"/>
               </a:rPr>
-              <a:t>Identify the technical, operational, privacy, security, equity, and governance issues associated with the topic.</a:t>
-            </a:r>
-            <a:endParaRPr lang="en-US" sz="1450" dirty="0"/>
-          </a:p>
-          <a:p>
-            <a:r>
-              <a:rPr lang="en-US" sz="1450" dirty="0">
+              <a:t>Play 2: Readiness Assessment - This lesson informs Play 2 by helping learners connect the lesson topic to readiness assessment work.</a:t>
+            </a:r>
+            <a:endParaRPr lang="en-US" sz="1540" dirty="0"/>
+          </a:p>
+          <a:p>
+            <a:r>
+              <a:rPr lang="en-US" sz="1540" dirty="0">
                 <a:solidFill>
                   <a:srgbClr val="17364A"/>
                 </a:solidFill>
@@ -5974,13 +10742,13 @@
                 <a:ea typeface="Aptos" pitchFamily="34" charset="-122"/>
                 <a:cs typeface="Aptos" pitchFamily="34" charset="-120"/>
               </a:rPr>
-              <a:t>Apply the topic to a real or realistic public health workflow, system, or implementation scenario.</a:t>
-            </a:r>
-            <a:endParaRPr lang="en-US" sz="1450" dirty="0"/>
-          </a:p>
-          <a:p>
-            <a:r>
-              <a:rPr lang="en-US" sz="1450" dirty="0">
+              <a:t>Play 3: Establish AI Governance - This lesson informs Play 3 by helping learners connect the lesson topic to establish ai governance.</a:t>
+            </a:r>
+            <a:endParaRPr lang="en-US" sz="1540" dirty="0"/>
+          </a:p>
+          <a:p>
+            <a:r>
+              <a:rPr lang="en-US" sz="1540" dirty="0">
                 <a:solidFill>
                   <a:srgbClr val="17364A"/>
                 </a:solidFill>
@@ -5988,13 +10756,106 @@
                 <a:ea typeface="Aptos" pitchFamily="34" charset="-122"/>
                 <a:cs typeface="Aptos" pitchFamily="34" charset="-120"/>
               </a:rPr>
-              <a:t>Recognize common failure modes that can affect safety, accuracy, trust, workflow fit, or sustainability.</a:t>
-            </a:r>
-            <a:endParaRPr lang="en-US" sz="1450" dirty="0"/>
-          </a:p>
-          <a:p>
-            <a:r>
-              <a:rPr lang="en-US" sz="1450" dirty="0">
+              <a:t>Play 1: Vision &amp; Guardrails - This lesson informs Play 1 by helping learners connect the lesson topic to vision &amp; guardrails work in.</a:t>
+            </a:r>
+            <a:endParaRPr lang="en-US" sz="1540" dirty="0"/>
+          </a:p>
+        </p:txBody>
+      </p:sp>
+      <p:sp>
+        <p:nvSpPr>
+          <p:cNvPr id="9" name="Shape 7"/>
+          <p:cNvSpPr/>
+          <p:nvPr/>
+        </p:nvSpPr>
+        <p:spPr>
+          <a:xfrm>
+            <a:off x="8046720" y="1417320"/>
+            <a:ext cx="3063240" cy="2103120"/>
+          </a:xfrm>
+          <a:prstGeom prst="roundRect">
+            <a:avLst>
+              <a:gd name="adj" fmla="val 5217"/>
+            </a:avLst>
+          </a:prstGeom>
+          <a:solidFill>
+            <a:srgbClr val="EEF8ED"/>
+          </a:solidFill>
+          <a:ln w="12700">
+            <a:solidFill>
+              <a:srgbClr val="B9D7E6"/>
+            </a:solidFill>
+            <a:prstDash val="solid"/>
+          </a:ln>
+        </p:spPr>
+      </p:sp>
+      <p:sp>
+        <p:nvSpPr>
+          <p:cNvPr id="10" name="Text 8"/>
+          <p:cNvSpPr/>
+          <p:nvPr/>
+        </p:nvSpPr>
+        <p:spPr>
+          <a:xfrm>
+            <a:off x="8211312" y="1563624"/>
+            <a:ext cx="2734056" cy="201168"/>
+          </a:xfrm>
+          <a:prstGeom prst="rect">
+            <a:avLst/>
+          </a:prstGeom>
+          <a:noFill/>
+          <a:ln/>
+        </p:spPr>
+        <p:txBody>
+          <a:bodyPr wrap="square" lIns="0" tIns="0" rIns="0" bIns="0" rtlCol="0" anchor="ctr"/>
+          <a:lstStyle/>
+          <a:p>
+            <a:pPr indent="0" marL="0">
+              <a:buNone/>
+            </a:pPr>
+            <a:r>
+              <a:rPr lang="en-US" sz="950" b="1" dirty="0">
+                <a:solidFill>
+                  <a:srgbClr val="0068B7"/>
+                </a:solidFill>
+                <a:latin typeface="Aptos" pitchFamily="34" charset="0"/>
+                <a:ea typeface="Aptos" pitchFamily="34" charset="-122"/>
+                <a:cs typeface="Aptos" pitchFamily="34" charset="-120"/>
+              </a:rPr>
+              <a:t>Apply the lesson</a:t>
+            </a:r>
+            <a:endParaRPr lang="en-US" sz="950" dirty="0"/>
+          </a:p>
+        </p:txBody>
+      </p:sp>
+      <p:sp>
+        <p:nvSpPr>
+          <p:cNvPr id="11" name="Text 9"/>
+          <p:cNvSpPr/>
+          <p:nvPr/>
+        </p:nvSpPr>
+        <p:spPr>
+          <a:xfrm>
+            <a:off x="8211312" y="1856232"/>
+            <a:ext cx="2734056" cy="1536192"/>
+          </a:xfrm>
+          <a:prstGeom prst="rect">
+            <a:avLst/>
+          </a:prstGeom>
+          <a:noFill/>
+          <a:ln/>
+        </p:spPr>
+        <p:txBody>
+          <a:bodyPr wrap="square" lIns="0" tIns="0" rIns="0" bIns="0" rtlCol="0" anchor="t">
+            <a:normAutofit/>
+          </a:bodyPr>
+          <a:lstStyle/>
+          <a:p>
+            <a:pPr indent="0" marL="0">
+              <a:buNone/>
+            </a:pPr>
+            <a:r>
+              <a:rPr lang="en-US" sz="1250" dirty="0">
                 <a:solidFill>
                   <a:srgbClr val="17364A"/>
                 </a:solidFill>
@@ -6002,9 +10863,116 @@
                 <a:ea typeface="Aptos" pitchFamily="34" charset="-122"/>
                 <a:cs typeface="Aptos" pitchFamily="34" charset="-120"/>
               </a:rPr>
-              <a:t>Identify practical guardrails that should be documented before implementation.</a:t>
-            </a:r>
-            <a:endParaRPr lang="en-US" sz="1450" dirty="0"/>
+              <a:t>Use the related plays to identify decisions, participants, timing, approvals, and documentation needed for responsible implementation.</a:t>
+            </a:r>
+            <a:endParaRPr lang="en-US" sz="1250" dirty="0"/>
+          </a:p>
+        </p:txBody>
+      </p:sp>
+      <p:sp>
+        <p:nvSpPr>
+          <p:cNvPr id="12" name="Shape 10"/>
+          <p:cNvSpPr/>
+          <p:nvPr/>
+        </p:nvSpPr>
+        <p:spPr>
+          <a:xfrm>
+            <a:off x="8046720" y="3794760"/>
+            <a:ext cx="3063240" cy="1508760"/>
+          </a:xfrm>
+          <a:prstGeom prst="roundRect">
+            <a:avLst>
+              <a:gd name="adj" fmla="val 7273"/>
+            </a:avLst>
+          </a:prstGeom>
+          <a:solidFill>
+            <a:srgbClr val="FFF4D9"/>
+          </a:solidFill>
+          <a:ln w="12700">
+            <a:solidFill>
+              <a:srgbClr val="B9D7E6"/>
+            </a:solidFill>
+            <a:prstDash val="solid"/>
+          </a:ln>
+        </p:spPr>
+      </p:sp>
+      <p:sp>
+        <p:nvSpPr>
+          <p:cNvPr id="13" name="Text 11"/>
+          <p:cNvSpPr/>
+          <p:nvPr/>
+        </p:nvSpPr>
+        <p:spPr>
+          <a:xfrm>
+            <a:off x="8211312" y="3941064"/>
+            <a:ext cx="2734056" cy="201168"/>
+          </a:xfrm>
+          <a:prstGeom prst="rect">
+            <a:avLst/>
+          </a:prstGeom>
+          <a:noFill/>
+          <a:ln/>
+        </p:spPr>
+        <p:txBody>
+          <a:bodyPr wrap="square" lIns="0" tIns="0" rIns="0" bIns="0" rtlCol="0" anchor="ctr"/>
+          <a:lstStyle/>
+          <a:p>
+            <a:pPr indent="0" marL="0">
+              <a:buNone/>
+            </a:pPr>
+            <a:r>
+              <a:rPr lang="en-US" sz="950" b="1" dirty="0">
+                <a:solidFill>
+                  <a:srgbClr val="0068B7"/>
+                </a:solidFill>
+                <a:latin typeface="Aptos" pitchFamily="34" charset="0"/>
+                <a:ea typeface="Aptos" pitchFamily="34" charset="-122"/>
+                <a:cs typeface="Aptos" pitchFamily="34" charset="-120"/>
+              </a:rPr>
+              <a:t>Keep in mind</a:t>
+            </a:r>
+            <a:endParaRPr lang="en-US" sz="950" dirty="0"/>
+          </a:p>
+        </p:txBody>
+      </p:sp>
+      <p:sp>
+        <p:nvSpPr>
+          <p:cNvPr id="14" name="Text 12"/>
+          <p:cNvSpPr/>
+          <p:nvPr/>
+        </p:nvSpPr>
+        <p:spPr>
+          <a:xfrm>
+            <a:off x="8211312" y="4233672"/>
+            <a:ext cx="2734056" cy="941832"/>
+          </a:xfrm>
+          <a:prstGeom prst="rect">
+            <a:avLst/>
+          </a:prstGeom>
+          <a:noFill/>
+          <a:ln/>
+        </p:spPr>
+        <p:txBody>
+          <a:bodyPr wrap="square" lIns="0" tIns="0" rIns="0" bIns="0" rtlCol="0" anchor="t">
+            <a:normAutofit/>
+          </a:bodyPr>
+          <a:lstStyle/>
+          <a:p>
+            <a:pPr indent="0" marL="0">
+              <a:buNone/>
+            </a:pPr>
+            <a:r>
+              <a:rPr lang="en-US" sz="1250" dirty="0">
+                <a:solidFill>
+                  <a:srgbClr val="17364A"/>
+                </a:solidFill>
+                <a:latin typeface="Aptos" pitchFamily="34" charset="0"/>
+                <a:ea typeface="Aptos" pitchFamily="34" charset="-122"/>
+                <a:cs typeface="Aptos" pitchFamily="34" charset="-120"/>
+              </a:rPr>
+              <a:t>The playbook connection helps turn training into agency work, not just individual knowledge.</a:t>
+            </a:r>
+            <a:endParaRPr lang="en-US" sz="1250" dirty="0"/>
           </a:p>
         </p:txBody>
       </p:sp>
@@ -6067,7 +11035,32 @@
       </p:sp>
       <p:sp>
         <p:nvSpPr>
-          <p:cNvPr id="3" name="Text 1"/>
+          <p:cNvPr id="3" name="Shape 1"/>
+          <p:cNvSpPr/>
+          <p:nvPr/>
+        </p:nvSpPr>
+        <p:spPr>
+          <a:xfrm>
+            <a:off x="0" y="164592"/>
+            <a:ext cx="146304" cy="6693408"/>
+          </a:xfrm>
+          <a:prstGeom prst="rect">
+            <a:avLst/>
+          </a:prstGeom>
+          <a:solidFill>
+            <a:srgbClr val="2F8A28"/>
+          </a:solidFill>
+          <a:ln w="12700">
+            <a:solidFill>
+              <a:srgbClr val="2F8A28"/>
+            </a:solidFill>
+            <a:prstDash val="solid"/>
+          </a:ln>
+        </p:spPr>
+      </p:sp>
+      <p:sp>
+        <p:nvSpPr>
+          <p:cNvPr id="4" name="Text 2"/>
           <p:cNvSpPr/>
           <p:nvPr/>
         </p:nvSpPr>
@@ -6106,7 +11099,7 @@
       </p:sp>
       <p:sp>
         <p:nvSpPr>
-          <p:cNvPr id="4" name="Text 2"/>
+          <p:cNvPr id="5" name="Text 3"/>
           <p:cNvSpPr/>
           <p:nvPr/>
         </p:nvSpPr>
@@ -6145,7 +11138,7 @@
       </p:sp>
       <p:sp>
         <p:nvSpPr>
-          <p:cNvPr id="5" name="Text 3"/>
+          <p:cNvPr id="6" name="Text 4"/>
           <p:cNvSpPr/>
           <p:nvPr/>
         </p:nvSpPr>
@@ -6184,7 +11177,7 @@
       </p:sp>
       <p:sp>
         <p:nvSpPr>
-          <p:cNvPr id="6" name="Text 4"/>
+          <p:cNvPr id="7" name="Text 5"/>
           <p:cNvSpPr/>
           <p:nvPr/>
         </p:nvSpPr>
@@ -6217,7 +11210,7 @@
                 <a:ea typeface="Aptos Display" pitchFamily="34" charset="-122"/>
                 <a:cs typeface="Aptos Display" pitchFamily="34" charset="-120"/>
               </a:rPr>
-              <a:t>Learning Objectives Continued</a:t>
+              <a:t>Related toolkit resources</a:t>
             </a:r>
             <a:endParaRPr lang="en-US" sz="2700" dirty="0"/>
           </a:p>
@@ -6225,14 +11218,14 @@
       </p:sp>
       <p:sp>
         <p:nvSpPr>
-          <p:cNvPr id="7" name="Text 5"/>
-          <p:cNvSpPr/>
-          <p:nvPr/>
-        </p:nvSpPr>
-        <p:spPr>
-          <a:xfrm>
-            <a:off x="822960" y="1325880"/>
-            <a:ext cx="10378440" cy="4800600"/>
+          <p:cNvPr id="8" name="Text 6"/>
+          <p:cNvSpPr/>
+          <p:nvPr/>
+        </p:nvSpPr>
+        <p:spPr>
+          <a:xfrm>
+            <a:off x="868680" y="1417320"/>
+            <a:ext cx="6903720" cy="4480560"/>
           </a:xfrm>
           <a:prstGeom prst="rect">
             <a:avLst/>
@@ -6247,7 +11240,7 @@
           <a:lstStyle/>
           <a:p>
             <a:r>
-              <a:rPr lang="en-US" sz="1450" dirty="0">
+              <a:rPr lang="en-US" sz="1460" dirty="0">
                 <a:solidFill>
                   <a:srgbClr val="17364A"/>
                 </a:solidFill>
@@ -6255,9 +11248,279 @@
                 <a:ea typeface="Aptos" pitchFamily="34" charset="-122"/>
                 <a:cs typeface="Aptos" pitchFamily="34" charset="-120"/>
               </a:rPr>
-              <a:t>Produce a AI business analysis package that can support readiness assessment, governance review, procurement, implementation, or monitoring.</a:t>
-            </a:r>
-            <a:endParaRPr lang="en-US" sz="1450" dirty="0"/>
+              <a:t>Tool 4: AI Policy Landscape Scan (Worksheet) - Use AI Policy Landscape Scan to translate this lesson into a documented public health.</a:t>
+            </a:r>
+            <a:endParaRPr lang="en-US" sz="1460" dirty="0"/>
+          </a:p>
+          <a:p>
+            <a:r>
+              <a:rPr lang="en-US" sz="1460" dirty="0">
+                <a:solidFill>
+                  <a:srgbClr val="17364A"/>
+                </a:solidFill>
+                <a:latin typeface="Aptos" pitchFamily="34" charset="0"/>
+                <a:ea typeface="Aptos" pitchFamily="34" charset="-122"/>
+                <a:cs typeface="Aptos" pitchFamily="34" charset="-120"/>
+              </a:rPr>
+              <a:t>Tool 5: AI Environmental and Resource Impact Review (Checklist) - Use this tool to complete or strengthen the practical exercise for.</a:t>
+            </a:r>
+            <a:endParaRPr lang="en-US" sz="1460" dirty="0"/>
+          </a:p>
+          <a:p>
+            <a:r>
+              <a:rPr lang="en-US" sz="1460" dirty="0">
+                <a:solidFill>
+                  <a:srgbClr val="17364A"/>
+                </a:solidFill>
+                <a:latin typeface="Aptos" pitchFamily="34" charset="0"/>
+                <a:ea typeface="Aptos" pitchFamily="34" charset="-122"/>
+                <a:cs typeface="Aptos" pitchFamily="34" charset="-120"/>
+              </a:rPr>
+              <a:t>Tool 6: Human-Centered AI Decision Rule Checklist (Checklist) - Use this tool to complete or strengthen the practical exercise for.</a:t>
+            </a:r>
+            <a:endParaRPr lang="en-US" sz="1460" dirty="0"/>
+          </a:p>
+          <a:p>
+            <a:r>
+              <a:rPr lang="en-US" sz="1460" dirty="0">
+                <a:solidFill>
+                  <a:srgbClr val="17364A"/>
+                </a:solidFill>
+                <a:latin typeface="Aptos" pitchFamily="34" charset="0"/>
+                <a:ea typeface="Aptos" pitchFamily="34" charset="-122"/>
+                <a:cs typeface="Aptos" pitchFamily="34" charset="-120"/>
+              </a:rPr>
+              <a:t>Tool 8: AI Project Charter (Planning) - Use AI Project Charter to translate this lesson into a documented public health AI planning,.</a:t>
+            </a:r>
+            <a:endParaRPr lang="en-US" sz="1460" dirty="0"/>
+          </a:p>
+          <a:p>
+            <a:r>
+              <a:rPr lang="en-US" sz="1460" dirty="0">
+                <a:solidFill>
+                  <a:srgbClr val="17364A"/>
+                </a:solidFill>
+                <a:latin typeface="Aptos" pitchFamily="34" charset="0"/>
+                <a:ea typeface="Aptos" pitchFamily="34" charset="-122"/>
+                <a:cs typeface="Aptos" pitchFamily="34" charset="-120"/>
+              </a:rPr>
+              <a:t>Tool 9: Data Quality Assessment Checklist (Checklist) - Use this tool to complete or strengthen the practical exercise for the module.</a:t>
+            </a:r>
+            <a:endParaRPr lang="en-US" sz="1460" dirty="0"/>
+          </a:p>
+        </p:txBody>
+      </p:sp>
+      <p:sp>
+        <p:nvSpPr>
+          <p:cNvPr id="9" name="Shape 7"/>
+          <p:cNvSpPr/>
+          <p:nvPr/>
+        </p:nvSpPr>
+        <p:spPr>
+          <a:xfrm>
+            <a:off x="8046720" y="1417320"/>
+            <a:ext cx="3063240" cy="2103120"/>
+          </a:xfrm>
+          <a:prstGeom prst="roundRect">
+            <a:avLst>
+              <a:gd name="adj" fmla="val 5217"/>
+            </a:avLst>
+          </a:prstGeom>
+          <a:solidFill>
+            <a:srgbClr val="EAF6F8"/>
+          </a:solidFill>
+          <a:ln w="12700">
+            <a:solidFill>
+              <a:srgbClr val="B9D7E6"/>
+            </a:solidFill>
+            <a:prstDash val="solid"/>
+          </a:ln>
+        </p:spPr>
+      </p:sp>
+      <p:sp>
+        <p:nvSpPr>
+          <p:cNvPr id="10" name="Text 8"/>
+          <p:cNvSpPr/>
+          <p:nvPr/>
+        </p:nvSpPr>
+        <p:spPr>
+          <a:xfrm>
+            <a:off x="8211312" y="1563624"/>
+            <a:ext cx="2734056" cy="201168"/>
+          </a:xfrm>
+          <a:prstGeom prst="rect">
+            <a:avLst/>
+          </a:prstGeom>
+          <a:noFill/>
+          <a:ln/>
+        </p:spPr>
+        <p:txBody>
+          <a:bodyPr wrap="square" lIns="0" tIns="0" rIns="0" bIns="0" rtlCol="0" anchor="ctr"/>
+          <a:lstStyle/>
+          <a:p>
+            <a:pPr indent="0" marL="0">
+              <a:buNone/>
+            </a:pPr>
+            <a:r>
+              <a:rPr lang="en-US" sz="950" b="1" dirty="0">
+                <a:solidFill>
+                  <a:srgbClr val="0068B7"/>
+                </a:solidFill>
+                <a:latin typeface="Aptos" pitchFamily="34" charset="0"/>
+                <a:ea typeface="Aptos" pitchFamily="34" charset="-122"/>
+                <a:cs typeface="Aptos" pitchFamily="34" charset="-120"/>
+              </a:rPr>
+              <a:t>Use the tools</a:t>
+            </a:r>
+            <a:endParaRPr lang="en-US" sz="950" dirty="0"/>
+          </a:p>
+        </p:txBody>
+      </p:sp>
+      <p:sp>
+        <p:nvSpPr>
+          <p:cNvPr id="11" name="Text 9"/>
+          <p:cNvSpPr/>
+          <p:nvPr/>
+        </p:nvSpPr>
+        <p:spPr>
+          <a:xfrm>
+            <a:off x="8211312" y="1856232"/>
+            <a:ext cx="2734056" cy="1536192"/>
+          </a:xfrm>
+          <a:prstGeom prst="rect">
+            <a:avLst/>
+          </a:prstGeom>
+          <a:noFill/>
+          <a:ln/>
+        </p:spPr>
+        <p:txBody>
+          <a:bodyPr wrap="square" lIns="0" tIns="0" rIns="0" bIns="0" rtlCol="0" anchor="t">
+            <a:normAutofit/>
+          </a:bodyPr>
+          <a:lstStyle/>
+          <a:p>
+            <a:pPr indent="0" marL="0">
+              <a:buNone/>
+            </a:pPr>
+            <a:r>
+              <a:rPr lang="en-US" sz="1250" dirty="0">
+                <a:solidFill>
+                  <a:srgbClr val="17364A"/>
+                </a:solidFill>
+                <a:latin typeface="Aptos" pitchFamily="34" charset="0"/>
+                <a:ea typeface="Aptos" pitchFamily="34" charset="-122"/>
+                <a:cs typeface="Aptos" pitchFamily="34" charset="-120"/>
+              </a:rPr>
+              <a:t>Use linked tools when your department needs a structured worksheet, template, checklist, review process, or documentation artifact.</a:t>
+            </a:r>
+            <a:endParaRPr lang="en-US" sz="1250" dirty="0"/>
+          </a:p>
+        </p:txBody>
+      </p:sp>
+      <p:sp>
+        <p:nvSpPr>
+          <p:cNvPr id="12" name="Shape 10"/>
+          <p:cNvSpPr/>
+          <p:nvPr/>
+        </p:nvSpPr>
+        <p:spPr>
+          <a:xfrm>
+            <a:off x="8046720" y="3794760"/>
+            <a:ext cx="3063240" cy="1508760"/>
+          </a:xfrm>
+          <a:prstGeom prst="roundRect">
+            <a:avLst>
+              <a:gd name="adj" fmla="val 7273"/>
+            </a:avLst>
+          </a:prstGeom>
+          <a:solidFill>
+            <a:srgbClr val="EEF8ED"/>
+          </a:solidFill>
+          <a:ln w="12700">
+            <a:solidFill>
+              <a:srgbClr val="B9D7E6"/>
+            </a:solidFill>
+            <a:prstDash val="solid"/>
+          </a:ln>
+        </p:spPr>
+      </p:sp>
+      <p:sp>
+        <p:nvSpPr>
+          <p:cNvPr id="13" name="Text 11"/>
+          <p:cNvSpPr/>
+          <p:nvPr/>
+        </p:nvSpPr>
+        <p:spPr>
+          <a:xfrm>
+            <a:off x="8211312" y="3941064"/>
+            <a:ext cx="2734056" cy="201168"/>
+          </a:xfrm>
+          <a:prstGeom prst="rect">
+            <a:avLst/>
+          </a:prstGeom>
+          <a:noFill/>
+          <a:ln/>
+        </p:spPr>
+        <p:txBody>
+          <a:bodyPr wrap="square" lIns="0" tIns="0" rIns="0" bIns="0" rtlCol="0" anchor="ctr"/>
+          <a:lstStyle/>
+          <a:p>
+            <a:pPr indent="0" marL="0">
+              <a:buNone/>
+            </a:pPr>
+            <a:r>
+              <a:rPr lang="en-US" sz="950" b="1" dirty="0">
+                <a:solidFill>
+                  <a:srgbClr val="0068B7"/>
+                </a:solidFill>
+                <a:latin typeface="Aptos" pitchFamily="34" charset="0"/>
+                <a:ea typeface="Aptos" pitchFamily="34" charset="-122"/>
+                <a:cs typeface="Aptos" pitchFamily="34" charset="-120"/>
+              </a:rPr>
+              <a:t>Avoid duplication</a:t>
+            </a:r>
+            <a:endParaRPr lang="en-US" sz="950" dirty="0"/>
+          </a:p>
+        </p:txBody>
+      </p:sp>
+      <p:sp>
+        <p:nvSpPr>
+          <p:cNvPr id="14" name="Text 12"/>
+          <p:cNvSpPr/>
+          <p:nvPr/>
+        </p:nvSpPr>
+        <p:spPr>
+          <a:xfrm>
+            <a:off x="8211312" y="4233672"/>
+            <a:ext cx="2734056" cy="941832"/>
+          </a:xfrm>
+          <a:prstGeom prst="rect">
+            <a:avLst/>
+          </a:prstGeom>
+          <a:noFill/>
+          <a:ln/>
+        </p:spPr>
+        <p:txBody>
+          <a:bodyPr wrap="square" lIns="0" tIns="0" rIns="0" bIns="0" rtlCol="0" anchor="t">
+            <a:normAutofit/>
+          </a:bodyPr>
+          <a:lstStyle/>
+          <a:p>
+            <a:pPr indent="0" marL="0">
+              <a:buNone/>
+            </a:pPr>
+            <a:r>
+              <a:rPr lang="en-US" sz="1250" dirty="0">
+                <a:solidFill>
+                  <a:srgbClr val="17364A"/>
+                </a:solidFill>
+                <a:latin typeface="Aptos" pitchFamily="34" charset="0"/>
+                <a:ea typeface="Aptos" pitchFamily="34" charset="-122"/>
+                <a:cs typeface="Aptos" pitchFamily="34" charset="-120"/>
+              </a:rPr>
+              <a:t>If your department already has a strong equivalent tool, adapt or use the existing process instead of recreating it.</a:t>
+            </a:r>
+            <a:endParaRPr lang="en-US" sz="1250" dirty="0"/>
           </a:p>
         </p:txBody>
       </p:sp>
@@ -6320,7 +11583,32 @@
       </p:sp>
       <p:sp>
         <p:nvSpPr>
-          <p:cNvPr id="3" name="Text 1"/>
+          <p:cNvPr id="3" name="Shape 1"/>
+          <p:cNvSpPr/>
+          <p:nvPr/>
+        </p:nvSpPr>
+        <p:spPr>
+          <a:xfrm>
+            <a:off x="0" y="164592"/>
+            <a:ext cx="146304" cy="6693408"/>
+          </a:xfrm>
+          <a:prstGeom prst="rect">
+            <a:avLst/>
+          </a:prstGeom>
+          <a:solidFill>
+            <a:srgbClr val="2F8A28"/>
+          </a:solidFill>
+          <a:ln w="12700">
+            <a:solidFill>
+              <a:srgbClr val="2F8A28"/>
+            </a:solidFill>
+            <a:prstDash val="solid"/>
+          </a:ln>
+        </p:spPr>
+      </p:sp>
+      <p:sp>
+        <p:nvSpPr>
+          <p:cNvPr id="4" name="Text 2"/>
           <p:cNvSpPr/>
           <p:nvPr/>
         </p:nvSpPr>
@@ -6359,7 +11647,7 @@
       </p:sp>
       <p:sp>
         <p:nvSpPr>
-          <p:cNvPr id="4" name="Text 2"/>
+          <p:cNvPr id="5" name="Text 3"/>
           <p:cNvSpPr/>
           <p:nvPr/>
         </p:nvSpPr>
@@ -6398,7 +11686,7 @@
       </p:sp>
       <p:sp>
         <p:nvSpPr>
-          <p:cNvPr id="5" name="Text 3"/>
+          <p:cNvPr id="6" name="Text 4"/>
           <p:cNvSpPr/>
           <p:nvPr/>
         </p:nvSpPr>
@@ -6437,13 +11725,77 @@
       </p:sp>
       <p:sp>
         <p:nvSpPr>
-          <p:cNvPr id="6" name="Text 4"/>
+          <p:cNvPr id="7" name="Shape 5"/>
           <p:cNvSpPr/>
           <p:nvPr/>
         </p:nvSpPr>
         <p:spPr>
           <a:xfrm>
             <a:off x="640080" y="658368"/>
+            <a:ext cx="420624" cy="420624"/>
+          </a:xfrm>
+          <a:prstGeom prst="ellipse">
+            <a:avLst/>
+          </a:prstGeom>
+          <a:solidFill>
+            <a:srgbClr val="0068B7"/>
+          </a:solidFill>
+          <a:ln w="12700">
+            <a:solidFill>
+              <a:srgbClr val="0068B7"/>
+            </a:solidFill>
+            <a:prstDash val="solid"/>
+          </a:ln>
+        </p:spPr>
+      </p:sp>
+      <p:sp>
+        <p:nvSpPr>
+          <p:cNvPr id="8" name="Text 6"/>
+          <p:cNvSpPr/>
+          <p:nvPr/>
+        </p:nvSpPr>
+        <p:spPr>
+          <a:xfrm>
+            <a:off x="640080" y="731520"/>
+            <a:ext cx="420624" cy="164592"/>
+          </a:xfrm>
+          <a:prstGeom prst="rect">
+            <a:avLst/>
+          </a:prstGeom>
+          <a:noFill/>
+          <a:ln/>
+        </p:spPr>
+        <p:txBody>
+          <a:bodyPr wrap="square" lIns="0" tIns="0" rIns="0" bIns="0" rtlCol="0" anchor="ctr"/>
+          <a:lstStyle/>
+          <a:p>
+            <a:pPr algn="ctr" indent="0" marL="0">
+              <a:buNone/>
+            </a:pPr>
+            <a:r>
+              <a:rPr lang="en-US" sz="1100" b="1" dirty="0">
+                <a:solidFill>
+                  <a:srgbClr val="FFFFFF"/>
+                </a:solidFill>
+                <a:latin typeface="Aptos" pitchFamily="34" charset="0"/>
+                <a:ea typeface="Aptos" pitchFamily="34" charset="-122"/>
+                <a:cs typeface="Aptos" pitchFamily="34" charset="-120"/>
+              </a:rPr>
+              <a:t>1</a:t>
+            </a:r>
+            <a:endParaRPr lang="en-US" sz="1100" dirty="0"/>
+          </a:p>
+        </p:txBody>
+      </p:sp>
+      <p:sp>
+        <p:nvSpPr>
+          <p:cNvPr id="9" name="Text 7"/>
+          <p:cNvSpPr/>
+          <p:nvPr/>
+        </p:nvSpPr>
+        <p:spPr>
+          <a:xfrm>
+            <a:off x="640080" y="621792"/>
             <a:ext cx="10881360" cy="566928"/>
           </a:xfrm>
           <a:prstGeom prst="rect">
@@ -6470,7 +11822,7 @@
                 <a:ea typeface="Aptos Display" pitchFamily="34" charset="-122"/>
                 <a:cs typeface="Aptos Display" pitchFamily="34" charset="-120"/>
               </a:rPr>
-              <a:t>Module Overview</a:t>
+              <a:t>Learning Objectives</a:t>
             </a:r>
             <a:endParaRPr lang="en-US" sz="2700" dirty="0"/>
           </a:p>
@@ -6478,32 +11830,178 @@
       </p:sp>
       <p:sp>
         <p:nvSpPr>
-          <p:cNvPr id="7" name="Text 5"/>
-          <p:cNvSpPr/>
-          <p:nvPr/>
-        </p:nvSpPr>
-        <p:spPr>
-          <a:xfrm>
-            <a:off x="822960" y="1325880"/>
-            <a:ext cx="10378440" cy="4800600"/>
-          </a:xfrm>
-          <a:prstGeom prst="rect">
-            <a:avLst/>
-          </a:prstGeom>
-          <a:noFill/>
-          <a:ln/>
-        </p:spPr>
-        <p:txBody>
-          <a:bodyPr wrap="square" lIns="1016" tIns="1016" rIns="1016" bIns="1016" rtlCol="0" anchor="t">
+          <p:cNvPr id="10" name="Text 8"/>
+          <p:cNvSpPr/>
+          <p:nvPr/>
+        </p:nvSpPr>
+        <p:spPr>
+          <a:xfrm>
+            <a:off x="868680" y="1417320"/>
+            <a:ext cx="6675120" cy="4434840"/>
+          </a:xfrm>
+          <a:prstGeom prst="rect">
+            <a:avLst/>
+          </a:prstGeom>
+          <a:noFill/>
+          <a:ln/>
+        </p:spPr>
+        <p:txBody>
+          <a:bodyPr wrap="square" lIns="635" tIns="635" rIns="635" bIns="635" rtlCol="0" anchor="t">
             <a:normAutofit/>
           </a:bodyPr>
           <a:lstStyle/>
           <a:p>
+            <a:r>
+              <a:rPr lang="en-US" sz="1700" dirty="0">
+                <a:solidFill>
+                  <a:srgbClr val="17364A"/>
+                </a:solidFill>
+                <a:latin typeface="Aptos" pitchFamily="34" charset="0"/>
+                <a:ea typeface="Aptos" pitchFamily="34" charset="-122"/>
+                <a:cs typeface="Aptos" pitchFamily="34" charset="-120"/>
+              </a:rPr>
+              <a:t>Explain the purpose of business analysis for ai-enabled public health systems in public health AI work.</a:t>
+            </a:r>
+            <a:endParaRPr lang="en-US" sz="1700" dirty="0"/>
+          </a:p>
+          <a:p>
+            <a:r>
+              <a:rPr lang="en-US" sz="1700" dirty="0">
+                <a:solidFill>
+                  <a:srgbClr val="17364A"/>
+                </a:solidFill>
+                <a:latin typeface="Aptos" pitchFamily="34" charset="0"/>
+                <a:ea typeface="Aptos" pitchFamily="34" charset="-122"/>
+                <a:cs typeface="Aptos" pitchFamily="34" charset="-120"/>
+              </a:rPr>
+              <a:t>Identify the technical, operational, privacy, security, equity, and governance issues associated with the topic.</a:t>
+            </a:r>
+            <a:endParaRPr lang="en-US" sz="1700" dirty="0"/>
+          </a:p>
+          <a:p>
+            <a:r>
+              <a:rPr lang="en-US" sz="1700" dirty="0">
+                <a:solidFill>
+                  <a:srgbClr val="17364A"/>
+                </a:solidFill>
+                <a:latin typeface="Aptos" pitchFamily="34" charset="0"/>
+                <a:ea typeface="Aptos" pitchFamily="34" charset="-122"/>
+                <a:cs typeface="Aptos" pitchFamily="34" charset="-120"/>
+              </a:rPr>
+              <a:t>Apply the topic to a real or realistic public health workflow, system, or implementation scenario.</a:t>
+            </a:r>
+            <a:endParaRPr lang="en-US" sz="1700" dirty="0"/>
+          </a:p>
+          <a:p>
+            <a:r>
+              <a:rPr lang="en-US" sz="1700" dirty="0">
+                <a:solidFill>
+                  <a:srgbClr val="17364A"/>
+                </a:solidFill>
+                <a:latin typeface="Aptos" pitchFamily="34" charset="0"/>
+                <a:ea typeface="Aptos" pitchFamily="34" charset="-122"/>
+                <a:cs typeface="Aptos" pitchFamily="34" charset="-120"/>
+              </a:rPr>
+              <a:t>Recognize common failure modes that can affect safety, accuracy, trust, workflow fit, or sustainability.</a:t>
+            </a:r>
+            <a:endParaRPr lang="en-US" sz="1700" dirty="0"/>
+          </a:p>
+        </p:txBody>
+      </p:sp>
+      <p:sp>
+        <p:nvSpPr>
+          <p:cNvPr id="11" name="Shape 9"/>
+          <p:cNvSpPr/>
+          <p:nvPr/>
+        </p:nvSpPr>
+        <p:spPr>
+          <a:xfrm>
+            <a:off x="7909560" y="1417320"/>
+            <a:ext cx="3154680" cy="1828800"/>
+          </a:xfrm>
+          <a:prstGeom prst="roundRect">
+            <a:avLst>
+              <a:gd name="adj" fmla="val 6000"/>
+            </a:avLst>
+          </a:prstGeom>
+          <a:solidFill>
+            <a:srgbClr val="EEF8ED"/>
+          </a:solidFill>
+          <a:ln w="12700">
+            <a:solidFill>
+              <a:srgbClr val="B9D7E6"/>
+            </a:solidFill>
+            <a:prstDash val="solid"/>
+          </a:ln>
+        </p:spPr>
+      </p:sp>
+      <p:sp>
+        <p:nvSpPr>
+          <p:cNvPr id="12" name="Text 10"/>
+          <p:cNvSpPr/>
+          <p:nvPr/>
+        </p:nvSpPr>
+        <p:spPr>
+          <a:xfrm>
+            <a:off x="8074152" y="1563624"/>
+            <a:ext cx="2825496" cy="201168"/>
+          </a:xfrm>
+          <a:prstGeom prst="rect">
+            <a:avLst/>
+          </a:prstGeom>
+          <a:noFill/>
+          <a:ln/>
+        </p:spPr>
+        <p:txBody>
+          <a:bodyPr wrap="square" lIns="0" tIns="0" rIns="0" bIns="0" rtlCol="0" anchor="ctr"/>
+          <a:lstStyle/>
+          <a:p>
             <a:pPr indent="0" marL="0">
               <a:buNone/>
             </a:pPr>
             <a:r>
-              <a:rPr lang="en-US" sz="1420" dirty="0">
+              <a:rPr lang="en-US" sz="950" b="1" dirty="0">
+                <a:solidFill>
+                  <a:srgbClr val="0068B7"/>
+                </a:solidFill>
+                <a:latin typeface="Aptos" pitchFamily="34" charset="0"/>
+                <a:ea typeface="Aptos" pitchFamily="34" charset="-122"/>
+                <a:cs typeface="Aptos" pitchFamily="34" charset="-120"/>
+              </a:rPr>
+              <a:t>Key idea</a:t>
+            </a:r>
+            <a:endParaRPr lang="en-US" sz="950" dirty="0"/>
+          </a:p>
+        </p:txBody>
+      </p:sp>
+      <p:sp>
+        <p:nvSpPr>
+          <p:cNvPr id="13" name="Text 11"/>
+          <p:cNvSpPr/>
+          <p:nvPr/>
+        </p:nvSpPr>
+        <p:spPr>
+          <a:xfrm>
+            <a:off x="8074152" y="1856232"/>
+            <a:ext cx="2825496" cy="1261872"/>
+          </a:xfrm>
+          <a:prstGeom prst="rect">
+            <a:avLst/>
+          </a:prstGeom>
+          <a:noFill/>
+          <a:ln/>
+        </p:spPr>
+        <p:txBody>
+          <a:bodyPr wrap="square" lIns="0" tIns="0" rIns="0" bIns="0" rtlCol="0" anchor="t">
+            <a:normAutofit/>
+          </a:bodyPr>
+          <a:lstStyle/>
+          <a:p>
+            <a:pPr indent="0" marL="0">
+              <a:buNone/>
+            </a:pPr>
+            <a:r>
+              <a:rPr lang="en-US" sz="1250" dirty="0">
                 <a:solidFill>
                   <a:srgbClr val="17364A"/>
                 </a:solidFill>
@@ -6511,9 +12009,116 @@
                 <a:ea typeface="Aptos" pitchFamily="34" charset="-122"/>
                 <a:cs typeface="Aptos" pitchFamily="34" charset="-120"/>
               </a:rPr>
-              <a:t>Business analysis translates public health needs into clear requirements, workflows, user stories, acceptance criteria, data needs, and implementation decisions. AI projects often fail when technical teams, vendors, and program staff do not share a precise understanding of the problem to be solved. This module gives informaticians and program leads a disciplined approach to defining AI-supported workflows before technology choices are finalized.</a:t>
-            </a:r>
-            <a:endParaRPr lang="en-US" sz="1420" dirty="0"/>
+              <a:t>Explain the purpose of business analysis for ai-enabled public health systems in public health AI work.</a:t>
+            </a:r>
+            <a:endParaRPr lang="en-US" sz="1250" dirty="0"/>
+          </a:p>
+        </p:txBody>
+      </p:sp>
+      <p:sp>
+        <p:nvSpPr>
+          <p:cNvPr id="14" name="Shape 12"/>
+          <p:cNvSpPr/>
+          <p:nvPr/>
+        </p:nvSpPr>
+        <p:spPr>
+          <a:xfrm>
+            <a:off x="7909560" y="3520440"/>
+            <a:ext cx="3154680" cy="1737360"/>
+          </a:xfrm>
+          <a:prstGeom prst="roundRect">
+            <a:avLst>
+              <a:gd name="adj" fmla="val 6316"/>
+            </a:avLst>
+          </a:prstGeom>
+          <a:solidFill>
+            <a:srgbClr val="EAF6F8"/>
+          </a:solidFill>
+          <a:ln w="12700">
+            <a:solidFill>
+              <a:srgbClr val="B9D7E6"/>
+            </a:solidFill>
+            <a:prstDash val="solid"/>
+          </a:ln>
+        </p:spPr>
+      </p:sp>
+      <p:sp>
+        <p:nvSpPr>
+          <p:cNvPr id="15" name="Text 13"/>
+          <p:cNvSpPr/>
+          <p:nvPr/>
+        </p:nvSpPr>
+        <p:spPr>
+          <a:xfrm>
+            <a:off x="8074152" y="3666744"/>
+            <a:ext cx="2825496" cy="201168"/>
+          </a:xfrm>
+          <a:prstGeom prst="rect">
+            <a:avLst/>
+          </a:prstGeom>
+          <a:noFill/>
+          <a:ln/>
+        </p:spPr>
+        <p:txBody>
+          <a:bodyPr wrap="square" lIns="0" tIns="0" rIns="0" bIns="0" rtlCol="0" anchor="ctr"/>
+          <a:lstStyle/>
+          <a:p>
+            <a:pPr indent="0" marL="0">
+              <a:buNone/>
+            </a:pPr>
+            <a:r>
+              <a:rPr lang="en-US" sz="950" b="1" dirty="0">
+                <a:solidFill>
+                  <a:srgbClr val="0068B7"/>
+                </a:solidFill>
+                <a:latin typeface="Aptos" pitchFamily="34" charset="0"/>
+                <a:ea typeface="Aptos" pitchFamily="34" charset="-122"/>
+                <a:cs typeface="Aptos" pitchFamily="34" charset="-120"/>
+              </a:rPr>
+              <a:t>Use this for</a:t>
+            </a:r>
+            <a:endParaRPr lang="en-US" sz="950" dirty="0"/>
+          </a:p>
+        </p:txBody>
+      </p:sp>
+      <p:sp>
+        <p:nvSpPr>
+          <p:cNvPr id="16" name="Text 14"/>
+          <p:cNvSpPr/>
+          <p:nvPr/>
+        </p:nvSpPr>
+        <p:spPr>
+          <a:xfrm>
+            <a:off x="8074152" y="3959352"/>
+            <a:ext cx="2825496" cy="1170432"/>
+          </a:xfrm>
+          <a:prstGeom prst="rect">
+            <a:avLst/>
+          </a:prstGeom>
+          <a:noFill/>
+          <a:ln/>
+        </p:spPr>
+        <p:txBody>
+          <a:bodyPr wrap="square" lIns="0" tIns="0" rIns="0" bIns="0" rtlCol="0" anchor="t">
+            <a:normAutofit/>
+          </a:bodyPr>
+          <a:lstStyle/>
+          <a:p>
+            <a:pPr indent="0" marL="0">
+              <a:buNone/>
+            </a:pPr>
+            <a:r>
+              <a:rPr lang="en-US" sz="1250" dirty="0">
+                <a:solidFill>
+                  <a:srgbClr val="17364A"/>
+                </a:solidFill>
+                <a:latin typeface="Aptos" pitchFamily="34" charset="0"/>
+                <a:ea typeface="Aptos" pitchFamily="34" charset="-122"/>
+                <a:cs typeface="Aptos" pitchFamily="34" charset="-120"/>
+              </a:rPr>
+              <a:t>Connect the concept to public health decisions, safeguards, documentation, or implementation work.</a:t>
+            </a:r>
+            <a:endParaRPr lang="en-US" sz="1250" dirty="0"/>
           </a:p>
         </p:txBody>
       </p:sp>
@@ -6576,7 +12181,32 @@
       </p:sp>
       <p:sp>
         <p:nvSpPr>
-          <p:cNvPr id="3" name="Text 1"/>
+          <p:cNvPr id="3" name="Shape 1"/>
+          <p:cNvSpPr/>
+          <p:nvPr/>
+        </p:nvSpPr>
+        <p:spPr>
+          <a:xfrm>
+            <a:off x="0" y="164592"/>
+            <a:ext cx="146304" cy="6693408"/>
+          </a:xfrm>
+          <a:prstGeom prst="rect">
+            <a:avLst/>
+          </a:prstGeom>
+          <a:solidFill>
+            <a:srgbClr val="2F8A28"/>
+          </a:solidFill>
+          <a:ln w="12700">
+            <a:solidFill>
+              <a:srgbClr val="2F8A28"/>
+            </a:solidFill>
+            <a:prstDash val="solid"/>
+          </a:ln>
+        </p:spPr>
+      </p:sp>
+      <p:sp>
+        <p:nvSpPr>
+          <p:cNvPr id="4" name="Text 2"/>
           <p:cNvSpPr/>
           <p:nvPr/>
         </p:nvSpPr>
@@ -6615,7 +12245,7 @@
       </p:sp>
       <p:sp>
         <p:nvSpPr>
-          <p:cNvPr id="4" name="Text 2"/>
+          <p:cNvPr id="5" name="Text 3"/>
           <p:cNvSpPr/>
           <p:nvPr/>
         </p:nvSpPr>
@@ -6654,7 +12284,7 @@
       </p:sp>
       <p:sp>
         <p:nvSpPr>
-          <p:cNvPr id="5" name="Text 3"/>
+          <p:cNvPr id="6" name="Text 4"/>
           <p:cNvSpPr/>
           <p:nvPr/>
         </p:nvSpPr>
@@ -6693,7 +12323,7 @@
       </p:sp>
       <p:sp>
         <p:nvSpPr>
-          <p:cNvPr id="6" name="Text 4"/>
+          <p:cNvPr id="7" name="Text 5"/>
           <p:cNvSpPr/>
           <p:nvPr/>
         </p:nvSpPr>
@@ -6726,7 +12356,7 @@
                 <a:ea typeface="Aptos Display" pitchFamily="34" charset="-122"/>
                 <a:cs typeface="Aptos Display" pitchFamily="34" charset="-120"/>
               </a:rPr>
-              <a:t>Jurisdiction and Agency Policy Note</a:t>
+              <a:t>Learning Objectives Continued</a:t>
             </a:r>
             <a:endParaRPr lang="en-US" sz="2700" dirty="0"/>
           </a:p>
@@ -6734,32 +12364,136 @@
       </p:sp>
       <p:sp>
         <p:nvSpPr>
-          <p:cNvPr id="7" name="Text 5"/>
-          <p:cNvSpPr/>
-          <p:nvPr/>
-        </p:nvSpPr>
-        <p:spPr>
-          <a:xfrm>
-            <a:off x="822960" y="1325880"/>
-            <a:ext cx="10378440" cy="4800600"/>
-          </a:xfrm>
-          <a:prstGeom prst="rect">
-            <a:avLst/>
-          </a:prstGeom>
-          <a:noFill/>
-          <a:ln/>
-        </p:spPr>
-        <p:txBody>
-          <a:bodyPr wrap="square" lIns="1016" tIns="1016" rIns="1016" bIns="1016" rtlCol="0" anchor="t">
+          <p:cNvPr id="8" name="Text 6"/>
+          <p:cNvSpPr/>
+          <p:nvPr/>
+        </p:nvSpPr>
+        <p:spPr>
+          <a:xfrm>
+            <a:off x="868680" y="1417320"/>
+            <a:ext cx="6675120" cy="4434840"/>
+          </a:xfrm>
+          <a:prstGeom prst="rect">
+            <a:avLst/>
+          </a:prstGeom>
+          <a:noFill/>
+          <a:ln/>
+        </p:spPr>
+        <p:txBody>
+          <a:bodyPr wrap="square" lIns="635" tIns="635" rIns="635" bIns="635" rtlCol="0" anchor="t">
             <a:normAutofit/>
           </a:bodyPr>
           <a:lstStyle/>
           <a:p>
+            <a:r>
+              <a:rPr lang="en-US" sz="1700" dirty="0">
+                <a:solidFill>
+                  <a:srgbClr val="17364A"/>
+                </a:solidFill>
+                <a:latin typeface="Aptos" pitchFamily="34" charset="0"/>
+                <a:ea typeface="Aptos" pitchFamily="34" charset="-122"/>
+                <a:cs typeface="Aptos" pitchFamily="34" charset="-120"/>
+              </a:rPr>
+              <a:t>Produce a AI business analysis package that can support readiness assessment, governance review, procurement, implementation,.</a:t>
+            </a:r>
+            <a:endParaRPr lang="en-US" sz="1700" dirty="0"/>
+          </a:p>
+        </p:txBody>
+      </p:sp>
+      <p:sp>
+        <p:nvSpPr>
+          <p:cNvPr id="9" name="Shape 7"/>
+          <p:cNvSpPr/>
+          <p:nvPr/>
+        </p:nvSpPr>
+        <p:spPr>
+          <a:xfrm>
+            <a:off x="7909560" y="1417320"/>
+            <a:ext cx="3154680" cy="1828800"/>
+          </a:xfrm>
+          <a:prstGeom prst="roundRect">
+            <a:avLst>
+              <a:gd name="adj" fmla="val 6000"/>
+            </a:avLst>
+          </a:prstGeom>
+          <a:solidFill>
+            <a:srgbClr val="EEF8ED"/>
+          </a:solidFill>
+          <a:ln w="12700">
+            <a:solidFill>
+              <a:srgbClr val="B9D7E6"/>
+            </a:solidFill>
+            <a:prstDash val="solid"/>
+          </a:ln>
+        </p:spPr>
+      </p:sp>
+      <p:sp>
+        <p:nvSpPr>
+          <p:cNvPr id="10" name="Text 8"/>
+          <p:cNvSpPr/>
+          <p:nvPr/>
+        </p:nvSpPr>
+        <p:spPr>
+          <a:xfrm>
+            <a:off x="8074152" y="1563624"/>
+            <a:ext cx="2825496" cy="201168"/>
+          </a:xfrm>
+          <a:prstGeom prst="rect">
+            <a:avLst/>
+          </a:prstGeom>
+          <a:noFill/>
+          <a:ln/>
+        </p:spPr>
+        <p:txBody>
+          <a:bodyPr wrap="square" lIns="0" tIns="0" rIns="0" bIns="0" rtlCol="0" anchor="ctr"/>
+          <a:lstStyle/>
+          <a:p>
             <a:pPr indent="0" marL="0">
               <a:buNone/>
             </a:pPr>
             <a:r>
-              <a:rPr lang="en-US" sz="1420" dirty="0">
+              <a:rPr lang="en-US" sz="950" b="1" dirty="0">
+                <a:solidFill>
+                  <a:srgbClr val="0068B7"/>
+                </a:solidFill>
+                <a:latin typeface="Aptos" pitchFamily="34" charset="0"/>
+                <a:ea typeface="Aptos" pitchFamily="34" charset="-122"/>
+                <a:cs typeface="Aptos" pitchFamily="34" charset="-120"/>
+              </a:rPr>
+              <a:t>Key idea</a:t>
+            </a:r>
+            <a:endParaRPr lang="en-US" sz="950" dirty="0"/>
+          </a:p>
+        </p:txBody>
+      </p:sp>
+      <p:sp>
+        <p:nvSpPr>
+          <p:cNvPr id="11" name="Text 9"/>
+          <p:cNvSpPr/>
+          <p:nvPr/>
+        </p:nvSpPr>
+        <p:spPr>
+          <a:xfrm>
+            <a:off x="8074152" y="1856232"/>
+            <a:ext cx="2825496" cy="1261872"/>
+          </a:xfrm>
+          <a:prstGeom prst="rect">
+            <a:avLst/>
+          </a:prstGeom>
+          <a:noFill/>
+          <a:ln/>
+        </p:spPr>
+        <p:txBody>
+          <a:bodyPr wrap="square" lIns="0" tIns="0" rIns="0" bIns="0" rtlCol="0" anchor="t">
+            <a:normAutofit/>
+          </a:bodyPr>
+          <a:lstStyle/>
+          <a:p>
+            <a:pPr indent="0" marL="0">
+              <a:buNone/>
+            </a:pPr>
+            <a:r>
+              <a:rPr lang="en-US" sz="1250" dirty="0">
                 <a:solidFill>
                   <a:srgbClr val="17364A"/>
                 </a:solidFill>
@@ -6767,9 +12501,116 @@
                 <a:ea typeface="Aptos" pitchFamily="34" charset="-122"/>
                 <a:cs typeface="Aptos" pitchFamily="34" charset="-120"/>
               </a:rPr>
-              <a:t>This national-level module is intended for training and planning purposes. It does not replace legal, privacy, procurement, civil rights, records, or agency policy review. Learners should confirm applicable requirements in their own jurisdiction and organization before implementing AI-supported workflows.</a:t>
-            </a:r>
-            <a:endParaRPr lang="en-US" sz="1420" dirty="0"/>
+              <a:t>Produce a AI business analysis package that can support readiness assessment, governance review, procurement, implementation,.</a:t>
+            </a:r>
+            <a:endParaRPr lang="en-US" sz="1250" dirty="0"/>
+          </a:p>
+        </p:txBody>
+      </p:sp>
+      <p:sp>
+        <p:nvSpPr>
+          <p:cNvPr id="12" name="Shape 10"/>
+          <p:cNvSpPr/>
+          <p:nvPr/>
+        </p:nvSpPr>
+        <p:spPr>
+          <a:xfrm>
+            <a:off x="7909560" y="3520440"/>
+            <a:ext cx="3154680" cy="1737360"/>
+          </a:xfrm>
+          <a:prstGeom prst="roundRect">
+            <a:avLst>
+              <a:gd name="adj" fmla="val 6316"/>
+            </a:avLst>
+          </a:prstGeom>
+          <a:solidFill>
+            <a:srgbClr val="EAF6F8"/>
+          </a:solidFill>
+          <a:ln w="12700">
+            <a:solidFill>
+              <a:srgbClr val="B9D7E6"/>
+            </a:solidFill>
+            <a:prstDash val="solid"/>
+          </a:ln>
+        </p:spPr>
+      </p:sp>
+      <p:sp>
+        <p:nvSpPr>
+          <p:cNvPr id="13" name="Text 11"/>
+          <p:cNvSpPr/>
+          <p:nvPr/>
+        </p:nvSpPr>
+        <p:spPr>
+          <a:xfrm>
+            <a:off x="8074152" y="3666744"/>
+            <a:ext cx="2825496" cy="201168"/>
+          </a:xfrm>
+          <a:prstGeom prst="rect">
+            <a:avLst/>
+          </a:prstGeom>
+          <a:noFill/>
+          <a:ln/>
+        </p:spPr>
+        <p:txBody>
+          <a:bodyPr wrap="square" lIns="0" tIns="0" rIns="0" bIns="0" rtlCol="0" anchor="ctr"/>
+          <a:lstStyle/>
+          <a:p>
+            <a:pPr indent="0" marL="0">
+              <a:buNone/>
+            </a:pPr>
+            <a:r>
+              <a:rPr lang="en-US" sz="950" b="1" dirty="0">
+                <a:solidFill>
+                  <a:srgbClr val="0068B7"/>
+                </a:solidFill>
+                <a:latin typeface="Aptos" pitchFamily="34" charset="0"/>
+                <a:ea typeface="Aptos" pitchFamily="34" charset="-122"/>
+                <a:cs typeface="Aptos" pitchFamily="34" charset="-120"/>
+              </a:rPr>
+              <a:t>Use this for</a:t>
+            </a:r>
+            <a:endParaRPr lang="en-US" sz="950" dirty="0"/>
+          </a:p>
+        </p:txBody>
+      </p:sp>
+      <p:sp>
+        <p:nvSpPr>
+          <p:cNvPr id="14" name="Text 12"/>
+          <p:cNvSpPr/>
+          <p:nvPr/>
+        </p:nvSpPr>
+        <p:spPr>
+          <a:xfrm>
+            <a:off x="8074152" y="3959352"/>
+            <a:ext cx="2825496" cy="1170432"/>
+          </a:xfrm>
+          <a:prstGeom prst="rect">
+            <a:avLst/>
+          </a:prstGeom>
+          <a:noFill/>
+          <a:ln/>
+        </p:spPr>
+        <p:txBody>
+          <a:bodyPr wrap="square" lIns="0" tIns="0" rIns="0" bIns="0" rtlCol="0" anchor="t">
+            <a:normAutofit/>
+          </a:bodyPr>
+          <a:lstStyle/>
+          <a:p>
+            <a:pPr indent="0" marL="0">
+              <a:buNone/>
+            </a:pPr>
+            <a:r>
+              <a:rPr lang="en-US" sz="1250" dirty="0">
+                <a:solidFill>
+                  <a:srgbClr val="17364A"/>
+                </a:solidFill>
+                <a:latin typeface="Aptos" pitchFamily="34" charset="0"/>
+                <a:ea typeface="Aptos" pitchFamily="34" charset="-122"/>
+                <a:cs typeface="Aptos" pitchFamily="34" charset="-120"/>
+              </a:rPr>
+              <a:t>Connect the concept to public health decisions, safeguards, documentation, or implementation work.</a:t>
+            </a:r>
+            <a:endParaRPr lang="en-US" sz="1250" dirty="0"/>
           </a:p>
         </p:txBody>
       </p:sp>
@@ -6832,7 +12673,32 @@
       </p:sp>
       <p:sp>
         <p:nvSpPr>
-          <p:cNvPr id="3" name="Text 1"/>
+          <p:cNvPr id="3" name="Shape 1"/>
+          <p:cNvSpPr/>
+          <p:nvPr/>
+        </p:nvSpPr>
+        <p:spPr>
+          <a:xfrm>
+            <a:off x="0" y="164592"/>
+            <a:ext cx="146304" cy="6693408"/>
+          </a:xfrm>
+          <a:prstGeom prst="rect">
+            <a:avLst/>
+          </a:prstGeom>
+          <a:solidFill>
+            <a:srgbClr val="2F8A28"/>
+          </a:solidFill>
+          <a:ln w="12700">
+            <a:solidFill>
+              <a:srgbClr val="2F8A28"/>
+            </a:solidFill>
+            <a:prstDash val="solid"/>
+          </a:ln>
+        </p:spPr>
+      </p:sp>
+      <p:sp>
+        <p:nvSpPr>
+          <p:cNvPr id="4" name="Text 2"/>
           <p:cNvSpPr/>
           <p:nvPr/>
         </p:nvSpPr>
@@ -6871,7 +12737,7 @@
       </p:sp>
       <p:sp>
         <p:nvSpPr>
-          <p:cNvPr id="4" name="Text 2"/>
+          <p:cNvPr id="5" name="Text 3"/>
           <p:cNvSpPr/>
           <p:nvPr/>
         </p:nvSpPr>
@@ -6910,7 +12776,7 @@
       </p:sp>
       <p:sp>
         <p:nvSpPr>
-          <p:cNvPr id="5" name="Text 3"/>
+          <p:cNvPr id="6" name="Text 4"/>
           <p:cNvSpPr/>
           <p:nvPr/>
         </p:nvSpPr>
@@ -6949,13 +12815,77 @@
       </p:sp>
       <p:sp>
         <p:nvSpPr>
-          <p:cNvPr id="6" name="Text 4"/>
+          <p:cNvPr id="7" name="Shape 5"/>
           <p:cNvSpPr/>
           <p:nvPr/>
         </p:nvSpPr>
         <p:spPr>
           <a:xfrm>
             <a:off x="640080" y="658368"/>
+            <a:ext cx="420624" cy="420624"/>
+          </a:xfrm>
+          <a:prstGeom prst="ellipse">
+            <a:avLst/>
+          </a:prstGeom>
+          <a:solidFill>
+            <a:srgbClr val="0068B7"/>
+          </a:solidFill>
+          <a:ln w="12700">
+            <a:solidFill>
+              <a:srgbClr val="0068B7"/>
+            </a:solidFill>
+            <a:prstDash val="solid"/>
+          </a:ln>
+        </p:spPr>
+      </p:sp>
+      <p:sp>
+        <p:nvSpPr>
+          <p:cNvPr id="8" name="Text 6"/>
+          <p:cNvSpPr/>
+          <p:nvPr/>
+        </p:nvSpPr>
+        <p:spPr>
+          <a:xfrm>
+            <a:off x="640080" y="731520"/>
+            <a:ext cx="420624" cy="164592"/>
+          </a:xfrm>
+          <a:prstGeom prst="rect">
+            <a:avLst/>
+          </a:prstGeom>
+          <a:noFill/>
+          <a:ln/>
+        </p:spPr>
+        <p:txBody>
+          <a:bodyPr wrap="square" lIns="0" tIns="0" rIns="0" bIns="0" rtlCol="0" anchor="ctr"/>
+          <a:lstStyle/>
+          <a:p>
+            <a:pPr algn="ctr" indent="0" marL="0">
+              <a:buNone/>
+            </a:pPr>
+            <a:r>
+              <a:rPr lang="en-US" sz="1100" b="1" dirty="0">
+                <a:solidFill>
+                  <a:srgbClr val="FFFFFF"/>
+                </a:solidFill>
+                <a:latin typeface="Aptos" pitchFamily="34" charset="0"/>
+                <a:ea typeface="Aptos" pitchFamily="34" charset="-122"/>
+                <a:cs typeface="Aptos" pitchFamily="34" charset="-120"/>
+              </a:rPr>
+              <a:t>2</a:t>
+            </a:r>
+            <a:endParaRPr lang="en-US" sz="1100" dirty="0"/>
+          </a:p>
+        </p:txBody>
+      </p:sp>
+      <p:sp>
+        <p:nvSpPr>
+          <p:cNvPr id="9" name="Text 7"/>
+          <p:cNvSpPr/>
+          <p:nvPr/>
+        </p:nvSpPr>
+        <p:spPr>
+          <a:xfrm>
+            <a:off x="640080" y="621792"/>
             <a:ext cx="10881360" cy="566928"/>
           </a:xfrm>
           <a:prstGeom prst="rect">
@@ -6982,7 +12912,7 @@
                 <a:ea typeface="Aptos Display" pitchFamily="34" charset="-122"/>
                 <a:cs typeface="Aptos Display" pitchFamily="34" charset="-120"/>
               </a:rPr>
-              <a:t>Why This Topic Matters for Public Health AI</a:t>
+              <a:t>Module Overview</a:t>
             </a:r>
             <a:endParaRPr lang="en-US" sz="2700" dirty="0"/>
           </a:p>
@@ -6990,32 +12920,164 @@
       </p:sp>
       <p:sp>
         <p:nvSpPr>
-          <p:cNvPr id="7" name="Text 5"/>
-          <p:cNvSpPr/>
-          <p:nvPr/>
-        </p:nvSpPr>
-        <p:spPr>
-          <a:xfrm>
-            <a:off x="822960" y="1325880"/>
-            <a:ext cx="10378440" cy="4800600"/>
-          </a:xfrm>
-          <a:prstGeom prst="rect">
-            <a:avLst/>
-          </a:prstGeom>
-          <a:noFill/>
-          <a:ln/>
-        </p:spPr>
-        <p:txBody>
-          <a:bodyPr wrap="square" lIns="1016" tIns="1016" rIns="1016" bIns="1016" rtlCol="0" anchor="t">
+          <p:cNvPr id="10" name="Text 8"/>
+          <p:cNvSpPr/>
+          <p:nvPr/>
+        </p:nvSpPr>
+        <p:spPr>
+          <a:xfrm>
+            <a:off x="868680" y="1417320"/>
+            <a:ext cx="6675120" cy="4434840"/>
+          </a:xfrm>
+          <a:prstGeom prst="rect">
+            <a:avLst/>
+          </a:prstGeom>
+          <a:noFill/>
+          <a:ln/>
+        </p:spPr>
+        <p:txBody>
+          <a:bodyPr wrap="square" lIns="635" tIns="635" rIns="635" bIns="635" rtlCol="0" anchor="t">
             <a:normAutofit/>
           </a:bodyPr>
           <a:lstStyle/>
           <a:p>
+            <a:r>
+              <a:rPr lang="en-US" sz="1700" dirty="0">
+                <a:solidFill>
+                  <a:srgbClr val="17364A"/>
+                </a:solidFill>
+                <a:latin typeface="Aptos" pitchFamily="34" charset="0"/>
+                <a:ea typeface="Aptos" pitchFamily="34" charset="-122"/>
+                <a:cs typeface="Aptos" pitchFamily="34" charset="-120"/>
+              </a:rPr>
+              <a:t>Business analysis translates public health needs into clear requirements, workflows, user stories, acceptance criteria,.</a:t>
+            </a:r>
+            <a:endParaRPr lang="en-US" sz="1700" dirty="0"/>
+          </a:p>
+          <a:p>
+            <a:r>
+              <a:rPr lang="en-US" sz="1700" dirty="0">
+                <a:solidFill>
+                  <a:srgbClr val="17364A"/>
+                </a:solidFill>
+                <a:latin typeface="Aptos" pitchFamily="34" charset="0"/>
+                <a:ea typeface="Aptos" pitchFamily="34" charset="-122"/>
+                <a:cs typeface="Aptos" pitchFamily="34" charset="-120"/>
+              </a:rPr>
+              <a:t>AI projects often fail when technical teams, vendors, and program staff do not share a precise understanding of the problem.</a:t>
+            </a:r>
+            <a:endParaRPr lang="en-US" sz="1700" dirty="0"/>
+          </a:p>
+          <a:p>
+            <a:r>
+              <a:rPr lang="en-US" sz="1700" dirty="0">
+                <a:solidFill>
+                  <a:srgbClr val="17364A"/>
+                </a:solidFill>
+                <a:latin typeface="Aptos" pitchFamily="34" charset="0"/>
+                <a:ea typeface="Aptos" pitchFamily="34" charset="-122"/>
+                <a:cs typeface="Aptos" pitchFamily="34" charset="-120"/>
+              </a:rPr>
+              <a:t>This module gives informaticians and program leads a disciplined approach to defining AI-supported workflows before.</a:t>
+            </a:r>
+            <a:endParaRPr lang="en-US" sz="1700" dirty="0"/>
+          </a:p>
+        </p:txBody>
+      </p:sp>
+      <p:sp>
+        <p:nvSpPr>
+          <p:cNvPr id="11" name="Shape 9"/>
+          <p:cNvSpPr/>
+          <p:nvPr/>
+        </p:nvSpPr>
+        <p:spPr>
+          <a:xfrm>
+            <a:off x="7909560" y="1417320"/>
+            <a:ext cx="3154680" cy="1828800"/>
+          </a:xfrm>
+          <a:prstGeom prst="roundRect">
+            <a:avLst>
+              <a:gd name="adj" fmla="val 6000"/>
+            </a:avLst>
+          </a:prstGeom>
+          <a:solidFill>
+            <a:srgbClr val="EEF8ED"/>
+          </a:solidFill>
+          <a:ln w="12700">
+            <a:solidFill>
+              <a:srgbClr val="B9D7E6"/>
+            </a:solidFill>
+            <a:prstDash val="solid"/>
+          </a:ln>
+        </p:spPr>
+      </p:sp>
+      <p:sp>
+        <p:nvSpPr>
+          <p:cNvPr id="12" name="Text 10"/>
+          <p:cNvSpPr/>
+          <p:nvPr/>
+        </p:nvSpPr>
+        <p:spPr>
+          <a:xfrm>
+            <a:off x="8074152" y="1563624"/>
+            <a:ext cx="2825496" cy="201168"/>
+          </a:xfrm>
+          <a:prstGeom prst="rect">
+            <a:avLst/>
+          </a:prstGeom>
+          <a:noFill/>
+          <a:ln/>
+        </p:spPr>
+        <p:txBody>
+          <a:bodyPr wrap="square" lIns="0" tIns="0" rIns="0" bIns="0" rtlCol="0" anchor="ctr"/>
+          <a:lstStyle/>
+          <a:p>
             <a:pPr indent="0" marL="0">
               <a:buNone/>
             </a:pPr>
             <a:r>
-              <a:rPr lang="en-US" sz="1420" dirty="0">
+              <a:rPr lang="en-US" sz="950" b="1" dirty="0">
+                <a:solidFill>
+                  <a:srgbClr val="0068B7"/>
+                </a:solidFill>
+                <a:latin typeface="Aptos" pitchFamily="34" charset="0"/>
+                <a:ea typeface="Aptos" pitchFamily="34" charset="-122"/>
+                <a:cs typeface="Aptos" pitchFamily="34" charset="-120"/>
+              </a:rPr>
+              <a:t>Key idea</a:t>
+            </a:r>
+            <a:endParaRPr lang="en-US" sz="950" dirty="0"/>
+          </a:p>
+        </p:txBody>
+      </p:sp>
+      <p:sp>
+        <p:nvSpPr>
+          <p:cNvPr id="13" name="Text 11"/>
+          <p:cNvSpPr/>
+          <p:nvPr/>
+        </p:nvSpPr>
+        <p:spPr>
+          <a:xfrm>
+            <a:off x="8074152" y="1856232"/>
+            <a:ext cx="2825496" cy="1261872"/>
+          </a:xfrm>
+          <a:prstGeom prst="rect">
+            <a:avLst/>
+          </a:prstGeom>
+          <a:noFill/>
+          <a:ln/>
+        </p:spPr>
+        <p:txBody>
+          <a:bodyPr wrap="square" lIns="0" tIns="0" rIns="0" bIns="0" rtlCol="0" anchor="t">
+            <a:normAutofit/>
+          </a:bodyPr>
+          <a:lstStyle/>
+          <a:p>
+            <a:pPr indent="0" marL="0">
+              <a:buNone/>
+            </a:pPr>
+            <a:r>
+              <a:rPr lang="en-US" sz="1250" dirty="0">
                 <a:solidFill>
                   <a:srgbClr val="17364A"/>
                 </a:solidFill>
@@ -7023,9 +13085,116 @@
                 <a:ea typeface="Aptos" pitchFamily="34" charset="-122"/>
                 <a:cs typeface="Aptos" pitchFamily="34" charset="-120"/>
               </a:rPr>
-              <a:t>Business Analysis for AI-Enabled Public Health Systems matters because AI systems are embedded in public health programs, data systems, and decision processes rather than operating in isolation. The topic affects whether AI outputs are accurate, explainable, safe, equitable, secure, and sustainable. Agencies that ignore this area may create tools that work in a demonstration but fail in actual practice. The topic also affects accountability. Public health agencies must be able to explain how data are used, why a tool was approved, what evidence supports the workflow, who reviews outputs, and what happens when the system fails. These responsibilities become more important as AI tools move from experimentation into operational use.</a:t>
-            </a:r>
-            <a:endParaRPr lang="en-US" sz="1420" dirty="0"/>
+              <a:t>Business analysis translates public health needs into clear requirements, workflows, user stories, acceptance criteria,.</a:t>
+            </a:r>
+            <a:endParaRPr lang="en-US" sz="1250" dirty="0"/>
+          </a:p>
+        </p:txBody>
+      </p:sp>
+      <p:sp>
+        <p:nvSpPr>
+          <p:cNvPr id="14" name="Shape 12"/>
+          <p:cNvSpPr/>
+          <p:nvPr/>
+        </p:nvSpPr>
+        <p:spPr>
+          <a:xfrm>
+            <a:off x="7909560" y="3520440"/>
+            <a:ext cx="3154680" cy="1737360"/>
+          </a:xfrm>
+          <a:prstGeom prst="roundRect">
+            <a:avLst>
+              <a:gd name="adj" fmla="val 6316"/>
+            </a:avLst>
+          </a:prstGeom>
+          <a:solidFill>
+            <a:srgbClr val="EAF6F8"/>
+          </a:solidFill>
+          <a:ln w="12700">
+            <a:solidFill>
+              <a:srgbClr val="B9D7E6"/>
+            </a:solidFill>
+            <a:prstDash val="solid"/>
+          </a:ln>
+        </p:spPr>
+      </p:sp>
+      <p:sp>
+        <p:nvSpPr>
+          <p:cNvPr id="15" name="Text 13"/>
+          <p:cNvSpPr/>
+          <p:nvPr/>
+        </p:nvSpPr>
+        <p:spPr>
+          <a:xfrm>
+            <a:off x="8074152" y="3666744"/>
+            <a:ext cx="2825496" cy="201168"/>
+          </a:xfrm>
+          <a:prstGeom prst="rect">
+            <a:avLst/>
+          </a:prstGeom>
+          <a:noFill/>
+          <a:ln/>
+        </p:spPr>
+        <p:txBody>
+          <a:bodyPr wrap="square" lIns="0" tIns="0" rIns="0" bIns="0" rtlCol="0" anchor="ctr"/>
+          <a:lstStyle/>
+          <a:p>
+            <a:pPr indent="0" marL="0">
+              <a:buNone/>
+            </a:pPr>
+            <a:r>
+              <a:rPr lang="en-US" sz="950" b="1" dirty="0">
+                <a:solidFill>
+                  <a:srgbClr val="0068B7"/>
+                </a:solidFill>
+                <a:latin typeface="Aptos" pitchFamily="34" charset="0"/>
+                <a:ea typeface="Aptos" pitchFamily="34" charset="-122"/>
+                <a:cs typeface="Aptos" pitchFamily="34" charset="-120"/>
+              </a:rPr>
+              <a:t>Use this for</a:t>
+            </a:r>
+            <a:endParaRPr lang="en-US" sz="950" dirty="0"/>
+          </a:p>
+        </p:txBody>
+      </p:sp>
+      <p:sp>
+        <p:nvSpPr>
+          <p:cNvPr id="16" name="Text 14"/>
+          <p:cNvSpPr/>
+          <p:nvPr/>
+        </p:nvSpPr>
+        <p:spPr>
+          <a:xfrm>
+            <a:off x="8074152" y="3959352"/>
+            <a:ext cx="2825496" cy="1170432"/>
+          </a:xfrm>
+          <a:prstGeom prst="rect">
+            <a:avLst/>
+          </a:prstGeom>
+          <a:noFill/>
+          <a:ln/>
+        </p:spPr>
+        <p:txBody>
+          <a:bodyPr wrap="square" lIns="0" tIns="0" rIns="0" bIns="0" rtlCol="0" anchor="t">
+            <a:normAutofit/>
+          </a:bodyPr>
+          <a:lstStyle/>
+          <a:p>
+            <a:pPr indent="0" marL="0">
+              <a:buNone/>
+            </a:pPr>
+            <a:r>
+              <a:rPr lang="en-US" sz="1250" dirty="0">
+                <a:solidFill>
+                  <a:srgbClr val="17364A"/>
+                </a:solidFill>
+                <a:latin typeface="Aptos" pitchFamily="34" charset="0"/>
+                <a:ea typeface="Aptos" pitchFamily="34" charset="-122"/>
+                <a:cs typeface="Aptos" pitchFamily="34" charset="-120"/>
+              </a:rPr>
+              <a:t>Connect the concept to public health decisions, safeguards, documentation, or implementation work.</a:t>
+            </a:r>
+            <a:endParaRPr lang="en-US" sz="1250" dirty="0"/>
           </a:p>
         </p:txBody>
       </p:sp>
@@ -7088,7 +13257,32 @@
       </p:sp>
       <p:sp>
         <p:nvSpPr>
-          <p:cNvPr id="3" name="Text 1"/>
+          <p:cNvPr id="3" name="Shape 1"/>
+          <p:cNvSpPr/>
+          <p:nvPr/>
+        </p:nvSpPr>
+        <p:spPr>
+          <a:xfrm>
+            <a:off x="0" y="164592"/>
+            <a:ext cx="146304" cy="6693408"/>
+          </a:xfrm>
+          <a:prstGeom prst="rect">
+            <a:avLst/>
+          </a:prstGeom>
+          <a:solidFill>
+            <a:srgbClr val="2F8A28"/>
+          </a:solidFill>
+          <a:ln w="12700">
+            <a:solidFill>
+              <a:srgbClr val="2F8A28"/>
+            </a:solidFill>
+            <a:prstDash val="solid"/>
+          </a:ln>
+        </p:spPr>
+      </p:sp>
+      <p:sp>
+        <p:nvSpPr>
+          <p:cNvPr id="4" name="Text 2"/>
           <p:cNvSpPr/>
           <p:nvPr/>
         </p:nvSpPr>
@@ -7127,7 +13321,7 @@
       </p:sp>
       <p:sp>
         <p:nvSpPr>
-          <p:cNvPr id="4" name="Text 2"/>
+          <p:cNvPr id="5" name="Text 3"/>
           <p:cNvSpPr/>
           <p:nvPr/>
         </p:nvSpPr>
@@ -7166,7 +13360,7 @@
       </p:sp>
       <p:sp>
         <p:nvSpPr>
-          <p:cNvPr id="5" name="Text 3"/>
+          <p:cNvPr id="6" name="Text 4"/>
           <p:cNvSpPr/>
           <p:nvPr/>
         </p:nvSpPr>
@@ -7205,13 +13399,77 @@
       </p:sp>
       <p:sp>
         <p:nvSpPr>
-          <p:cNvPr id="6" name="Text 4"/>
+          <p:cNvPr id="7" name="Shape 5"/>
           <p:cNvSpPr/>
           <p:nvPr/>
         </p:nvSpPr>
         <p:spPr>
           <a:xfrm>
             <a:off x="640080" y="658368"/>
+            <a:ext cx="420624" cy="420624"/>
+          </a:xfrm>
+          <a:prstGeom prst="ellipse">
+            <a:avLst/>
+          </a:prstGeom>
+          <a:solidFill>
+            <a:srgbClr val="0068B7"/>
+          </a:solidFill>
+          <a:ln w="12700">
+            <a:solidFill>
+              <a:srgbClr val="0068B7"/>
+            </a:solidFill>
+            <a:prstDash val="solid"/>
+          </a:ln>
+        </p:spPr>
+      </p:sp>
+      <p:sp>
+        <p:nvSpPr>
+          <p:cNvPr id="8" name="Text 6"/>
+          <p:cNvSpPr/>
+          <p:nvPr/>
+        </p:nvSpPr>
+        <p:spPr>
+          <a:xfrm>
+            <a:off x="640080" y="731520"/>
+            <a:ext cx="420624" cy="164592"/>
+          </a:xfrm>
+          <a:prstGeom prst="rect">
+            <a:avLst/>
+          </a:prstGeom>
+          <a:noFill/>
+          <a:ln/>
+        </p:spPr>
+        <p:txBody>
+          <a:bodyPr wrap="square" lIns="0" tIns="0" rIns="0" bIns="0" rtlCol="0" anchor="ctr"/>
+          <a:lstStyle/>
+          <a:p>
+            <a:pPr algn="ctr" indent="0" marL="0">
+              <a:buNone/>
+            </a:pPr>
+            <a:r>
+              <a:rPr lang="en-US" sz="1100" b="1" dirty="0">
+                <a:solidFill>
+                  <a:srgbClr val="FFFFFF"/>
+                </a:solidFill>
+                <a:latin typeface="Aptos" pitchFamily="34" charset="0"/>
+                <a:ea typeface="Aptos" pitchFamily="34" charset="-122"/>
+                <a:cs typeface="Aptos" pitchFamily="34" charset="-120"/>
+              </a:rPr>
+              <a:t>3</a:t>
+            </a:r>
+            <a:endParaRPr lang="en-US" sz="1100" dirty="0"/>
+          </a:p>
+        </p:txBody>
+      </p:sp>
+      <p:sp>
+        <p:nvSpPr>
+          <p:cNvPr id="9" name="Text 7"/>
+          <p:cNvSpPr/>
+          <p:nvPr/>
+        </p:nvSpPr>
+        <p:spPr>
+          <a:xfrm>
+            <a:off x="640080" y="621792"/>
             <a:ext cx="10881360" cy="566928"/>
           </a:xfrm>
           <a:prstGeom prst="rect">
@@ -7238,7 +13496,7 @@
                 <a:ea typeface="Aptos Display" pitchFamily="34" charset="-122"/>
                 <a:cs typeface="Aptos Display" pitchFamily="34" charset="-120"/>
               </a:rPr>
-              <a:t>Core Concepts</a:t>
+              <a:t>Jurisdiction and Agency Policy Note</a:t>
             </a:r>
             <a:endParaRPr lang="en-US" sz="2700" dirty="0"/>
           </a:p>
@@ -7246,32 +13504,164 @@
       </p:sp>
       <p:sp>
         <p:nvSpPr>
-          <p:cNvPr id="7" name="Text 5"/>
-          <p:cNvSpPr/>
-          <p:nvPr/>
-        </p:nvSpPr>
-        <p:spPr>
-          <a:xfrm>
-            <a:off x="822960" y="1325880"/>
-            <a:ext cx="10378440" cy="4800600"/>
-          </a:xfrm>
-          <a:prstGeom prst="rect">
-            <a:avLst/>
-          </a:prstGeom>
-          <a:noFill/>
-          <a:ln/>
-        </p:spPr>
-        <p:txBody>
-          <a:bodyPr wrap="square" lIns="1016" tIns="1016" rIns="1016" bIns="1016" rtlCol="0" anchor="t">
+          <p:cNvPr id="10" name="Text 8"/>
+          <p:cNvSpPr/>
+          <p:nvPr/>
+        </p:nvSpPr>
+        <p:spPr>
+          <a:xfrm>
+            <a:off x="868680" y="1417320"/>
+            <a:ext cx="6675120" cy="4434840"/>
+          </a:xfrm>
+          <a:prstGeom prst="rect">
+            <a:avLst/>
+          </a:prstGeom>
+          <a:noFill/>
+          <a:ln/>
+        </p:spPr>
+        <p:txBody>
+          <a:bodyPr wrap="square" lIns="635" tIns="635" rIns="635" bIns="635" rtlCol="0" anchor="t">
             <a:normAutofit/>
           </a:bodyPr>
           <a:lstStyle/>
           <a:p>
+            <a:r>
+              <a:rPr lang="en-US" sz="1700" dirty="0">
+                <a:solidFill>
+                  <a:srgbClr val="17364A"/>
+                </a:solidFill>
+                <a:latin typeface="Aptos" pitchFamily="34" charset="0"/>
+                <a:ea typeface="Aptos" pitchFamily="34" charset="-122"/>
+                <a:cs typeface="Aptos" pitchFamily="34" charset="-120"/>
+              </a:rPr>
+              <a:t>This national-level module is intended for training and planning purposes.</a:t>
+            </a:r>
+            <a:endParaRPr lang="en-US" sz="1700" dirty="0"/>
+          </a:p>
+          <a:p>
+            <a:r>
+              <a:rPr lang="en-US" sz="1700" dirty="0">
+                <a:solidFill>
+                  <a:srgbClr val="17364A"/>
+                </a:solidFill>
+                <a:latin typeface="Aptos" pitchFamily="34" charset="0"/>
+                <a:ea typeface="Aptos" pitchFamily="34" charset="-122"/>
+                <a:cs typeface="Aptos" pitchFamily="34" charset="-120"/>
+              </a:rPr>
+              <a:t>It does not replace legal, privacy, procurement, civil rights, records, or agency policy review.</a:t>
+            </a:r>
+            <a:endParaRPr lang="en-US" sz="1700" dirty="0"/>
+          </a:p>
+          <a:p>
+            <a:r>
+              <a:rPr lang="en-US" sz="1700" dirty="0">
+                <a:solidFill>
+                  <a:srgbClr val="17364A"/>
+                </a:solidFill>
+                <a:latin typeface="Aptos" pitchFamily="34" charset="0"/>
+                <a:ea typeface="Aptos" pitchFamily="34" charset="-122"/>
+                <a:cs typeface="Aptos" pitchFamily="34" charset="-120"/>
+              </a:rPr>
+              <a:t>Learners should confirm applicable requirements in their own jurisdiction and organization before implementing AI-supported.</a:t>
+            </a:r>
+            <a:endParaRPr lang="en-US" sz="1700" dirty="0"/>
+          </a:p>
+        </p:txBody>
+      </p:sp>
+      <p:sp>
+        <p:nvSpPr>
+          <p:cNvPr id="11" name="Shape 9"/>
+          <p:cNvSpPr/>
+          <p:nvPr/>
+        </p:nvSpPr>
+        <p:spPr>
+          <a:xfrm>
+            <a:off x="7909560" y="1417320"/>
+            <a:ext cx="3154680" cy="1828800"/>
+          </a:xfrm>
+          <a:prstGeom prst="roundRect">
+            <a:avLst>
+              <a:gd name="adj" fmla="val 6000"/>
+            </a:avLst>
+          </a:prstGeom>
+          <a:solidFill>
+            <a:srgbClr val="EEF8ED"/>
+          </a:solidFill>
+          <a:ln w="12700">
+            <a:solidFill>
+              <a:srgbClr val="B9D7E6"/>
+            </a:solidFill>
+            <a:prstDash val="solid"/>
+          </a:ln>
+        </p:spPr>
+      </p:sp>
+      <p:sp>
+        <p:nvSpPr>
+          <p:cNvPr id="12" name="Text 10"/>
+          <p:cNvSpPr/>
+          <p:nvPr/>
+        </p:nvSpPr>
+        <p:spPr>
+          <a:xfrm>
+            <a:off x="8074152" y="1563624"/>
+            <a:ext cx="2825496" cy="201168"/>
+          </a:xfrm>
+          <a:prstGeom prst="rect">
+            <a:avLst/>
+          </a:prstGeom>
+          <a:noFill/>
+          <a:ln/>
+        </p:spPr>
+        <p:txBody>
+          <a:bodyPr wrap="square" lIns="0" tIns="0" rIns="0" bIns="0" rtlCol="0" anchor="ctr"/>
+          <a:lstStyle/>
+          <a:p>
             <a:pPr indent="0" marL="0">
               <a:buNone/>
             </a:pPr>
             <a:r>
-              <a:rPr lang="en-US" sz="1420" dirty="0">
+              <a:rPr lang="en-US" sz="950" b="1" dirty="0">
+                <a:solidFill>
+                  <a:srgbClr val="0068B7"/>
+                </a:solidFill>
+                <a:latin typeface="Aptos" pitchFamily="34" charset="0"/>
+                <a:ea typeface="Aptos" pitchFamily="34" charset="-122"/>
+                <a:cs typeface="Aptos" pitchFamily="34" charset="-120"/>
+              </a:rPr>
+              <a:t>Key idea</a:t>
+            </a:r>
+            <a:endParaRPr lang="en-US" sz="950" dirty="0"/>
+          </a:p>
+        </p:txBody>
+      </p:sp>
+      <p:sp>
+        <p:nvSpPr>
+          <p:cNvPr id="13" name="Text 11"/>
+          <p:cNvSpPr/>
+          <p:nvPr/>
+        </p:nvSpPr>
+        <p:spPr>
+          <a:xfrm>
+            <a:off x="8074152" y="1856232"/>
+            <a:ext cx="2825496" cy="1261872"/>
+          </a:xfrm>
+          <a:prstGeom prst="rect">
+            <a:avLst/>
+          </a:prstGeom>
+          <a:noFill/>
+          <a:ln/>
+        </p:spPr>
+        <p:txBody>
+          <a:bodyPr wrap="square" lIns="0" tIns="0" rIns="0" bIns="0" rtlCol="0" anchor="t">
+            <a:normAutofit/>
+          </a:bodyPr>
+          <a:lstStyle/>
+          <a:p>
+            <a:pPr indent="0" marL="0">
+              <a:buNone/>
+            </a:pPr>
+            <a:r>
+              <a:rPr lang="en-US" sz="1250" dirty="0">
                 <a:solidFill>
                   <a:srgbClr val="17364A"/>
                 </a:solidFill>
@@ -7279,9 +13669,116 @@
                 <a:ea typeface="Aptos" pitchFamily="34" charset="-122"/>
                 <a:cs typeface="Aptos" pitchFamily="34" charset="-120"/>
               </a:rPr>
-              <a:t>Business analysis clarifies the problem, workflow, users, requirements, constraints, and success criteria before technology decisions are made. AI projects often fail when teams start with a tool rather than a well-defined public health need. A user story describes what a user needs to do and why. In AI work, user stories should include human review, data requirements, documentation, and limitations. A user story should not simply say that the user wants AI; it should describe the task the AI is supporting. Acceptance criteria are testable conditions that determine whether a requirement has been met. For AI systems, acceptance criteria should include accuracy, workflow fit, usability, security, privacy, accessibility, and human oversight.</a:t>
-            </a:r>
-            <a:endParaRPr lang="en-US" sz="1420" dirty="0"/>
+              <a:t>This national-level module is intended for training and planning purposes.</a:t>
+            </a:r>
+            <a:endParaRPr lang="en-US" sz="1250" dirty="0"/>
+          </a:p>
+        </p:txBody>
+      </p:sp>
+      <p:sp>
+        <p:nvSpPr>
+          <p:cNvPr id="14" name="Shape 12"/>
+          <p:cNvSpPr/>
+          <p:nvPr/>
+        </p:nvSpPr>
+        <p:spPr>
+          <a:xfrm>
+            <a:off x="7909560" y="3520440"/>
+            <a:ext cx="3154680" cy="1737360"/>
+          </a:xfrm>
+          <a:prstGeom prst="roundRect">
+            <a:avLst>
+              <a:gd name="adj" fmla="val 6316"/>
+            </a:avLst>
+          </a:prstGeom>
+          <a:solidFill>
+            <a:srgbClr val="EAF6F8"/>
+          </a:solidFill>
+          <a:ln w="12700">
+            <a:solidFill>
+              <a:srgbClr val="B9D7E6"/>
+            </a:solidFill>
+            <a:prstDash val="solid"/>
+          </a:ln>
+        </p:spPr>
+      </p:sp>
+      <p:sp>
+        <p:nvSpPr>
+          <p:cNvPr id="15" name="Text 13"/>
+          <p:cNvSpPr/>
+          <p:nvPr/>
+        </p:nvSpPr>
+        <p:spPr>
+          <a:xfrm>
+            <a:off x="8074152" y="3666744"/>
+            <a:ext cx="2825496" cy="201168"/>
+          </a:xfrm>
+          <a:prstGeom prst="rect">
+            <a:avLst/>
+          </a:prstGeom>
+          <a:noFill/>
+          <a:ln/>
+        </p:spPr>
+        <p:txBody>
+          <a:bodyPr wrap="square" lIns="0" tIns="0" rIns="0" bIns="0" rtlCol="0" anchor="ctr"/>
+          <a:lstStyle/>
+          <a:p>
+            <a:pPr indent="0" marL="0">
+              <a:buNone/>
+            </a:pPr>
+            <a:r>
+              <a:rPr lang="en-US" sz="950" b="1" dirty="0">
+                <a:solidFill>
+                  <a:srgbClr val="0068B7"/>
+                </a:solidFill>
+                <a:latin typeface="Aptos" pitchFamily="34" charset="0"/>
+                <a:ea typeface="Aptos" pitchFamily="34" charset="-122"/>
+                <a:cs typeface="Aptos" pitchFamily="34" charset="-120"/>
+              </a:rPr>
+              <a:t>Use this for</a:t>
+            </a:r>
+            <a:endParaRPr lang="en-US" sz="950" dirty="0"/>
+          </a:p>
+        </p:txBody>
+      </p:sp>
+      <p:sp>
+        <p:nvSpPr>
+          <p:cNvPr id="16" name="Text 14"/>
+          <p:cNvSpPr/>
+          <p:nvPr/>
+        </p:nvSpPr>
+        <p:spPr>
+          <a:xfrm>
+            <a:off x="8074152" y="3959352"/>
+            <a:ext cx="2825496" cy="1170432"/>
+          </a:xfrm>
+          <a:prstGeom prst="rect">
+            <a:avLst/>
+          </a:prstGeom>
+          <a:noFill/>
+          <a:ln/>
+        </p:spPr>
+        <p:txBody>
+          <a:bodyPr wrap="square" lIns="0" tIns="0" rIns="0" bIns="0" rtlCol="0" anchor="t">
+            <a:normAutofit/>
+          </a:bodyPr>
+          <a:lstStyle/>
+          <a:p>
+            <a:pPr indent="0" marL="0">
+              <a:buNone/>
+            </a:pPr>
+            <a:r>
+              <a:rPr lang="en-US" sz="1250" dirty="0">
+                <a:solidFill>
+                  <a:srgbClr val="17364A"/>
+                </a:solidFill>
+                <a:latin typeface="Aptos" pitchFamily="34" charset="0"/>
+                <a:ea typeface="Aptos" pitchFamily="34" charset="-122"/>
+                <a:cs typeface="Aptos" pitchFamily="34" charset="-120"/>
+              </a:rPr>
+              <a:t>Connect the concept to public health decisions, safeguards, documentation, or implementation work.</a:t>
+            </a:r>
+            <a:endParaRPr lang="en-US" sz="1250" dirty="0"/>
           </a:p>
         </p:txBody>
       </p:sp>
@@ -7344,7 +13841,32 @@
       </p:sp>
       <p:sp>
         <p:nvSpPr>
-          <p:cNvPr id="3" name="Text 1"/>
+          <p:cNvPr id="3" name="Shape 1"/>
+          <p:cNvSpPr/>
+          <p:nvPr/>
+        </p:nvSpPr>
+        <p:spPr>
+          <a:xfrm>
+            <a:off x="0" y="164592"/>
+            <a:ext cx="146304" cy="6693408"/>
+          </a:xfrm>
+          <a:prstGeom prst="rect">
+            <a:avLst/>
+          </a:prstGeom>
+          <a:solidFill>
+            <a:srgbClr val="2F8A28"/>
+          </a:solidFill>
+          <a:ln w="12700">
+            <a:solidFill>
+              <a:srgbClr val="2F8A28"/>
+            </a:solidFill>
+            <a:prstDash val="solid"/>
+          </a:ln>
+        </p:spPr>
+      </p:sp>
+      <p:sp>
+        <p:nvSpPr>
+          <p:cNvPr id="4" name="Text 2"/>
           <p:cNvSpPr/>
           <p:nvPr/>
         </p:nvSpPr>
@@ -7383,7 +13905,7 @@
       </p:sp>
       <p:sp>
         <p:nvSpPr>
-          <p:cNvPr id="4" name="Text 2"/>
+          <p:cNvPr id="5" name="Text 3"/>
           <p:cNvSpPr/>
           <p:nvPr/>
         </p:nvSpPr>
@@ -7422,7 +13944,7 @@
       </p:sp>
       <p:sp>
         <p:nvSpPr>
-          <p:cNvPr id="5" name="Text 3"/>
+          <p:cNvPr id="6" name="Text 4"/>
           <p:cNvSpPr/>
           <p:nvPr/>
         </p:nvSpPr>
@@ -7461,13 +13983,77 @@
       </p:sp>
       <p:sp>
         <p:nvSpPr>
-          <p:cNvPr id="6" name="Text 4"/>
+          <p:cNvPr id="7" name="Shape 5"/>
           <p:cNvSpPr/>
           <p:nvPr/>
         </p:nvSpPr>
         <p:spPr>
           <a:xfrm>
             <a:off x="640080" y="658368"/>
+            <a:ext cx="420624" cy="420624"/>
+          </a:xfrm>
+          <a:prstGeom prst="ellipse">
+            <a:avLst/>
+          </a:prstGeom>
+          <a:solidFill>
+            <a:srgbClr val="0068B7"/>
+          </a:solidFill>
+          <a:ln w="12700">
+            <a:solidFill>
+              <a:srgbClr val="0068B7"/>
+            </a:solidFill>
+            <a:prstDash val="solid"/>
+          </a:ln>
+        </p:spPr>
+      </p:sp>
+      <p:sp>
+        <p:nvSpPr>
+          <p:cNvPr id="8" name="Text 6"/>
+          <p:cNvSpPr/>
+          <p:nvPr/>
+        </p:nvSpPr>
+        <p:spPr>
+          <a:xfrm>
+            <a:off x="640080" y="731520"/>
+            <a:ext cx="420624" cy="164592"/>
+          </a:xfrm>
+          <a:prstGeom prst="rect">
+            <a:avLst/>
+          </a:prstGeom>
+          <a:noFill/>
+          <a:ln/>
+        </p:spPr>
+        <p:txBody>
+          <a:bodyPr wrap="square" lIns="0" tIns="0" rIns="0" bIns="0" rtlCol="0" anchor="ctr"/>
+          <a:lstStyle/>
+          <a:p>
+            <a:pPr algn="ctr" indent="0" marL="0">
+              <a:buNone/>
+            </a:pPr>
+            <a:r>
+              <a:rPr lang="en-US" sz="1100" b="1" dirty="0">
+                <a:solidFill>
+                  <a:srgbClr val="FFFFFF"/>
+                </a:solidFill>
+                <a:latin typeface="Aptos" pitchFamily="34" charset="0"/>
+                <a:ea typeface="Aptos" pitchFamily="34" charset="-122"/>
+                <a:cs typeface="Aptos" pitchFamily="34" charset="-120"/>
+              </a:rPr>
+              <a:t>4</a:t>
+            </a:r>
+            <a:endParaRPr lang="en-US" sz="1100" dirty="0"/>
+          </a:p>
+        </p:txBody>
+      </p:sp>
+      <p:sp>
+        <p:nvSpPr>
+          <p:cNvPr id="9" name="Text 7"/>
+          <p:cNvSpPr/>
+          <p:nvPr/>
+        </p:nvSpPr>
+        <p:spPr>
+          <a:xfrm>
+            <a:off x="640080" y="621792"/>
             <a:ext cx="10881360" cy="566928"/>
           </a:xfrm>
           <a:prstGeom prst="rect">
@@ -7494,7 +14080,7 @@
                 <a:ea typeface="Aptos Display" pitchFamily="34" charset="-122"/>
                 <a:cs typeface="Aptos Display" pitchFamily="34" charset="-120"/>
               </a:rPr>
-              <a:t>Public Health Example</a:t>
+              <a:t>Why This Topic Matters for Public Health AI</a:t>
             </a:r>
             <a:endParaRPr lang="en-US" sz="2700" dirty="0"/>
           </a:p>
@@ -7502,32 +14088,178 @@
       </p:sp>
       <p:sp>
         <p:nvSpPr>
-          <p:cNvPr id="7" name="Text 5"/>
-          <p:cNvSpPr/>
-          <p:nvPr/>
-        </p:nvSpPr>
-        <p:spPr>
-          <a:xfrm>
-            <a:off x="822960" y="1325880"/>
-            <a:ext cx="10378440" cy="4800600"/>
-          </a:xfrm>
-          <a:prstGeom prst="rect">
-            <a:avLst/>
-          </a:prstGeom>
-          <a:noFill/>
-          <a:ln/>
-        </p:spPr>
-        <p:txBody>
-          <a:bodyPr wrap="square" lIns="1016" tIns="1016" rIns="1016" bIns="1016" rtlCol="0" anchor="t">
+          <p:cNvPr id="10" name="Text 8"/>
+          <p:cNvSpPr/>
+          <p:nvPr/>
+        </p:nvSpPr>
+        <p:spPr>
+          <a:xfrm>
+            <a:off x="868680" y="1417320"/>
+            <a:ext cx="6675120" cy="4434840"/>
+          </a:xfrm>
+          <a:prstGeom prst="rect">
+            <a:avLst/>
+          </a:prstGeom>
+          <a:noFill/>
+          <a:ln/>
+        </p:spPr>
+        <p:txBody>
+          <a:bodyPr wrap="square" lIns="635" tIns="635" rIns="635" bIns="635" rtlCol="0" anchor="t">
             <a:normAutofit/>
           </a:bodyPr>
           <a:lstStyle/>
           <a:p>
+            <a:r>
+              <a:rPr lang="en-US" sz="1700" dirty="0">
+                <a:solidFill>
+                  <a:srgbClr val="17364A"/>
+                </a:solidFill>
+                <a:latin typeface="Aptos" pitchFamily="34" charset="0"/>
+                <a:ea typeface="Aptos" pitchFamily="34" charset="-122"/>
+                <a:cs typeface="Aptos" pitchFamily="34" charset="-120"/>
+              </a:rPr>
+              <a:t>Business Analysis for AI-Enabled Public Health Systems matters because AI systems are embedded in public health programs,.</a:t>
+            </a:r>
+            <a:endParaRPr lang="en-US" sz="1700" dirty="0"/>
+          </a:p>
+          <a:p>
+            <a:r>
+              <a:rPr lang="en-US" sz="1700" dirty="0">
+                <a:solidFill>
+                  <a:srgbClr val="17364A"/>
+                </a:solidFill>
+                <a:latin typeface="Aptos" pitchFamily="34" charset="0"/>
+                <a:ea typeface="Aptos" pitchFamily="34" charset="-122"/>
+                <a:cs typeface="Aptos" pitchFamily="34" charset="-120"/>
+              </a:rPr>
+              <a:t>The topic affects whether AI outputs are accurate, explainable, safe, equitable, secure, and sustainable.</a:t>
+            </a:r>
+            <a:endParaRPr lang="en-US" sz="1700" dirty="0"/>
+          </a:p>
+          <a:p>
+            <a:r>
+              <a:rPr lang="en-US" sz="1700" dirty="0">
+                <a:solidFill>
+                  <a:srgbClr val="17364A"/>
+                </a:solidFill>
+                <a:latin typeface="Aptos" pitchFamily="34" charset="0"/>
+                <a:ea typeface="Aptos" pitchFamily="34" charset="-122"/>
+                <a:cs typeface="Aptos" pitchFamily="34" charset="-120"/>
+              </a:rPr>
+              <a:t>Agencies that ignore this area may create tools that work in a demonstration but fail in actual practice.</a:t>
+            </a:r>
+            <a:endParaRPr lang="en-US" sz="1700" dirty="0"/>
+          </a:p>
+          <a:p>
+            <a:r>
+              <a:rPr lang="en-US" sz="1700" dirty="0">
+                <a:solidFill>
+                  <a:srgbClr val="17364A"/>
+                </a:solidFill>
+                <a:latin typeface="Aptos" pitchFamily="34" charset="0"/>
+                <a:ea typeface="Aptos" pitchFamily="34" charset="-122"/>
+                <a:cs typeface="Aptos" pitchFamily="34" charset="-120"/>
+              </a:rPr>
+              <a:t>The topic also affects accountability.</a:t>
+            </a:r>
+            <a:endParaRPr lang="en-US" sz="1700" dirty="0"/>
+          </a:p>
+        </p:txBody>
+      </p:sp>
+      <p:sp>
+        <p:nvSpPr>
+          <p:cNvPr id="11" name="Shape 9"/>
+          <p:cNvSpPr/>
+          <p:nvPr/>
+        </p:nvSpPr>
+        <p:spPr>
+          <a:xfrm>
+            <a:off x="7909560" y="1417320"/>
+            <a:ext cx="3154680" cy="1828800"/>
+          </a:xfrm>
+          <a:prstGeom prst="roundRect">
+            <a:avLst>
+              <a:gd name="adj" fmla="val 6000"/>
+            </a:avLst>
+          </a:prstGeom>
+          <a:solidFill>
+            <a:srgbClr val="EEF8ED"/>
+          </a:solidFill>
+          <a:ln w="12700">
+            <a:solidFill>
+              <a:srgbClr val="B9D7E6"/>
+            </a:solidFill>
+            <a:prstDash val="solid"/>
+          </a:ln>
+        </p:spPr>
+      </p:sp>
+      <p:sp>
+        <p:nvSpPr>
+          <p:cNvPr id="12" name="Text 10"/>
+          <p:cNvSpPr/>
+          <p:nvPr/>
+        </p:nvSpPr>
+        <p:spPr>
+          <a:xfrm>
+            <a:off x="8074152" y="1563624"/>
+            <a:ext cx="2825496" cy="201168"/>
+          </a:xfrm>
+          <a:prstGeom prst="rect">
+            <a:avLst/>
+          </a:prstGeom>
+          <a:noFill/>
+          <a:ln/>
+        </p:spPr>
+        <p:txBody>
+          <a:bodyPr wrap="square" lIns="0" tIns="0" rIns="0" bIns="0" rtlCol="0" anchor="ctr"/>
+          <a:lstStyle/>
+          <a:p>
             <a:pPr indent="0" marL="0">
               <a:buNone/>
             </a:pPr>
             <a:r>
-              <a:rPr lang="en-US" sz="1420" dirty="0">
+              <a:rPr lang="en-US" sz="950" b="1" dirty="0">
+                <a:solidFill>
+                  <a:srgbClr val="0068B7"/>
+                </a:solidFill>
+                <a:latin typeface="Aptos" pitchFamily="34" charset="0"/>
+                <a:ea typeface="Aptos" pitchFamily="34" charset="-122"/>
+                <a:cs typeface="Aptos" pitchFamily="34" charset="-120"/>
+              </a:rPr>
+              <a:t>Key idea</a:t>
+            </a:r>
+            <a:endParaRPr lang="en-US" sz="950" dirty="0"/>
+          </a:p>
+        </p:txBody>
+      </p:sp>
+      <p:sp>
+        <p:nvSpPr>
+          <p:cNvPr id="13" name="Text 11"/>
+          <p:cNvSpPr/>
+          <p:nvPr/>
+        </p:nvSpPr>
+        <p:spPr>
+          <a:xfrm>
+            <a:off x="8074152" y="1856232"/>
+            <a:ext cx="2825496" cy="1261872"/>
+          </a:xfrm>
+          <a:prstGeom prst="rect">
+            <a:avLst/>
+          </a:prstGeom>
+          <a:noFill/>
+          <a:ln/>
+        </p:spPr>
+        <p:txBody>
+          <a:bodyPr wrap="square" lIns="0" tIns="0" rIns="0" bIns="0" rtlCol="0" anchor="t">
+            <a:normAutofit/>
+          </a:bodyPr>
+          <a:lstStyle/>
+          <a:p>
+            <a:pPr indent="0" marL="0">
+              <a:buNone/>
+            </a:pPr>
+            <a:r>
+              <a:rPr lang="en-US" sz="1250" dirty="0">
                 <a:solidFill>
                   <a:srgbClr val="17364A"/>
                 </a:solidFill>
@@ -7535,9 +14267,116 @@
                 <a:ea typeface="Aptos" pitchFamily="34" charset="-122"/>
                 <a:cs typeface="Aptos" pitchFamily="34" charset="-120"/>
               </a:rPr>
-              <a:t>A local health department may want AI to help classify community complaints. A business analyst would clarify whether the real problem is high complaint volume, inconsistent routing, delayed response, lack of category definitions, or insufficient staffing. The resulting requirements may call for classification support with human review rather than fully automated complaint resolution.</a:t>
-            </a:r>
-            <a:endParaRPr lang="en-US" sz="1420" dirty="0"/>
+              <a:t>Business Analysis for AI-Enabled Public Health Systems matters because AI systems are embedded in public health programs,.</a:t>
+            </a:r>
+            <a:endParaRPr lang="en-US" sz="1250" dirty="0"/>
+          </a:p>
+        </p:txBody>
+      </p:sp>
+      <p:sp>
+        <p:nvSpPr>
+          <p:cNvPr id="14" name="Shape 12"/>
+          <p:cNvSpPr/>
+          <p:nvPr/>
+        </p:nvSpPr>
+        <p:spPr>
+          <a:xfrm>
+            <a:off x="7909560" y="3520440"/>
+            <a:ext cx="3154680" cy="1737360"/>
+          </a:xfrm>
+          <a:prstGeom prst="roundRect">
+            <a:avLst>
+              <a:gd name="adj" fmla="val 6316"/>
+            </a:avLst>
+          </a:prstGeom>
+          <a:solidFill>
+            <a:srgbClr val="EAF6F8"/>
+          </a:solidFill>
+          <a:ln w="12700">
+            <a:solidFill>
+              <a:srgbClr val="B9D7E6"/>
+            </a:solidFill>
+            <a:prstDash val="solid"/>
+          </a:ln>
+        </p:spPr>
+      </p:sp>
+      <p:sp>
+        <p:nvSpPr>
+          <p:cNvPr id="15" name="Text 13"/>
+          <p:cNvSpPr/>
+          <p:nvPr/>
+        </p:nvSpPr>
+        <p:spPr>
+          <a:xfrm>
+            <a:off x="8074152" y="3666744"/>
+            <a:ext cx="2825496" cy="201168"/>
+          </a:xfrm>
+          <a:prstGeom prst="rect">
+            <a:avLst/>
+          </a:prstGeom>
+          <a:noFill/>
+          <a:ln/>
+        </p:spPr>
+        <p:txBody>
+          <a:bodyPr wrap="square" lIns="0" tIns="0" rIns="0" bIns="0" rtlCol="0" anchor="ctr"/>
+          <a:lstStyle/>
+          <a:p>
+            <a:pPr indent="0" marL="0">
+              <a:buNone/>
+            </a:pPr>
+            <a:r>
+              <a:rPr lang="en-US" sz="950" b="1" dirty="0">
+                <a:solidFill>
+                  <a:srgbClr val="0068B7"/>
+                </a:solidFill>
+                <a:latin typeface="Aptos" pitchFamily="34" charset="0"/>
+                <a:ea typeface="Aptos" pitchFamily="34" charset="-122"/>
+                <a:cs typeface="Aptos" pitchFamily="34" charset="-120"/>
+              </a:rPr>
+              <a:t>Use this for</a:t>
+            </a:r>
+            <a:endParaRPr lang="en-US" sz="950" dirty="0"/>
+          </a:p>
+        </p:txBody>
+      </p:sp>
+      <p:sp>
+        <p:nvSpPr>
+          <p:cNvPr id="16" name="Text 14"/>
+          <p:cNvSpPr/>
+          <p:nvPr/>
+        </p:nvSpPr>
+        <p:spPr>
+          <a:xfrm>
+            <a:off x="8074152" y="3959352"/>
+            <a:ext cx="2825496" cy="1170432"/>
+          </a:xfrm>
+          <a:prstGeom prst="rect">
+            <a:avLst/>
+          </a:prstGeom>
+          <a:noFill/>
+          <a:ln/>
+        </p:spPr>
+        <p:txBody>
+          <a:bodyPr wrap="square" lIns="0" tIns="0" rIns="0" bIns="0" rtlCol="0" anchor="t">
+            <a:normAutofit/>
+          </a:bodyPr>
+          <a:lstStyle/>
+          <a:p>
+            <a:pPr indent="0" marL="0">
+              <a:buNone/>
+            </a:pPr>
+            <a:r>
+              <a:rPr lang="en-US" sz="1250" dirty="0">
+                <a:solidFill>
+                  <a:srgbClr val="17364A"/>
+                </a:solidFill>
+                <a:latin typeface="Aptos" pitchFamily="34" charset="0"/>
+                <a:ea typeface="Aptos" pitchFamily="34" charset="-122"/>
+                <a:cs typeface="Aptos" pitchFamily="34" charset="-120"/>
+              </a:rPr>
+              <a:t>Connect the concept to public health decisions, safeguards, documentation, or implementation work.</a:t>
+            </a:r>
+            <a:endParaRPr lang="en-US" sz="1250" dirty="0"/>
           </a:p>
         </p:txBody>
       </p:sp>

--- a/downloads/presentations/modules/lesson-61-business-analysis-for-ai-enabled-public-health-systems.pptx
+++ b/downloads/presentations/modules/lesson-61-business-analysis-for-ai-enabled-public-health-systems.pptx
@@ -2902,6 +2902,45 @@
           </a:p>
         </p:txBody>
       </p:sp>
+      <p:sp>
+        <p:nvSpPr>
+          <p:cNvPr id="8" name="Text 5"/>
+          <p:cNvSpPr/>
+          <p:nvPr/>
+        </p:nvSpPr>
+        <p:spPr>
+          <a:xfrm>
+            <a:off x="11137392" y="6510528"/>
+            <a:ext cx="411480" cy="201168"/>
+          </a:xfrm>
+          <a:prstGeom prst="rect">
+            <a:avLst/>
+          </a:prstGeom>
+          <a:noFill/>
+          <a:ln/>
+        </p:spPr>
+        <p:txBody>
+          <a:bodyPr wrap="square" lIns="0" tIns="0" rIns="0" bIns="0" rtlCol="0" anchor="ctr"/>
+          <a:lstStyle/>
+          <a:p>
+            <a:pPr algn="r" indent="0" marL="0">
+              <a:buNone/>
+            </a:pPr>
+            <a:r>
+              <a:rPr lang="en-US" sz="900" dirty="0">
+                <a:solidFill>
+                  <a:srgbClr val="5F7181"/>
+                </a:solidFill>
+                <a:latin typeface="Aptos" pitchFamily="34" charset="0"/>
+                <a:ea typeface="Aptos" pitchFamily="34" charset="-122"/>
+                <a:cs typeface="Aptos" pitchFamily="34" charset="-120"/>
+              </a:rPr>
+              <a:t>1</a:t>
+            </a:r>
+            <a:endParaRPr lang="en-US" sz="900" dirty="0"/>
+          </a:p>
+        </p:txBody>
+      </p:sp>
     </p:spTree>
   </p:cSld>
   <p:clrMapOvr>
@@ -3095,7 +3134,7 @@
                 <a:ea typeface="Aptos" pitchFamily="34" charset="-122"/>
                 <a:cs typeface="Aptos" pitchFamily="34" charset="-120"/>
               </a:rPr>
-              <a:t>© Paula Soper</a:t>
+              <a:t>Â© Paula Soper</a:t>
             </a:r>
             <a:endParaRPr lang="en-US" sz="800" dirty="0"/>
           </a:p>
@@ -3103,7 +3142,46 @@
       </p:sp>
       <p:sp>
         <p:nvSpPr>
-          <p:cNvPr id="7" name="Shape 5"/>
+          <p:cNvPr id="7" name="Text 5"/>
+          <p:cNvSpPr/>
+          <p:nvPr/>
+        </p:nvSpPr>
+        <p:spPr>
+          <a:xfrm>
+            <a:off x="11137392" y="6510528"/>
+            <a:ext cx="411480" cy="201168"/>
+          </a:xfrm>
+          <a:prstGeom prst="rect">
+            <a:avLst/>
+          </a:prstGeom>
+          <a:noFill/>
+          <a:ln/>
+        </p:spPr>
+        <p:txBody>
+          <a:bodyPr wrap="square" lIns="0" tIns="0" rIns="0" bIns="0" rtlCol="0" anchor="ctr"/>
+          <a:lstStyle/>
+          <a:p>
+            <a:pPr algn="r" indent="0" marL="0">
+              <a:buNone/>
+            </a:pPr>
+            <a:r>
+              <a:rPr lang="en-US" sz="900" dirty="0">
+                <a:solidFill>
+                  <a:srgbClr val="5F7181"/>
+                </a:solidFill>
+                <a:latin typeface="Aptos" pitchFamily="34" charset="0"/>
+                <a:ea typeface="Aptos" pitchFamily="34" charset="-122"/>
+                <a:cs typeface="Aptos" pitchFamily="34" charset="-120"/>
+              </a:rPr>
+              <a:t>10</a:t>
+            </a:r>
+            <a:endParaRPr lang="en-US" sz="900" dirty="0"/>
+          </a:p>
+        </p:txBody>
+      </p:sp>
+      <p:sp>
+        <p:nvSpPr>
+          <p:cNvPr id="8" name="Shape 6"/>
           <p:cNvSpPr/>
           <p:nvPr/>
         </p:nvSpPr>
@@ -3128,7 +3206,7 @@
       </p:sp>
       <p:sp>
         <p:nvSpPr>
-          <p:cNvPr id="8" name="Text 6"/>
+          <p:cNvPr id="9" name="Text 7"/>
           <p:cNvSpPr/>
           <p:nvPr/>
         </p:nvSpPr>
@@ -3167,14 +3245,14 @@
       </p:sp>
       <p:sp>
         <p:nvSpPr>
-          <p:cNvPr id="9" name="Text 7"/>
+          <p:cNvPr id="10" name="Text 8"/>
           <p:cNvSpPr/>
           <p:nvPr/>
         </p:nvSpPr>
         <p:spPr>
           <a:xfrm>
             <a:off x="640080" y="621792"/>
-            <a:ext cx="10881360" cy="566928"/>
+            <a:ext cx="10881360" cy="713232"/>
           </a:xfrm>
           <a:prstGeom prst="rect">
             <a:avLst/>
@@ -3192,7 +3270,7 @@
               <a:buNone/>
             </a:pPr>
             <a:r>
-              <a:rPr lang="en-US" sz="2700" b="1" dirty="0">
+              <a:rPr lang="en-US" sz="3400" b="1" dirty="0">
                 <a:solidFill>
                   <a:srgbClr val="003A63"/>
                 </a:solidFill>
@@ -3202,20 +3280,20 @@
               </a:rPr>
               <a:t>Core Concepts</a:t>
             </a:r>
-            <a:endParaRPr lang="en-US" sz="2700" dirty="0"/>
-          </a:p>
-        </p:txBody>
-      </p:sp>
-      <p:sp>
-        <p:nvSpPr>
-          <p:cNvPr id="10" name="Text 8"/>
-          <p:cNvSpPr/>
-          <p:nvPr/>
-        </p:nvSpPr>
-        <p:spPr>
-          <a:xfrm>
-            <a:off x="868680" y="1417320"/>
-            <a:ext cx="6675120" cy="4434840"/>
+            <a:endParaRPr lang="en-US" sz="3400" dirty="0"/>
+          </a:p>
+        </p:txBody>
+      </p:sp>
+      <p:sp>
+        <p:nvSpPr>
+          <p:cNvPr id="11" name="Text 9"/>
+          <p:cNvSpPr/>
+          <p:nvPr/>
+        </p:nvSpPr>
+        <p:spPr>
+          <a:xfrm>
+            <a:off x="868680" y="1508760"/>
+            <a:ext cx="6537960" cy="4160520"/>
           </a:xfrm>
           <a:prstGeom prst="rect">
             <a:avLst/>
@@ -3230,7 +3308,7 @@
           <a:lstStyle/>
           <a:p>
             <a:r>
-              <a:rPr lang="en-US" sz="1700" dirty="0">
+              <a:rPr lang="en-US" sz="2100" dirty="0">
                 <a:solidFill>
                   <a:srgbClr val="17364A"/>
                 </a:solidFill>
@@ -3238,13 +3316,13 @@
                 <a:ea typeface="Aptos" pitchFamily="34" charset="-122"/>
                 <a:cs typeface="Aptos" pitchFamily="34" charset="-120"/>
               </a:rPr>
-              <a:t>Business analysis clarifies the problem, workflow, users, requirements, constraints, and success criteria before technology.</a:t>
-            </a:r>
-            <a:endParaRPr lang="en-US" sz="1700" dirty="0"/>
-          </a:p>
-          <a:p>
-            <a:r>
-              <a:rPr lang="en-US" sz="1700" dirty="0">
+              <a:t>Business analysis clarifies the problem, workflow, users, requirements, constraints, and success.</a:t>
+            </a:r>
+            <a:endParaRPr lang="en-US" sz="2100" dirty="0"/>
+          </a:p>
+          <a:p>
+            <a:r>
+              <a:rPr lang="en-US" sz="2100" dirty="0">
                 <a:solidFill>
                   <a:srgbClr val="17364A"/>
                 </a:solidFill>
@@ -3254,11 +3332,11 @@
               </a:rPr>
               <a:t>AI projects often fail when teams start with a tool rather than a well-defined public health need.</a:t>
             </a:r>
-            <a:endParaRPr lang="en-US" sz="1700" dirty="0"/>
-          </a:p>
-          <a:p>
-            <a:r>
-              <a:rPr lang="en-US" sz="1700" dirty="0">
+            <a:endParaRPr lang="en-US" sz="2100" dirty="0"/>
+          </a:p>
+          <a:p>
+            <a:r>
+              <a:rPr lang="en-US" sz="2100" dirty="0">
                 <a:solidFill>
                   <a:srgbClr val="17364A"/>
                 </a:solidFill>
@@ -3268,27 +3346,13 @@
               </a:rPr>
               <a:t>A user story describes what a user needs to do and why.</a:t>
             </a:r>
-            <a:endParaRPr lang="en-US" sz="1700" dirty="0"/>
-          </a:p>
-          <a:p>
-            <a:r>
-              <a:rPr lang="en-US" sz="1700" dirty="0">
-                <a:solidFill>
-                  <a:srgbClr val="17364A"/>
-                </a:solidFill>
-                <a:latin typeface="Aptos" pitchFamily="34" charset="0"/>
-                <a:ea typeface="Aptos" pitchFamily="34" charset="-122"/>
-                <a:cs typeface="Aptos" pitchFamily="34" charset="-120"/>
-              </a:rPr>
-              <a:t>In AI work, user stories should include human review, data requirements, documentation, and limitations.</a:t>
-            </a:r>
-            <a:endParaRPr lang="en-US" sz="1700" dirty="0"/>
-          </a:p>
-        </p:txBody>
-      </p:sp>
-      <p:sp>
-        <p:nvSpPr>
-          <p:cNvPr id="11" name="Shape 9"/>
+            <a:endParaRPr lang="en-US" sz="2100" dirty="0"/>
+          </a:p>
+        </p:txBody>
+      </p:sp>
+      <p:sp>
+        <p:nvSpPr>
+          <p:cNvPr id="12" name="Shape 10"/>
           <p:cNvSpPr/>
           <p:nvPr/>
         </p:nvSpPr>
@@ -3315,14 +3379,14 @@
       </p:sp>
       <p:sp>
         <p:nvSpPr>
-          <p:cNvPr id="12" name="Text 10"/>
+          <p:cNvPr id="13" name="Text 11"/>
           <p:cNvSpPr/>
           <p:nvPr/>
         </p:nvSpPr>
         <p:spPr>
           <a:xfrm>
             <a:off x="8074152" y="1563624"/>
-            <a:ext cx="2825496" cy="201168"/>
+            <a:ext cx="2825496" cy="256032"/>
           </a:xfrm>
           <a:prstGeom prst="rect">
             <a:avLst/>
@@ -3338,7 +3402,7 @@
               <a:buNone/>
             </a:pPr>
             <a:r>
-              <a:rPr lang="en-US" sz="950" b="1" dirty="0">
+              <a:rPr lang="en-US" sz="1300" b="1" dirty="0">
                 <a:solidFill>
                   <a:srgbClr val="0068B7"/>
                 </a:solidFill>
@@ -3348,20 +3412,20 @@
               </a:rPr>
               <a:t>Key idea</a:t>
             </a:r>
-            <a:endParaRPr lang="en-US" sz="950" dirty="0"/>
-          </a:p>
-        </p:txBody>
-      </p:sp>
-      <p:sp>
-        <p:nvSpPr>
-          <p:cNvPr id="13" name="Text 11"/>
-          <p:cNvSpPr/>
-          <p:nvPr/>
-        </p:nvSpPr>
-        <p:spPr>
-          <a:xfrm>
-            <a:off x="8074152" y="1856232"/>
-            <a:ext cx="2825496" cy="1261872"/>
+            <a:endParaRPr lang="en-US" sz="1300" dirty="0"/>
+          </a:p>
+        </p:txBody>
+      </p:sp>
+      <p:sp>
+        <p:nvSpPr>
+          <p:cNvPr id="14" name="Text 12"/>
+          <p:cNvSpPr/>
+          <p:nvPr/>
+        </p:nvSpPr>
+        <p:spPr>
+          <a:xfrm>
+            <a:off x="8074152" y="1920240"/>
+            <a:ext cx="2825496" cy="1188720"/>
           </a:xfrm>
           <a:prstGeom prst="rect">
             <a:avLst/>
@@ -3379,7 +3443,7 @@
               <a:buNone/>
             </a:pPr>
             <a:r>
-              <a:rPr lang="en-US" sz="1250" dirty="0">
+              <a:rPr lang="en-US" sz="1550" dirty="0">
                 <a:solidFill>
                   <a:srgbClr val="17364A"/>
                 </a:solidFill>
@@ -3387,15 +3451,15 @@
                 <a:ea typeface="Aptos" pitchFamily="34" charset="-122"/>
                 <a:cs typeface="Aptos" pitchFamily="34" charset="-120"/>
               </a:rPr>
-              <a:t>Business analysis clarifies the problem, workflow, users, requirements, constraints, and success criteria before technology.</a:t>
-            </a:r>
-            <a:endParaRPr lang="en-US" sz="1250" dirty="0"/>
-          </a:p>
-        </p:txBody>
-      </p:sp>
-      <p:sp>
-        <p:nvSpPr>
-          <p:cNvPr id="14" name="Shape 12"/>
+              <a:t>Business analysis clarifies the problem, workflow, users, requirements, constraints, and success.</a:t>
+            </a:r>
+            <a:endParaRPr lang="en-US" sz="1550" dirty="0"/>
+          </a:p>
+        </p:txBody>
+      </p:sp>
+      <p:sp>
+        <p:nvSpPr>
+          <p:cNvPr id="15" name="Shape 13"/>
           <p:cNvSpPr/>
           <p:nvPr/>
         </p:nvSpPr>
@@ -3422,14 +3486,14 @@
       </p:sp>
       <p:sp>
         <p:nvSpPr>
-          <p:cNvPr id="15" name="Text 13"/>
+          <p:cNvPr id="16" name="Text 14"/>
           <p:cNvSpPr/>
           <p:nvPr/>
         </p:nvSpPr>
         <p:spPr>
           <a:xfrm>
             <a:off x="8074152" y="3666744"/>
-            <a:ext cx="2825496" cy="201168"/>
+            <a:ext cx="2825496" cy="256032"/>
           </a:xfrm>
           <a:prstGeom prst="rect">
             <a:avLst/>
@@ -3445,7 +3509,7 @@
               <a:buNone/>
             </a:pPr>
             <a:r>
-              <a:rPr lang="en-US" sz="950" b="1" dirty="0">
+              <a:rPr lang="en-US" sz="1300" b="1" dirty="0">
                 <a:solidFill>
                   <a:srgbClr val="0068B7"/>
                 </a:solidFill>
@@ -3455,20 +3519,20 @@
               </a:rPr>
               <a:t>Use this for</a:t>
             </a:r>
-            <a:endParaRPr lang="en-US" sz="950" dirty="0"/>
-          </a:p>
-        </p:txBody>
-      </p:sp>
-      <p:sp>
-        <p:nvSpPr>
-          <p:cNvPr id="16" name="Text 14"/>
-          <p:cNvSpPr/>
-          <p:nvPr/>
-        </p:nvSpPr>
-        <p:spPr>
-          <a:xfrm>
-            <a:off x="8074152" y="3959352"/>
-            <a:ext cx="2825496" cy="1170432"/>
+            <a:endParaRPr lang="en-US" sz="1300" dirty="0"/>
+          </a:p>
+        </p:txBody>
+      </p:sp>
+      <p:sp>
+        <p:nvSpPr>
+          <p:cNvPr id="17" name="Text 15"/>
+          <p:cNvSpPr/>
+          <p:nvPr/>
+        </p:nvSpPr>
+        <p:spPr>
+          <a:xfrm>
+            <a:off x="8074152" y="4023360"/>
+            <a:ext cx="2825496" cy="1097280"/>
           </a:xfrm>
           <a:prstGeom prst="rect">
             <a:avLst/>
@@ -3486,7 +3550,7 @@
               <a:buNone/>
             </a:pPr>
             <a:r>
-              <a:rPr lang="en-US" sz="1250" dirty="0">
+              <a:rPr lang="en-US" sz="1550" dirty="0">
                 <a:solidFill>
                   <a:srgbClr val="17364A"/>
                 </a:solidFill>
@@ -3496,7 +3560,7 @@
               </a:rPr>
               <a:t>Connect the concept to public health decisions, safeguards, documentation, or implementation work.</a:t>
             </a:r>
-            <a:endParaRPr lang="en-US" sz="1250" dirty="0"/>
+            <a:endParaRPr lang="en-US" sz="1550" dirty="0"/>
           </a:p>
         </p:txBody>
       </p:sp>
@@ -3693,7 +3757,7 @@
                 <a:ea typeface="Aptos" pitchFamily="34" charset="-122"/>
                 <a:cs typeface="Aptos" pitchFamily="34" charset="-120"/>
               </a:rPr>
-              <a:t>© Paula Soper</a:t>
+              <a:t>Â© Paula Soper</a:t>
             </a:r>
             <a:endParaRPr lang="en-US" sz="800" dirty="0"/>
           </a:p>
@@ -3701,7 +3765,46 @@
       </p:sp>
       <p:sp>
         <p:nvSpPr>
-          <p:cNvPr id="7" name="Shape 5"/>
+          <p:cNvPr id="7" name="Text 5"/>
+          <p:cNvSpPr/>
+          <p:nvPr/>
+        </p:nvSpPr>
+        <p:spPr>
+          <a:xfrm>
+            <a:off x="11137392" y="6510528"/>
+            <a:ext cx="411480" cy="201168"/>
+          </a:xfrm>
+          <a:prstGeom prst="rect">
+            <a:avLst/>
+          </a:prstGeom>
+          <a:noFill/>
+          <a:ln/>
+        </p:spPr>
+        <p:txBody>
+          <a:bodyPr wrap="square" lIns="0" tIns="0" rIns="0" bIns="0" rtlCol="0" anchor="ctr"/>
+          <a:lstStyle/>
+          <a:p>
+            <a:pPr algn="r" indent="0" marL="0">
+              <a:buNone/>
+            </a:pPr>
+            <a:r>
+              <a:rPr lang="en-US" sz="900" dirty="0">
+                <a:solidFill>
+                  <a:srgbClr val="5F7181"/>
+                </a:solidFill>
+                <a:latin typeface="Aptos" pitchFamily="34" charset="0"/>
+                <a:ea typeface="Aptos" pitchFamily="34" charset="-122"/>
+                <a:cs typeface="Aptos" pitchFamily="34" charset="-120"/>
+              </a:rPr>
+              <a:t>11</a:t>
+            </a:r>
+            <a:endParaRPr lang="en-US" sz="900" dirty="0"/>
+          </a:p>
+        </p:txBody>
+      </p:sp>
+      <p:sp>
+        <p:nvSpPr>
+          <p:cNvPr id="8" name="Shape 6"/>
           <p:cNvSpPr/>
           <p:nvPr/>
         </p:nvSpPr>
@@ -3726,7 +3829,7 @@
       </p:sp>
       <p:sp>
         <p:nvSpPr>
-          <p:cNvPr id="8" name="Text 6"/>
+          <p:cNvPr id="9" name="Text 7"/>
           <p:cNvSpPr/>
           <p:nvPr/>
         </p:nvSpPr>
@@ -3765,14 +3868,14 @@
       </p:sp>
       <p:sp>
         <p:nvSpPr>
-          <p:cNvPr id="9" name="Text 7"/>
+          <p:cNvPr id="10" name="Text 8"/>
           <p:cNvSpPr/>
           <p:nvPr/>
         </p:nvSpPr>
         <p:spPr>
           <a:xfrm>
             <a:off x="640080" y="621792"/>
-            <a:ext cx="10881360" cy="566928"/>
+            <a:ext cx="10881360" cy="713232"/>
           </a:xfrm>
           <a:prstGeom prst="rect">
             <a:avLst/>
@@ -3790,7 +3893,7 @@
               <a:buNone/>
             </a:pPr>
             <a:r>
-              <a:rPr lang="en-US" sz="2700" b="1" dirty="0">
+              <a:rPr lang="en-US" sz="3400" b="1" dirty="0">
                 <a:solidFill>
                   <a:srgbClr val="003A63"/>
                 </a:solidFill>
@@ -3800,20 +3903,20 @@
               </a:rPr>
               <a:t>Public Health Example</a:t>
             </a:r>
-            <a:endParaRPr lang="en-US" sz="2700" dirty="0"/>
-          </a:p>
-        </p:txBody>
-      </p:sp>
-      <p:sp>
-        <p:nvSpPr>
-          <p:cNvPr id="10" name="Text 8"/>
-          <p:cNvSpPr/>
-          <p:nvPr/>
-        </p:nvSpPr>
-        <p:spPr>
-          <a:xfrm>
-            <a:off x="868680" y="1417320"/>
-            <a:ext cx="6675120" cy="4434840"/>
+            <a:endParaRPr lang="en-US" sz="3400" dirty="0"/>
+          </a:p>
+        </p:txBody>
+      </p:sp>
+      <p:sp>
+        <p:nvSpPr>
+          <p:cNvPr id="11" name="Text 9"/>
+          <p:cNvSpPr/>
+          <p:nvPr/>
+        </p:nvSpPr>
+        <p:spPr>
+          <a:xfrm>
+            <a:off x="868680" y="1508760"/>
+            <a:ext cx="6537960" cy="4160520"/>
           </a:xfrm>
           <a:prstGeom prst="rect">
             <a:avLst/>
@@ -3828,7 +3931,7 @@
           <a:lstStyle/>
           <a:p>
             <a:r>
-              <a:rPr lang="en-US" sz="1700" dirty="0">
+              <a:rPr lang="en-US" sz="2100" dirty="0">
                 <a:solidFill>
                   <a:srgbClr val="17364A"/>
                 </a:solidFill>
@@ -3838,11 +3941,11 @@
               </a:rPr>
               <a:t>A local health department may want AI to help classify community complaints.</a:t>
             </a:r>
-            <a:endParaRPr lang="en-US" sz="1700" dirty="0"/>
-          </a:p>
-          <a:p>
-            <a:r>
-              <a:rPr lang="en-US" sz="1700" dirty="0">
+            <a:endParaRPr lang="en-US" sz="2100" dirty="0"/>
+          </a:p>
+          <a:p>
+            <a:r>
+              <a:rPr lang="en-US" sz="2100" dirty="0">
                 <a:solidFill>
                   <a:srgbClr val="17364A"/>
                 </a:solidFill>
@@ -3850,13 +3953,13 @@
                 <a:ea typeface="Aptos" pitchFamily="34" charset="-122"/>
                 <a:cs typeface="Aptos" pitchFamily="34" charset="-120"/>
               </a:rPr>
-              <a:t>A business analyst would clarify whether the real problem is high complaint volume, inconsistent routing, delayed response,.</a:t>
-            </a:r>
-            <a:endParaRPr lang="en-US" sz="1700" dirty="0"/>
-          </a:p>
-          <a:p>
-            <a:r>
-              <a:rPr lang="en-US" sz="1700" dirty="0">
+              <a:t>A business analyst would clarify whether the real problem is high complaint volume, inconsistent.</a:t>
+            </a:r>
+            <a:endParaRPr lang="en-US" sz="2100" dirty="0"/>
+          </a:p>
+          <a:p>
+            <a:r>
+              <a:rPr lang="en-US" sz="2100" dirty="0">
                 <a:solidFill>
                   <a:srgbClr val="17364A"/>
                 </a:solidFill>
@@ -3864,15 +3967,15 @@
                 <a:ea typeface="Aptos" pitchFamily="34" charset="-122"/>
                 <a:cs typeface="Aptos" pitchFamily="34" charset="-120"/>
               </a:rPr>
-              <a:t>The resulting requirements may call for classification support with human review rather than fully automated complaint.</a:t>
-            </a:r>
-            <a:endParaRPr lang="en-US" sz="1700" dirty="0"/>
-          </a:p>
-        </p:txBody>
-      </p:sp>
-      <p:sp>
-        <p:nvSpPr>
-          <p:cNvPr id="11" name="Shape 9"/>
+              <a:t>The resulting requirements may call for classification support with human review rather than fully.</a:t>
+            </a:r>
+            <a:endParaRPr lang="en-US" sz="2100" dirty="0"/>
+          </a:p>
+        </p:txBody>
+      </p:sp>
+      <p:sp>
+        <p:nvSpPr>
+          <p:cNvPr id="12" name="Shape 10"/>
           <p:cNvSpPr/>
           <p:nvPr/>
         </p:nvSpPr>
@@ -3899,14 +4002,14 @@
       </p:sp>
       <p:sp>
         <p:nvSpPr>
-          <p:cNvPr id="12" name="Text 10"/>
+          <p:cNvPr id="13" name="Text 11"/>
           <p:cNvSpPr/>
           <p:nvPr/>
         </p:nvSpPr>
         <p:spPr>
           <a:xfrm>
             <a:off x="8074152" y="1563624"/>
-            <a:ext cx="2825496" cy="201168"/>
+            <a:ext cx="2825496" cy="256032"/>
           </a:xfrm>
           <a:prstGeom prst="rect">
             <a:avLst/>
@@ -3922,7 +4025,7 @@
               <a:buNone/>
             </a:pPr>
             <a:r>
-              <a:rPr lang="en-US" sz="950" b="1" dirty="0">
+              <a:rPr lang="en-US" sz="1300" b="1" dirty="0">
                 <a:solidFill>
                   <a:srgbClr val="0068B7"/>
                 </a:solidFill>
@@ -3932,20 +4035,20 @@
               </a:rPr>
               <a:t>Key idea</a:t>
             </a:r>
-            <a:endParaRPr lang="en-US" sz="950" dirty="0"/>
-          </a:p>
-        </p:txBody>
-      </p:sp>
-      <p:sp>
-        <p:nvSpPr>
-          <p:cNvPr id="13" name="Text 11"/>
-          <p:cNvSpPr/>
-          <p:nvPr/>
-        </p:nvSpPr>
-        <p:spPr>
-          <a:xfrm>
-            <a:off x="8074152" y="1856232"/>
-            <a:ext cx="2825496" cy="1261872"/>
+            <a:endParaRPr lang="en-US" sz="1300" dirty="0"/>
+          </a:p>
+        </p:txBody>
+      </p:sp>
+      <p:sp>
+        <p:nvSpPr>
+          <p:cNvPr id="14" name="Text 12"/>
+          <p:cNvSpPr/>
+          <p:nvPr/>
+        </p:nvSpPr>
+        <p:spPr>
+          <a:xfrm>
+            <a:off x="8074152" y="1920240"/>
+            <a:ext cx="2825496" cy="1188720"/>
           </a:xfrm>
           <a:prstGeom prst="rect">
             <a:avLst/>
@@ -3963,7 +4066,7 @@
               <a:buNone/>
             </a:pPr>
             <a:r>
-              <a:rPr lang="en-US" sz="1250" dirty="0">
+              <a:rPr lang="en-US" sz="1550" dirty="0">
                 <a:solidFill>
                   <a:srgbClr val="17364A"/>
                 </a:solidFill>
@@ -3973,13 +4076,13 @@
               </a:rPr>
               <a:t>A local health department may want AI to help classify community complaints.</a:t>
             </a:r>
-            <a:endParaRPr lang="en-US" sz="1250" dirty="0"/>
-          </a:p>
-        </p:txBody>
-      </p:sp>
-      <p:sp>
-        <p:nvSpPr>
-          <p:cNvPr id="14" name="Shape 12"/>
+            <a:endParaRPr lang="en-US" sz="1550" dirty="0"/>
+          </a:p>
+        </p:txBody>
+      </p:sp>
+      <p:sp>
+        <p:nvSpPr>
+          <p:cNvPr id="15" name="Shape 13"/>
           <p:cNvSpPr/>
           <p:nvPr/>
         </p:nvSpPr>
@@ -4006,14 +4109,14 @@
       </p:sp>
       <p:sp>
         <p:nvSpPr>
-          <p:cNvPr id="15" name="Text 13"/>
+          <p:cNvPr id="16" name="Text 14"/>
           <p:cNvSpPr/>
           <p:nvPr/>
         </p:nvSpPr>
         <p:spPr>
           <a:xfrm>
             <a:off x="8074152" y="3666744"/>
-            <a:ext cx="2825496" cy="201168"/>
+            <a:ext cx="2825496" cy="256032"/>
           </a:xfrm>
           <a:prstGeom prst="rect">
             <a:avLst/>
@@ -4029,7 +4132,7 @@
               <a:buNone/>
             </a:pPr>
             <a:r>
-              <a:rPr lang="en-US" sz="950" b="1" dirty="0">
+              <a:rPr lang="en-US" sz="1300" b="1" dirty="0">
                 <a:solidFill>
                   <a:srgbClr val="0068B7"/>
                 </a:solidFill>
@@ -4039,20 +4142,20 @@
               </a:rPr>
               <a:t>Use this for</a:t>
             </a:r>
-            <a:endParaRPr lang="en-US" sz="950" dirty="0"/>
-          </a:p>
-        </p:txBody>
-      </p:sp>
-      <p:sp>
-        <p:nvSpPr>
-          <p:cNvPr id="16" name="Text 14"/>
-          <p:cNvSpPr/>
-          <p:nvPr/>
-        </p:nvSpPr>
-        <p:spPr>
-          <a:xfrm>
-            <a:off x="8074152" y="3959352"/>
-            <a:ext cx="2825496" cy="1170432"/>
+            <a:endParaRPr lang="en-US" sz="1300" dirty="0"/>
+          </a:p>
+        </p:txBody>
+      </p:sp>
+      <p:sp>
+        <p:nvSpPr>
+          <p:cNvPr id="17" name="Text 15"/>
+          <p:cNvSpPr/>
+          <p:nvPr/>
+        </p:nvSpPr>
+        <p:spPr>
+          <a:xfrm>
+            <a:off x="8074152" y="4023360"/>
+            <a:ext cx="2825496" cy="1097280"/>
           </a:xfrm>
           <a:prstGeom prst="rect">
             <a:avLst/>
@@ -4070,7 +4173,7 @@
               <a:buNone/>
             </a:pPr>
             <a:r>
-              <a:rPr lang="en-US" sz="1250" dirty="0">
+              <a:rPr lang="en-US" sz="1550" dirty="0">
                 <a:solidFill>
                   <a:srgbClr val="17364A"/>
                 </a:solidFill>
@@ -4080,7 +4183,7 @@
               </a:rPr>
               <a:t>Connect the concept to public health decisions, safeguards, documentation, or implementation work.</a:t>
             </a:r>
-            <a:endParaRPr lang="en-US" sz="1250" dirty="0"/>
+            <a:endParaRPr lang="en-US" sz="1550" dirty="0"/>
           </a:p>
         </p:txBody>
       </p:sp>
@@ -4277,7 +4380,7 @@
                 <a:ea typeface="Aptos" pitchFamily="34" charset="-122"/>
                 <a:cs typeface="Aptos" pitchFamily="34" charset="-120"/>
               </a:rPr>
-              <a:t>© Paula Soper</a:t>
+              <a:t>Â© Paula Soper</a:t>
             </a:r>
             <a:endParaRPr lang="en-US" sz="800" dirty="0"/>
           </a:p>
@@ -4285,7 +4388,46 @@
       </p:sp>
       <p:sp>
         <p:nvSpPr>
-          <p:cNvPr id="7" name="Shape 5"/>
+          <p:cNvPr id="7" name="Text 5"/>
+          <p:cNvSpPr/>
+          <p:nvPr/>
+        </p:nvSpPr>
+        <p:spPr>
+          <a:xfrm>
+            <a:off x="11137392" y="6510528"/>
+            <a:ext cx="411480" cy="201168"/>
+          </a:xfrm>
+          <a:prstGeom prst="rect">
+            <a:avLst/>
+          </a:prstGeom>
+          <a:noFill/>
+          <a:ln/>
+        </p:spPr>
+        <p:txBody>
+          <a:bodyPr wrap="square" lIns="0" tIns="0" rIns="0" bIns="0" rtlCol="0" anchor="ctr"/>
+          <a:lstStyle/>
+          <a:p>
+            <a:pPr algn="r" indent="0" marL="0">
+              <a:buNone/>
+            </a:pPr>
+            <a:r>
+              <a:rPr lang="en-US" sz="900" dirty="0">
+                <a:solidFill>
+                  <a:srgbClr val="5F7181"/>
+                </a:solidFill>
+                <a:latin typeface="Aptos" pitchFamily="34" charset="0"/>
+                <a:ea typeface="Aptos" pitchFamily="34" charset="-122"/>
+                <a:cs typeface="Aptos" pitchFamily="34" charset="-120"/>
+              </a:rPr>
+              <a:t>12</a:t>
+            </a:r>
+            <a:endParaRPr lang="en-US" sz="900" dirty="0"/>
+          </a:p>
+        </p:txBody>
+      </p:sp>
+      <p:sp>
+        <p:nvSpPr>
+          <p:cNvPr id="8" name="Shape 6"/>
           <p:cNvSpPr/>
           <p:nvPr/>
         </p:nvSpPr>
@@ -4310,7 +4452,7 @@
       </p:sp>
       <p:sp>
         <p:nvSpPr>
-          <p:cNvPr id="8" name="Text 6"/>
+          <p:cNvPr id="9" name="Text 7"/>
           <p:cNvSpPr/>
           <p:nvPr/>
         </p:nvSpPr>
@@ -4349,14 +4491,14 @@
       </p:sp>
       <p:sp>
         <p:nvSpPr>
-          <p:cNvPr id="9" name="Text 7"/>
+          <p:cNvPr id="10" name="Text 8"/>
           <p:cNvSpPr/>
           <p:nvPr/>
         </p:nvSpPr>
         <p:spPr>
           <a:xfrm>
             <a:off x="640080" y="621792"/>
-            <a:ext cx="10881360" cy="566928"/>
+            <a:ext cx="10881360" cy="713232"/>
           </a:xfrm>
           <a:prstGeom prst="rect">
             <a:avLst/>
@@ -4374,7 +4516,7 @@
               <a:buNone/>
             </a:pPr>
             <a:r>
-              <a:rPr lang="en-US" sz="2700" b="1" dirty="0">
+              <a:rPr lang="en-US" sz="3400" b="1" dirty="0">
                 <a:solidFill>
                   <a:srgbClr val="003A63"/>
                 </a:solidFill>
@@ -4384,20 +4526,20 @@
               </a:rPr>
               <a:t>Topic Deep Dive</a:t>
             </a:r>
-            <a:endParaRPr lang="en-US" sz="2700" dirty="0"/>
-          </a:p>
-        </p:txBody>
-      </p:sp>
-      <p:sp>
-        <p:nvSpPr>
-          <p:cNvPr id="10" name="Text 8"/>
-          <p:cNvSpPr/>
-          <p:nvPr/>
-        </p:nvSpPr>
-        <p:spPr>
-          <a:xfrm>
-            <a:off x="868680" y="1417320"/>
-            <a:ext cx="6675120" cy="4434840"/>
+            <a:endParaRPr lang="en-US" sz="3400" dirty="0"/>
+          </a:p>
+        </p:txBody>
+      </p:sp>
+      <p:sp>
+        <p:nvSpPr>
+          <p:cNvPr id="11" name="Text 9"/>
+          <p:cNvSpPr/>
+          <p:nvPr/>
+        </p:nvSpPr>
+        <p:spPr>
+          <a:xfrm>
+            <a:off x="868680" y="1508760"/>
+            <a:ext cx="6537960" cy="4160520"/>
           </a:xfrm>
           <a:prstGeom prst="rect">
             <a:avLst/>
@@ -4412,7 +4554,7 @@
           <a:lstStyle/>
           <a:p>
             <a:r>
-              <a:rPr lang="en-US" sz="1700" dirty="0">
+              <a:rPr lang="en-US" sz="2100" dirty="0">
                 <a:solidFill>
                   <a:srgbClr val="17364A"/>
                 </a:solidFill>
@@ -4422,11 +4564,11 @@
               </a:rPr>
               <a:t>Business analysis begins with problem definition.</a:t>
             </a:r>
-            <a:endParaRPr lang="en-US" sz="1700" dirty="0"/>
-          </a:p>
-          <a:p>
-            <a:r>
-              <a:rPr lang="en-US" sz="1700" dirty="0">
+            <a:endParaRPr lang="en-US" sz="2100" dirty="0"/>
+          </a:p>
+          <a:p>
+            <a:r>
+              <a:rPr lang="en-US" sz="2100" dirty="0">
                 <a:solidFill>
                   <a:srgbClr val="17364A"/>
                 </a:solidFill>
@@ -4434,13 +4576,13 @@
                 <a:ea typeface="Aptos" pitchFamily="34" charset="-122"/>
                 <a:cs typeface="Aptos" pitchFamily="34" charset="-120"/>
               </a:rPr>
-              <a:t>Teams should document the public health objective, the operational pain point, the affected users, the current workflow,.</a:t>
-            </a:r>
-            <a:endParaRPr lang="en-US" sz="1700" dirty="0"/>
-          </a:p>
-          <a:p>
-            <a:r>
-              <a:rPr lang="en-US" sz="1700" dirty="0">
+              <a:t>Teams should document the public health objective, the operational pain point, the affected users, the.</a:t>
+            </a:r>
+            <a:endParaRPr lang="en-US" sz="2100" dirty="0"/>
+          </a:p>
+          <a:p>
+            <a:r>
+              <a:rPr lang="en-US" sz="2100" dirty="0">
                 <a:solidFill>
                   <a:srgbClr val="17364A"/>
                 </a:solidFill>
@@ -4450,27 +4592,13 @@
               </a:rPr>
               <a:t>A vague goal such as “use AI to improve efficiency” is not sufficient for implementation.</a:t>
             </a:r>
-            <a:endParaRPr lang="en-US" sz="1700" dirty="0"/>
-          </a:p>
-          <a:p>
-            <a:r>
-              <a:rPr lang="en-US" sz="1700" dirty="0">
-                <a:solidFill>
-                  <a:srgbClr val="17364A"/>
-                </a:solidFill>
-                <a:latin typeface="Aptos" pitchFamily="34" charset="0"/>
-                <a:ea typeface="Aptos" pitchFamily="34" charset="-122"/>
-                <a:cs typeface="Aptos" pitchFamily="34" charset="-120"/>
-              </a:rPr>
-              <a:t>Requirements should be grounded in workflow.</a:t>
-            </a:r>
-            <a:endParaRPr lang="en-US" sz="1700" dirty="0"/>
-          </a:p>
-        </p:txBody>
-      </p:sp>
-      <p:sp>
-        <p:nvSpPr>
-          <p:cNvPr id="11" name="Shape 9"/>
+            <a:endParaRPr lang="en-US" sz="2100" dirty="0"/>
+          </a:p>
+        </p:txBody>
+      </p:sp>
+      <p:sp>
+        <p:nvSpPr>
+          <p:cNvPr id="12" name="Shape 10"/>
           <p:cNvSpPr/>
           <p:nvPr/>
         </p:nvSpPr>
@@ -4497,14 +4625,14 @@
       </p:sp>
       <p:sp>
         <p:nvSpPr>
-          <p:cNvPr id="12" name="Text 10"/>
+          <p:cNvPr id="13" name="Text 11"/>
           <p:cNvSpPr/>
           <p:nvPr/>
         </p:nvSpPr>
         <p:spPr>
           <a:xfrm>
             <a:off x="8074152" y="1563624"/>
-            <a:ext cx="2825496" cy="201168"/>
+            <a:ext cx="2825496" cy="256032"/>
           </a:xfrm>
           <a:prstGeom prst="rect">
             <a:avLst/>
@@ -4520,7 +4648,7 @@
               <a:buNone/>
             </a:pPr>
             <a:r>
-              <a:rPr lang="en-US" sz="950" b="1" dirty="0">
+              <a:rPr lang="en-US" sz="1300" b="1" dirty="0">
                 <a:solidFill>
                   <a:srgbClr val="0068B7"/>
                 </a:solidFill>
@@ -4530,20 +4658,20 @@
               </a:rPr>
               <a:t>Key idea</a:t>
             </a:r>
-            <a:endParaRPr lang="en-US" sz="950" dirty="0"/>
-          </a:p>
-        </p:txBody>
-      </p:sp>
-      <p:sp>
-        <p:nvSpPr>
-          <p:cNvPr id="13" name="Text 11"/>
-          <p:cNvSpPr/>
-          <p:nvPr/>
-        </p:nvSpPr>
-        <p:spPr>
-          <a:xfrm>
-            <a:off x="8074152" y="1856232"/>
-            <a:ext cx="2825496" cy="1261872"/>
+            <a:endParaRPr lang="en-US" sz="1300" dirty="0"/>
+          </a:p>
+        </p:txBody>
+      </p:sp>
+      <p:sp>
+        <p:nvSpPr>
+          <p:cNvPr id="14" name="Text 12"/>
+          <p:cNvSpPr/>
+          <p:nvPr/>
+        </p:nvSpPr>
+        <p:spPr>
+          <a:xfrm>
+            <a:off x="8074152" y="1920240"/>
+            <a:ext cx="2825496" cy="1188720"/>
           </a:xfrm>
           <a:prstGeom prst="rect">
             <a:avLst/>
@@ -4561,7 +4689,7 @@
               <a:buNone/>
             </a:pPr>
             <a:r>
-              <a:rPr lang="en-US" sz="1250" dirty="0">
+              <a:rPr lang="en-US" sz="1550" dirty="0">
                 <a:solidFill>
                   <a:srgbClr val="17364A"/>
                 </a:solidFill>
@@ -4571,13 +4699,13 @@
               </a:rPr>
               <a:t>Business analysis begins with problem definition.</a:t>
             </a:r>
-            <a:endParaRPr lang="en-US" sz="1250" dirty="0"/>
-          </a:p>
-        </p:txBody>
-      </p:sp>
-      <p:sp>
-        <p:nvSpPr>
-          <p:cNvPr id="14" name="Shape 12"/>
+            <a:endParaRPr lang="en-US" sz="1550" dirty="0"/>
+          </a:p>
+        </p:txBody>
+      </p:sp>
+      <p:sp>
+        <p:nvSpPr>
+          <p:cNvPr id="15" name="Shape 13"/>
           <p:cNvSpPr/>
           <p:nvPr/>
         </p:nvSpPr>
@@ -4604,14 +4732,14 @@
       </p:sp>
       <p:sp>
         <p:nvSpPr>
-          <p:cNvPr id="15" name="Text 13"/>
+          <p:cNvPr id="16" name="Text 14"/>
           <p:cNvSpPr/>
           <p:nvPr/>
         </p:nvSpPr>
         <p:spPr>
           <a:xfrm>
             <a:off x="8074152" y="3666744"/>
-            <a:ext cx="2825496" cy="201168"/>
+            <a:ext cx="2825496" cy="256032"/>
           </a:xfrm>
           <a:prstGeom prst="rect">
             <a:avLst/>
@@ -4627,7 +4755,7 @@
               <a:buNone/>
             </a:pPr>
             <a:r>
-              <a:rPr lang="en-US" sz="950" b="1" dirty="0">
+              <a:rPr lang="en-US" sz="1300" b="1" dirty="0">
                 <a:solidFill>
                   <a:srgbClr val="0068B7"/>
                 </a:solidFill>
@@ -4637,20 +4765,20 @@
               </a:rPr>
               <a:t>Use this for</a:t>
             </a:r>
-            <a:endParaRPr lang="en-US" sz="950" dirty="0"/>
-          </a:p>
-        </p:txBody>
-      </p:sp>
-      <p:sp>
-        <p:nvSpPr>
-          <p:cNvPr id="16" name="Text 14"/>
-          <p:cNvSpPr/>
-          <p:nvPr/>
-        </p:nvSpPr>
-        <p:spPr>
-          <a:xfrm>
-            <a:off x="8074152" y="3959352"/>
-            <a:ext cx="2825496" cy="1170432"/>
+            <a:endParaRPr lang="en-US" sz="1300" dirty="0"/>
+          </a:p>
+        </p:txBody>
+      </p:sp>
+      <p:sp>
+        <p:nvSpPr>
+          <p:cNvPr id="17" name="Text 15"/>
+          <p:cNvSpPr/>
+          <p:nvPr/>
+        </p:nvSpPr>
+        <p:spPr>
+          <a:xfrm>
+            <a:off x="8074152" y="4023360"/>
+            <a:ext cx="2825496" cy="1097280"/>
           </a:xfrm>
           <a:prstGeom prst="rect">
             <a:avLst/>
@@ -4668,7 +4796,7 @@
               <a:buNone/>
             </a:pPr>
             <a:r>
-              <a:rPr lang="en-US" sz="1250" dirty="0">
+              <a:rPr lang="en-US" sz="1550" dirty="0">
                 <a:solidFill>
                   <a:srgbClr val="17364A"/>
                 </a:solidFill>
@@ -4678,7 +4806,7 @@
               </a:rPr>
               <a:t>Connect the concept to public health decisions, safeguards, documentation, or implementation work.</a:t>
             </a:r>
-            <a:endParaRPr lang="en-US" sz="1250" dirty="0"/>
+            <a:endParaRPr lang="en-US" sz="1550" dirty="0"/>
           </a:p>
         </p:txBody>
       </p:sp>
@@ -4875,7 +5003,7 @@
                 <a:ea typeface="Aptos" pitchFamily="34" charset="-122"/>
                 <a:cs typeface="Aptos" pitchFamily="34" charset="-120"/>
               </a:rPr>
-              <a:t>© Paula Soper</a:t>
+              <a:t>Â© Paula Soper</a:t>
             </a:r>
             <a:endParaRPr lang="en-US" sz="800" dirty="0"/>
           </a:p>
@@ -4883,7 +5011,46 @@
       </p:sp>
       <p:sp>
         <p:nvSpPr>
-          <p:cNvPr id="7" name="Shape 5"/>
+          <p:cNvPr id="7" name="Text 5"/>
+          <p:cNvSpPr/>
+          <p:nvPr/>
+        </p:nvSpPr>
+        <p:spPr>
+          <a:xfrm>
+            <a:off x="11137392" y="6510528"/>
+            <a:ext cx="411480" cy="201168"/>
+          </a:xfrm>
+          <a:prstGeom prst="rect">
+            <a:avLst/>
+          </a:prstGeom>
+          <a:noFill/>
+          <a:ln/>
+        </p:spPr>
+        <p:txBody>
+          <a:bodyPr wrap="square" lIns="0" tIns="0" rIns="0" bIns="0" rtlCol="0" anchor="ctr"/>
+          <a:lstStyle/>
+          <a:p>
+            <a:pPr algn="r" indent="0" marL="0">
+              <a:buNone/>
+            </a:pPr>
+            <a:r>
+              <a:rPr lang="en-US" sz="900" dirty="0">
+                <a:solidFill>
+                  <a:srgbClr val="5F7181"/>
+                </a:solidFill>
+                <a:latin typeface="Aptos" pitchFamily="34" charset="0"/>
+                <a:ea typeface="Aptos" pitchFamily="34" charset="-122"/>
+                <a:cs typeface="Aptos" pitchFamily="34" charset="-120"/>
+              </a:rPr>
+              <a:t>13</a:t>
+            </a:r>
+            <a:endParaRPr lang="en-US" sz="900" dirty="0"/>
+          </a:p>
+        </p:txBody>
+      </p:sp>
+      <p:sp>
+        <p:nvSpPr>
+          <p:cNvPr id="8" name="Shape 6"/>
           <p:cNvSpPr/>
           <p:nvPr/>
         </p:nvSpPr>
@@ -4908,7 +5075,7 @@
       </p:sp>
       <p:sp>
         <p:nvSpPr>
-          <p:cNvPr id="8" name="Text 6"/>
+          <p:cNvPr id="9" name="Text 7"/>
           <p:cNvSpPr/>
           <p:nvPr/>
         </p:nvSpPr>
@@ -4947,14 +5114,14 @@
       </p:sp>
       <p:sp>
         <p:nvSpPr>
-          <p:cNvPr id="9" name="Text 7"/>
+          <p:cNvPr id="10" name="Text 8"/>
           <p:cNvSpPr/>
           <p:nvPr/>
         </p:nvSpPr>
         <p:spPr>
           <a:xfrm>
             <a:off x="640080" y="621792"/>
-            <a:ext cx="10881360" cy="566928"/>
+            <a:ext cx="10881360" cy="713232"/>
           </a:xfrm>
           <a:prstGeom prst="rect">
             <a:avLst/>
@@ -4972,7 +5139,7 @@
               <a:buNone/>
             </a:pPr>
             <a:r>
-              <a:rPr lang="en-US" sz="2700" b="1" dirty="0">
+              <a:rPr lang="en-US" sz="3400" b="1" dirty="0">
                 <a:solidFill>
                   <a:srgbClr val="003A63"/>
                 </a:solidFill>
@@ -4982,20 +5149,20 @@
               </a:rPr>
               <a:t>Risks, Failure Modes, and Guardrails</a:t>
             </a:r>
-            <a:endParaRPr lang="en-US" sz="2700" dirty="0"/>
-          </a:p>
-        </p:txBody>
-      </p:sp>
-      <p:sp>
-        <p:nvSpPr>
-          <p:cNvPr id="10" name="Text 8"/>
-          <p:cNvSpPr/>
-          <p:nvPr/>
-        </p:nvSpPr>
-        <p:spPr>
-          <a:xfrm>
-            <a:off x="868680" y="1417320"/>
-            <a:ext cx="6675120" cy="4434840"/>
+            <a:endParaRPr lang="en-US" sz="3400" dirty="0"/>
+          </a:p>
+        </p:txBody>
+      </p:sp>
+      <p:sp>
+        <p:nvSpPr>
+          <p:cNvPr id="11" name="Text 9"/>
+          <p:cNvSpPr/>
+          <p:nvPr/>
+        </p:nvSpPr>
+        <p:spPr>
+          <a:xfrm>
+            <a:off x="868680" y="1508760"/>
+            <a:ext cx="6537960" cy="4160520"/>
           </a:xfrm>
           <a:prstGeom prst="rect">
             <a:avLst/>
@@ -5010,7 +5177,7 @@
           <a:lstStyle/>
           <a:p>
             <a:r>
-              <a:rPr lang="en-US" sz="1700" dirty="0">
+              <a:rPr lang="en-US" sz="2100" dirty="0">
                 <a:solidFill>
                   <a:srgbClr val="17364A"/>
                 </a:solidFill>
@@ -5020,11 +5187,11 @@
               </a:rPr>
               <a:t>A common failure mode is treating the topic as a technical detail rather than a public health control.</a:t>
             </a:r>
-            <a:endParaRPr lang="en-US" sz="1700" dirty="0"/>
-          </a:p>
-          <a:p>
-            <a:r>
-              <a:rPr lang="en-US" sz="1700" dirty="0">
+            <a:endParaRPr lang="en-US" sz="2100" dirty="0"/>
+          </a:p>
+          <a:p>
+            <a:r>
+              <a:rPr lang="en-US" sz="2100" dirty="0">
                 <a:solidFill>
                   <a:srgbClr val="17364A"/>
                 </a:solidFill>
@@ -5032,13 +5199,13 @@
                 <a:ea typeface="Aptos" pitchFamily="34" charset="-122"/>
                 <a:cs typeface="Aptos" pitchFamily="34" charset="-120"/>
               </a:rPr>
-              <a:t>When staff do not connect technical decisions to authority, workflow, equity, privacy, security, and accountability, the.</a:t>
-            </a:r>
-            <a:endParaRPr lang="en-US" sz="1700" dirty="0"/>
-          </a:p>
-          <a:p>
-            <a:r>
-              <a:rPr lang="en-US" sz="1700" dirty="0">
+              <a:t>When staff do not connect technical decisions to authority, workflow, equity, privacy, security, and.</a:t>
+            </a:r>
+            <a:endParaRPr lang="en-US" sz="2100" dirty="0"/>
+          </a:p>
+          <a:p>
+            <a:r>
+              <a:rPr lang="en-US" sz="2100" dirty="0">
                 <a:solidFill>
                   <a:srgbClr val="17364A"/>
                 </a:solidFill>
@@ -5048,27 +5215,13 @@
               </a:rPr>
               <a:t>Another risk is relying on vendor claims without agency-defined evidence.</a:t>
             </a:r>
-            <a:endParaRPr lang="en-US" sz="1700" dirty="0"/>
-          </a:p>
-          <a:p>
-            <a:r>
-              <a:rPr lang="en-US" sz="1700" dirty="0">
-                <a:solidFill>
-                  <a:srgbClr val="17364A"/>
-                </a:solidFill>
-                <a:latin typeface="Aptos" pitchFamily="34" charset="0"/>
-                <a:ea typeface="Aptos" pitchFamily="34" charset="-122"/>
-                <a:cs typeface="Aptos" pitchFamily="34" charset="-120"/>
-              </a:rPr>
-              <a:t>Vendors may provide demonstrations, dashboards, or summary metrics that do not match the agency workflow or data environment.</a:t>
-            </a:r>
-            <a:endParaRPr lang="en-US" sz="1700" dirty="0"/>
-          </a:p>
-        </p:txBody>
-      </p:sp>
-      <p:sp>
-        <p:nvSpPr>
-          <p:cNvPr id="11" name="Shape 9"/>
+            <a:endParaRPr lang="en-US" sz="2100" dirty="0"/>
+          </a:p>
+        </p:txBody>
+      </p:sp>
+      <p:sp>
+        <p:nvSpPr>
+          <p:cNvPr id="12" name="Shape 10"/>
           <p:cNvSpPr/>
           <p:nvPr/>
         </p:nvSpPr>
@@ -5095,14 +5248,14 @@
       </p:sp>
       <p:sp>
         <p:nvSpPr>
-          <p:cNvPr id="12" name="Text 10"/>
+          <p:cNvPr id="13" name="Text 11"/>
           <p:cNvSpPr/>
           <p:nvPr/>
         </p:nvSpPr>
         <p:spPr>
           <a:xfrm>
             <a:off x="8074152" y="1563624"/>
-            <a:ext cx="2825496" cy="201168"/>
+            <a:ext cx="2825496" cy="256032"/>
           </a:xfrm>
           <a:prstGeom prst="rect">
             <a:avLst/>
@@ -5118,7 +5271,7 @@
               <a:buNone/>
             </a:pPr>
             <a:r>
-              <a:rPr lang="en-US" sz="950" b="1" dirty="0">
+              <a:rPr lang="en-US" sz="1300" b="1" dirty="0">
                 <a:solidFill>
                   <a:srgbClr val="0068B7"/>
                 </a:solidFill>
@@ -5128,20 +5281,20 @@
               </a:rPr>
               <a:t>Key idea</a:t>
             </a:r>
-            <a:endParaRPr lang="en-US" sz="950" dirty="0"/>
-          </a:p>
-        </p:txBody>
-      </p:sp>
-      <p:sp>
-        <p:nvSpPr>
-          <p:cNvPr id="13" name="Text 11"/>
-          <p:cNvSpPr/>
-          <p:nvPr/>
-        </p:nvSpPr>
-        <p:spPr>
-          <a:xfrm>
-            <a:off x="8074152" y="1856232"/>
-            <a:ext cx="2825496" cy="1261872"/>
+            <a:endParaRPr lang="en-US" sz="1300" dirty="0"/>
+          </a:p>
+        </p:txBody>
+      </p:sp>
+      <p:sp>
+        <p:nvSpPr>
+          <p:cNvPr id="14" name="Text 12"/>
+          <p:cNvSpPr/>
+          <p:nvPr/>
+        </p:nvSpPr>
+        <p:spPr>
+          <a:xfrm>
+            <a:off x="8074152" y="1920240"/>
+            <a:ext cx="2825496" cy="1188720"/>
           </a:xfrm>
           <a:prstGeom prst="rect">
             <a:avLst/>
@@ -5159,7 +5312,7 @@
               <a:buNone/>
             </a:pPr>
             <a:r>
-              <a:rPr lang="en-US" sz="1250" dirty="0">
+              <a:rPr lang="en-US" sz="1550" dirty="0">
                 <a:solidFill>
                   <a:srgbClr val="17364A"/>
                 </a:solidFill>
@@ -5169,13 +5322,13 @@
               </a:rPr>
               <a:t>A common failure mode is treating the topic as a technical detail rather than a public health control.</a:t>
             </a:r>
-            <a:endParaRPr lang="en-US" sz="1250" dirty="0"/>
-          </a:p>
-        </p:txBody>
-      </p:sp>
-      <p:sp>
-        <p:nvSpPr>
-          <p:cNvPr id="14" name="Shape 12"/>
+            <a:endParaRPr lang="en-US" sz="1550" dirty="0"/>
+          </a:p>
+        </p:txBody>
+      </p:sp>
+      <p:sp>
+        <p:nvSpPr>
+          <p:cNvPr id="15" name="Shape 13"/>
           <p:cNvSpPr/>
           <p:nvPr/>
         </p:nvSpPr>
@@ -5202,14 +5355,14 @@
       </p:sp>
       <p:sp>
         <p:nvSpPr>
-          <p:cNvPr id="15" name="Text 13"/>
+          <p:cNvPr id="16" name="Text 14"/>
           <p:cNvSpPr/>
           <p:nvPr/>
         </p:nvSpPr>
         <p:spPr>
           <a:xfrm>
             <a:off x="8074152" y="3666744"/>
-            <a:ext cx="2825496" cy="201168"/>
+            <a:ext cx="2825496" cy="256032"/>
           </a:xfrm>
           <a:prstGeom prst="rect">
             <a:avLst/>
@@ -5225,7 +5378,7 @@
               <a:buNone/>
             </a:pPr>
             <a:r>
-              <a:rPr lang="en-US" sz="950" b="1" dirty="0">
+              <a:rPr lang="en-US" sz="1300" b="1" dirty="0">
                 <a:solidFill>
                   <a:srgbClr val="0068B7"/>
                 </a:solidFill>
@@ -5235,20 +5388,20 @@
               </a:rPr>
               <a:t>Use this for</a:t>
             </a:r>
-            <a:endParaRPr lang="en-US" sz="950" dirty="0"/>
-          </a:p>
-        </p:txBody>
-      </p:sp>
-      <p:sp>
-        <p:nvSpPr>
-          <p:cNvPr id="16" name="Text 14"/>
-          <p:cNvSpPr/>
-          <p:nvPr/>
-        </p:nvSpPr>
-        <p:spPr>
-          <a:xfrm>
-            <a:off x="8074152" y="3959352"/>
-            <a:ext cx="2825496" cy="1170432"/>
+            <a:endParaRPr lang="en-US" sz="1300" dirty="0"/>
+          </a:p>
+        </p:txBody>
+      </p:sp>
+      <p:sp>
+        <p:nvSpPr>
+          <p:cNvPr id="17" name="Text 15"/>
+          <p:cNvSpPr/>
+          <p:nvPr/>
+        </p:nvSpPr>
+        <p:spPr>
+          <a:xfrm>
+            <a:off x="8074152" y="4023360"/>
+            <a:ext cx="2825496" cy="1097280"/>
           </a:xfrm>
           <a:prstGeom prst="rect">
             <a:avLst/>
@@ -5266,7 +5419,7 @@
               <a:buNone/>
             </a:pPr>
             <a:r>
-              <a:rPr lang="en-US" sz="1250" dirty="0">
+              <a:rPr lang="en-US" sz="1550" dirty="0">
                 <a:solidFill>
                   <a:srgbClr val="17364A"/>
                 </a:solidFill>
@@ -5276,7 +5429,7 @@
               </a:rPr>
               <a:t>Connect the concept to public health decisions, safeguards, documentation, or implementation work.</a:t>
             </a:r>
-            <a:endParaRPr lang="en-US" sz="1250" dirty="0"/>
+            <a:endParaRPr lang="en-US" sz="1550" dirty="0"/>
           </a:p>
         </p:txBody>
       </p:sp>
@@ -5473,7 +5626,7 @@
                 <a:ea typeface="Aptos" pitchFamily="34" charset="-122"/>
                 <a:cs typeface="Aptos" pitchFamily="34" charset="-120"/>
               </a:rPr>
-              <a:t>© Paula Soper</a:t>
+              <a:t>Â© Paula Soper</a:t>
             </a:r>
             <a:endParaRPr lang="en-US" sz="800" dirty="0"/>
           </a:p>
@@ -5481,7 +5634,46 @@
       </p:sp>
       <p:sp>
         <p:nvSpPr>
-          <p:cNvPr id="7" name="Shape 5"/>
+          <p:cNvPr id="7" name="Text 5"/>
+          <p:cNvSpPr/>
+          <p:nvPr/>
+        </p:nvSpPr>
+        <p:spPr>
+          <a:xfrm>
+            <a:off x="11137392" y="6510528"/>
+            <a:ext cx="411480" cy="201168"/>
+          </a:xfrm>
+          <a:prstGeom prst="rect">
+            <a:avLst/>
+          </a:prstGeom>
+          <a:noFill/>
+          <a:ln/>
+        </p:spPr>
+        <p:txBody>
+          <a:bodyPr wrap="square" lIns="0" tIns="0" rIns="0" bIns="0" rtlCol="0" anchor="ctr"/>
+          <a:lstStyle/>
+          <a:p>
+            <a:pPr algn="r" indent="0" marL="0">
+              <a:buNone/>
+            </a:pPr>
+            <a:r>
+              <a:rPr lang="en-US" sz="900" dirty="0">
+                <a:solidFill>
+                  <a:srgbClr val="5F7181"/>
+                </a:solidFill>
+                <a:latin typeface="Aptos" pitchFamily="34" charset="0"/>
+                <a:ea typeface="Aptos" pitchFamily="34" charset="-122"/>
+                <a:cs typeface="Aptos" pitchFamily="34" charset="-120"/>
+              </a:rPr>
+              <a:t>14</a:t>
+            </a:r>
+            <a:endParaRPr lang="en-US" sz="900" dirty="0"/>
+          </a:p>
+        </p:txBody>
+      </p:sp>
+      <p:sp>
+        <p:nvSpPr>
+          <p:cNvPr id="8" name="Shape 6"/>
           <p:cNvSpPr/>
           <p:nvPr/>
         </p:nvSpPr>
@@ -5506,7 +5698,7 @@
       </p:sp>
       <p:sp>
         <p:nvSpPr>
-          <p:cNvPr id="8" name="Text 6"/>
+          <p:cNvPr id="9" name="Text 7"/>
           <p:cNvSpPr/>
           <p:nvPr/>
         </p:nvSpPr>
@@ -5545,14 +5737,14 @@
       </p:sp>
       <p:sp>
         <p:nvSpPr>
-          <p:cNvPr id="9" name="Text 7"/>
+          <p:cNvPr id="10" name="Text 8"/>
           <p:cNvSpPr/>
           <p:nvPr/>
         </p:nvSpPr>
         <p:spPr>
           <a:xfrm>
             <a:off x="640080" y="621792"/>
-            <a:ext cx="10881360" cy="566928"/>
+            <a:ext cx="10881360" cy="713232"/>
           </a:xfrm>
           <a:prstGeom prst="rect">
             <a:avLst/>
@@ -5570,7 +5762,7 @@
               <a:buNone/>
             </a:pPr>
             <a:r>
-              <a:rPr lang="en-US" sz="2700" b="1" dirty="0">
+              <a:rPr lang="en-US" sz="3400" b="1" dirty="0">
                 <a:solidFill>
                   <a:srgbClr val="003A63"/>
                 </a:solidFill>
@@ -5580,20 +5772,20 @@
               </a:rPr>
               <a:t>Application to AI-Supported Workflows</a:t>
             </a:r>
-            <a:endParaRPr lang="en-US" sz="2700" dirty="0"/>
-          </a:p>
-        </p:txBody>
-      </p:sp>
-      <p:sp>
-        <p:nvSpPr>
-          <p:cNvPr id="10" name="Text 8"/>
-          <p:cNvSpPr/>
-          <p:nvPr/>
-        </p:nvSpPr>
-        <p:spPr>
-          <a:xfrm>
-            <a:off x="868680" y="1417320"/>
-            <a:ext cx="6675120" cy="4434840"/>
+            <a:endParaRPr lang="en-US" sz="3400" dirty="0"/>
+          </a:p>
+        </p:txBody>
+      </p:sp>
+      <p:sp>
+        <p:nvSpPr>
+          <p:cNvPr id="11" name="Text 9"/>
+          <p:cNvSpPr/>
+          <p:nvPr/>
+        </p:nvSpPr>
+        <p:spPr>
+          <a:xfrm>
+            <a:off x="868680" y="1508760"/>
+            <a:ext cx="6537960" cy="4160520"/>
           </a:xfrm>
           <a:prstGeom prst="rect">
             <a:avLst/>
@@ -5608,7 +5800,7 @@
           <a:lstStyle/>
           <a:p>
             <a:r>
-              <a:rPr lang="en-US" sz="1700" dirty="0">
+              <a:rPr lang="en-US" sz="2100" dirty="0">
                 <a:solidFill>
                   <a:srgbClr val="17364A"/>
                 </a:solidFill>
@@ -5616,13 +5808,13 @@
                 <a:ea typeface="Aptos" pitchFamily="34" charset="-122"/>
                 <a:cs typeface="Aptos" pitchFamily="34" charset="-120"/>
               </a:rPr>
-              <a:t>Generative AI, predictive analytics, RAG, automation, and agentic workflows all depend on the controls described in this.</a:t>
-            </a:r>
-            <a:endParaRPr lang="en-US" sz="1700" dirty="0"/>
-          </a:p>
-          <a:p>
-            <a:r>
-              <a:rPr lang="en-US" sz="1700" dirty="0">
+              <a:t>Generative AI, predictive analytics, RAG, automation, and agentic workflows all depend on the controls.</a:t>
+            </a:r>
+            <a:endParaRPr lang="en-US" sz="2100" dirty="0"/>
+          </a:p>
+          <a:p>
+            <a:r>
+              <a:rPr lang="en-US" sz="2100" dirty="0">
                 <a:solidFill>
                   <a:srgbClr val="17364A"/>
                 </a:solidFill>
@@ -5632,11 +5824,11 @@
               </a:rPr>
               <a:t>The controls should be scaled to the risk of the use case.</a:t>
             </a:r>
-            <a:endParaRPr lang="en-US" sz="1700" dirty="0"/>
-          </a:p>
-          <a:p>
-            <a:r>
-              <a:rPr lang="en-US" sz="1700" dirty="0">
+            <a:endParaRPr lang="en-US" sz="2100" dirty="0"/>
+          </a:p>
+          <a:p>
+            <a:r>
+              <a:rPr lang="en-US" sz="2100" dirty="0">
                 <a:solidFill>
                   <a:srgbClr val="17364A"/>
                 </a:solidFill>
@@ -5644,29 +5836,15 @@
                 <a:ea typeface="Aptos" pitchFamily="34" charset="-122"/>
                 <a:cs typeface="Aptos" pitchFamily="34" charset="-120"/>
               </a:rPr>
-              <a:t>A tool that drafts internal training text may require lighter review than a tool that updates case records, prioritizes.</a:t>
-            </a:r>
-            <a:endParaRPr lang="en-US" sz="1700" dirty="0"/>
-          </a:p>
-          <a:p>
-            <a:r>
-              <a:rPr lang="en-US" sz="1700" dirty="0">
-                <a:solidFill>
-                  <a:srgbClr val="17364A"/>
-                </a:solidFill>
-                <a:latin typeface="Aptos" pitchFamily="34" charset="0"/>
-                <a:ea typeface="Aptos" pitchFamily="34" charset="-122"/>
-                <a:cs typeface="Aptos" pitchFamily="34" charset="-120"/>
-              </a:rPr>
-              <a:t>The module should be applied during readiness assessment, procurement, implementation planning, pilot testing, and.</a:t>
-            </a:r>
-            <a:endParaRPr lang="en-US" sz="1700" dirty="0"/>
-          </a:p>
-        </p:txBody>
-      </p:sp>
-      <p:sp>
-        <p:nvSpPr>
-          <p:cNvPr id="11" name="Shape 9"/>
+              <a:t>A tool that drafts internal training text may require lighter review than a tool that updates case.</a:t>
+            </a:r>
+            <a:endParaRPr lang="en-US" sz="2100" dirty="0"/>
+          </a:p>
+        </p:txBody>
+      </p:sp>
+      <p:sp>
+        <p:nvSpPr>
+          <p:cNvPr id="12" name="Shape 10"/>
           <p:cNvSpPr/>
           <p:nvPr/>
         </p:nvSpPr>
@@ -5693,14 +5871,14 @@
       </p:sp>
       <p:sp>
         <p:nvSpPr>
-          <p:cNvPr id="12" name="Text 10"/>
+          <p:cNvPr id="13" name="Text 11"/>
           <p:cNvSpPr/>
           <p:nvPr/>
         </p:nvSpPr>
         <p:spPr>
           <a:xfrm>
             <a:off x="8074152" y="1563624"/>
-            <a:ext cx="2825496" cy="201168"/>
+            <a:ext cx="2825496" cy="256032"/>
           </a:xfrm>
           <a:prstGeom prst="rect">
             <a:avLst/>
@@ -5716,7 +5894,7 @@
               <a:buNone/>
             </a:pPr>
             <a:r>
-              <a:rPr lang="en-US" sz="950" b="1" dirty="0">
+              <a:rPr lang="en-US" sz="1300" b="1" dirty="0">
                 <a:solidFill>
                   <a:srgbClr val="0068B7"/>
                 </a:solidFill>
@@ -5726,20 +5904,20 @@
               </a:rPr>
               <a:t>Key idea</a:t>
             </a:r>
-            <a:endParaRPr lang="en-US" sz="950" dirty="0"/>
-          </a:p>
-        </p:txBody>
-      </p:sp>
-      <p:sp>
-        <p:nvSpPr>
-          <p:cNvPr id="13" name="Text 11"/>
-          <p:cNvSpPr/>
-          <p:nvPr/>
-        </p:nvSpPr>
-        <p:spPr>
-          <a:xfrm>
-            <a:off x="8074152" y="1856232"/>
-            <a:ext cx="2825496" cy="1261872"/>
+            <a:endParaRPr lang="en-US" sz="1300" dirty="0"/>
+          </a:p>
+        </p:txBody>
+      </p:sp>
+      <p:sp>
+        <p:nvSpPr>
+          <p:cNvPr id="14" name="Text 12"/>
+          <p:cNvSpPr/>
+          <p:nvPr/>
+        </p:nvSpPr>
+        <p:spPr>
+          <a:xfrm>
+            <a:off x="8074152" y="1920240"/>
+            <a:ext cx="2825496" cy="1188720"/>
           </a:xfrm>
           <a:prstGeom prst="rect">
             <a:avLst/>
@@ -5757,7 +5935,7 @@
               <a:buNone/>
             </a:pPr>
             <a:r>
-              <a:rPr lang="en-US" sz="1250" dirty="0">
+              <a:rPr lang="en-US" sz="1550" dirty="0">
                 <a:solidFill>
                   <a:srgbClr val="17364A"/>
                 </a:solidFill>
@@ -5765,15 +5943,15 @@
                 <a:ea typeface="Aptos" pitchFamily="34" charset="-122"/>
                 <a:cs typeface="Aptos" pitchFamily="34" charset="-120"/>
               </a:rPr>
-              <a:t>Generative AI, predictive analytics, RAG, automation, and agentic workflows all depend on the controls described in this.</a:t>
-            </a:r>
-            <a:endParaRPr lang="en-US" sz="1250" dirty="0"/>
-          </a:p>
-        </p:txBody>
-      </p:sp>
-      <p:sp>
-        <p:nvSpPr>
-          <p:cNvPr id="14" name="Shape 12"/>
+              <a:t>Generative AI, predictive analytics, RAG, automation, and agentic workflows all depend on the controls.</a:t>
+            </a:r>
+            <a:endParaRPr lang="en-US" sz="1550" dirty="0"/>
+          </a:p>
+        </p:txBody>
+      </p:sp>
+      <p:sp>
+        <p:nvSpPr>
+          <p:cNvPr id="15" name="Shape 13"/>
           <p:cNvSpPr/>
           <p:nvPr/>
         </p:nvSpPr>
@@ -5800,14 +5978,14 @@
       </p:sp>
       <p:sp>
         <p:nvSpPr>
-          <p:cNvPr id="15" name="Text 13"/>
+          <p:cNvPr id="16" name="Text 14"/>
           <p:cNvSpPr/>
           <p:nvPr/>
         </p:nvSpPr>
         <p:spPr>
           <a:xfrm>
             <a:off x="8074152" y="3666744"/>
-            <a:ext cx="2825496" cy="201168"/>
+            <a:ext cx="2825496" cy="256032"/>
           </a:xfrm>
           <a:prstGeom prst="rect">
             <a:avLst/>
@@ -5823,7 +6001,7 @@
               <a:buNone/>
             </a:pPr>
             <a:r>
-              <a:rPr lang="en-US" sz="950" b="1" dirty="0">
+              <a:rPr lang="en-US" sz="1300" b="1" dirty="0">
                 <a:solidFill>
                   <a:srgbClr val="0068B7"/>
                 </a:solidFill>
@@ -5833,20 +6011,20 @@
               </a:rPr>
               <a:t>Use this for</a:t>
             </a:r>
-            <a:endParaRPr lang="en-US" sz="950" dirty="0"/>
-          </a:p>
-        </p:txBody>
-      </p:sp>
-      <p:sp>
-        <p:nvSpPr>
-          <p:cNvPr id="16" name="Text 14"/>
-          <p:cNvSpPr/>
-          <p:nvPr/>
-        </p:nvSpPr>
-        <p:spPr>
-          <a:xfrm>
-            <a:off x="8074152" y="3959352"/>
-            <a:ext cx="2825496" cy="1170432"/>
+            <a:endParaRPr lang="en-US" sz="1300" dirty="0"/>
+          </a:p>
+        </p:txBody>
+      </p:sp>
+      <p:sp>
+        <p:nvSpPr>
+          <p:cNvPr id="17" name="Text 15"/>
+          <p:cNvSpPr/>
+          <p:nvPr/>
+        </p:nvSpPr>
+        <p:spPr>
+          <a:xfrm>
+            <a:off x="8074152" y="4023360"/>
+            <a:ext cx="2825496" cy="1097280"/>
           </a:xfrm>
           <a:prstGeom prst="rect">
             <a:avLst/>
@@ -5864,7 +6042,7 @@
               <a:buNone/>
             </a:pPr>
             <a:r>
-              <a:rPr lang="en-US" sz="1250" dirty="0">
+              <a:rPr lang="en-US" sz="1550" dirty="0">
                 <a:solidFill>
                   <a:srgbClr val="17364A"/>
                 </a:solidFill>
@@ -5874,7 +6052,7 @@
               </a:rPr>
               <a:t>Connect the concept to public health decisions, safeguards, documentation, or implementation work.</a:t>
             </a:r>
-            <a:endParaRPr lang="en-US" sz="1250" dirty="0"/>
+            <a:endParaRPr lang="en-US" sz="1550" dirty="0"/>
           </a:p>
         </p:txBody>
       </p:sp>
@@ -6071,7 +6249,7 @@
                 <a:ea typeface="Aptos" pitchFamily="34" charset="-122"/>
                 <a:cs typeface="Aptos" pitchFamily="34" charset="-120"/>
               </a:rPr>
-              <a:t>© Paula Soper</a:t>
+              <a:t>Â© Paula Soper</a:t>
             </a:r>
             <a:endParaRPr lang="en-US" sz="800" dirty="0"/>
           </a:p>
@@ -6079,7 +6257,46 @@
       </p:sp>
       <p:sp>
         <p:nvSpPr>
-          <p:cNvPr id="7" name="Shape 5"/>
+          <p:cNvPr id="7" name="Text 5"/>
+          <p:cNvSpPr/>
+          <p:nvPr/>
+        </p:nvSpPr>
+        <p:spPr>
+          <a:xfrm>
+            <a:off x="11137392" y="6510528"/>
+            <a:ext cx="411480" cy="201168"/>
+          </a:xfrm>
+          <a:prstGeom prst="rect">
+            <a:avLst/>
+          </a:prstGeom>
+          <a:noFill/>
+          <a:ln/>
+        </p:spPr>
+        <p:txBody>
+          <a:bodyPr wrap="square" lIns="0" tIns="0" rIns="0" bIns="0" rtlCol="0" anchor="ctr"/>
+          <a:lstStyle/>
+          <a:p>
+            <a:pPr algn="r" indent="0" marL="0">
+              <a:buNone/>
+            </a:pPr>
+            <a:r>
+              <a:rPr lang="en-US" sz="900" dirty="0">
+                <a:solidFill>
+                  <a:srgbClr val="5F7181"/>
+                </a:solidFill>
+                <a:latin typeface="Aptos" pitchFamily="34" charset="0"/>
+                <a:ea typeface="Aptos" pitchFamily="34" charset="-122"/>
+                <a:cs typeface="Aptos" pitchFamily="34" charset="-120"/>
+              </a:rPr>
+              <a:t>15</a:t>
+            </a:r>
+            <a:endParaRPr lang="en-US" sz="900" dirty="0"/>
+          </a:p>
+        </p:txBody>
+      </p:sp>
+      <p:sp>
+        <p:nvSpPr>
+          <p:cNvPr id="8" name="Shape 6"/>
           <p:cNvSpPr/>
           <p:nvPr/>
         </p:nvSpPr>
@@ -6104,7 +6321,7 @@
       </p:sp>
       <p:sp>
         <p:nvSpPr>
-          <p:cNvPr id="8" name="Text 6"/>
+          <p:cNvPr id="9" name="Text 7"/>
           <p:cNvSpPr/>
           <p:nvPr/>
         </p:nvSpPr>
@@ -6143,14 +6360,14 @@
       </p:sp>
       <p:sp>
         <p:nvSpPr>
-          <p:cNvPr id="9" name="Text 7"/>
+          <p:cNvPr id="10" name="Text 8"/>
           <p:cNvSpPr/>
           <p:nvPr/>
         </p:nvSpPr>
         <p:spPr>
           <a:xfrm>
             <a:off x="640080" y="621792"/>
-            <a:ext cx="10881360" cy="566928"/>
+            <a:ext cx="10881360" cy="713232"/>
           </a:xfrm>
           <a:prstGeom prst="rect">
             <a:avLst/>
@@ -6168,7 +6385,7 @@
               <a:buNone/>
             </a:pPr>
             <a:r>
-              <a:rPr lang="en-US" sz="2700" b="1" dirty="0">
+              <a:rPr lang="en-US" sz="3400" b="1" dirty="0">
                 <a:solidFill>
                   <a:srgbClr val="003A63"/>
                 </a:solidFill>
@@ -6178,20 +6395,20 @@
               </a:rPr>
               <a:t>Reflection Questions</a:t>
             </a:r>
-            <a:endParaRPr lang="en-US" sz="2700" dirty="0"/>
-          </a:p>
-        </p:txBody>
-      </p:sp>
-      <p:sp>
-        <p:nvSpPr>
-          <p:cNvPr id="10" name="Text 8"/>
-          <p:cNvSpPr/>
-          <p:nvPr/>
-        </p:nvSpPr>
-        <p:spPr>
-          <a:xfrm>
-            <a:off x="868680" y="1417320"/>
-            <a:ext cx="6675120" cy="4434840"/>
+            <a:endParaRPr lang="en-US" sz="3400" dirty="0"/>
+          </a:p>
+        </p:txBody>
+      </p:sp>
+      <p:sp>
+        <p:nvSpPr>
+          <p:cNvPr id="11" name="Text 9"/>
+          <p:cNvSpPr/>
+          <p:nvPr/>
+        </p:nvSpPr>
+        <p:spPr>
+          <a:xfrm>
+            <a:off x="868680" y="1508760"/>
+            <a:ext cx="6537960" cy="4160520"/>
           </a:xfrm>
           <a:prstGeom prst="rect">
             <a:avLst/>
@@ -6206,7 +6423,7 @@
           <a:lstStyle/>
           <a:p>
             <a:r>
-              <a:rPr lang="en-US" sz="1700" dirty="0">
+              <a:rPr lang="en-US" sz="2100" dirty="0">
                 <a:solidFill>
                   <a:srgbClr val="17364A"/>
                 </a:solidFill>
@@ -6216,11 +6433,11 @@
               </a:rPr>
               <a:t>Where does this topic appear in one current or proposed AI workflow in your agency?</a:t>
             </a:r>
-            <a:endParaRPr lang="en-US" sz="1700" dirty="0"/>
-          </a:p>
-          <a:p>
-            <a:r>
-              <a:rPr lang="en-US" sz="1700" dirty="0">
+            <a:endParaRPr lang="en-US" sz="2100" dirty="0"/>
+          </a:p>
+          <a:p>
+            <a:r>
+              <a:rPr lang="en-US" sz="2100" dirty="0">
                 <a:solidFill>
                   <a:srgbClr val="17364A"/>
                 </a:solidFill>
@@ -6230,11 +6447,11 @@
               </a:rPr>
               <a:t>What decisions, data sources, users, or partners would be affected if this area is poorly designed?</a:t>
             </a:r>
-            <a:endParaRPr lang="en-US" sz="1700" dirty="0"/>
-          </a:p>
-          <a:p>
-            <a:r>
-              <a:rPr lang="en-US" sz="1700" dirty="0">
+            <a:endParaRPr lang="en-US" sz="2100" dirty="0"/>
+          </a:p>
+          <a:p>
+            <a:r>
+              <a:rPr lang="en-US" sz="2100" dirty="0">
                 <a:solidFill>
                   <a:srgbClr val="17364A"/>
                 </a:solidFill>
@@ -6244,13 +6461,13 @@
               </a:rPr>
               <a:t>What evidence would governance reviewers need before approving the workflow?</a:t>
             </a:r>
-            <a:endParaRPr lang="en-US" sz="1700" dirty="0"/>
-          </a:p>
-        </p:txBody>
-      </p:sp>
-      <p:sp>
-        <p:nvSpPr>
-          <p:cNvPr id="11" name="Shape 9"/>
+            <a:endParaRPr lang="en-US" sz="2100" dirty="0"/>
+          </a:p>
+        </p:txBody>
+      </p:sp>
+      <p:sp>
+        <p:nvSpPr>
+          <p:cNvPr id="12" name="Shape 10"/>
           <p:cNvSpPr/>
           <p:nvPr/>
         </p:nvSpPr>
@@ -6277,14 +6494,14 @@
       </p:sp>
       <p:sp>
         <p:nvSpPr>
-          <p:cNvPr id="12" name="Text 10"/>
+          <p:cNvPr id="13" name="Text 11"/>
           <p:cNvSpPr/>
           <p:nvPr/>
         </p:nvSpPr>
         <p:spPr>
           <a:xfrm>
             <a:off x="8074152" y="1563624"/>
-            <a:ext cx="2825496" cy="201168"/>
+            <a:ext cx="2825496" cy="256032"/>
           </a:xfrm>
           <a:prstGeom prst="rect">
             <a:avLst/>
@@ -6300,7 +6517,7 @@
               <a:buNone/>
             </a:pPr>
             <a:r>
-              <a:rPr lang="en-US" sz="950" b="1" dirty="0">
+              <a:rPr lang="en-US" sz="1300" b="1" dirty="0">
                 <a:solidFill>
                   <a:srgbClr val="0068B7"/>
                 </a:solidFill>
@@ -6310,20 +6527,20 @@
               </a:rPr>
               <a:t>Key idea</a:t>
             </a:r>
-            <a:endParaRPr lang="en-US" sz="950" dirty="0"/>
-          </a:p>
-        </p:txBody>
-      </p:sp>
-      <p:sp>
-        <p:nvSpPr>
-          <p:cNvPr id="13" name="Text 11"/>
-          <p:cNvSpPr/>
-          <p:nvPr/>
-        </p:nvSpPr>
-        <p:spPr>
-          <a:xfrm>
-            <a:off x="8074152" y="1856232"/>
-            <a:ext cx="2825496" cy="1261872"/>
+            <a:endParaRPr lang="en-US" sz="1300" dirty="0"/>
+          </a:p>
+        </p:txBody>
+      </p:sp>
+      <p:sp>
+        <p:nvSpPr>
+          <p:cNvPr id="14" name="Text 12"/>
+          <p:cNvSpPr/>
+          <p:nvPr/>
+        </p:nvSpPr>
+        <p:spPr>
+          <a:xfrm>
+            <a:off x="8074152" y="1920240"/>
+            <a:ext cx="2825496" cy="1188720"/>
           </a:xfrm>
           <a:prstGeom prst="rect">
             <a:avLst/>
@@ -6341,7 +6558,7 @@
               <a:buNone/>
             </a:pPr>
             <a:r>
-              <a:rPr lang="en-US" sz="1250" dirty="0">
+              <a:rPr lang="en-US" sz="1550" dirty="0">
                 <a:solidFill>
                   <a:srgbClr val="17364A"/>
                 </a:solidFill>
@@ -6351,13 +6568,13 @@
               </a:rPr>
               <a:t>Where does this topic appear in one current or proposed AI workflow in your agency?</a:t>
             </a:r>
-            <a:endParaRPr lang="en-US" sz="1250" dirty="0"/>
-          </a:p>
-        </p:txBody>
-      </p:sp>
-      <p:sp>
-        <p:nvSpPr>
-          <p:cNvPr id="14" name="Shape 12"/>
+            <a:endParaRPr lang="en-US" sz="1550" dirty="0"/>
+          </a:p>
+        </p:txBody>
+      </p:sp>
+      <p:sp>
+        <p:nvSpPr>
+          <p:cNvPr id="15" name="Shape 13"/>
           <p:cNvSpPr/>
           <p:nvPr/>
         </p:nvSpPr>
@@ -6384,14 +6601,14 @@
       </p:sp>
       <p:sp>
         <p:nvSpPr>
-          <p:cNvPr id="15" name="Text 13"/>
+          <p:cNvPr id="16" name="Text 14"/>
           <p:cNvSpPr/>
           <p:nvPr/>
         </p:nvSpPr>
         <p:spPr>
           <a:xfrm>
             <a:off x="8074152" y="3666744"/>
-            <a:ext cx="2825496" cy="201168"/>
+            <a:ext cx="2825496" cy="256032"/>
           </a:xfrm>
           <a:prstGeom prst="rect">
             <a:avLst/>
@@ -6407,7 +6624,7 @@
               <a:buNone/>
             </a:pPr>
             <a:r>
-              <a:rPr lang="en-US" sz="950" b="1" dirty="0">
+              <a:rPr lang="en-US" sz="1300" b="1" dirty="0">
                 <a:solidFill>
                   <a:srgbClr val="0068B7"/>
                 </a:solidFill>
@@ -6417,20 +6634,20 @@
               </a:rPr>
               <a:t>Use this for</a:t>
             </a:r>
-            <a:endParaRPr lang="en-US" sz="950" dirty="0"/>
-          </a:p>
-        </p:txBody>
-      </p:sp>
-      <p:sp>
-        <p:nvSpPr>
-          <p:cNvPr id="16" name="Text 14"/>
-          <p:cNvSpPr/>
-          <p:nvPr/>
-        </p:nvSpPr>
-        <p:spPr>
-          <a:xfrm>
-            <a:off x="8074152" y="3959352"/>
-            <a:ext cx="2825496" cy="1170432"/>
+            <a:endParaRPr lang="en-US" sz="1300" dirty="0"/>
+          </a:p>
+        </p:txBody>
+      </p:sp>
+      <p:sp>
+        <p:nvSpPr>
+          <p:cNvPr id="17" name="Text 15"/>
+          <p:cNvSpPr/>
+          <p:nvPr/>
+        </p:nvSpPr>
+        <p:spPr>
+          <a:xfrm>
+            <a:off x="8074152" y="4023360"/>
+            <a:ext cx="2825496" cy="1097280"/>
           </a:xfrm>
           <a:prstGeom prst="rect">
             <a:avLst/>
@@ -6448,7 +6665,7 @@
               <a:buNone/>
             </a:pPr>
             <a:r>
-              <a:rPr lang="en-US" sz="1250" dirty="0">
+              <a:rPr lang="en-US" sz="1550" dirty="0">
                 <a:solidFill>
                   <a:srgbClr val="17364A"/>
                 </a:solidFill>
@@ -6458,7 +6675,7 @@
               </a:rPr>
               <a:t>Connect the concept to public health decisions, safeguards, documentation, or implementation work.</a:t>
             </a:r>
-            <a:endParaRPr lang="en-US" sz="1250" dirty="0"/>
+            <a:endParaRPr lang="en-US" sz="1550" dirty="0"/>
           </a:p>
         </p:txBody>
       </p:sp>
@@ -6655,7 +6872,7 @@
                 <a:ea typeface="Aptos" pitchFamily="34" charset="-122"/>
                 <a:cs typeface="Aptos" pitchFamily="34" charset="-120"/>
               </a:rPr>
-              <a:t>© Paula Soper</a:t>
+              <a:t>Â© Paula Soper</a:t>
             </a:r>
             <a:endParaRPr lang="en-US" sz="800" dirty="0"/>
           </a:p>
@@ -6669,8 +6886,47 @@
         </p:nvSpPr>
         <p:spPr>
           <a:xfrm>
+            <a:off x="11137392" y="6510528"/>
+            <a:ext cx="411480" cy="201168"/>
+          </a:xfrm>
+          <a:prstGeom prst="rect">
+            <a:avLst/>
+          </a:prstGeom>
+          <a:noFill/>
+          <a:ln/>
+        </p:spPr>
+        <p:txBody>
+          <a:bodyPr wrap="square" lIns="0" tIns="0" rIns="0" bIns="0" rtlCol="0" anchor="ctr"/>
+          <a:lstStyle/>
+          <a:p>
+            <a:pPr algn="r" indent="0" marL="0">
+              <a:buNone/>
+            </a:pPr>
+            <a:r>
+              <a:rPr lang="en-US" sz="900" dirty="0">
+                <a:solidFill>
+                  <a:srgbClr val="5F7181"/>
+                </a:solidFill>
+                <a:latin typeface="Aptos" pitchFamily="34" charset="0"/>
+                <a:ea typeface="Aptos" pitchFamily="34" charset="-122"/>
+                <a:cs typeface="Aptos" pitchFamily="34" charset="-120"/>
+              </a:rPr>
+              <a:t>16</a:t>
+            </a:r>
+            <a:endParaRPr lang="en-US" sz="900" dirty="0"/>
+          </a:p>
+        </p:txBody>
+      </p:sp>
+      <p:sp>
+        <p:nvSpPr>
+          <p:cNvPr id="8" name="Text 6"/>
+          <p:cNvSpPr/>
+          <p:nvPr/>
+        </p:nvSpPr>
+        <p:spPr>
+          <a:xfrm>
             <a:off x="640080" y="658368"/>
-            <a:ext cx="10881360" cy="566928"/>
+            <a:ext cx="10881360" cy="713232"/>
           </a:xfrm>
           <a:prstGeom prst="rect">
             <a:avLst/>
@@ -6688,7 +6944,7 @@
               <a:buNone/>
             </a:pPr>
             <a:r>
-              <a:rPr lang="en-US" sz="2700" b="1" dirty="0">
+              <a:rPr lang="en-US" sz="3400" b="1" dirty="0">
                 <a:solidFill>
                   <a:srgbClr val="003A63"/>
                 </a:solidFill>
@@ -6698,20 +6954,20 @@
               </a:rPr>
               <a:t>Reflection Questions Continued</a:t>
             </a:r>
-            <a:endParaRPr lang="en-US" sz="2700" dirty="0"/>
-          </a:p>
-        </p:txBody>
-      </p:sp>
-      <p:sp>
-        <p:nvSpPr>
-          <p:cNvPr id="8" name="Text 6"/>
-          <p:cNvSpPr/>
-          <p:nvPr/>
-        </p:nvSpPr>
-        <p:spPr>
-          <a:xfrm>
-            <a:off x="868680" y="1417320"/>
-            <a:ext cx="6675120" cy="4434840"/>
+            <a:endParaRPr lang="en-US" sz="3400" dirty="0"/>
+          </a:p>
+        </p:txBody>
+      </p:sp>
+      <p:sp>
+        <p:nvSpPr>
+          <p:cNvPr id="9" name="Text 7"/>
+          <p:cNvSpPr/>
+          <p:nvPr/>
+        </p:nvSpPr>
+        <p:spPr>
+          <a:xfrm>
+            <a:off x="868680" y="1508760"/>
+            <a:ext cx="6537960" cy="4160520"/>
           </a:xfrm>
           <a:prstGeom prst="rect">
             <a:avLst/>
@@ -6726,7 +6982,7 @@
           <a:lstStyle/>
           <a:p>
             <a:r>
-              <a:rPr lang="en-US" sz="1700" dirty="0">
+              <a:rPr lang="en-US" sz="2100" dirty="0">
                 <a:solidFill>
                   <a:srgbClr val="17364A"/>
                 </a:solidFill>
@@ -6736,11 +6992,11 @@
               </a:rPr>
               <a:t>Which safeguards should be required before pilot testing?</a:t>
             </a:r>
-            <a:endParaRPr lang="en-US" sz="1700" dirty="0"/>
-          </a:p>
-          <a:p>
-            <a:r>
-              <a:rPr lang="en-US" sz="1700" dirty="0">
+            <a:endParaRPr lang="en-US" sz="2100" dirty="0"/>
+          </a:p>
+          <a:p>
+            <a:r>
+              <a:rPr lang="en-US" sz="2100" dirty="0">
                 <a:solidFill>
                   <a:srgbClr val="17364A"/>
                 </a:solidFill>
@@ -6750,13 +7006,13 @@
               </a:rPr>
               <a:t>Who owns ongoing monitoring and review?</a:t>
             </a:r>
-            <a:endParaRPr lang="en-US" sz="1700" dirty="0"/>
-          </a:p>
-        </p:txBody>
-      </p:sp>
-      <p:sp>
-        <p:nvSpPr>
-          <p:cNvPr id="9" name="Shape 7"/>
+            <a:endParaRPr lang="en-US" sz="2100" dirty="0"/>
+          </a:p>
+        </p:txBody>
+      </p:sp>
+      <p:sp>
+        <p:nvSpPr>
+          <p:cNvPr id="10" name="Shape 8"/>
           <p:cNvSpPr/>
           <p:nvPr/>
         </p:nvSpPr>
@@ -6783,14 +7039,14 @@
       </p:sp>
       <p:sp>
         <p:nvSpPr>
-          <p:cNvPr id="10" name="Text 8"/>
+          <p:cNvPr id="11" name="Text 9"/>
           <p:cNvSpPr/>
           <p:nvPr/>
         </p:nvSpPr>
         <p:spPr>
           <a:xfrm>
             <a:off x="8074152" y="1563624"/>
-            <a:ext cx="2825496" cy="201168"/>
+            <a:ext cx="2825496" cy="256032"/>
           </a:xfrm>
           <a:prstGeom prst="rect">
             <a:avLst/>
@@ -6806,7 +7062,7 @@
               <a:buNone/>
             </a:pPr>
             <a:r>
-              <a:rPr lang="en-US" sz="950" b="1" dirty="0">
+              <a:rPr lang="en-US" sz="1300" b="1" dirty="0">
                 <a:solidFill>
                   <a:srgbClr val="0068B7"/>
                 </a:solidFill>
@@ -6816,20 +7072,20 @@
               </a:rPr>
               <a:t>Key idea</a:t>
             </a:r>
-            <a:endParaRPr lang="en-US" sz="950" dirty="0"/>
-          </a:p>
-        </p:txBody>
-      </p:sp>
-      <p:sp>
-        <p:nvSpPr>
-          <p:cNvPr id="11" name="Text 9"/>
-          <p:cNvSpPr/>
-          <p:nvPr/>
-        </p:nvSpPr>
-        <p:spPr>
-          <a:xfrm>
-            <a:off x="8074152" y="1856232"/>
-            <a:ext cx="2825496" cy="1261872"/>
+            <a:endParaRPr lang="en-US" sz="1300" dirty="0"/>
+          </a:p>
+        </p:txBody>
+      </p:sp>
+      <p:sp>
+        <p:nvSpPr>
+          <p:cNvPr id="12" name="Text 10"/>
+          <p:cNvSpPr/>
+          <p:nvPr/>
+        </p:nvSpPr>
+        <p:spPr>
+          <a:xfrm>
+            <a:off x="8074152" y="1920240"/>
+            <a:ext cx="2825496" cy="1188720"/>
           </a:xfrm>
           <a:prstGeom prst="rect">
             <a:avLst/>
@@ -6847,7 +7103,7 @@
               <a:buNone/>
             </a:pPr>
             <a:r>
-              <a:rPr lang="en-US" sz="1250" dirty="0">
+              <a:rPr lang="en-US" sz="1550" dirty="0">
                 <a:solidFill>
                   <a:srgbClr val="17364A"/>
                 </a:solidFill>
@@ -6857,13 +7113,13 @@
               </a:rPr>
               <a:t>Which safeguards should be required before pilot testing?</a:t>
             </a:r>
-            <a:endParaRPr lang="en-US" sz="1250" dirty="0"/>
-          </a:p>
-        </p:txBody>
-      </p:sp>
-      <p:sp>
-        <p:nvSpPr>
-          <p:cNvPr id="12" name="Shape 10"/>
+            <a:endParaRPr lang="en-US" sz="1550" dirty="0"/>
+          </a:p>
+        </p:txBody>
+      </p:sp>
+      <p:sp>
+        <p:nvSpPr>
+          <p:cNvPr id="13" name="Shape 11"/>
           <p:cNvSpPr/>
           <p:nvPr/>
         </p:nvSpPr>
@@ -6890,14 +7146,14 @@
       </p:sp>
       <p:sp>
         <p:nvSpPr>
-          <p:cNvPr id="13" name="Text 11"/>
+          <p:cNvPr id="14" name="Text 12"/>
           <p:cNvSpPr/>
           <p:nvPr/>
         </p:nvSpPr>
         <p:spPr>
           <a:xfrm>
             <a:off x="8074152" y="3666744"/>
-            <a:ext cx="2825496" cy="201168"/>
+            <a:ext cx="2825496" cy="256032"/>
           </a:xfrm>
           <a:prstGeom prst="rect">
             <a:avLst/>
@@ -6913,7 +7169,7 @@
               <a:buNone/>
             </a:pPr>
             <a:r>
-              <a:rPr lang="en-US" sz="950" b="1" dirty="0">
+              <a:rPr lang="en-US" sz="1300" b="1" dirty="0">
                 <a:solidFill>
                   <a:srgbClr val="0068B7"/>
                 </a:solidFill>
@@ -6923,20 +7179,20 @@
               </a:rPr>
               <a:t>Use this for</a:t>
             </a:r>
-            <a:endParaRPr lang="en-US" sz="950" dirty="0"/>
-          </a:p>
-        </p:txBody>
-      </p:sp>
-      <p:sp>
-        <p:nvSpPr>
-          <p:cNvPr id="14" name="Text 12"/>
-          <p:cNvSpPr/>
-          <p:nvPr/>
-        </p:nvSpPr>
-        <p:spPr>
-          <a:xfrm>
-            <a:off x="8074152" y="3959352"/>
-            <a:ext cx="2825496" cy="1170432"/>
+            <a:endParaRPr lang="en-US" sz="1300" dirty="0"/>
+          </a:p>
+        </p:txBody>
+      </p:sp>
+      <p:sp>
+        <p:nvSpPr>
+          <p:cNvPr id="15" name="Text 13"/>
+          <p:cNvSpPr/>
+          <p:nvPr/>
+        </p:nvSpPr>
+        <p:spPr>
+          <a:xfrm>
+            <a:off x="8074152" y="4023360"/>
+            <a:ext cx="2825496" cy="1097280"/>
           </a:xfrm>
           <a:prstGeom prst="rect">
             <a:avLst/>
@@ -6954,7 +7210,7 @@
               <a:buNone/>
             </a:pPr>
             <a:r>
-              <a:rPr lang="en-US" sz="1250" dirty="0">
+              <a:rPr lang="en-US" sz="1550" dirty="0">
                 <a:solidFill>
                   <a:srgbClr val="17364A"/>
                 </a:solidFill>
@@ -6964,7 +7220,7 @@
               </a:rPr>
               <a:t>Connect the concept to public health decisions, safeguards, documentation, or implementation work.</a:t>
             </a:r>
-            <a:endParaRPr lang="en-US" sz="1250" dirty="0"/>
+            <a:endParaRPr lang="en-US" sz="1550" dirty="0"/>
           </a:p>
         </p:txBody>
       </p:sp>
@@ -7161,7 +7417,7 @@
                 <a:ea typeface="Aptos" pitchFamily="34" charset="-122"/>
                 <a:cs typeface="Aptos" pitchFamily="34" charset="-120"/>
               </a:rPr>
-              <a:t>© Paula Soper</a:t>
+              <a:t>Â© Paula Soper</a:t>
             </a:r>
             <a:endParaRPr lang="en-US" sz="800" dirty="0"/>
           </a:p>
@@ -7169,7 +7425,46 @@
       </p:sp>
       <p:sp>
         <p:nvSpPr>
-          <p:cNvPr id="7" name="Shape 5"/>
+          <p:cNvPr id="7" name="Text 5"/>
+          <p:cNvSpPr/>
+          <p:nvPr/>
+        </p:nvSpPr>
+        <p:spPr>
+          <a:xfrm>
+            <a:off x="11137392" y="6510528"/>
+            <a:ext cx="411480" cy="201168"/>
+          </a:xfrm>
+          <a:prstGeom prst="rect">
+            <a:avLst/>
+          </a:prstGeom>
+          <a:noFill/>
+          <a:ln/>
+        </p:spPr>
+        <p:txBody>
+          <a:bodyPr wrap="square" lIns="0" tIns="0" rIns="0" bIns="0" rtlCol="0" anchor="ctr"/>
+          <a:lstStyle/>
+          <a:p>
+            <a:pPr algn="r" indent="0" marL="0">
+              <a:buNone/>
+            </a:pPr>
+            <a:r>
+              <a:rPr lang="en-US" sz="900" dirty="0">
+                <a:solidFill>
+                  <a:srgbClr val="5F7181"/>
+                </a:solidFill>
+                <a:latin typeface="Aptos" pitchFamily="34" charset="0"/>
+                <a:ea typeface="Aptos" pitchFamily="34" charset="-122"/>
+                <a:cs typeface="Aptos" pitchFamily="34" charset="-120"/>
+              </a:rPr>
+              <a:t>17</a:t>
+            </a:r>
+            <a:endParaRPr lang="en-US" sz="900" dirty="0"/>
+          </a:p>
+        </p:txBody>
+      </p:sp>
+      <p:sp>
+        <p:nvSpPr>
+          <p:cNvPr id="8" name="Shape 6"/>
           <p:cNvSpPr/>
           <p:nvPr/>
         </p:nvSpPr>
@@ -7194,7 +7489,7 @@
       </p:sp>
       <p:sp>
         <p:nvSpPr>
-          <p:cNvPr id="8" name="Text 6"/>
+          <p:cNvPr id="9" name="Text 7"/>
           <p:cNvSpPr/>
           <p:nvPr/>
         </p:nvSpPr>
@@ -7233,14 +7528,14 @@
       </p:sp>
       <p:sp>
         <p:nvSpPr>
-          <p:cNvPr id="9" name="Text 7"/>
+          <p:cNvPr id="10" name="Text 8"/>
           <p:cNvSpPr/>
           <p:nvPr/>
         </p:nvSpPr>
         <p:spPr>
           <a:xfrm>
             <a:off x="640080" y="621792"/>
-            <a:ext cx="10881360" cy="566928"/>
+            <a:ext cx="10881360" cy="713232"/>
           </a:xfrm>
           <a:prstGeom prst="rect">
             <a:avLst/>
@@ -7258,7 +7553,7 @@
               <a:buNone/>
             </a:pPr>
             <a:r>
-              <a:rPr lang="en-US" sz="2700" b="1" dirty="0">
+              <a:rPr lang="en-US" sz="3400" b="1" dirty="0">
                 <a:solidFill>
                   <a:srgbClr val="003A63"/>
                 </a:solidFill>
@@ -7268,20 +7563,20 @@
               </a:rPr>
               <a:t>Practical Exercise</a:t>
             </a:r>
-            <a:endParaRPr lang="en-US" sz="2700" dirty="0"/>
-          </a:p>
-        </p:txBody>
-      </p:sp>
-      <p:sp>
-        <p:nvSpPr>
-          <p:cNvPr id="10" name="Text 8"/>
-          <p:cNvSpPr/>
-          <p:nvPr/>
-        </p:nvSpPr>
-        <p:spPr>
-          <a:xfrm>
-            <a:off x="868680" y="1417320"/>
-            <a:ext cx="6675120" cy="4434840"/>
+            <a:endParaRPr lang="en-US" sz="3400" dirty="0"/>
+          </a:p>
+        </p:txBody>
+      </p:sp>
+      <p:sp>
+        <p:nvSpPr>
+          <p:cNvPr id="11" name="Text 9"/>
+          <p:cNvSpPr/>
+          <p:nvPr/>
+        </p:nvSpPr>
+        <p:spPr>
+          <a:xfrm>
+            <a:off x="868680" y="1508760"/>
+            <a:ext cx="6537960" cy="4160520"/>
           </a:xfrm>
           <a:prstGeom prst="rect">
             <a:avLst/>
@@ -7296,7 +7591,7 @@
           <a:lstStyle/>
           <a:p>
             <a:r>
-              <a:rPr lang="en-US" sz="1700" dirty="0">
+              <a:rPr lang="en-US" sz="2100" dirty="0">
                 <a:solidFill>
                   <a:srgbClr val="17364A"/>
                 </a:solidFill>
@@ -7306,11 +7601,11 @@
               </a:rPr>
               <a:t>Create a AI business analysis package for one real or realistic public health AI workflow.</a:t>
             </a:r>
-            <a:endParaRPr lang="en-US" sz="1700" dirty="0"/>
-          </a:p>
-          <a:p>
-            <a:r>
-              <a:rPr lang="en-US" sz="1700" dirty="0">
+            <a:endParaRPr lang="en-US" sz="2100" dirty="0"/>
+          </a:p>
+          <a:p>
+            <a:r>
+              <a:rPr lang="en-US" sz="2100" dirty="0">
                 <a:solidFill>
                   <a:srgbClr val="17364A"/>
                 </a:solidFill>
@@ -7318,13 +7613,13 @@
                 <a:ea typeface="Aptos" pitchFamily="34" charset="-122"/>
                 <a:cs typeface="Aptos" pitchFamily="34" charset="-120"/>
               </a:rPr>
-              <a:t>The artifact should describe the use case, affected users, data sources, system dependencies, risks, guardrails, review.</a:t>
-            </a:r>
-            <a:endParaRPr lang="en-US" sz="1700" dirty="0"/>
-          </a:p>
-          <a:p>
-            <a:r>
-              <a:rPr lang="en-US" sz="1700" dirty="0">
+              <a:t>The artifact should describe the use case, affected users, data sources, system dependencies, risks,.</a:t>
+            </a:r>
+            <a:endParaRPr lang="en-US" sz="2100" dirty="0"/>
+          </a:p>
+          <a:p>
+            <a:r>
+              <a:rPr lang="en-US" sz="2100" dirty="0">
                 <a:solidFill>
                   <a:srgbClr val="17364A"/>
                 </a:solidFill>
@@ -7332,29 +7627,15 @@
                 <a:ea typeface="Aptos" pitchFamily="34" charset="-122"/>
                 <a:cs typeface="Aptos" pitchFamily="34" charset="-120"/>
               </a:rPr>
-              <a:t>The exercise should produce a work product that could be used in a governance meeting, procurement review, implementation.</a:t>
-            </a:r>
-            <a:endParaRPr lang="en-US" sz="1700" dirty="0"/>
-          </a:p>
-          <a:p>
-            <a:r>
-              <a:rPr lang="en-US" sz="1700" dirty="0">
-                <a:solidFill>
-                  <a:srgbClr val="17364A"/>
-                </a:solidFill>
-                <a:latin typeface="Aptos" pitchFamily="34" charset="0"/>
-                <a:ea typeface="Aptos" pitchFamily="34" charset="-122"/>
-                <a:cs typeface="Aptos" pitchFamily="34" charset="-120"/>
-              </a:rPr>
-              <a:t>Learners should document assumptions and identify which staff or partners need to be consulted.</a:t>
-            </a:r>
-            <a:endParaRPr lang="en-US" sz="1700" dirty="0"/>
-          </a:p>
-        </p:txBody>
-      </p:sp>
-      <p:sp>
-        <p:nvSpPr>
-          <p:cNvPr id="11" name="Shape 9"/>
+              <a:t>The exercise should produce a work product that could be used in a governance meeting, procurement.</a:t>
+            </a:r>
+            <a:endParaRPr lang="en-US" sz="2100" dirty="0"/>
+          </a:p>
+        </p:txBody>
+      </p:sp>
+      <p:sp>
+        <p:nvSpPr>
+          <p:cNvPr id="12" name="Shape 10"/>
           <p:cNvSpPr/>
           <p:nvPr/>
         </p:nvSpPr>
@@ -7381,14 +7662,14 @@
       </p:sp>
       <p:sp>
         <p:nvSpPr>
-          <p:cNvPr id="12" name="Text 10"/>
+          <p:cNvPr id="13" name="Text 11"/>
           <p:cNvSpPr/>
           <p:nvPr/>
         </p:nvSpPr>
         <p:spPr>
           <a:xfrm>
             <a:off x="8074152" y="1563624"/>
-            <a:ext cx="2825496" cy="201168"/>
+            <a:ext cx="2825496" cy="256032"/>
           </a:xfrm>
           <a:prstGeom prst="rect">
             <a:avLst/>
@@ -7404,7 +7685,7 @@
               <a:buNone/>
             </a:pPr>
             <a:r>
-              <a:rPr lang="en-US" sz="950" b="1" dirty="0">
+              <a:rPr lang="en-US" sz="1300" b="1" dirty="0">
                 <a:solidFill>
                   <a:srgbClr val="0068B7"/>
                 </a:solidFill>
@@ -7414,20 +7695,20 @@
               </a:rPr>
               <a:t>Key idea</a:t>
             </a:r>
-            <a:endParaRPr lang="en-US" sz="950" dirty="0"/>
-          </a:p>
-        </p:txBody>
-      </p:sp>
-      <p:sp>
-        <p:nvSpPr>
-          <p:cNvPr id="13" name="Text 11"/>
-          <p:cNvSpPr/>
-          <p:nvPr/>
-        </p:nvSpPr>
-        <p:spPr>
-          <a:xfrm>
-            <a:off x="8074152" y="1856232"/>
-            <a:ext cx="2825496" cy="1261872"/>
+            <a:endParaRPr lang="en-US" sz="1300" dirty="0"/>
+          </a:p>
+        </p:txBody>
+      </p:sp>
+      <p:sp>
+        <p:nvSpPr>
+          <p:cNvPr id="14" name="Text 12"/>
+          <p:cNvSpPr/>
+          <p:nvPr/>
+        </p:nvSpPr>
+        <p:spPr>
+          <a:xfrm>
+            <a:off x="8074152" y="1920240"/>
+            <a:ext cx="2825496" cy="1188720"/>
           </a:xfrm>
           <a:prstGeom prst="rect">
             <a:avLst/>
@@ -7445,7 +7726,7 @@
               <a:buNone/>
             </a:pPr>
             <a:r>
-              <a:rPr lang="en-US" sz="1250" dirty="0">
+              <a:rPr lang="en-US" sz="1550" dirty="0">
                 <a:solidFill>
                   <a:srgbClr val="17364A"/>
                 </a:solidFill>
@@ -7455,13 +7736,13 @@
               </a:rPr>
               <a:t>Create a AI business analysis package for one real or realistic public health AI workflow.</a:t>
             </a:r>
-            <a:endParaRPr lang="en-US" sz="1250" dirty="0"/>
-          </a:p>
-        </p:txBody>
-      </p:sp>
-      <p:sp>
-        <p:nvSpPr>
-          <p:cNvPr id="14" name="Shape 12"/>
+            <a:endParaRPr lang="en-US" sz="1550" dirty="0"/>
+          </a:p>
+        </p:txBody>
+      </p:sp>
+      <p:sp>
+        <p:nvSpPr>
+          <p:cNvPr id="15" name="Shape 13"/>
           <p:cNvSpPr/>
           <p:nvPr/>
         </p:nvSpPr>
@@ -7488,14 +7769,14 @@
       </p:sp>
       <p:sp>
         <p:nvSpPr>
-          <p:cNvPr id="15" name="Text 13"/>
+          <p:cNvPr id="16" name="Text 14"/>
           <p:cNvSpPr/>
           <p:nvPr/>
         </p:nvSpPr>
         <p:spPr>
           <a:xfrm>
             <a:off x="8074152" y="3666744"/>
-            <a:ext cx="2825496" cy="201168"/>
+            <a:ext cx="2825496" cy="256032"/>
           </a:xfrm>
           <a:prstGeom prst="rect">
             <a:avLst/>
@@ -7511,7 +7792,7 @@
               <a:buNone/>
             </a:pPr>
             <a:r>
-              <a:rPr lang="en-US" sz="950" b="1" dirty="0">
+              <a:rPr lang="en-US" sz="1300" b="1" dirty="0">
                 <a:solidFill>
                   <a:srgbClr val="0068B7"/>
                 </a:solidFill>
@@ -7521,20 +7802,20 @@
               </a:rPr>
               <a:t>Use this for</a:t>
             </a:r>
-            <a:endParaRPr lang="en-US" sz="950" dirty="0"/>
-          </a:p>
-        </p:txBody>
-      </p:sp>
-      <p:sp>
-        <p:nvSpPr>
-          <p:cNvPr id="16" name="Text 14"/>
-          <p:cNvSpPr/>
-          <p:nvPr/>
-        </p:nvSpPr>
-        <p:spPr>
-          <a:xfrm>
-            <a:off x="8074152" y="3959352"/>
-            <a:ext cx="2825496" cy="1170432"/>
+            <a:endParaRPr lang="en-US" sz="1300" dirty="0"/>
+          </a:p>
+        </p:txBody>
+      </p:sp>
+      <p:sp>
+        <p:nvSpPr>
+          <p:cNvPr id="17" name="Text 15"/>
+          <p:cNvSpPr/>
+          <p:nvPr/>
+        </p:nvSpPr>
+        <p:spPr>
+          <a:xfrm>
+            <a:off x="8074152" y="4023360"/>
+            <a:ext cx="2825496" cy="1097280"/>
           </a:xfrm>
           <a:prstGeom prst="rect">
             <a:avLst/>
@@ -7552,7 +7833,7 @@
               <a:buNone/>
             </a:pPr>
             <a:r>
-              <a:rPr lang="en-US" sz="1250" dirty="0">
+              <a:rPr lang="en-US" sz="1550" dirty="0">
                 <a:solidFill>
                   <a:srgbClr val="17364A"/>
                 </a:solidFill>
@@ -7562,7 +7843,7 @@
               </a:rPr>
               <a:t>Connect the concept to public health decisions, safeguards, documentation, or implementation work.</a:t>
             </a:r>
-            <a:endParaRPr lang="en-US" sz="1250" dirty="0"/>
+            <a:endParaRPr lang="en-US" sz="1550" dirty="0"/>
           </a:p>
         </p:txBody>
       </p:sp>
@@ -7759,7 +8040,7 @@
                 <a:ea typeface="Aptos" pitchFamily="34" charset="-122"/>
                 <a:cs typeface="Aptos" pitchFamily="34" charset="-120"/>
               </a:rPr>
-              <a:t>© Paula Soper</a:t>
+              <a:t>Â© Paula Soper</a:t>
             </a:r>
             <a:endParaRPr lang="en-US" sz="800" dirty="0"/>
           </a:p>
@@ -7767,7 +8048,46 @@
       </p:sp>
       <p:sp>
         <p:nvSpPr>
-          <p:cNvPr id="7" name="Shape 5"/>
+          <p:cNvPr id="7" name="Text 5"/>
+          <p:cNvSpPr/>
+          <p:nvPr/>
+        </p:nvSpPr>
+        <p:spPr>
+          <a:xfrm>
+            <a:off x="11137392" y="6510528"/>
+            <a:ext cx="411480" cy="201168"/>
+          </a:xfrm>
+          <a:prstGeom prst="rect">
+            <a:avLst/>
+          </a:prstGeom>
+          <a:noFill/>
+          <a:ln/>
+        </p:spPr>
+        <p:txBody>
+          <a:bodyPr wrap="square" lIns="0" tIns="0" rIns="0" bIns="0" rtlCol="0" anchor="ctr"/>
+          <a:lstStyle/>
+          <a:p>
+            <a:pPr algn="r" indent="0" marL="0">
+              <a:buNone/>
+            </a:pPr>
+            <a:r>
+              <a:rPr lang="en-US" sz="900" dirty="0">
+                <a:solidFill>
+                  <a:srgbClr val="5F7181"/>
+                </a:solidFill>
+                <a:latin typeface="Aptos" pitchFamily="34" charset="0"/>
+                <a:ea typeface="Aptos" pitchFamily="34" charset="-122"/>
+                <a:cs typeface="Aptos" pitchFamily="34" charset="-120"/>
+              </a:rPr>
+              <a:t>18</a:t>
+            </a:r>
+            <a:endParaRPr lang="en-US" sz="900" dirty="0"/>
+          </a:p>
+        </p:txBody>
+      </p:sp>
+      <p:sp>
+        <p:nvSpPr>
+          <p:cNvPr id="8" name="Shape 6"/>
           <p:cNvSpPr/>
           <p:nvPr/>
         </p:nvSpPr>
@@ -7792,7 +8112,7 @@
       </p:sp>
       <p:sp>
         <p:nvSpPr>
-          <p:cNvPr id="8" name="Text 6"/>
+          <p:cNvPr id="9" name="Text 7"/>
           <p:cNvSpPr/>
           <p:nvPr/>
         </p:nvSpPr>
@@ -7831,14 +8151,14 @@
       </p:sp>
       <p:sp>
         <p:nvSpPr>
-          <p:cNvPr id="9" name="Text 7"/>
+          <p:cNvPr id="10" name="Text 8"/>
           <p:cNvSpPr/>
           <p:nvPr/>
         </p:nvSpPr>
         <p:spPr>
           <a:xfrm>
             <a:off x="640080" y="621792"/>
-            <a:ext cx="10881360" cy="566928"/>
+            <a:ext cx="10881360" cy="713232"/>
           </a:xfrm>
           <a:prstGeom prst="rect">
             <a:avLst/>
@@ -7856,7 +8176,7 @@
               <a:buNone/>
             </a:pPr>
             <a:r>
-              <a:rPr lang="en-US" sz="2700" b="1" dirty="0">
+              <a:rPr lang="en-US" sz="3400" b="1" dirty="0">
                 <a:solidFill>
                   <a:srgbClr val="003A63"/>
                 </a:solidFill>
@@ -7866,20 +8186,20 @@
               </a:rPr>
               <a:t>Expected Artifact or Evidence</a:t>
             </a:r>
-            <a:endParaRPr lang="en-US" sz="2700" dirty="0"/>
-          </a:p>
-        </p:txBody>
-      </p:sp>
-      <p:sp>
-        <p:nvSpPr>
-          <p:cNvPr id="10" name="Text 8"/>
-          <p:cNvSpPr/>
-          <p:nvPr/>
-        </p:nvSpPr>
-        <p:spPr>
-          <a:xfrm>
-            <a:off x="868680" y="1417320"/>
-            <a:ext cx="6675120" cy="4434840"/>
+            <a:endParaRPr lang="en-US" sz="3400" dirty="0"/>
+          </a:p>
+        </p:txBody>
+      </p:sp>
+      <p:sp>
+        <p:nvSpPr>
+          <p:cNvPr id="11" name="Text 9"/>
+          <p:cNvSpPr/>
+          <p:nvPr/>
+        </p:nvSpPr>
+        <p:spPr>
+          <a:xfrm>
+            <a:off x="868680" y="1508760"/>
+            <a:ext cx="6537960" cy="4160520"/>
           </a:xfrm>
           <a:prstGeom prst="rect">
             <a:avLst/>
@@ -7894,7 +8214,7 @@
           <a:lstStyle/>
           <a:p>
             <a:r>
-              <a:rPr lang="en-US" sz="1700" dirty="0">
+              <a:rPr lang="en-US" sz="2100" dirty="0">
                 <a:solidFill>
                   <a:srgbClr val="17364A"/>
                 </a:solidFill>
@@ -7904,11 +8224,11 @@
               </a:rPr>
               <a:t>The expected artifact is a completed AI business analysis package.</a:t>
             </a:r>
-            <a:endParaRPr lang="en-US" sz="1700" dirty="0"/>
-          </a:p>
-          <a:p>
-            <a:r>
-              <a:rPr lang="en-US" sz="1700" dirty="0">
+            <a:endParaRPr lang="en-US" sz="2100" dirty="0"/>
+          </a:p>
+          <a:p>
+            <a:r>
+              <a:rPr lang="en-US" sz="2100" dirty="0">
                 <a:solidFill>
                   <a:srgbClr val="17364A"/>
                 </a:solidFill>
@@ -7916,15 +8236,15 @@
                 <a:ea typeface="Aptos" pitchFamily="34" charset="-122"/>
                 <a:cs typeface="Aptos" pitchFamily="34" charset="-120"/>
               </a:rPr>
-              <a:t>It should be specific to a public health workflow and should include technical dependencies, governance questions, human.</a:t>
-            </a:r>
-            <a:endParaRPr lang="en-US" sz="1700" dirty="0"/>
-          </a:p>
-        </p:txBody>
-      </p:sp>
-      <p:sp>
-        <p:nvSpPr>
-          <p:cNvPr id="11" name="Shape 9"/>
+              <a:t>It should be specific to a public health workflow and should include technical dependencies, governance.</a:t>
+            </a:r>
+            <a:endParaRPr lang="en-US" sz="2100" dirty="0"/>
+          </a:p>
+        </p:txBody>
+      </p:sp>
+      <p:sp>
+        <p:nvSpPr>
+          <p:cNvPr id="12" name="Shape 10"/>
           <p:cNvSpPr/>
           <p:nvPr/>
         </p:nvSpPr>
@@ -7951,14 +8271,14 @@
       </p:sp>
       <p:sp>
         <p:nvSpPr>
-          <p:cNvPr id="12" name="Text 10"/>
+          <p:cNvPr id="13" name="Text 11"/>
           <p:cNvSpPr/>
           <p:nvPr/>
         </p:nvSpPr>
         <p:spPr>
           <a:xfrm>
             <a:off x="8074152" y="1563624"/>
-            <a:ext cx="2825496" cy="201168"/>
+            <a:ext cx="2825496" cy="256032"/>
           </a:xfrm>
           <a:prstGeom prst="rect">
             <a:avLst/>
@@ -7974,7 +8294,7 @@
               <a:buNone/>
             </a:pPr>
             <a:r>
-              <a:rPr lang="en-US" sz="950" b="1" dirty="0">
+              <a:rPr lang="en-US" sz="1300" b="1" dirty="0">
                 <a:solidFill>
                   <a:srgbClr val="0068B7"/>
                 </a:solidFill>
@@ -7984,20 +8304,20 @@
               </a:rPr>
               <a:t>Key idea</a:t>
             </a:r>
-            <a:endParaRPr lang="en-US" sz="950" dirty="0"/>
-          </a:p>
-        </p:txBody>
-      </p:sp>
-      <p:sp>
-        <p:nvSpPr>
-          <p:cNvPr id="13" name="Text 11"/>
-          <p:cNvSpPr/>
-          <p:nvPr/>
-        </p:nvSpPr>
-        <p:spPr>
-          <a:xfrm>
-            <a:off x="8074152" y="1856232"/>
-            <a:ext cx="2825496" cy="1261872"/>
+            <a:endParaRPr lang="en-US" sz="1300" dirty="0"/>
+          </a:p>
+        </p:txBody>
+      </p:sp>
+      <p:sp>
+        <p:nvSpPr>
+          <p:cNvPr id="14" name="Text 12"/>
+          <p:cNvSpPr/>
+          <p:nvPr/>
+        </p:nvSpPr>
+        <p:spPr>
+          <a:xfrm>
+            <a:off x="8074152" y="1920240"/>
+            <a:ext cx="2825496" cy="1188720"/>
           </a:xfrm>
           <a:prstGeom prst="rect">
             <a:avLst/>
@@ -8015,7 +8335,7 @@
               <a:buNone/>
             </a:pPr>
             <a:r>
-              <a:rPr lang="en-US" sz="1250" dirty="0">
+              <a:rPr lang="en-US" sz="1550" dirty="0">
                 <a:solidFill>
                   <a:srgbClr val="17364A"/>
                 </a:solidFill>
@@ -8025,13 +8345,13 @@
               </a:rPr>
               <a:t>The expected artifact is a completed AI business analysis package.</a:t>
             </a:r>
-            <a:endParaRPr lang="en-US" sz="1250" dirty="0"/>
-          </a:p>
-        </p:txBody>
-      </p:sp>
-      <p:sp>
-        <p:nvSpPr>
-          <p:cNvPr id="14" name="Shape 12"/>
+            <a:endParaRPr lang="en-US" sz="1550" dirty="0"/>
+          </a:p>
+        </p:txBody>
+      </p:sp>
+      <p:sp>
+        <p:nvSpPr>
+          <p:cNvPr id="15" name="Shape 13"/>
           <p:cNvSpPr/>
           <p:nvPr/>
         </p:nvSpPr>
@@ -8058,14 +8378,14 @@
       </p:sp>
       <p:sp>
         <p:nvSpPr>
-          <p:cNvPr id="15" name="Text 13"/>
+          <p:cNvPr id="16" name="Text 14"/>
           <p:cNvSpPr/>
           <p:nvPr/>
         </p:nvSpPr>
         <p:spPr>
           <a:xfrm>
             <a:off x="8074152" y="3666744"/>
-            <a:ext cx="2825496" cy="201168"/>
+            <a:ext cx="2825496" cy="256032"/>
           </a:xfrm>
           <a:prstGeom prst="rect">
             <a:avLst/>
@@ -8081,7 +8401,7 @@
               <a:buNone/>
             </a:pPr>
             <a:r>
-              <a:rPr lang="en-US" sz="950" b="1" dirty="0">
+              <a:rPr lang="en-US" sz="1300" b="1" dirty="0">
                 <a:solidFill>
                   <a:srgbClr val="0068B7"/>
                 </a:solidFill>
@@ -8091,20 +8411,20 @@
               </a:rPr>
               <a:t>Use this for</a:t>
             </a:r>
-            <a:endParaRPr lang="en-US" sz="950" dirty="0"/>
-          </a:p>
-        </p:txBody>
-      </p:sp>
-      <p:sp>
-        <p:nvSpPr>
-          <p:cNvPr id="16" name="Text 14"/>
-          <p:cNvSpPr/>
-          <p:nvPr/>
-        </p:nvSpPr>
-        <p:spPr>
-          <a:xfrm>
-            <a:off x="8074152" y="3959352"/>
-            <a:ext cx="2825496" cy="1170432"/>
+            <a:endParaRPr lang="en-US" sz="1300" dirty="0"/>
+          </a:p>
+        </p:txBody>
+      </p:sp>
+      <p:sp>
+        <p:nvSpPr>
+          <p:cNvPr id="17" name="Text 15"/>
+          <p:cNvSpPr/>
+          <p:nvPr/>
+        </p:nvSpPr>
+        <p:spPr>
+          <a:xfrm>
+            <a:off x="8074152" y="4023360"/>
+            <a:ext cx="2825496" cy="1097280"/>
           </a:xfrm>
           <a:prstGeom prst="rect">
             <a:avLst/>
@@ -8122,7 +8442,7 @@
               <a:buNone/>
             </a:pPr>
             <a:r>
-              <a:rPr lang="en-US" sz="1250" dirty="0">
+              <a:rPr lang="en-US" sz="1550" dirty="0">
                 <a:solidFill>
                   <a:srgbClr val="17364A"/>
                 </a:solidFill>
@@ -8132,7 +8452,7 @@
               </a:rPr>
               <a:t>Connect the concept to public health decisions, safeguards, documentation, or implementation work.</a:t>
             </a:r>
-            <a:endParaRPr lang="en-US" sz="1250" dirty="0"/>
+            <a:endParaRPr lang="en-US" sz="1550" dirty="0"/>
           </a:p>
         </p:txBody>
       </p:sp>
@@ -8329,7 +8649,7 @@
                 <a:ea typeface="Aptos" pitchFamily="34" charset="-122"/>
                 <a:cs typeface="Aptos" pitchFamily="34" charset="-120"/>
               </a:rPr>
-              <a:t>© Paula Soper</a:t>
+              <a:t>Â© Paula Soper</a:t>
             </a:r>
             <a:endParaRPr lang="en-US" sz="800" dirty="0"/>
           </a:p>
@@ -8337,7 +8657,46 @@
       </p:sp>
       <p:sp>
         <p:nvSpPr>
-          <p:cNvPr id="7" name="Shape 5"/>
+          <p:cNvPr id="7" name="Text 5"/>
+          <p:cNvSpPr/>
+          <p:nvPr/>
+        </p:nvSpPr>
+        <p:spPr>
+          <a:xfrm>
+            <a:off x="11137392" y="6510528"/>
+            <a:ext cx="411480" cy="201168"/>
+          </a:xfrm>
+          <a:prstGeom prst="rect">
+            <a:avLst/>
+          </a:prstGeom>
+          <a:noFill/>
+          <a:ln/>
+        </p:spPr>
+        <p:txBody>
+          <a:bodyPr wrap="square" lIns="0" tIns="0" rIns="0" bIns="0" rtlCol="0" anchor="ctr"/>
+          <a:lstStyle/>
+          <a:p>
+            <a:pPr algn="r" indent="0" marL="0">
+              <a:buNone/>
+            </a:pPr>
+            <a:r>
+              <a:rPr lang="en-US" sz="900" dirty="0">
+                <a:solidFill>
+                  <a:srgbClr val="5F7181"/>
+                </a:solidFill>
+                <a:latin typeface="Aptos" pitchFamily="34" charset="0"/>
+                <a:ea typeface="Aptos" pitchFamily="34" charset="-122"/>
+                <a:cs typeface="Aptos" pitchFamily="34" charset="-120"/>
+              </a:rPr>
+              <a:t>19</a:t>
+            </a:r>
+            <a:endParaRPr lang="en-US" sz="900" dirty="0"/>
+          </a:p>
+        </p:txBody>
+      </p:sp>
+      <p:sp>
+        <p:nvSpPr>
+          <p:cNvPr id="8" name="Shape 6"/>
           <p:cNvSpPr/>
           <p:nvPr/>
         </p:nvSpPr>
@@ -8362,7 +8721,7 @@
       </p:sp>
       <p:sp>
         <p:nvSpPr>
-          <p:cNvPr id="8" name="Text 6"/>
+          <p:cNvPr id="9" name="Text 7"/>
           <p:cNvSpPr/>
           <p:nvPr/>
         </p:nvSpPr>
@@ -8401,14 +8760,14 @@
       </p:sp>
       <p:sp>
         <p:nvSpPr>
-          <p:cNvPr id="9" name="Text 7"/>
+          <p:cNvPr id="10" name="Text 8"/>
           <p:cNvSpPr/>
           <p:nvPr/>
         </p:nvSpPr>
         <p:spPr>
           <a:xfrm>
             <a:off x="640080" y="621792"/>
-            <a:ext cx="10881360" cy="566928"/>
+            <a:ext cx="10881360" cy="713232"/>
           </a:xfrm>
           <a:prstGeom prst="rect">
             <a:avLst/>
@@ -8426,7 +8785,7 @@
               <a:buNone/>
             </a:pPr>
             <a:r>
-              <a:rPr lang="en-US" sz="2700" b="1" dirty="0">
+              <a:rPr lang="en-US" sz="3400" b="1" dirty="0">
                 <a:solidFill>
                   <a:srgbClr val="003A63"/>
                 </a:solidFill>
@@ -8436,20 +8795,20 @@
               </a:rPr>
               <a:t>Expected Assignment</a:t>
             </a:r>
-            <a:endParaRPr lang="en-US" sz="2700" dirty="0"/>
-          </a:p>
-        </p:txBody>
-      </p:sp>
-      <p:sp>
-        <p:nvSpPr>
-          <p:cNvPr id="10" name="Text 8"/>
-          <p:cNvSpPr/>
-          <p:nvPr/>
-        </p:nvSpPr>
-        <p:spPr>
-          <a:xfrm>
-            <a:off x="868680" y="1417320"/>
-            <a:ext cx="6675120" cy="4434840"/>
+            <a:endParaRPr lang="en-US" sz="3400" dirty="0"/>
+          </a:p>
+        </p:txBody>
+      </p:sp>
+      <p:sp>
+        <p:nvSpPr>
+          <p:cNvPr id="11" name="Text 9"/>
+          <p:cNvSpPr/>
+          <p:nvPr/>
+        </p:nvSpPr>
+        <p:spPr>
+          <a:xfrm>
+            <a:off x="868680" y="1508760"/>
+            <a:ext cx="6537960" cy="4160520"/>
           </a:xfrm>
           <a:prstGeom prst="rect">
             <a:avLst/>
@@ -8464,7 +8823,7 @@
           <a:lstStyle/>
           <a:p>
             <a:r>
-              <a:rPr lang="en-US" sz="1700" dirty="0">
+              <a:rPr lang="en-US" sz="2100" dirty="0">
                 <a:solidFill>
                   <a:srgbClr val="17364A"/>
                 </a:solidFill>
@@ -8472,15 +8831,15 @@
                 <a:ea typeface="Aptos" pitchFamily="34" charset="-122"/>
                 <a:cs typeface="Aptos" pitchFamily="34" charset="-120"/>
               </a:rPr>
-              <a:t>The expected artifact is a completed AI business analysis package. It should be specific to a public health workflow and.</a:t>
-            </a:r>
-            <a:endParaRPr lang="en-US" sz="1700" dirty="0"/>
-          </a:p>
-        </p:txBody>
-      </p:sp>
-      <p:sp>
-        <p:nvSpPr>
-          <p:cNvPr id="11" name="Shape 9"/>
+              <a:t>The expected artifact is a completed AI business analysis package. It should be specific to a public.</a:t>
+            </a:r>
+            <a:endParaRPr lang="en-US" sz="2100" dirty="0"/>
+          </a:p>
+        </p:txBody>
+      </p:sp>
+      <p:sp>
+        <p:nvSpPr>
+          <p:cNvPr id="12" name="Shape 10"/>
           <p:cNvSpPr/>
           <p:nvPr/>
         </p:nvSpPr>
@@ -8507,14 +8866,14 @@
       </p:sp>
       <p:sp>
         <p:nvSpPr>
-          <p:cNvPr id="12" name="Text 10"/>
+          <p:cNvPr id="13" name="Text 11"/>
           <p:cNvSpPr/>
           <p:nvPr/>
         </p:nvSpPr>
         <p:spPr>
           <a:xfrm>
             <a:off x="8074152" y="1563624"/>
-            <a:ext cx="2825496" cy="201168"/>
+            <a:ext cx="2825496" cy="256032"/>
           </a:xfrm>
           <a:prstGeom prst="rect">
             <a:avLst/>
@@ -8530,7 +8889,7 @@
               <a:buNone/>
             </a:pPr>
             <a:r>
-              <a:rPr lang="en-US" sz="950" b="1" dirty="0">
+              <a:rPr lang="en-US" sz="1300" b="1" dirty="0">
                 <a:solidFill>
                   <a:srgbClr val="0068B7"/>
                 </a:solidFill>
@@ -8540,20 +8899,20 @@
               </a:rPr>
               <a:t>Key idea</a:t>
             </a:r>
-            <a:endParaRPr lang="en-US" sz="950" dirty="0"/>
-          </a:p>
-        </p:txBody>
-      </p:sp>
-      <p:sp>
-        <p:nvSpPr>
-          <p:cNvPr id="13" name="Text 11"/>
-          <p:cNvSpPr/>
-          <p:nvPr/>
-        </p:nvSpPr>
-        <p:spPr>
-          <a:xfrm>
-            <a:off x="8074152" y="1856232"/>
-            <a:ext cx="2825496" cy="1261872"/>
+            <a:endParaRPr lang="en-US" sz="1300" dirty="0"/>
+          </a:p>
+        </p:txBody>
+      </p:sp>
+      <p:sp>
+        <p:nvSpPr>
+          <p:cNvPr id="14" name="Text 12"/>
+          <p:cNvSpPr/>
+          <p:nvPr/>
+        </p:nvSpPr>
+        <p:spPr>
+          <a:xfrm>
+            <a:off x="8074152" y="1920240"/>
+            <a:ext cx="2825496" cy="1188720"/>
           </a:xfrm>
           <a:prstGeom prst="rect">
             <a:avLst/>
@@ -8571,7 +8930,7 @@
               <a:buNone/>
             </a:pPr>
             <a:r>
-              <a:rPr lang="en-US" sz="1250" dirty="0">
+              <a:rPr lang="en-US" sz="1550" dirty="0">
                 <a:solidFill>
                   <a:srgbClr val="17364A"/>
                 </a:solidFill>
@@ -8579,15 +8938,15 @@
                 <a:ea typeface="Aptos" pitchFamily="34" charset="-122"/>
                 <a:cs typeface="Aptos" pitchFamily="34" charset="-120"/>
               </a:rPr>
-              <a:t>The expected artifact is a completed AI business analysis package. It should be specific to a public health workflow and.</a:t>
-            </a:r>
-            <a:endParaRPr lang="en-US" sz="1250" dirty="0"/>
-          </a:p>
-        </p:txBody>
-      </p:sp>
-      <p:sp>
-        <p:nvSpPr>
-          <p:cNvPr id="14" name="Shape 12"/>
+              <a:t>The expected artifact is a completed AI business analysis package. It should be specific to a public.</a:t>
+            </a:r>
+            <a:endParaRPr lang="en-US" sz="1550" dirty="0"/>
+          </a:p>
+        </p:txBody>
+      </p:sp>
+      <p:sp>
+        <p:nvSpPr>
+          <p:cNvPr id="15" name="Shape 13"/>
           <p:cNvSpPr/>
           <p:nvPr/>
         </p:nvSpPr>
@@ -8614,14 +8973,14 @@
       </p:sp>
       <p:sp>
         <p:nvSpPr>
-          <p:cNvPr id="15" name="Text 13"/>
+          <p:cNvPr id="16" name="Text 14"/>
           <p:cNvSpPr/>
           <p:nvPr/>
         </p:nvSpPr>
         <p:spPr>
           <a:xfrm>
             <a:off x="8074152" y="3666744"/>
-            <a:ext cx="2825496" cy="201168"/>
+            <a:ext cx="2825496" cy="256032"/>
           </a:xfrm>
           <a:prstGeom prst="rect">
             <a:avLst/>
@@ -8637,7 +8996,7 @@
               <a:buNone/>
             </a:pPr>
             <a:r>
-              <a:rPr lang="en-US" sz="950" b="1" dirty="0">
+              <a:rPr lang="en-US" sz="1300" b="1" dirty="0">
                 <a:solidFill>
                   <a:srgbClr val="0068B7"/>
                 </a:solidFill>
@@ -8647,20 +9006,20 @@
               </a:rPr>
               <a:t>Use this for</a:t>
             </a:r>
-            <a:endParaRPr lang="en-US" sz="950" dirty="0"/>
-          </a:p>
-        </p:txBody>
-      </p:sp>
-      <p:sp>
-        <p:nvSpPr>
-          <p:cNvPr id="16" name="Text 14"/>
-          <p:cNvSpPr/>
-          <p:nvPr/>
-        </p:nvSpPr>
-        <p:spPr>
-          <a:xfrm>
-            <a:off x="8074152" y="3959352"/>
-            <a:ext cx="2825496" cy="1170432"/>
+            <a:endParaRPr lang="en-US" sz="1300" dirty="0"/>
+          </a:p>
+        </p:txBody>
+      </p:sp>
+      <p:sp>
+        <p:nvSpPr>
+          <p:cNvPr id="17" name="Text 15"/>
+          <p:cNvSpPr/>
+          <p:nvPr/>
+        </p:nvSpPr>
+        <p:spPr>
+          <a:xfrm>
+            <a:off x="8074152" y="4023360"/>
+            <a:ext cx="2825496" cy="1097280"/>
           </a:xfrm>
           <a:prstGeom prst="rect">
             <a:avLst/>
@@ -8678,7 +9037,7 @@
               <a:buNone/>
             </a:pPr>
             <a:r>
-              <a:rPr lang="en-US" sz="1250" dirty="0">
+              <a:rPr lang="en-US" sz="1550" dirty="0">
                 <a:solidFill>
                   <a:srgbClr val="17364A"/>
                 </a:solidFill>
@@ -8688,7 +9047,7 @@
               </a:rPr>
               <a:t>Connect the concept to public health decisions, safeguards, documentation, or implementation work.</a:t>
             </a:r>
-            <a:endParaRPr lang="en-US" sz="1250" dirty="0"/>
+            <a:endParaRPr lang="en-US" sz="1550" dirty="0"/>
           </a:p>
         </p:txBody>
       </p:sp>
@@ -8885,7 +9244,7 @@
                 <a:ea typeface="Aptos" pitchFamily="34" charset="-122"/>
                 <a:cs typeface="Aptos" pitchFamily="34" charset="-120"/>
               </a:rPr>
-              <a:t>© Paula Soper</a:t>
+              <a:t>Â© Paula Soper</a:t>
             </a:r>
             <a:endParaRPr lang="en-US" sz="800" dirty="0"/>
           </a:p>
@@ -8899,8 +9258,47 @@
         </p:nvSpPr>
         <p:spPr>
           <a:xfrm>
+            <a:off x="11137392" y="6510528"/>
+            <a:ext cx="411480" cy="201168"/>
+          </a:xfrm>
+          <a:prstGeom prst="rect">
+            <a:avLst/>
+          </a:prstGeom>
+          <a:noFill/>
+          <a:ln/>
+        </p:spPr>
+        <p:txBody>
+          <a:bodyPr wrap="square" lIns="0" tIns="0" rIns="0" bIns="0" rtlCol="0" anchor="ctr"/>
+          <a:lstStyle/>
+          <a:p>
+            <a:pPr algn="r" indent="0" marL="0">
+              <a:buNone/>
+            </a:pPr>
+            <a:r>
+              <a:rPr lang="en-US" sz="900" dirty="0">
+                <a:solidFill>
+                  <a:srgbClr val="5F7181"/>
+                </a:solidFill>
+                <a:latin typeface="Aptos" pitchFamily="34" charset="0"/>
+                <a:ea typeface="Aptos" pitchFamily="34" charset="-122"/>
+                <a:cs typeface="Aptos" pitchFamily="34" charset="-120"/>
+              </a:rPr>
+              <a:t>2</a:t>
+            </a:r>
+            <a:endParaRPr lang="en-US" sz="900" dirty="0"/>
+          </a:p>
+        </p:txBody>
+      </p:sp>
+      <p:sp>
+        <p:nvSpPr>
+          <p:cNvPr id="8" name="Text 6"/>
+          <p:cNvSpPr/>
+          <p:nvPr/>
+        </p:nvSpPr>
+        <p:spPr>
+          <a:xfrm>
             <a:off x="640080" y="658368"/>
-            <a:ext cx="10881360" cy="566928"/>
+            <a:ext cx="10881360" cy="713232"/>
           </a:xfrm>
           <a:prstGeom prst="rect">
             <a:avLst/>
@@ -8918,7 +9316,7 @@
               <a:buNone/>
             </a:pPr>
             <a:r>
-              <a:rPr lang="en-US" sz="2700" b="1" dirty="0">
+              <a:rPr lang="en-US" sz="3400" b="1" dirty="0">
                 <a:solidFill>
                   <a:srgbClr val="003A63"/>
                 </a:solidFill>
@@ -8928,20 +9326,20 @@
               </a:rPr>
               <a:t>What this module helps you do</a:t>
             </a:r>
-            <a:endParaRPr lang="en-US" sz="2700" dirty="0"/>
-          </a:p>
-        </p:txBody>
-      </p:sp>
-      <p:sp>
-        <p:nvSpPr>
-          <p:cNvPr id="8" name="Text 6"/>
-          <p:cNvSpPr/>
-          <p:nvPr/>
-        </p:nvSpPr>
-        <p:spPr>
-          <a:xfrm>
-            <a:off x="868680" y="1417320"/>
-            <a:ext cx="6675120" cy="3291840"/>
+            <a:endParaRPr lang="en-US" sz="3400" dirty="0"/>
+          </a:p>
+        </p:txBody>
+      </p:sp>
+      <p:sp>
+        <p:nvSpPr>
+          <p:cNvPr id="9" name="Text 7"/>
+          <p:cNvSpPr/>
+          <p:nvPr/>
+        </p:nvSpPr>
+        <p:spPr>
+          <a:xfrm>
+            <a:off x="868680" y="1508760"/>
+            <a:ext cx="6446520" cy="2926080"/>
           </a:xfrm>
           <a:prstGeom prst="rect">
             <a:avLst/>
@@ -8956,7 +9354,7 @@
           <a:lstStyle/>
           <a:p>
             <a:r>
-              <a:rPr lang="en-US" sz="1700" dirty="0">
+              <a:rPr lang="en-US" sz="2100" dirty="0">
                 <a:solidFill>
                   <a:srgbClr val="17364A"/>
                 </a:solidFill>
@@ -8964,13 +9362,13 @@
                 <a:ea typeface="Aptos" pitchFamily="34" charset="-122"/>
                 <a:cs typeface="Aptos" pitchFamily="34" charset="-120"/>
               </a:rPr>
-              <a:t>Business analysis translates public health needs into clear requirements, workflows, user stories, acceptance criteria, data needs, and.</a:t>
-            </a:r>
-            <a:endParaRPr lang="en-US" sz="1700" dirty="0"/>
-          </a:p>
-          <a:p>
-            <a:r>
-              <a:rPr lang="en-US" sz="1700" dirty="0">
+              <a:t>Business analysis translates public health needs into clear requirements, workflows, user stories, acceptance.</a:t>
+            </a:r>
+            <a:endParaRPr lang="en-US" sz="2100" dirty="0"/>
+          </a:p>
+          <a:p>
+            <a:r>
+              <a:rPr lang="en-US" sz="2100" dirty="0">
                 <a:solidFill>
                   <a:srgbClr val="17364A"/>
                 </a:solidFill>
@@ -8978,13 +9376,13 @@
                 <a:ea typeface="Aptos" pitchFamily="34" charset="-122"/>
                 <a:cs typeface="Aptos" pitchFamily="34" charset="-120"/>
               </a:rPr>
-              <a:t>AI projects often fail when technical teams, vendors, and program staff do not share a precise understanding of the problem to be solved.</a:t>
-            </a:r>
-            <a:endParaRPr lang="en-US" sz="1700" dirty="0"/>
-          </a:p>
-          <a:p>
-            <a:r>
-              <a:rPr lang="en-US" sz="1700" dirty="0">
+              <a:t>AI projects often fail when technical teams, vendors, and program staff do not share a precise understanding of.</a:t>
+            </a:r>
+            <a:endParaRPr lang="en-US" sz="2100" dirty="0"/>
+          </a:p>
+          <a:p>
+            <a:r>
+              <a:rPr lang="en-US" sz="2100" dirty="0">
                 <a:solidFill>
                   <a:srgbClr val="17364A"/>
                 </a:solidFill>
@@ -8992,15 +9390,15 @@
                 <a:ea typeface="Aptos" pitchFamily="34" charset="-122"/>
                 <a:cs typeface="Aptos" pitchFamily="34" charset="-120"/>
               </a:rPr>
-              <a:t>This module gives informaticians and program leads a disciplined approach to defining AI-supported workflows before technology choices are finalized.</a:t>
-            </a:r>
-            <a:endParaRPr lang="en-US" sz="1700" dirty="0"/>
-          </a:p>
-        </p:txBody>
-      </p:sp>
-      <p:sp>
-        <p:nvSpPr>
-          <p:cNvPr id="9" name="Shape 7"/>
+              <a:t>This module gives informaticians and program leads a disciplined approach to defining AI-supported workflows.</a:t>
+            </a:r>
+            <a:endParaRPr lang="en-US" sz="2100" dirty="0"/>
+          </a:p>
+        </p:txBody>
+      </p:sp>
+      <p:sp>
+        <p:nvSpPr>
+          <p:cNvPr id="10" name="Shape 8"/>
           <p:cNvSpPr/>
           <p:nvPr/>
         </p:nvSpPr>
@@ -9027,14 +9425,14 @@
       </p:sp>
       <p:sp>
         <p:nvSpPr>
-          <p:cNvPr id="10" name="Text 8"/>
+          <p:cNvPr id="11" name="Text 9"/>
           <p:cNvSpPr/>
           <p:nvPr/>
         </p:nvSpPr>
         <p:spPr>
           <a:xfrm>
             <a:off x="8074152" y="1563624"/>
-            <a:ext cx="2825496" cy="201168"/>
+            <a:ext cx="2825496" cy="256032"/>
           </a:xfrm>
           <a:prstGeom prst="rect">
             <a:avLst/>
@@ -9050,7 +9448,7 @@
               <a:buNone/>
             </a:pPr>
             <a:r>
-              <a:rPr lang="en-US" sz="950" b="1" dirty="0">
+              <a:rPr lang="en-US" sz="1300" b="1" dirty="0">
                 <a:solidFill>
                   <a:srgbClr val="0068B7"/>
                 </a:solidFill>
@@ -9060,20 +9458,20 @@
               </a:rPr>
               <a:t>Module details</a:t>
             </a:r>
-            <a:endParaRPr lang="en-US" sz="950" dirty="0"/>
-          </a:p>
-        </p:txBody>
-      </p:sp>
-      <p:sp>
-        <p:nvSpPr>
-          <p:cNvPr id="11" name="Text 9"/>
-          <p:cNvSpPr/>
-          <p:nvPr/>
-        </p:nvSpPr>
-        <p:spPr>
-          <a:xfrm>
-            <a:off x="8074152" y="1856232"/>
-            <a:ext cx="2825496" cy="1353312"/>
+            <a:endParaRPr lang="en-US" sz="1300" dirty="0"/>
+          </a:p>
+        </p:txBody>
+      </p:sp>
+      <p:sp>
+        <p:nvSpPr>
+          <p:cNvPr id="12" name="Text 10"/>
+          <p:cNvSpPr/>
+          <p:nvPr/>
+        </p:nvSpPr>
+        <p:spPr>
+          <a:xfrm>
+            <a:off x="8074152" y="1920240"/>
+            <a:ext cx="2825496" cy="1280160"/>
           </a:xfrm>
           <a:prstGeom prst="rect">
             <a:avLst/>
@@ -9091,7 +9489,7 @@
               <a:buNone/>
             </a:pPr>
             <a:r>
-              <a:rPr lang="en-US" sz="1250" dirty="0">
+              <a:rPr lang="en-US" sz="1550" dirty="0">
                 <a:solidFill>
                   <a:srgbClr val="17364A"/>
                 </a:solidFill>
@@ -9101,14 +9499,14 @@
               </a:rPr>
               <a:t>Level: applied/foundational</a:t>
             </a:r>
-            <a:endParaRPr lang="en-US" sz="1250" dirty="0"/>
+            <a:endParaRPr lang="en-US" sz="1550" dirty="0"/>
           </a:p>
           <a:p>
             <a:pPr indent="0" marL="0">
               <a:buNone/>
             </a:pPr>
             <a:r>
-              <a:rPr lang="en-US" sz="1250" dirty="0">
+              <a:rPr lang="en-US" sz="1550" dirty="0">
                 <a:solidFill>
                   <a:srgbClr val="17364A"/>
                 </a:solidFill>
@@ -9118,14 +9516,14 @@
               </a:rPr>
               <a:t>Primary track: Program Management Role-Based Track</a:t>
             </a:r>
-            <a:endParaRPr lang="en-US" sz="1250" dirty="0"/>
+            <a:endParaRPr lang="en-US" sz="1550" dirty="0"/>
           </a:p>
           <a:p>
             <a:pPr indent="0" marL="0">
               <a:buNone/>
             </a:pPr>
             <a:r>
-              <a:rPr lang="en-US" sz="1250" dirty="0">
+              <a:rPr lang="en-US" sz="1550" dirty="0">
                 <a:solidFill>
                   <a:srgbClr val="17364A"/>
                 </a:solidFill>
@@ -9135,32 +9533,32 @@
               </a:rPr>
               <a:t>Appears in tracks: operations-data-quality</a:t>
             </a:r>
-            <a:endParaRPr lang="en-US" sz="1250" dirty="0"/>
-          </a:p>
-        </p:txBody>
-      </p:sp>
-      <p:sp>
-        <p:nvSpPr>
-          <p:cNvPr id="12" name="Shape 10"/>
-          <p:cNvSpPr/>
-          <p:nvPr/>
-        </p:nvSpPr>
-        <p:spPr>
-          <a:xfrm>
-            <a:off x="7909560" y="3611880"/>
-            <a:ext cx="3154680" cy="1783080"/>
+            <a:endParaRPr lang="en-US" sz="1550" dirty="0"/>
+          </a:p>
+        </p:txBody>
+      </p:sp>
+      <p:sp>
+        <p:nvSpPr>
+          <p:cNvPr id="13" name="Shape 11"/>
+          <p:cNvSpPr/>
+          <p:nvPr/>
+        </p:nvSpPr>
+        <p:spPr>
+          <a:xfrm>
+            <a:off x="7635240" y="3730752"/>
+            <a:ext cx="1033272" cy="749808"/>
           </a:xfrm>
           <a:prstGeom prst="roundRect">
             <a:avLst>
-              <a:gd name="adj" fmla="val 6154"/>
+              <a:gd name="adj" fmla="val 14634"/>
             </a:avLst>
           </a:prstGeom>
           <a:solidFill>
-            <a:srgbClr val="EEF8ED"/>
+            <a:srgbClr val="0068B7"/>
           </a:solidFill>
           <a:ln w="12700">
             <a:solidFill>
-              <a:srgbClr val="B9D7E6"/>
+              <a:srgbClr val="0068B7"/>
             </a:solidFill>
             <a:prstDash val="solid"/>
           </a:ln>
@@ -9168,81 +9566,256 @@
       </p:sp>
       <p:sp>
         <p:nvSpPr>
-          <p:cNvPr id="13" name="Text 11"/>
-          <p:cNvSpPr/>
-          <p:nvPr/>
-        </p:nvSpPr>
-        <p:spPr>
-          <a:xfrm>
-            <a:off x="8074152" y="3758184"/>
-            <a:ext cx="2825496" cy="201168"/>
-          </a:xfrm>
-          <a:prstGeom prst="rect">
-            <a:avLst/>
-          </a:prstGeom>
-          <a:noFill/>
-          <a:ln/>
-        </p:spPr>
-        <p:txBody>
-          <a:bodyPr wrap="square" lIns="0" tIns="0" rIns="0" bIns="0" rtlCol="0" anchor="ctr"/>
-          <a:lstStyle/>
-          <a:p>
-            <a:pPr indent="0" marL="0">
-              <a:buNone/>
-            </a:pPr>
-            <a:r>
-              <a:rPr lang="en-US" sz="950" b="1" dirty="0">
-                <a:solidFill>
-                  <a:srgbClr val="0068B7"/>
-                </a:solidFill>
-                <a:latin typeface="Aptos" pitchFamily="34" charset="0"/>
-                <a:ea typeface="Aptos" pitchFamily="34" charset="-122"/>
-                <a:cs typeface="Aptos" pitchFamily="34" charset="-120"/>
-              </a:rPr>
-              <a:t>Learning approach</a:t>
-            </a:r>
-            <a:endParaRPr lang="en-US" sz="950" dirty="0"/>
-          </a:p>
-        </p:txBody>
-      </p:sp>
-      <p:sp>
-        <p:nvSpPr>
           <p:cNvPr id="14" name="Text 12"/>
           <p:cNvSpPr/>
           <p:nvPr/>
         </p:nvSpPr>
         <p:spPr>
           <a:xfrm>
-            <a:off x="8074152" y="4050792"/>
-            <a:ext cx="2825496" cy="1216152"/>
-          </a:xfrm>
-          <a:prstGeom prst="rect">
-            <a:avLst/>
-          </a:prstGeom>
-          <a:noFill/>
-          <a:ln/>
-        </p:spPr>
-        <p:txBody>
-          <a:bodyPr wrap="square" lIns="0" tIns="0" rIns="0" bIns="0" rtlCol="0" anchor="t">
+            <a:off x="7708392" y="3922776"/>
+            <a:ext cx="886968" cy="310896"/>
+          </a:xfrm>
+          <a:prstGeom prst="rect">
+            <a:avLst/>
+          </a:prstGeom>
+          <a:noFill/>
+          <a:ln/>
+        </p:spPr>
+        <p:txBody>
+          <a:bodyPr wrap="square" lIns="0" tIns="0" rIns="0" bIns="0" rtlCol="0" anchor="ctr">
             <a:normAutofit/>
           </a:bodyPr>
           <a:lstStyle/>
           <a:p>
-            <a:pPr indent="0" marL="0">
-              <a:buNone/>
-            </a:pPr>
-            <a:r>
-              <a:rPr lang="en-US" sz="1250" dirty="0">
-                <a:solidFill>
-                  <a:srgbClr val="17364A"/>
-                </a:solidFill>
-                <a:latin typeface="Aptos" pitchFamily="34" charset="0"/>
-                <a:ea typeface="Aptos" pitchFamily="34" charset="-122"/>
-                <a:cs typeface="Aptos" pitchFamily="34" charset="-120"/>
-              </a:rPr>
-              <a:t>Review the core ideas, complete the practical exercise, check your understanding, and use the related plays and tools to apply the lesson.</a:t>
-            </a:r>
-            <a:endParaRPr lang="en-US" sz="1250" dirty="0"/>
+            <a:pPr algn="ctr" indent="0" marL="0">
+              <a:buNone/>
+            </a:pPr>
+            <a:r>
+              <a:rPr lang="en-US" sz="1500" b="1" dirty="0">
+                <a:solidFill>
+                  <a:srgbClr val="FFFFFF"/>
+                </a:solidFill>
+                <a:latin typeface="Aptos" pitchFamily="34" charset="0"/>
+                <a:ea typeface="Aptos" pitchFamily="34" charset="-122"/>
+                <a:cs typeface="Aptos" pitchFamily="34" charset="-120"/>
+              </a:rPr>
+              <a:t>Learn</a:t>
+            </a:r>
+            <a:endParaRPr lang="en-US" sz="1500" dirty="0"/>
+          </a:p>
+        </p:txBody>
+      </p:sp>
+      <p:sp>
+        <p:nvSpPr>
+          <p:cNvPr id="15" name="Text 13"/>
+          <p:cNvSpPr/>
+          <p:nvPr/>
+        </p:nvSpPr>
+        <p:spPr>
+          <a:xfrm>
+            <a:off x="8695944" y="3941064"/>
+            <a:ext cx="201168" cy="256032"/>
+          </a:xfrm>
+          <a:prstGeom prst="rect">
+            <a:avLst/>
+          </a:prstGeom>
+          <a:noFill/>
+          <a:ln/>
+        </p:spPr>
+        <p:txBody>
+          <a:bodyPr wrap="square" lIns="0" tIns="0" rIns="0" bIns="0" rtlCol="0" anchor="ctr"/>
+          <a:lstStyle/>
+          <a:p>
+            <a:pPr algn="ctr" indent="0" marL="0">
+              <a:buNone/>
+            </a:pPr>
+            <a:r>
+              <a:rPr lang="en-US" sz="1800" b="1" dirty="0">
+                <a:solidFill>
+                  <a:srgbClr val="0068B7"/>
+                </a:solidFill>
+                <a:latin typeface="Aptos" pitchFamily="34" charset="0"/>
+                <a:ea typeface="Aptos" pitchFamily="34" charset="-122"/>
+                <a:cs typeface="Aptos" pitchFamily="34" charset="-120"/>
+              </a:rPr>
+              <a:t>â†’</a:t>
+            </a:r>
+            <a:endParaRPr lang="en-US" sz="1800" dirty="0"/>
+          </a:p>
+        </p:txBody>
+      </p:sp>
+      <p:sp>
+        <p:nvSpPr>
+          <p:cNvPr id="16" name="Shape 14"/>
+          <p:cNvSpPr/>
+          <p:nvPr/>
+        </p:nvSpPr>
+        <p:spPr>
+          <a:xfrm>
+            <a:off x="8924544" y="3730752"/>
+            <a:ext cx="1033272" cy="749808"/>
+          </a:xfrm>
+          <a:prstGeom prst="roundRect">
+            <a:avLst>
+              <a:gd name="adj" fmla="val 14634"/>
+            </a:avLst>
+          </a:prstGeom>
+          <a:solidFill>
+            <a:srgbClr val="2F8A28"/>
+          </a:solidFill>
+          <a:ln w="12700">
+            <a:solidFill>
+              <a:srgbClr val="2F8A28"/>
+            </a:solidFill>
+            <a:prstDash val="solid"/>
+          </a:ln>
+        </p:spPr>
+      </p:sp>
+      <p:sp>
+        <p:nvSpPr>
+          <p:cNvPr id="17" name="Text 15"/>
+          <p:cNvSpPr/>
+          <p:nvPr/>
+        </p:nvSpPr>
+        <p:spPr>
+          <a:xfrm>
+            <a:off x="8997696" y="3922776"/>
+            <a:ext cx="886968" cy="310896"/>
+          </a:xfrm>
+          <a:prstGeom prst="rect">
+            <a:avLst/>
+          </a:prstGeom>
+          <a:noFill/>
+          <a:ln/>
+        </p:spPr>
+        <p:txBody>
+          <a:bodyPr wrap="square" lIns="0" tIns="0" rIns="0" bIns="0" rtlCol="0" anchor="ctr">
+            <a:normAutofit/>
+          </a:bodyPr>
+          <a:lstStyle/>
+          <a:p>
+            <a:pPr algn="ctr" indent="0" marL="0">
+              <a:buNone/>
+            </a:pPr>
+            <a:r>
+              <a:rPr lang="en-US" sz="1500" b="1" dirty="0">
+                <a:solidFill>
+                  <a:srgbClr val="FFFFFF"/>
+                </a:solidFill>
+                <a:latin typeface="Aptos" pitchFamily="34" charset="0"/>
+                <a:ea typeface="Aptos" pitchFamily="34" charset="-122"/>
+                <a:cs typeface="Aptos" pitchFamily="34" charset="-120"/>
+              </a:rPr>
+              <a:t>Apply</a:t>
+            </a:r>
+            <a:endParaRPr lang="en-US" sz="1500" dirty="0"/>
+          </a:p>
+        </p:txBody>
+      </p:sp>
+      <p:sp>
+        <p:nvSpPr>
+          <p:cNvPr id="18" name="Text 16"/>
+          <p:cNvSpPr/>
+          <p:nvPr/>
+        </p:nvSpPr>
+        <p:spPr>
+          <a:xfrm>
+            <a:off x="9985248" y="3941064"/>
+            <a:ext cx="201168" cy="256032"/>
+          </a:xfrm>
+          <a:prstGeom prst="rect">
+            <a:avLst/>
+          </a:prstGeom>
+          <a:noFill/>
+          <a:ln/>
+        </p:spPr>
+        <p:txBody>
+          <a:bodyPr wrap="square" lIns="0" tIns="0" rIns="0" bIns="0" rtlCol="0" anchor="ctr"/>
+          <a:lstStyle/>
+          <a:p>
+            <a:pPr algn="ctr" indent="0" marL="0">
+              <a:buNone/>
+            </a:pPr>
+            <a:r>
+              <a:rPr lang="en-US" sz="1800" b="1" dirty="0">
+                <a:solidFill>
+                  <a:srgbClr val="0068B7"/>
+                </a:solidFill>
+                <a:latin typeface="Aptos" pitchFamily="34" charset="0"/>
+                <a:ea typeface="Aptos" pitchFamily="34" charset="-122"/>
+                <a:cs typeface="Aptos" pitchFamily="34" charset="-120"/>
+              </a:rPr>
+              <a:t>â†’</a:t>
+            </a:r>
+            <a:endParaRPr lang="en-US" sz="1800" dirty="0"/>
+          </a:p>
+        </p:txBody>
+      </p:sp>
+      <p:sp>
+        <p:nvSpPr>
+          <p:cNvPr id="19" name="Shape 17"/>
+          <p:cNvSpPr/>
+          <p:nvPr/>
+        </p:nvSpPr>
+        <p:spPr>
+          <a:xfrm>
+            <a:off x="10213848" y="3730752"/>
+            <a:ext cx="1033272" cy="749808"/>
+          </a:xfrm>
+          <a:prstGeom prst="roundRect">
+            <a:avLst>
+              <a:gd name="adj" fmla="val 14634"/>
+            </a:avLst>
+          </a:prstGeom>
+          <a:solidFill>
+            <a:srgbClr val="6A4CA3"/>
+          </a:solidFill>
+          <a:ln w="12700">
+            <a:solidFill>
+              <a:srgbClr val="6A4CA3"/>
+            </a:solidFill>
+            <a:prstDash val="solid"/>
+          </a:ln>
+        </p:spPr>
+      </p:sp>
+      <p:sp>
+        <p:nvSpPr>
+          <p:cNvPr id="20" name="Text 18"/>
+          <p:cNvSpPr/>
+          <p:nvPr/>
+        </p:nvSpPr>
+        <p:spPr>
+          <a:xfrm>
+            <a:off x="10287000" y="3922776"/>
+            <a:ext cx="886968" cy="310896"/>
+          </a:xfrm>
+          <a:prstGeom prst="rect">
+            <a:avLst/>
+          </a:prstGeom>
+          <a:noFill/>
+          <a:ln/>
+        </p:spPr>
+        <p:txBody>
+          <a:bodyPr wrap="square" lIns="0" tIns="0" rIns="0" bIns="0" rtlCol="0" anchor="ctr">
+            <a:normAutofit/>
+          </a:bodyPr>
+          <a:lstStyle/>
+          <a:p>
+            <a:pPr algn="ctr" indent="0" marL="0">
+              <a:buNone/>
+            </a:pPr>
+            <a:r>
+              <a:rPr lang="en-US" sz="1500" b="1" dirty="0">
+                <a:solidFill>
+                  <a:srgbClr val="FFFFFF"/>
+                </a:solidFill>
+                <a:latin typeface="Aptos" pitchFamily="34" charset="0"/>
+                <a:ea typeface="Aptos" pitchFamily="34" charset="-122"/>
+                <a:cs typeface="Aptos" pitchFamily="34" charset="-120"/>
+              </a:rPr>
+              <a:t>Document</a:t>
+            </a:r>
+            <a:endParaRPr lang="en-US" sz="1500" dirty="0"/>
           </a:p>
         </p:txBody>
       </p:sp>
@@ -9439,7 +10012,7 @@
                 <a:ea typeface="Aptos" pitchFamily="34" charset="-122"/>
                 <a:cs typeface="Aptos" pitchFamily="34" charset="-120"/>
               </a:rPr>
-              <a:t>© Paula Soper</a:t>
+              <a:t>Â© Paula Soper</a:t>
             </a:r>
             <a:endParaRPr lang="en-US" sz="800" dirty="0"/>
           </a:p>
@@ -9447,7 +10020,46 @@
       </p:sp>
       <p:sp>
         <p:nvSpPr>
-          <p:cNvPr id="7" name="Shape 5"/>
+          <p:cNvPr id="7" name="Text 5"/>
+          <p:cNvSpPr/>
+          <p:nvPr/>
+        </p:nvSpPr>
+        <p:spPr>
+          <a:xfrm>
+            <a:off x="11137392" y="6510528"/>
+            <a:ext cx="411480" cy="201168"/>
+          </a:xfrm>
+          <a:prstGeom prst="rect">
+            <a:avLst/>
+          </a:prstGeom>
+          <a:noFill/>
+          <a:ln/>
+        </p:spPr>
+        <p:txBody>
+          <a:bodyPr wrap="square" lIns="0" tIns="0" rIns="0" bIns="0" rtlCol="0" anchor="ctr"/>
+          <a:lstStyle/>
+          <a:p>
+            <a:pPr algn="r" indent="0" marL="0">
+              <a:buNone/>
+            </a:pPr>
+            <a:r>
+              <a:rPr lang="en-US" sz="900" dirty="0">
+                <a:solidFill>
+                  <a:srgbClr val="5F7181"/>
+                </a:solidFill>
+                <a:latin typeface="Aptos" pitchFamily="34" charset="0"/>
+                <a:ea typeface="Aptos" pitchFamily="34" charset="-122"/>
+                <a:cs typeface="Aptos" pitchFamily="34" charset="-120"/>
+              </a:rPr>
+              <a:t>20</a:t>
+            </a:r>
+            <a:endParaRPr lang="en-US" sz="900" dirty="0"/>
+          </a:p>
+        </p:txBody>
+      </p:sp>
+      <p:sp>
+        <p:nvSpPr>
+          <p:cNvPr id="8" name="Shape 6"/>
           <p:cNvSpPr/>
           <p:nvPr/>
         </p:nvSpPr>
@@ -9472,7 +10084,7 @@
       </p:sp>
       <p:sp>
         <p:nvSpPr>
-          <p:cNvPr id="8" name="Text 6"/>
+          <p:cNvPr id="9" name="Text 7"/>
           <p:cNvSpPr/>
           <p:nvPr/>
         </p:nvSpPr>
@@ -9511,14 +10123,14 @@
       </p:sp>
       <p:sp>
         <p:nvSpPr>
-          <p:cNvPr id="9" name="Text 7"/>
+          <p:cNvPr id="10" name="Text 8"/>
           <p:cNvSpPr/>
           <p:nvPr/>
         </p:nvSpPr>
         <p:spPr>
           <a:xfrm>
             <a:off x="640080" y="621792"/>
-            <a:ext cx="10881360" cy="566928"/>
+            <a:ext cx="10881360" cy="713232"/>
           </a:xfrm>
           <a:prstGeom prst="rect">
             <a:avLst/>
@@ -9536,7 +10148,7 @@
               <a:buNone/>
             </a:pPr>
             <a:r>
-              <a:rPr lang="en-US" sz="2700" b="1" dirty="0">
+              <a:rPr lang="en-US" sz="3400" b="1" dirty="0">
                 <a:solidFill>
                   <a:srgbClr val="003A63"/>
                 </a:solidFill>
@@ -9546,20 +10158,20 @@
               </a:rPr>
               <a:t>Knowledge Check</a:t>
             </a:r>
-            <a:endParaRPr lang="en-US" sz="2700" dirty="0"/>
-          </a:p>
-        </p:txBody>
-      </p:sp>
-      <p:sp>
-        <p:nvSpPr>
-          <p:cNvPr id="10" name="Text 8"/>
-          <p:cNvSpPr/>
-          <p:nvPr/>
-        </p:nvSpPr>
-        <p:spPr>
-          <a:xfrm>
-            <a:off x="868680" y="1417320"/>
-            <a:ext cx="6675120" cy="4434840"/>
+            <a:endParaRPr lang="en-US" sz="3400" dirty="0"/>
+          </a:p>
+        </p:txBody>
+      </p:sp>
+      <p:sp>
+        <p:nvSpPr>
+          <p:cNvPr id="11" name="Text 9"/>
+          <p:cNvSpPr/>
+          <p:nvPr/>
+        </p:nvSpPr>
+        <p:spPr>
+          <a:xfrm>
+            <a:off x="868680" y="1508760"/>
+            <a:ext cx="6537960" cy="4160520"/>
           </a:xfrm>
           <a:prstGeom prst="rect">
             <a:avLst/>
@@ -9574,7 +10186,7 @@
           <a:lstStyle/>
           <a:p>
             <a:r>
-              <a:rPr lang="en-US" sz="1700" dirty="0">
+              <a:rPr lang="en-US" sz="2100" dirty="0">
                 <a:solidFill>
                   <a:srgbClr val="17364A"/>
                 </a:solidFill>
@@ -9582,13 +10194,13 @@
                 <a:ea typeface="Aptos" pitchFamily="34" charset="-122"/>
                 <a:cs typeface="Aptos" pitchFamily="34" charset="-120"/>
               </a:rPr>
-              <a:t>1. What is the best reason to address business analysis for ai-enabled public health systems before deployment?</a:t>
-            </a:r>
-            <a:endParaRPr lang="en-US" sz="1700" dirty="0"/>
-          </a:p>
-          <a:p>
-            <a:r>
-              <a:rPr lang="en-US" sz="1700" dirty="0">
+              <a:t>1. What is the best reason to address business analysis for ai-enabled public health systems before.</a:t>
+            </a:r>
+            <a:endParaRPr lang="en-US" sz="2100" dirty="0"/>
+          </a:p>
+          <a:p>
+            <a:r>
+              <a:rPr lang="en-US" sz="2100" dirty="0">
                 <a:solidFill>
                   <a:srgbClr val="17364A"/>
                 </a:solidFill>
@@ -9598,11 +10210,11 @@
               </a:rPr>
               <a:t>2. Which practice best supports responsible implementation?</a:t>
             </a:r>
-            <a:endParaRPr lang="en-US" sz="1700" dirty="0"/>
-          </a:p>
-          <a:p>
-            <a:r>
-              <a:rPr lang="en-US" sz="1700" dirty="0">
+            <a:endParaRPr lang="en-US" sz="2100" dirty="0"/>
+          </a:p>
+          <a:p>
+            <a:r>
+              <a:rPr lang="en-US" sz="2100" dirty="0">
                 <a:solidFill>
                   <a:srgbClr val="17364A"/>
                 </a:solidFill>
@@ -9612,27 +10224,13 @@
               </a:rPr>
               <a:t>3. Which statement best describes a common failure mode?</a:t>
             </a:r>
-            <a:endParaRPr lang="en-US" sz="1700" dirty="0"/>
-          </a:p>
-          <a:p>
-            <a:r>
-              <a:rPr lang="en-US" sz="1700" dirty="0">
-                <a:solidFill>
-                  <a:srgbClr val="17364A"/>
-                </a:solidFill>
-                <a:latin typeface="Aptos" pitchFamily="34" charset="0"/>
-                <a:ea typeface="Aptos" pitchFamily="34" charset="-122"/>
-                <a:cs typeface="Aptos" pitchFamily="34" charset="-120"/>
-              </a:rPr>
-              <a:t>4. What should be included in the practical artifact for this module?</a:t>
-            </a:r>
-            <a:endParaRPr lang="en-US" sz="1700" dirty="0"/>
-          </a:p>
-        </p:txBody>
-      </p:sp>
-      <p:sp>
-        <p:nvSpPr>
-          <p:cNvPr id="11" name="Shape 9"/>
+            <a:endParaRPr lang="en-US" sz="2100" dirty="0"/>
+          </a:p>
+        </p:txBody>
+      </p:sp>
+      <p:sp>
+        <p:nvSpPr>
+          <p:cNvPr id="12" name="Shape 10"/>
           <p:cNvSpPr/>
           <p:nvPr/>
         </p:nvSpPr>
@@ -9659,14 +10257,14 @@
       </p:sp>
       <p:sp>
         <p:nvSpPr>
-          <p:cNvPr id="12" name="Text 10"/>
+          <p:cNvPr id="13" name="Text 11"/>
           <p:cNvSpPr/>
           <p:nvPr/>
         </p:nvSpPr>
         <p:spPr>
           <a:xfrm>
             <a:off x="8074152" y="1563624"/>
-            <a:ext cx="2825496" cy="201168"/>
+            <a:ext cx="2825496" cy="256032"/>
           </a:xfrm>
           <a:prstGeom prst="rect">
             <a:avLst/>
@@ -9682,7 +10280,7 @@
               <a:buNone/>
             </a:pPr>
             <a:r>
-              <a:rPr lang="en-US" sz="950" b="1" dirty="0">
+              <a:rPr lang="en-US" sz="1300" b="1" dirty="0">
                 <a:solidFill>
                   <a:srgbClr val="0068B7"/>
                 </a:solidFill>
@@ -9692,20 +10290,20 @@
               </a:rPr>
               <a:t>Key idea</a:t>
             </a:r>
-            <a:endParaRPr lang="en-US" sz="950" dirty="0"/>
-          </a:p>
-        </p:txBody>
-      </p:sp>
-      <p:sp>
-        <p:nvSpPr>
-          <p:cNvPr id="13" name="Text 11"/>
-          <p:cNvSpPr/>
-          <p:nvPr/>
-        </p:nvSpPr>
-        <p:spPr>
-          <a:xfrm>
-            <a:off x="8074152" y="1856232"/>
-            <a:ext cx="2825496" cy="1261872"/>
+            <a:endParaRPr lang="en-US" sz="1300" dirty="0"/>
+          </a:p>
+        </p:txBody>
+      </p:sp>
+      <p:sp>
+        <p:nvSpPr>
+          <p:cNvPr id="14" name="Text 12"/>
+          <p:cNvSpPr/>
+          <p:nvPr/>
+        </p:nvSpPr>
+        <p:spPr>
+          <a:xfrm>
+            <a:off x="8074152" y="1920240"/>
+            <a:ext cx="2825496" cy="1188720"/>
           </a:xfrm>
           <a:prstGeom prst="rect">
             <a:avLst/>
@@ -9723,7 +10321,7 @@
               <a:buNone/>
             </a:pPr>
             <a:r>
-              <a:rPr lang="en-US" sz="1250" dirty="0">
+              <a:rPr lang="en-US" sz="1550" dirty="0">
                 <a:solidFill>
                   <a:srgbClr val="17364A"/>
                 </a:solidFill>
@@ -9731,15 +10329,15 @@
                 <a:ea typeface="Aptos" pitchFamily="34" charset="-122"/>
                 <a:cs typeface="Aptos" pitchFamily="34" charset="-120"/>
               </a:rPr>
-              <a:t>1. What is the best reason to address business analysis for ai-enabled public health systems before deployment?</a:t>
-            </a:r>
-            <a:endParaRPr lang="en-US" sz="1250" dirty="0"/>
-          </a:p>
-        </p:txBody>
-      </p:sp>
-      <p:sp>
-        <p:nvSpPr>
-          <p:cNvPr id="14" name="Shape 12"/>
+              <a:t>1. What is the best reason to address business analysis for ai-enabled public health systems before.</a:t>
+            </a:r>
+            <a:endParaRPr lang="en-US" sz="1550" dirty="0"/>
+          </a:p>
+        </p:txBody>
+      </p:sp>
+      <p:sp>
+        <p:nvSpPr>
+          <p:cNvPr id="15" name="Shape 13"/>
           <p:cNvSpPr/>
           <p:nvPr/>
         </p:nvSpPr>
@@ -9766,14 +10364,14 @@
       </p:sp>
       <p:sp>
         <p:nvSpPr>
-          <p:cNvPr id="15" name="Text 13"/>
+          <p:cNvPr id="16" name="Text 14"/>
           <p:cNvSpPr/>
           <p:nvPr/>
         </p:nvSpPr>
         <p:spPr>
           <a:xfrm>
             <a:off x="8074152" y="3666744"/>
-            <a:ext cx="2825496" cy="201168"/>
+            <a:ext cx="2825496" cy="256032"/>
           </a:xfrm>
           <a:prstGeom prst="rect">
             <a:avLst/>
@@ -9789,7 +10387,7 @@
               <a:buNone/>
             </a:pPr>
             <a:r>
-              <a:rPr lang="en-US" sz="950" b="1" dirty="0">
+              <a:rPr lang="en-US" sz="1300" b="1" dirty="0">
                 <a:solidFill>
                   <a:srgbClr val="0068B7"/>
                 </a:solidFill>
@@ -9799,20 +10397,20 @@
               </a:rPr>
               <a:t>Use this for</a:t>
             </a:r>
-            <a:endParaRPr lang="en-US" sz="950" dirty="0"/>
-          </a:p>
-        </p:txBody>
-      </p:sp>
-      <p:sp>
-        <p:nvSpPr>
-          <p:cNvPr id="16" name="Text 14"/>
-          <p:cNvSpPr/>
-          <p:nvPr/>
-        </p:nvSpPr>
-        <p:spPr>
-          <a:xfrm>
-            <a:off x="8074152" y="3959352"/>
-            <a:ext cx="2825496" cy="1170432"/>
+            <a:endParaRPr lang="en-US" sz="1300" dirty="0"/>
+          </a:p>
+        </p:txBody>
+      </p:sp>
+      <p:sp>
+        <p:nvSpPr>
+          <p:cNvPr id="17" name="Text 15"/>
+          <p:cNvSpPr/>
+          <p:nvPr/>
+        </p:nvSpPr>
+        <p:spPr>
+          <a:xfrm>
+            <a:off x="8074152" y="4023360"/>
+            <a:ext cx="2825496" cy="1097280"/>
           </a:xfrm>
           <a:prstGeom prst="rect">
             <a:avLst/>
@@ -9830,7 +10428,7 @@
               <a:buNone/>
             </a:pPr>
             <a:r>
-              <a:rPr lang="en-US" sz="1250" dirty="0">
+              <a:rPr lang="en-US" sz="1550" dirty="0">
                 <a:solidFill>
                   <a:srgbClr val="17364A"/>
                 </a:solidFill>
@@ -9840,7 +10438,7 @@
               </a:rPr>
               <a:t>Connect the concept to public health decisions, safeguards, documentation, or implementation work.</a:t>
             </a:r>
-            <a:endParaRPr lang="en-US" sz="1250" dirty="0"/>
+            <a:endParaRPr lang="en-US" sz="1550" dirty="0"/>
           </a:p>
         </p:txBody>
       </p:sp>
@@ -10037,7 +10635,7 @@
                 <a:ea typeface="Aptos" pitchFamily="34" charset="-122"/>
                 <a:cs typeface="Aptos" pitchFamily="34" charset="-120"/>
               </a:rPr>
-              <a:t>© Paula Soper</a:t>
+              <a:t>Â© Paula Soper</a:t>
             </a:r>
             <a:endParaRPr lang="en-US" sz="800" dirty="0"/>
           </a:p>
@@ -10045,7 +10643,46 @@
       </p:sp>
       <p:sp>
         <p:nvSpPr>
-          <p:cNvPr id="7" name="Shape 5"/>
+          <p:cNvPr id="7" name="Text 5"/>
+          <p:cNvSpPr/>
+          <p:nvPr/>
+        </p:nvSpPr>
+        <p:spPr>
+          <a:xfrm>
+            <a:off x="11137392" y="6510528"/>
+            <a:ext cx="411480" cy="201168"/>
+          </a:xfrm>
+          <a:prstGeom prst="rect">
+            <a:avLst/>
+          </a:prstGeom>
+          <a:noFill/>
+          <a:ln/>
+        </p:spPr>
+        <p:txBody>
+          <a:bodyPr wrap="square" lIns="0" tIns="0" rIns="0" bIns="0" rtlCol="0" anchor="ctr"/>
+          <a:lstStyle/>
+          <a:p>
+            <a:pPr algn="r" indent="0" marL="0">
+              <a:buNone/>
+            </a:pPr>
+            <a:r>
+              <a:rPr lang="en-US" sz="900" dirty="0">
+                <a:solidFill>
+                  <a:srgbClr val="5F7181"/>
+                </a:solidFill>
+                <a:latin typeface="Aptos" pitchFamily="34" charset="0"/>
+                <a:ea typeface="Aptos" pitchFamily="34" charset="-122"/>
+                <a:cs typeface="Aptos" pitchFamily="34" charset="-120"/>
+              </a:rPr>
+              <a:t>21</a:t>
+            </a:r>
+            <a:endParaRPr lang="en-US" sz="900" dirty="0"/>
+          </a:p>
+        </p:txBody>
+      </p:sp>
+      <p:sp>
+        <p:nvSpPr>
+          <p:cNvPr id="8" name="Shape 6"/>
           <p:cNvSpPr/>
           <p:nvPr/>
         </p:nvSpPr>
@@ -10070,7 +10707,7 @@
       </p:sp>
       <p:sp>
         <p:nvSpPr>
-          <p:cNvPr id="8" name="Text 6"/>
+          <p:cNvPr id="9" name="Text 7"/>
           <p:cNvSpPr/>
           <p:nvPr/>
         </p:nvSpPr>
@@ -10109,14 +10746,14 @@
       </p:sp>
       <p:sp>
         <p:nvSpPr>
-          <p:cNvPr id="9" name="Text 7"/>
+          <p:cNvPr id="10" name="Text 8"/>
           <p:cNvSpPr/>
           <p:nvPr/>
         </p:nvSpPr>
         <p:spPr>
           <a:xfrm>
             <a:off x="640080" y="621792"/>
-            <a:ext cx="10881360" cy="566928"/>
+            <a:ext cx="10881360" cy="713232"/>
           </a:xfrm>
           <a:prstGeom prst="rect">
             <a:avLst/>
@@ -10134,7 +10771,7 @@
               <a:buNone/>
             </a:pPr>
             <a:r>
-              <a:rPr lang="en-US" sz="2700" b="1" dirty="0">
+              <a:rPr lang="en-US" sz="3400" b="1" dirty="0">
                 <a:solidFill>
                   <a:srgbClr val="003A63"/>
                 </a:solidFill>
@@ -10144,20 +10781,20 @@
               </a:rPr>
               <a:t>References and Resources</a:t>
             </a:r>
-            <a:endParaRPr lang="en-US" sz="2700" dirty="0"/>
-          </a:p>
-        </p:txBody>
-      </p:sp>
-      <p:sp>
-        <p:nvSpPr>
-          <p:cNvPr id="10" name="Text 8"/>
-          <p:cNvSpPr/>
-          <p:nvPr/>
-        </p:nvSpPr>
-        <p:spPr>
-          <a:xfrm>
-            <a:off x="868680" y="1417320"/>
-            <a:ext cx="6675120" cy="4434840"/>
+            <a:endParaRPr lang="en-US" sz="3400" dirty="0"/>
+          </a:p>
+        </p:txBody>
+      </p:sp>
+      <p:sp>
+        <p:nvSpPr>
+          <p:cNvPr id="11" name="Text 9"/>
+          <p:cNvSpPr/>
+          <p:nvPr/>
+        </p:nvSpPr>
+        <p:spPr>
+          <a:xfrm>
+            <a:off x="868680" y="1508760"/>
+            <a:ext cx="6537960" cy="4160520"/>
           </a:xfrm>
           <a:prstGeom prst="rect">
             <a:avLst/>
@@ -10172,7 +10809,7 @@
           <a:lstStyle/>
           <a:p>
             <a:r>
-              <a:rPr lang="en-US" sz="1700" dirty="0">
+              <a:rPr lang="en-US" sz="2100" dirty="0">
                 <a:solidFill>
                   <a:srgbClr val="17364A"/>
                 </a:solidFill>
@@ -10182,11 +10819,11 @@
               </a:rPr>
               <a:t>NIST AI Risk Management Framework: https://www.nist.gov/itl/ai-risk-management-framework</a:t>
             </a:r>
-            <a:endParaRPr lang="en-US" sz="1700" dirty="0"/>
-          </a:p>
-          <a:p>
-            <a:r>
-              <a:rPr lang="en-US" sz="1700" dirty="0">
+            <a:endParaRPr lang="en-US" sz="2100" dirty="0"/>
+          </a:p>
+          <a:p>
+            <a:r>
+              <a:rPr lang="en-US" sz="2100" dirty="0">
                 <a:solidFill>
                   <a:srgbClr val="17364A"/>
                 </a:solidFill>
@@ -10196,11 +10833,11 @@
               </a:rPr>
               <a:t>NIST Generative AI Profile:.</a:t>
             </a:r>
-            <a:endParaRPr lang="en-US" sz="1700" dirty="0"/>
-          </a:p>
-          <a:p>
-            <a:r>
-              <a:rPr lang="en-US" sz="1700" dirty="0">
+            <a:endParaRPr lang="en-US" sz="2100" dirty="0"/>
+          </a:p>
+          <a:p>
+            <a:r>
+              <a:rPr lang="en-US" sz="2100" dirty="0">
                 <a:solidFill>
                   <a:srgbClr val="17364A"/>
                 </a:solidFill>
@@ -10210,27 +10847,13 @@
               </a:rPr>
               <a:t>CDC Public Health Data Strategy and Data Modernization resources:.</a:t>
             </a:r>
-            <a:endParaRPr lang="en-US" sz="1700" dirty="0"/>
-          </a:p>
-          <a:p>
-            <a:r>
-              <a:rPr lang="en-US" sz="1700" dirty="0">
-                <a:solidFill>
-                  <a:srgbClr val="17364A"/>
-                </a:solidFill>
-                <a:latin typeface="Aptos" pitchFamily="34" charset="0"/>
-                <a:ea typeface="Aptos" pitchFamily="34" charset="-122"/>
-                <a:cs typeface="Aptos" pitchFamily="34" charset="-120"/>
-              </a:rPr>
-              <a:t>OWASP Top 10 for LLM Applications, when security or AI integrations are relevant</a:t>
-            </a:r>
-            <a:endParaRPr lang="en-US" sz="1700" dirty="0"/>
-          </a:p>
-        </p:txBody>
-      </p:sp>
-      <p:sp>
-        <p:nvSpPr>
-          <p:cNvPr id="11" name="Shape 9"/>
+            <a:endParaRPr lang="en-US" sz="2100" dirty="0"/>
+          </a:p>
+        </p:txBody>
+      </p:sp>
+      <p:sp>
+        <p:nvSpPr>
+          <p:cNvPr id="12" name="Shape 10"/>
           <p:cNvSpPr/>
           <p:nvPr/>
         </p:nvSpPr>
@@ -10257,14 +10880,14 @@
       </p:sp>
       <p:sp>
         <p:nvSpPr>
-          <p:cNvPr id="12" name="Text 10"/>
+          <p:cNvPr id="13" name="Text 11"/>
           <p:cNvSpPr/>
           <p:nvPr/>
         </p:nvSpPr>
         <p:spPr>
           <a:xfrm>
             <a:off x="8074152" y="1563624"/>
-            <a:ext cx="2825496" cy="201168"/>
+            <a:ext cx="2825496" cy="256032"/>
           </a:xfrm>
           <a:prstGeom prst="rect">
             <a:avLst/>
@@ -10280,7 +10903,7 @@
               <a:buNone/>
             </a:pPr>
             <a:r>
-              <a:rPr lang="en-US" sz="950" b="1" dirty="0">
+              <a:rPr lang="en-US" sz="1300" b="1" dirty="0">
                 <a:solidFill>
                   <a:srgbClr val="0068B7"/>
                 </a:solidFill>
@@ -10290,20 +10913,20 @@
               </a:rPr>
               <a:t>Key idea</a:t>
             </a:r>
-            <a:endParaRPr lang="en-US" sz="950" dirty="0"/>
-          </a:p>
-        </p:txBody>
-      </p:sp>
-      <p:sp>
-        <p:nvSpPr>
-          <p:cNvPr id="13" name="Text 11"/>
-          <p:cNvSpPr/>
-          <p:nvPr/>
-        </p:nvSpPr>
-        <p:spPr>
-          <a:xfrm>
-            <a:off x="8074152" y="1856232"/>
-            <a:ext cx="2825496" cy="1261872"/>
+            <a:endParaRPr lang="en-US" sz="1300" dirty="0"/>
+          </a:p>
+        </p:txBody>
+      </p:sp>
+      <p:sp>
+        <p:nvSpPr>
+          <p:cNvPr id="14" name="Text 12"/>
+          <p:cNvSpPr/>
+          <p:nvPr/>
+        </p:nvSpPr>
+        <p:spPr>
+          <a:xfrm>
+            <a:off x="8074152" y="1920240"/>
+            <a:ext cx="2825496" cy="1188720"/>
           </a:xfrm>
           <a:prstGeom prst="rect">
             <a:avLst/>
@@ -10321,7 +10944,7 @@
               <a:buNone/>
             </a:pPr>
             <a:r>
-              <a:rPr lang="en-US" sz="1250" dirty="0">
+              <a:rPr lang="en-US" sz="1550" dirty="0">
                 <a:solidFill>
                   <a:srgbClr val="17364A"/>
                 </a:solidFill>
@@ -10331,13 +10954,13 @@
               </a:rPr>
               <a:t>NIST AI Risk Management Framework: https://www.nist.gov/itl/ai-risk-management-framework</a:t>
             </a:r>
-            <a:endParaRPr lang="en-US" sz="1250" dirty="0"/>
-          </a:p>
-        </p:txBody>
-      </p:sp>
-      <p:sp>
-        <p:nvSpPr>
-          <p:cNvPr id="14" name="Shape 12"/>
+            <a:endParaRPr lang="en-US" sz="1550" dirty="0"/>
+          </a:p>
+        </p:txBody>
+      </p:sp>
+      <p:sp>
+        <p:nvSpPr>
+          <p:cNvPr id="15" name="Shape 13"/>
           <p:cNvSpPr/>
           <p:nvPr/>
         </p:nvSpPr>
@@ -10364,14 +10987,14 @@
       </p:sp>
       <p:sp>
         <p:nvSpPr>
-          <p:cNvPr id="15" name="Text 13"/>
+          <p:cNvPr id="16" name="Text 14"/>
           <p:cNvSpPr/>
           <p:nvPr/>
         </p:nvSpPr>
         <p:spPr>
           <a:xfrm>
             <a:off x="8074152" y="3666744"/>
-            <a:ext cx="2825496" cy="201168"/>
+            <a:ext cx="2825496" cy="256032"/>
           </a:xfrm>
           <a:prstGeom prst="rect">
             <a:avLst/>
@@ -10387,7 +11010,7 @@
               <a:buNone/>
             </a:pPr>
             <a:r>
-              <a:rPr lang="en-US" sz="950" b="1" dirty="0">
+              <a:rPr lang="en-US" sz="1300" b="1" dirty="0">
                 <a:solidFill>
                   <a:srgbClr val="0068B7"/>
                 </a:solidFill>
@@ -10397,20 +11020,20 @@
               </a:rPr>
               <a:t>Use this for</a:t>
             </a:r>
-            <a:endParaRPr lang="en-US" sz="950" dirty="0"/>
-          </a:p>
-        </p:txBody>
-      </p:sp>
-      <p:sp>
-        <p:nvSpPr>
-          <p:cNvPr id="16" name="Text 14"/>
-          <p:cNvSpPr/>
-          <p:nvPr/>
-        </p:nvSpPr>
-        <p:spPr>
-          <a:xfrm>
-            <a:off x="8074152" y="3959352"/>
-            <a:ext cx="2825496" cy="1170432"/>
+            <a:endParaRPr lang="en-US" sz="1300" dirty="0"/>
+          </a:p>
+        </p:txBody>
+      </p:sp>
+      <p:sp>
+        <p:nvSpPr>
+          <p:cNvPr id="17" name="Text 15"/>
+          <p:cNvSpPr/>
+          <p:nvPr/>
+        </p:nvSpPr>
+        <p:spPr>
+          <a:xfrm>
+            <a:off x="8074152" y="4023360"/>
+            <a:ext cx="2825496" cy="1097280"/>
           </a:xfrm>
           <a:prstGeom prst="rect">
             <a:avLst/>
@@ -10428,7 +11051,7 @@
               <a:buNone/>
             </a:pPr>
             <a:r>
-              <a:rPr lang="en-US" sz="1250" dirty="0">
+              <a:rPr lang="en-US" sz="1550" dirty="0">
                 <a:solidFill>
                   <a:srgbClr val="17364A"/>
                 </a:solidFill>
@@ -10438,7 +11061,7 @@
               </a:rPr>
               <a:t>Connect the concept to public health decisions, safeguards, documentation, or implementation work.</a:t>
             </a:r>
-            <a:endParaRPr lang="en-US" sz="1250" dirty="0"/>
+            <a:endParaRPr lang="en-US" sz="1550" dirty="0"/>
           </a:p>
         </p:txBody>
       </p:sp>
@@ -10635,7 +11258,7 @@
                 <a:ea typeface="Aptos" pitchFamily="34" charset="-122"/>
                 <a:cs typeface="Aptos" pitchFamily="34" charset="-120"/>
               </a:rPr>
-              <a:t>© Paula Soper</a:t>
+              <a:t>Â© Paula Soper</a:t>
             </a:r>
             <a:endParaRPr lang="en-US" sz="800" dirty="0"/>
           </a:p>
@@ -10649,8 +11272,47 @@
         </p:nvSpPr>
         <p:spPr>
           <a:xfrm>
+            <a:off x="11137392" y="6510528"/>
+            <a:ext cx="411480" cy="201168"/>
+          </a:xfrm>
+          <a:prstGeom prst="rect">
+            <a:avLst/>
+          </a:prstGeom>
+          <a:noFill/>
+          <a:ln/>
+        </p:spPr>
+        <p:txBody>
+          <a:bodyPr wrap="square" lIns="0" tIns="0" rIns="0" bIns="0" rtlCol="0" anchor="ctr"/>
+          <a:lstStyle/>
+          <a:p>
+            <a:pPr algn="r" indent="0" marL="0">
+              <a:buNone/>
+            </a:pPr>
+            <a:r>
+              <a:rPr lang="en-US" sz="900" dirty="0">
+                <a:solidFill>
+                  <a:srgbClr val="5F7181"/>
+                </a:solidFill>
+                <a:latin typeface="Aptos" pitchFamily="34" charset="0"/>
+                <a:ea typeface="Aptos" pitchFamily="34" charset="-122"/>
+                <a:cs typeface="Aptos" pitchFamily="34" charset="-120"/>
+              </a:rPr>
+              <a:t>3</a:t>
+            </a:r>
+            <a:endParaRPr lang="en-US" sz="900" dirty="0"/>
+          </a:p>
+        </p:txBody>
+      </p:sp>
+      <p:sp>
+        <p:nvSpPr>
+          <p:cNvPr id="8" name="Text 6"/>
+          <p:cNvSpPr/>
+          <p:nvPr/>
+        </p:nvSpPr>
+        <p:spPr>
+          <a:xfrm>
             <a:off x="640080" y="658368"/>
-            <a:ext cx="10881360" cy="566928"/>
+            <a:ext cx="10881360" cy="713232"/>
           </a:xfrm>
           <a:prstGeom prst="rect">
             <a:avLst/>
@@ -10668,7 +11330,7 @@
               <a:buNone/>
             </a:pPr>
             <a:r>
-              <a:rPr lang="en-US" sz="2700" b="1" dirty="0">
+              <a:rPr lang="en-US" sz="3400" b="1" dirty="0">
                 <a:solidFill>
                   <a:srgbClr val="003A63"/>
                 </a:solidFill>
@@ -10678,20 +11340,20 @@
               </a:rPr>
               <a:t>How this module connects to the playbook</a:t>
             </a:r>
-            <a:endParaRPr lang="en-US" sz="2700" dirty="0"/>
-          </a:p>
-        </p:txBody>
-      </p:sp>
-      <p:sp>
-        <p:nvSpPr>
-          <p:cNvPr id="8" name="Text 6"/>
-          <p:cNvSpPr/>
-          <p:nvPr/>
-        </p:nvSpPr>
-        <p:spPr>
-          <a:xfrm>
-            <a:off x="868680" y="1417320"/>
-            <a:ext cx="6903720" cy="4480560"/>
+            <a:endParaRPr lang="en-US" sz="3400" dirty="0"/>
+          </a:p>
+        </p:txBody>
+      </p:sp>
+      <p:sp>
+        <p:nvSpPr>
+          <p:cNvPr id="9" name="Text 7"/>
+          <p:cNvSpPr/>
+          <p:nvPr/>
+        </p:nvSpPr>
+        <p:spPr>
+          <a:xfrm>
+            <a:off x="868680" y="1508760"/>
+            <a:ext cx="6812280" cy="3977640"/>
           </a:xfrm>
           <a:prstGeom prst="rect">
             <a:avLst/>
@@ -10706,7 +11368,7 @@
           <a:lstStyle/>
           <a:p>
             <a:r>
-              <a:rPr lang="en-US" sz="1540" dirty="0">
+              <a:rPr lang="en-US" sz="1900" dirty="0">
                 <a:solidFill>
                   <a:srgbClr val="17364A"/>
                 </a:solidFill>
@@ -10714,13 +11376,13 @@
                 <a:ea typeface="Aptos" pitchFamily="34" charset="-122"/>
                 <a:cs typeface="Aptos" pitchFamily="34" charset="-120"/>
               </a:rPr>
-              <a:t>Play 11: Build and Deploy AI Solutions - This lesson informs Play 11 by helping learners connect the lesson topic to build and deploy.</a:t>
-            </a:r>
-            <a:endParaRPr lang="en-US" sz="1540" dirty="0"/>
-          </a:p>
-          <a:p>
-            <a:r>
-              <a:rPr lang="en-US" sz="1540" dirty="0">
+              <a:t>Play 11: Build and Deploy AI Solutions - This lesson informs Play 11 by helping learners connect the lesson.</a:t>
+            </a:r>
+            <a:endParaRPr lang="en-US" sz="1900" dirty="0"/>
+          </a:p>
+          <a:p>
+            <a:r>
+              <a:rPr lang="en-US" sz="1900" dirty="0">
                 <a:solidFill>
                   <a:srgbClr val="17364A"/>
                 </a:solidFill>
@@ -10728,13 +11390,13 @@
                 <a:ea typeface="Aptos" pitchFamily="34" charset="-122"/>
                 <a:cs typeface="Aptos" pitchFamily="34" charset="-120"/>
               </a:rPr>
-              <a:t>Play 2: Readiness Assessment - This lesson informs Play 2 by helping learners connect the lesson topic to readiness assessment work.</a:t>
-            </a:r>
-            <a:endParaRPr lang="en-US" sz="1540" dirty="0"/>
-          </a:p>
-          <a:p>
-            <a:r>
-              <a:rPr lang="en-US" sz="1540" dirty="0">
+              <a:t>Play 2: Readiness Assessment - This lesson informs Play 2 by helping learners connect the lesson topic to.</a:t>
+            </a:r>
+            <a:endParaRPr lang="en-US" sz="1900" dirty="0"/>
+          </a:p>
+          <a:p>
+            <a:r>
+              <a:rPr lang="en-US" sz="1900" dirty="0">
                 <a:solidFill>
                   <a:srgbClr val="17364A"/>
                 </a:solidFill>
@@ -10742,13 +11404,13 @@
                 <a:ea typeface="Aptos" pitchFamily="34" charset="-122"/>
                 <a:cs typeface="Aptos" pitchFamily="34" charset="-120"/>
               </a:rPr>
-              <a:t>Play 3: Establish AI Governance - This lesson informs Play 3 by helping learners connect the lesson topic to establish ai governance.</a:t>
-            </a:r>
-            <a:endParaRPr lang="en-US" sz="1540" dirty="0"/>
-          </a:p>
-          <a:p>
-            <a:r>
-              <a:rPr lang="en-US" sz="1540" dirty="0">
+              <a:t>Play 3: Establish AI Governance - This lesson informs Play 3 by helping learners connect the lesson topic to.</a:t>
+            </a:r>
+            <a:endParaRPr lang="en-US" sz="1900" dirty="0"/>
+          </a:p>
+          <a:p>
+            <a:r>
+              <a:rPr lang="en-US" sz="1900" dirty="0">
                 <a:solidFill>
                   <a:srgbClr val="17364A"/>
                 </a:solidFill>
@@ -10756,15 +11418,15 @@
                 <a:ea typeface="Aptos" pitchFamily="34" charset="-122"/>
                 <a:cs typeface="Aptos" pitchFamily="34" charset="-120"/>
               </a:rPr>
-              <a:t>Play 1: Vision &amp; Guardrails - This lesson informs Play 1 by helping learners connect the lesson topic to vision &amp; guardrails work in.</a:t>
-            </a:r>
-            <a:endParaRPr lang="en-US" sz="1540" dirty="0"/>
-          </a:p>
-        </p:txBody>
-      </p:sp>
-      <p:sp>
-        <p:nvSpPr>
-          <p:cNvPr id="9" name="Shape 7"/>
+              <a:t>Play 1: Vision &amp; Guardrails - This lesson informs Play 1 by helping learners connect the lesson topic to.</a:t>
+            </a:r>
+            <a:endParaRPr lang="en-US" sz="1900" dirty="0"/>
+          </a:p>
+        </p:txBody>
+      </p:sp>
+      <p:sp>
+        <p:nvSpPr>
+          <p:cNvPr id="10" name="Shape 8"/>
           <p:cNvSpPr/>
           <p:nvPr/>
         </p:nvSpPr>
@@ -10791,14 +11453,14 @@
       </p:sp>
       <p:sp>
         <p:nvSpPr>
-          <p:cNvPr id="10" name="Text 8"/>
+          <p:cNvPr id="11" name="Text 9"/>
           <p:cNvSpPr/>
           <p:nvPr/>
         </p:nvSpPr>
         <p:spPr>
           <a:xfrm>
             <a:off x="8211312" y="1563624"/>
-            <a:ext cx="2734056" cy="201168"/>
+            <a:ext cx="2734056" cy="256032"/>
           </a:xfrm>
           <a:prstGeom prst="rect">
             <a:avLst/>
@@ -10814,7 +11476,7 @@
               <a:buNone/>
             </a:pPr>
             <a:r>
-              <a:rPr lang="en-US" sz="950" b="1" dirty="0">
+              <a:rPr lang="en-US" sz="1300" b="1" dirty="0">
                 <a:solidFill>
                   <a:srgbClr val="0068B7"/>
                 </a:solidFill>
@@ -10824,20 +11486,20 @@
               </a:rPr>
               <a:t>Apply the lesson</a:t>
             </a:r>
-            <a:endParaRPr lang="en-US" sz="950" dirty="0"/>
-          </a:p>
-        </p:txBody>
-      </p:sp>
-      <p:sp>
-        <p:nvSpPr>
-          <p:cNvPr id="11" name="Text 9"/>
-          <p:cNvSpPr/>
-          <p:nvPr/>
-        </p:nvSpPr>
-        <p:spPr>
-          <a:xfrm>
-            <a:off x="8211312" y="1856232"/>
-            <a:ext cx="2734056" cy="1536192"/>
+            <a:endParaRPr lang="en-US" sz="1300" dirty="0"/>
+          </a:p>
+        </p:txBody>
+      </p:sp>
+      <p:sp>
+        <p:nvSpPr>
+          <p:cNvPr id="12" name="Text 10"/>
+          <p:cNvSpPr/>
+          <p:nvPr/>
+        </p:nvSpPr>
+        <p:spPr>
+          <a:xfrm>
+            <a:off x="8211312" y="1920240"/>
+            <a:ext cx="2734056" cy="1463040"/>
           </a:xfrm>
           <a:prstGeom prst="rect">
             <a:avLst/>
@@ -10855,7 +11517,7 @@
               <a:buNone/>
             </a:pPr>
             <a:r>
-              <a:rPr lang="en-US" sz="1250" dirty="0">
+              <a:rPr lang="en-US" sz="1550" dirty="0">
                 <a:solidFill>
                   <a:srgbClr val="17364A"/>
                 </a:solidFill>
@@ -10865,32 +11527,32 @@
               </a:rPr>
               <a:t>Use the related plays to identify decisions, participants, timing, approvals, and documentation needed for responsible implementation.</a:t>
             </a:r>
-            <a:endParaRPr lang="en-US" sz="1250" dirty="0"/>
-          </a:p>
-        </p:txBody>
-      </p:sp>
-      <p:sp>
-        <p:nvSpPr>
-          <p:cNvPr id="12" name="Shape 10"/>
-          <p:cNvSpPr/>
-          <p:nvPr/>
-        </p:nvSpPr>
-        <p:spPr>
-          <a:xfrm>
-            <a:off x="8046720" y="3794760"/>
-            <a:ext cx="3063240" cy="1508760"/>
+            <a:endParaRPr lang="en-US" sz="1550" dirty="0"/>
+          </a:p>
+        </p:txBody>
+      </p:sp>
+      <p:sp>
+        <p:nvSpPr>
+          <p:cNvPr id="13" name="Shape 11"/>
+          <p:cNvSpPr/>
+          <p:nvPr/>
+        </p:nvSpPr>
+        <p:spPr>
+          <a:xfrm>
+            <a:off x="7818120" y="3977640"/>
+            <a:ext cx="972312" cy="749808"/>
           </a:xfrm>
           <a:prstGeom prst="roundRect">
             <a:avLst>
-              <a:gd name="adj" fmla="val 7273"/>
+              <a:gd name="adj" fmla="val 14634"/>
             </a:avLst>
           </a:prstGeom>
           <a:solidFill>
-            <a:srgbClr val="FFF4D9"/>
+            <a:srgbClr val="0068B7"/>
           </a:solidFill>
           <a:ln w="12700">
             <a:solidFill>
-              <a:srgbClr val="B9D7E6"/>
+              <a:srgbClr val="0068B7"/>
             </a:solidFill>
             <a:prstDash val="solid"/>
           </a:ln>
@@ -10898,81 +11560,256 @@
       </p:sp>
       <p:sp>
         <p:nvSpPr>
-          <p:cNvPr id="13" name="Text 11"/>
-          <p:cNvSpPr/>
-          <p:nvPr/>
-        </p:nvSpPr>
-        <p:spPr>
-          <a:xfrm>
-            <a:off x="8211312" y="3941064"/>
-            <a:ext cx="2734056" cy="201168"/>
-          </a:xfrm>
-          <a:prstGeom prst="rect">
-            <a:avLst/>
-          </a:prstGeom>
-          <a:noFill/>
-          <a:ln/>
-        </p:spPr>
-        <p:txBody>
-          <a:bodyPr wrap="square" lIns="0" tIns="0" rIns="0" bIns="0" rtlCol="0" anchor="ctr"/>
-          <a:lstStyle/>
-          <a:p>
-            <a:pPr indent="0" marL="0">
-              <a:buNone/>
-            </a:pPr>
-            <a:r>
-              <a:rPr lang="en-US" sz="950" b="1" dirty="0">
-                <a:solidFill>
-                  <a:srgbClr val="0068B7"/>
-                </a:solidFill>
-                <a:latin typeface="Aptos" pitchFamily="34" charset="0"/>
-                <a:ea typeface="Aptos" pitchFamily="34" charset="-122"/>
-                <a:cs typeface="Aptos" pitchFamily="34" charset="-120"/>
-              </a:rPr>
-              <a:t>Keep in mind</a:t>
-            </a:r>
-            <a:endParaRPr lang="en-US" sz="950" dirty="0"/>
-          </a:p>
-        </p:txBody>
-      </p:sp>
-      <p:sp>
-        <p:nvSpPr>
           <p:cNvPr id="14" name="Text 12"/>
           <p:cNvSpPr/>
           <p:nvPr/>
         </p:nvSpPr>
         <p:spPr>
           <a:xfrm>
-            <a:off x="8211312" y="4233672"/>
-            <a:ext cx="2734056" cy="941832"/>
-          </a:xfrm>
-          <a:prstGeom prst="rect">
-            <a:avLst/>
-          </a:prstGeom>
-          <a:noFill/>
-          <a:ln/>
-        </p:spPr>
-        <p:txBody>
-          <a:bodyPr wrap="square" lIns="0" tIns="0" rIns="0" bIns="0" rtlCol="0" anchor="t">
+            <a:off x="7891272" y="4169664"/>
+            <a:ext cx="826008" cy="310896"/>
+          </a:xfrm>
+          <a:prstGeom prst="rect">
+            <a:avLst/>
+          </a:prstGeom>
+          <a:noFill/>
+          <a:ln/>
+        </p:spPr>
+        <p:txBody>
+          <a:bodyPr wrap="square" lIns="0" tIns="0" rIns="0" bIns="0" rtlCol="0" anchor="ctr">
             <a:normAutofit/>
           </a:bodyPr>
           <a:lstStyle/>
           <a:p>
-            <a:pPr indent="0" marL="0">
-              <a:buNone/>
-            </a:pPr>
-            <a:r>
-              <a:rPr lang="en-US" sz="1250" dirty="0">
-                <a:solidFill>
-                  <a:srgbClr val="17364A"/>
-                </a:solidFill>
-                <a:latin typeface="Aptos" pitchFamily="34" charset="0"/>
-                <a:ea typeface="Aptos" pitchFamily="34" charset="-122"/>
-                <a:cs typeface="Aptos" pitchFamily="34" charset="-120"/>
-              </a:rPr>
-              <a:t>The playbook connection helps turn training into agency work, not just individual knowledge.</a:t>
-            </a:r>
-            <a:endParaRPr lang="en-US" sz="1250" dirty="0"/>
+            <a:pPr algn="ctr" indent="0" marL="0">
+              <a:buNone/>
+            </a:pPr>
+            <a:r>
+              <a:rPr lang="en-US" sz="1500" b="1" dirty="0">
+                <a:solidFill>
+                  <a:srgbClr val="FFFFFF"/>
+                </a:solidFill>
+                <a:latin typeface="Aptos" pitchFamily="34" charset="0"/>
+                <a:ea typeface="Aptos" pitchFamily="34" charset="-122"/>
+                <a:cs typeface="Aptos" pitchFamily="34" charset="-120"/>
+              </a:rPr>
+              <a:t>Lesson</a:t>
+            </a:r>
+            <a:endParaRPr lang="en-US" sz="1500" dirty="0"/>
+          </a:p>
+        </p:txBody>
+      </p:sp>
+      <p:sp>
+        <p:nvSpPr>
+          <p:cNvPr id="15" name="Text 13"/>
+          <p:cNvSpPr/>
+          <p:nvPr/>
+        </p:nvSpPr>
+        <p:spPr>
+          <a:xfrm>
+            <a:off x="8817864" y="4187952"/>
+            <a:ext cx="201168" cy="256032"/>
+          </a:xfrm>
+          <a:prstGeom prst="rect">
+            <a:avLst/>
+          </a:prstGeom>
+          <a:noFill/>
+          <a:ln/>
+        </p:spPr>
+        <p:txBody>
+          <a:bodyPr wrap="square" lIns="0" tIns="0" rIns="0" bIns="0" rtlCol="0" anchor="ctr"/>
+          <a:lstStyle/>
+          <a:p>
+            <a:pPr algn="ctr" indent="0" marL="0">
+              <a:buNone/>
+            </a:pPr>
+            <a:r>
+              <a:rPr lang="en-US" sz="1800" b="1" dirty="0">
+                <a:solidFill>
+                  <a:srgbClr val="0068B7"/>
+                </a:solidFill>
+                <a:latin typeface="Aptos" pitchFamily="34" charset="0"/>
+                <a:ea typeface="Aptos" pitchFamily="34" charset="-122"/>
+                <a:cs typeface="Aptos" pitchFamily="34" charset="-120"/>
+              </a:rPr>
+              <a:t>â†’</a:t>
+            </a:r>
+            <a:endParaRPr lang="en-US" sz="1800" dirty="0"/>
+          </a:p>
+        </p:txBody>
+      </p:sp>
+      <p:sp>
+        <p:nvSpPr>
+          <p:cNvPr id="16" name="Shape 14"/>
+          <p:cNvSpPr/>
+          <p:nvPr/>
+        </p:nvSpPr>
+        <p:spPr>
+          <a:xfrm>
+            <a:off x="9046464" y="3977640"/>
+            <a:ext cx="972312" cy="749808"/>
+          </a:xfrm>
+          <a:prstGeom prst="roundRect">
+            <a:avLst>
+              <a:gd name="adj" fmla="val 14634"/>
+            </a:avLst>
+          </a:prstGeom>
+          <a:solidFill>
+            <a:srgbClr val="2F8A28"/>
+          </a:solidFill>
+          <a:ln w="12700">
+            <a:solidFill>
+              <a:srgbClr val="2F8A28"/>
+            </a:solidFill>
+            <a:prstDash val="solid"/>
+          </a:ln>
+        </p:spPr>
+      </p:sp>
+      <p:sp>
+        <p:nvSpPr>
+          <p:cNvPr id="17" name="Text 15"/>
+          <p:cNvSpPr/>
+          <p:nvPr/>
+        </p:nvSpPr>
+        <p:spPr>
+          <a:xfrm>
+            <a:off x="9119616" y="4169664"/>
+            <a:ext cx="826008" cy="310896"/>
+          </a:xfrm>
+          <a:prstGeom prst="rect">
+            <a:avLst/>
+          </a:prstGeom>
+          <a:noFill/>
+          <a:ln/>
+        </p:spPr>
+        <p:txBody>
+          <a:bodyPr wrap="square" lIns="0" tIns="0" rIns="0" bIns="0" rtlCol="0" anchor="ctr">
+            <a:normAutofit/>
+          </a:bodyPr>
+          <a:lstStyle/>
+          <a:p>
+            <a:pPr algn="ctr" indent="0" marL="0">
+              <a:buNone/>
+            </a:pPr>
+            <a:r>
+              <a:rPr lang="en-US" sz="1500" b="1" dirty="0">
+                <a:solidFill>
+                  <a:srgbClr val="FFFFFF"/>
+                </a:solidFill>
+                <a:latin typeface="Aptos" pitchFamily="34" charset="0"/>
+                <a:ea typeface="Aptos" pitchFamily="34" charset="-122"/>
+                <a:cs typeface="Aptos" pitchFamily="34" charset="-120"/>
+              </a:rPr>
+              <a:t>Plays</a:t>
+            </a:r>
+            <a:endParaRPr lang="en-US" sz="1500" dirty="0"/>
+          </a:p>
+        </p:txBody>
+      </p:sp>
+      <p:sp>
+        <p:nvSpPr>
+          <p:cNvPr id="18" name="Text 16"/>
+          <p:cNvSpPr/>
+          <p:nvPr/>
+        </p:nvSpPr>
+        <p:spPr>
+          <a:xfrm>
+            <a:off x="10046208" y="4187952"/>
+            <a:ext cx="201168" cy="256032"/>
+          </a:xfrm>
+          <a:prstGeom prst="rect">
+            <a:avLst/>
+          </a:prstGeom>
+          <a:noFill/>
+          <a:ln/>
+        </p:spPr>
+        <p:txBody>
+          <a:bodyPr wrap="square" lIns="0" tIns="0" rIns="0" bIns="0" rtlCol="0" anchor="ctr"/>
+          <a:lstStyle/>
+          <a:p>
+            <a:pPr algn="ctr" indent="0" marL="0">
+              <a:buNone/>
+            </a:pPr>
+            <a:r>
+              <a:rPr lang="en-US" sz="1800" b="1" dirty="0">
+                <a:solidFill>
+                  <a:srgbClr val="0068B7"/>
+                </a:solidFill>
+                <a:latin typeface="Aptos" pitchFamily="34" charset="0"/>
+                <a:ea typeface="Aptos" pitchFamily="34" charset="-122"/>
+                <a:cs typeface="Aptos" pitchFamily="34" charset="-120"/>
+              </a:rPr>
+              <a:t>â†’</a:t>
+            </a:r>
+            <a:endParaRPr lang="en-US" sz="1800" dirty="0"/>
+          </a:p>
+        </p:txBody>
+      </p:sp>
+      <p:sp>
+        <p:nvSpPr>
+          <p:cNvPr id="19" name="Shape 17"/>
+          <p:cNvSpPr/>
+          <p:nvPr/>
+        </p:nvSpPr>
+        <p:spPr>
+          <a:xfrm>
+            <a:off x="10274808" y="3977640"/>
+            <a:ext cx="972312" cy="749808"/>
+          </a:xfrm>
+          <a:prstGeom prst="roundRect">
+            <a:avLst>
+              <a:gd name="adj" fmla="val 14634"/>
+            </a:avLst>
+          </a:prstGeom>
+          <a:solidFill>
+            <a:srgbClr val="6A4CA3"/>
+          </a:solidFill>
+          <a:ln w="12700">
+            <a:solidFill>
+              <a:srgbClr val="6A4CA3"/>
+            </a:solidFill>
+            <a:prstDash val="solid"/>
+          </a:ln>
+        </p:spPr>
+      </p:sp>
+      <p:sp>
+        <p:nvSpPr>
+          <p:cNvPr id="20" name="Text 18"/>
+          <p:cNvSpPr/>
+          <p:nvPr/>
+        </p:nvSpPr>
+        <p:spPr>
+          <a:xfrm>
+            <a:off x="10347960" y="4169664"/>
+            <a:ext cx="826008" cy="310896"/>
+          </a:xfrm>
+          <a:prstGeom prst="rect">
+            <a:avLst/>
+          </a:prstGeom>
+          <a:noFill/>
+          <a:ln/>
+        </p:spPr>
+        <p:txBody>
+          <a:bodyPr wrap="square" lIns="0" tIns="0" rIns="0" bIns="0" rtlCol="0" anchor="ctr">
+            <a:normAutofit/>
+          </a:bodyPr>
+          <a:lstStyle/>
+          <a:p>
+            <a:pPr algn="ctr" indent="0" marL="0">
+              <a:buNone/>
+            </a:pPr>
+            <a:r>
+              <a:rPr lang="en-US" sz="1500" b="1" dirty="0">
+                <a:solidFill>
+                  <a:srgbClr val="FFFFFF"/>
+                </a:solidFill>
+                <a:latin typeface="Aptos" pitchFamily="34" charset="0"/>
+                <a:ea typeface="Aptos" pitchFamily="34" charset="-122"/>
+                <a:cs typeface="Aptos" pitchFamily="34" charset="-120"/>
+              </a:rPr>
+              <a:t>Action</a:t>
+            </a:r>
+            <a:endParaRPr lang="en-US" sz="1500" dirty="0"/>
           </a:p>
         </p:txBody>
       </p:sp>
@@ -11169,7 +12006,7 @@
                 <a:ea typeface="Aptos" pitchFamily="34" charset="-122"/>
                 <a:cs typeface="Aptos" pitchFamily="34" charset="-120"/>
               </a:rPr>
-              <a:t>© Paula Soper</a:t>
+              <a:t>Â© Paula Soper</a:t>
             </a:r>
             <a:endParaRPr lang="en-US" sz="800" dirty="0"/>
           </a:p>
@@ -11183,8 +12020,47 @@
         </p:nvSpPr>
         <p:spPr>
           <a:xfrm>
+            <a:off x="11137392" y="6510528"/>
+            <a:ext cx="411480" cy="201168"/>
+          </a:xfrm>
+          <a:prstGeom prst="rect">
+            <a:avLst/>
+          </a:prstGeom>
+          <a:noFill/>
+          <a:ln/>
+        </p:spPr>
+        <p:txBody>
+          <a:bodyPr wrap="square" lIns="0" tIns="0" rIns="0" bIns="0" rtlCol="0" anchor="ctr"/>
+          <a:lstStyle/>
+          <a:p>
+            <a:pPr algn="r" indent="0" marL="0">
+              <a:buNone/>
+            </a:pPr>
+            <a:r>
+              <a:rPr lang="en-US" sz="900" dirty="0">
+                <a:solidFill>
+                  <a:srgbClr val="5F7181"/>
+                </a:solidFill>
+                <a:latin typeface="Aptos" pitchFamily="34" charset="0"/>
+                <a:ea typeface="Aptos" pitchFamily="34" charset="-122"/>
+                <a:cs typeface="Aptos" pitchFamily="34" charset="-120"/>
+              </a:rPr>
+              <a:t>4</a:t>
+            </a:r>
+            <a:endParaRPr lang="en-US" sz="900" dirty="0"/>
+          </a:p>
+        </p:txBody>
+      </p:sp>
+      <p:sp>
+        <p:nvSpPr>
+          <p:cNvPr id="8" name="Text 6"/>
+          <p:cNvSpPr/>
+          <p:nvPr/>
+        </p:nvSpPr>
+        <p:spPr>
+          <a:xfrm>
             <a:off x="640080" y="658368"/>
-            <a:ext cx="10881360" cy="566928"/>
+            <a:ext cx="10881360" cy="713232"/>
           </a:xfrm>
           <a:prstGeom prst="rect">
             <a:avLst/>
@@ -11202,7 +12078,7 @@
               <a:buNone/>
             </a:pPr>
             <a:r>
-              <a:rPr lang="en-US" sz="2700" b="1" dirty="0">
+              <a:rPr lang="en-US" sz="3400" b="1" dirty="0">
                 <a:solidFill>
                   <a:srgbClr val="003A63"/>
                 </a:solidFill>
@@ -11212,20 +12088,20 @@
               </a:rPr>
               <a:t>Related toolkit resources</a:t>
             </a:r>
-            <a:endParaRPr lang="en-US" sz="2700" dirty="0"/>
-          </a:p>
-        </p:txBody>
-      </p:sp>
-      <p:sp>
-        <p:nvSpPr>
-          <p:cNvPr id="8" name="Text 6"/>
-          <p:cNvSpPr/>
-          <p:nvPr/>
-        </p:nvSpPr>
-        <p:spPr>
-          <a:xfrm>
-            <a:off x="868680" y="1417320"/>
-            <a:ext cx="6903720" cy="4480560"/>
+            <a:endParaRPr lang="en-US" sz="3400" dirty="0"/>
+          </a:p>
+        </p:txBody>
+      </p:sp>
+      <p:sp>
+        <p:nvSpPr>
+          <p:cNvPr id="9" name="Text 7"/>
+          <p:cNvSpPr/>
+          <p:nvPr/>
+        </p:nvSpPr>
+        <p:spPr>
+          <a:xfrm>
+            <a:off x="868680" y="1508760"/>
+            <a:ext cx="6812280" cy="3977640"/>
           </a:xfrm>
           <a:prstGeom prst="rect">
             <a:avLst/>
@@ -11240,7 +12116,7 @@
           <a:lstStyle/>
           <a:p>
             <a:r>
-              <a:rPr lang="en-US" sz="1460" dirty="0">
+              <a:rPr lang="en-US" sz="1850" dirty="0">
                 <a:solidFill>
                   <a:srgbClr val="17364A"/>
                 </a:solidFill>
@@ -11248,13 +12124,13 @@
                 <a:ea typeface="Aptos" pitchFamily="34" charset="-122"/>
                 <a:cs typeface="Aptos" pitchFamily="34" charset="-120"/>
               </a:rPr>
-              <a:t>Tool 4: AI Policy Landscape Scan (Worksheet) - Use AI Policy Landscape Scan to translate this lesson into a documented public health.</a:t>
-            </a:r>
-            <a:endParaRPr lang="en-US" sz="1460" dirty="0"/>
-          </a:p>
-          <a:p>
-            <a:r>
-              <a:rPr lang="en-US" sz="1460" dirty="0">
+              <a:t>Tool 4: AI Policy Landscape Scan (Worksheet) - Use AI Policy Landscape Scan to translate this lesson into a.</a:t>
+            </a:r>
+            <a:endParaRPr lang="en-US" sz="1850" dirty="0"/>
+          </a:p>
+          <a:p>
+            <a:r>
+              <a:rPr lang="en-US" sz="1850" dirty="0">
                 <a:solidFill>
                   <a:srgbClr val="17364A"/>
                 </a:solidFill>
@@ -11262,13 +12138,13 @@
                 <a:ea typeface="Aptos" pitchFamily="34" charset="-122"/>
                 <a:cs typeface="Aptos" pitchFamily="34" charset="-120"/>
               </a:rPr>
-              <a:t>Tool 5: AI Environmental and Resource Impact Review (Checklist) - Use this tool to complete or strengthen the practical exercise for.</a:t>
-            </a:r>
-            <a:endParaRPr lang="en-US" sz="1460" dirty="0"/>
-          </a:p>
-          <a:p>
-            <a:r>
-              <a:rPr lang="en-US" sz="1460" dirty="0">
+              <a:t>Tool 5: AI Environmental and Resource Impact Review (Checklist) - Use this tool to complete or strengthen.</a:t>
+            </a:r>
+            <a:endParaRPr lang="en-US" sz="1850" dirty="0"/>
+          </a:p>
+          <a:p>
+            <a:r>
+              <a:rPr lang="en-US" sz="1850" dirty="0">
                 <a:solidFill>
                   <a:srgbClr val="17364A"/>
                 </a:solidFill>
@@ -11276,13 +12152,13 @@
                 <a:ea typeface="Aptos" pitchFamily="34" charset="-122"/>
                 <a:cs typeface="Aptos" pitchFamily="34" charset="-120"/>
               </a:rPr>
-              <a:t>Tool 6: Human-Centered AI Decision Rule Checklist (Checklist) - Use this tool to complete or strengthen the practical exercise for.</a:t>
-            </a:r>
-            <a:endParaRPr lang="en-US" sz="1460" dirty="0"/>
-          </a:p>
-          <a:p>
-            <a:r>
-              <a:rPr lang="en-US" sz="1460" dirty="0">
+              <a:t>Tool 6: Human-Centered AI Decision Rule Checklist (Checklist) - Use this tool to complete or strengthen the.</a:t>
+            </a:r>
+            <a:endParaRPr lang="en-US" sz="1850" dirty="0"/>
+          </a:p>
+          <a:p>
+            <a:r>
+              <a:rPr lang="en-US" sz="1850" dirty="0">
                 <a:solidFill>
                   <a:srgbClr val="17364A"/>
                 </a:solidFill>
@@ -11290,29 +12166,15 @@
                 <a:ea typeface="Aptos" pitchFamily="34" charset="-122"/>
                 <a:cs typeface="Aptos" pitchFamily="34" charset="-120"/>
               </a:rPr>
-              <a:t>Tool 8: AI Project Charter (Planning) - Use AI Project Charter to translate this lesson into a documented public health AI planning,.</a:t>
-            </a:r>
-            <a:endParaRPr lang="en-US" sz="1460" dirty="0"/>
-          </a:p>
-          <a:p>
-            <a:r>
-              <a:rPr lang="en-US" sz="1460" dirty="0">
-                <a:solidFill>
-                  <a:srgbClr val="17364A"/>
-                </a:solidFill>
-                <a:latin typeface="Aptos" pitchFamily="34" charset="0"/>
-                <a:ea typeface="Aptos" pitchFamily="34" charset="-122"/>
-                <a:cs typeface="Aptos" pitchFamily="34" charset="-120"/>
-              </a:rPr>
-              <a:t>Tool 9: Data Quality Assessment Checklist (Checklist) - Use this tool to complete or strengthen the practical exercise for the module.</a:t>
-            </a:r>
-            <a:endParaRPr lang="en-US" sz="1460" dirty="0"/>
-          </a:p>
-        </p:txBody>
-      </p:sp>
-      <p:sp>
-        <p:nvSpPr>
-          <p:cNvPr id="9" name="Shape 7"/>
+              <a:t>Tool 8: AI Project Charter (Planning) - Use AI Project Charter to translate this lesson into a documented.</a:t>
+            </a:r>
+            <a:endParaRPr lang="en-US" sz="1850" dirty="0"/>
+          </a:p>
+        </p:txBody>
+      </p:sp>
+      <p:sp>
+        <p:nvSpPr>
+          <p:cNvPr id="10" name="Shape 8"/>
           <p:cNvSpPr/>
           <p:nvPr/>
         </p:nvSpPr>
@@ -11339,14 +12201,14 @@
       </p:sp>
       <p:sp>
         <p:nvSpPr>
-          <p:cNvPr id="10" name="Text 8"/>
+          <p:cNvPr id="11" name="Text 9"/>
           <p:cNvSpPr/>
           <p:nvPr/>
         </p:nvSpPr>
         <p:spPr>
           <a:xfrm>
             <a:off x="8211312" y="1563624"/>
-            <a:ext cx="2734056" cy="201168"/>
+            <a:ext cx="2734056" cy="256032"/>
           </a:xfrm>
           <a:prstGeom prst="rect">
             <a:avLst/>
@@ -11362,7 +12224,7 @@
               <a:buNone/>
             </a:pPr>
             <a:r>
-              <a:rPr lang="en-US" sz="950" b="1" dirty="0">
+              <a:rPr lang="en-US" sz="1300" b="1" dirty="0">
                 <a:solidFill>
                   <a:srgbClr val="0068B7"/>
                 </a:solidFill>
@@ -11372,20 +12234,20 @@
               </a:rPr>
               <a:t>Use the tools</a:t>
             </a:r>
-            <a:endParaRPr lang="en-US" sz="950" dirty="0"/>
-          </a:p>
-        </p:txBody>
-      </p:sp>
-      <p:sp>
-        <p:nvSpPr>
-          <p:cNvPr id="11" name="Text 9"/>
-          <p:cNvSpPr/>
-          <p:nvPr/>
-        </p:nvSpPr>
-        <p:spPr>
-          <a:xfrm>
-            <a:off x="8211312" y="1856232"/>
-            <a:ext cx="2734056" cy="1536192"/>
+            <a:endParaRPr lang="en-US" sz="1300" dirty="0"/>
+          </a:p>
+        </p:txBody>
+      </p:sp>
+      <p:sp>
+        <p:nvSpPr>
+          <p:cNvPr id="12" name="Text 10"/>
+          <p:cNvSpPr/>
+          <p:nvPr/>
+        </p:nvSpPr>
+        <p:spPr>
+          <a:xfrm>
+            <a:off x="8211312" y="1920240"/>
+            <a:ext cx="2734056" cy="1463040"/>
           </a:xfrm>
           <a:prstGeom prst="rect">
             <a:avLst/>
@@ -11403,7 +12265,7 @@
               <a:buNone/>
             </a:pPr>
             <a:r>
-              <a:rPr lang="en-US" sz="1250" dirty="0">
+              <a:rPr lang="en-US" sz="1550" dirty="0">
                 <a:solidFill>
                   <a:srgbClr val="17364A"/>
                 </a:solidFill>
@@ -11413,32 +12275,32 @@
               </a:rPr>
               <a:t>Use linked tools when your department needs a structured worksheet, template, checklist, review process, or documentation artifact.</a:t>
             </a:r>
-            <a:endParaRPr lang="en-US" sz="1250" dirty="0"/>
-          </a:p>
-        </p:txBody>
-      </p:sp>
-      <p:sp>
-        <p:nvSpPr>
-          <p:cNvPr id="12" name="Shape 10"/>
-          <p:cNvSpPr/>
-          <p:nvPr/>
-        </p:nvSpPr>
-        <p:spPr>
-          <a:xfrm>
-            <a:off x="8046720" y="3794760"/>
-            <a:ext cx="3063240" cy="1508760"/>
+            <a:endParaRPr lang="en-US" sz="1550" dirty="0"/>
+          </a:p>
+        </p:txBody>
+      </p:sp>
+      <p:sp>
+        <p:nvSpPr>
+          <p:cNvPr id="13" name="Shape 11"/>
+          <p:cNvSpPr/>
+          <p:nvPr/>
+        </p:nvSpPr>
+        <p:spPr>
+          <a:xfrm>
+            <a:off x="7818120" y="3977640"/>
+            <a:ext cx="972312" cy="749808"/>
           </a:xfrm>
           <a:prstGeom prst="roundRect">
             <a:avLst>
-              <a:gd name="adj" fmla="val 7273"/>
+              <a:gd name="adj" fmla="val 14634"/>
             </a:avLst>
           </a:prstGeom>
           <a:solidFill>
-            <a:srgbClr val="EEF8ED"/>
+            <a:srgbClr val="0068B7"/>
           </a:solidFill>
           <a:ln w="12700">
             <a:solidFill>
-              <a:srgbClr val="B9D7E6"/>
+              <a:srgbClr val="0068B7"/>
             </a:solidFill>
             <a:prstDash val="solid"/>
           </a:ln>
@@ -11446,81 +12308,256 @@
       </p:sp>
       <p:sp>
         <p:nvSpPr>
-          <p:cNvPr id="13" name="Text 11"/>
-          <p:cNvSpPr/>
-          <p:nvPr/>
-        </p:nvSpPr>
-        <p:spPr>
-          <a:xfrm>
-            <a:off x="8211312" y="3941064"/>
-            <a:ext cx="2734056" cy="201168"/>
-          </a:xfrm>
-          <a:prstGeom prst="rect">
-            <a:avLst/>
-          </a:prstGeom>
-          <a:noFill/>
-          <a:ln/>
-        </p:spPr>
-        <p:txBody>
-          <a:bodyPr wrap="square" lIns="0" tIns="0" rIns="0" bIns="0" rtlCol="0" anchor="ctr"/>
-          <a:lstStyle/>
-          <a:p>
-            <a:pPr indent="0" marL="0">
-              <a:buNone/>
-            </a:pPr>
-            <a:r>
-              <a:rPr lang="en-US" sz="950" b="1" dirty="0">
-                <a:solidFill>
-                  <a:srgbClr val="0068B7"/>
-                </a:solidFill>
-                <a:latin typeface="Aptos" pitchFamily="34" charset="0"/>
-                <a:ea typeface="Aptos" pitchFamily="34" charset="-122"/>
-                <a:cs typeface="Aptos" pitchFamily="34" charset="-120"/>
-              </a:rPr>
-              <a:t>Avoid duplication</a:t>
-            </a:r>
-            <a:endParaRPr lang="en-US" sz="950" dirty="0"/>
-          </a:p>
-        </p:txBody>
-      </p:sp>
-      <p:sp>
-        <p:nvSpPr>
           <p:cNvPr id="14" name="Text 12"/>
           <p:cNvSpPr/>
           <p:nvPr/>
         </p:nvSpPr>
         <p:spPr>
           <a:xfrm>
-            <a:off x="8211312" y="4233672"/>
-            <a:ext cx="2734056" cy="941832"/>
-          </a:xfrm>
-          <a:prstGeom prst="rect">
-            <a:avLst/>
-          </a:prstGeom>
-          <a:noFill/>
-          <a:ln/>
-        </p:spPr>
-        <p:txBody>
-          <a:bodyPr wrap="square" lIns="0" tIns="0" rIns="0" bIns="0" rtlCol="0" anchor="t">
+            <a:off x="7891272" y="4169664"/>
+            <a:ext cx="826008" cy="310896"/>
+          </a:xfrm>
+          <a:prstGeom prst="rect">
+            <a:avLst/>
+          </a:prstGeom>
+          <a:noFill/>
+          <a:ln/>
+        </p:spPr>
+        <p:txBody>
+          <a:bodyPr wrap="square" lIns="0" tIns="0" rIns="0" bIns="0" rtlCol="0" anchor="ctr">
             <a:normAutofit/>
           </a:bodyPr>
           <a:lstStyle/>
           <a:p>
-            <a:pPr indent="0" marL="0">
-              <a:buNone/>
-            </a:pPr>
-            <a:r>
-              <a:rPr lang="en-US" sz="1250" dirty="0">
-                <a:solidFill>
-                  <a:srgbClr val="17364A"/>
-                </a:solidFill>
-                <a:latin typeface="Aptos" pitchFamily="34" charset="0"/>
-                <a:ea typeface="Aptos" pitchFamily="34" charset="-122"/>
-                <a:cs typeface="Aptos" pitchFamily="34" charset="-120"/>
-              </a:rPr>
-              <a:t>If your department already has a strong equivalent tool, adapt or use the existing process instead of recreating it.</a:t>
-            </a:r>
-            <a:endParaRPr lang="en-US" sz="1250" dirty="0"/>
+            <a:pPr algn="ctr" indent="0" marL="0">
+              <a:buNone/>
+            </a:pPr>
+            <a:r>
+              <a:rPr lang="en-US" sz="1500" b="1" dirty="0">
+                <a:solidFill>
+                  <a:srgbClr val="FFFFFF"/>
+                </a:solidFill>
+                <a:latin typeface="Aptos" pitchFamily="34" charset="0"/>
+                <a:ea typeface="Aptos" pitchFamily="34" charset="-122"/>
+                <a:cs typeface="Aptos" pitchFamily="34" charset="-120"/>
+              </a:rPr>
+              <a:t>Concept</a:t>
+            </a:r>
+            <a:endParaRPr lang="en-US" sz="1500" dirty="0"/>
+          </a:p>
+        </p:txBody>
+      </p:sp>
+      <p:sp>
+        <p:nvSpPr>
+          <p:cNvPr id="15" name="Text 13"/>
+          <p:cNvSpPr/>
+          <p:nvPr/>
+        </p:nvSpPr>
+        <p:spPr>
+          <a:xfrm>
+            <a:off x="8817864" y="4187952"/>
+            <a:ext cx="201168" cy="256032"/>
+          </a:xfrm>
+          <a:prstGeom prst="rect">
+            <a:avLst/>
+          </a:prstGeom>
+          <a:noFill/>
+          <a:ln/>
+        </p:spPr>
+        <p:txBody>
+          <a:bodyPr wrap="square" lIns="0" tIns="0" rIns="0" bIns="0" rtlCol="0" anchor="ctr"/>
+          <a:lstStyle/>
+          <a:p>
+            <a:pPr algn="ctr" indent="0" marL="0">
+              <a:buNone/>
+            </a:pPr>
+            <a:r>
+              <a:rPr lang="en-US" sz="1800" b="1" dirty="0">
+                <a:solidFill>
+                  <a:srgbClr val="0068B7"/>
+                </a:solidFill>
+                <a:latin typeface="Aptos" pitchFamily="34" charset="0"/>
+                <a:ea typeface="Aptos" pitchFamily="34" charset="-122"/>
+                <a:cs typeface="Aptos" pitchFamily="34" charset="-120"/>
+              </a:rPr>
+              <a:t>â†’</a:t>
+            </a:r>
+            <a:endParaRPr lang="en-US" sz="1800" dirty="0"/>
+          </a:p>
+        </p:txBody>
+      </p:sp>
+      <p:sp>
+        <p:nvSpPr>
+          <p:cNvPr id="16" name="Shape 14"/>
+          <p:cNvSpPr/>
+          <p:nvPr/>
+        </p:nvSpPr>
+        <p:spPr>
+          <a:xfrm>
+            <a:off x="9046464" y="3977640"/>
+            <a:ext cx="972312" cy="749808"/>
+          </a:xfrm>
+          <a:prstGeom prst="roundRect">
+            <a:avLst>
+              <a:gd name="adj" fmla="val 14634"/>
+            </a:avLst>
+          </a:prstGeom>
+          <a:solidFill>
+            <a:srgbClr val="2F8A28"/>
+          </a:solidFill>
+          <a:ln w="12700">
+            <a:solidFill>
+              <a:srgbClr val="2F8A28"/>
+            </a:solidFill>
+            <a:prstDash val="solid"/>
+          </a:ln>
+        </p:spPr>
+      </p:sp>
+      <p:sp>
+        <p:nvSpPr>
+          <p:cNvPr id="17" name="Text 15"/>
+          <p:cNvSpPr/>
+          <p:nvPr/>
+        </p:nvSpPr>
+        <p:spPr>
+          <a:xfrm>
+            <a:off x="9119616" y="4169664"/>
+            <a:ext cx="826008" cy="310896"/>
+          </a:xfrm>
+          <a:prstGeom prst="rect">
+            <a:avLst/>
+          </a:prstGeom>
+          <a:noFill/>
+          <a:ln/>
+        </p:spPr>
+        <p:txBody>
+          <a:bodyPr wrap="square" lIns="0" tIns="0" rIns="0" bIns="0" rtlCol="0" anchor="ctr">
+            <a:normAutofit/>
+          </a:bodyPr>
+          <a:lstStyle/>
+          <a:p>
+            <a:pPr algn="ctr" indent="0" marL="0">
+              <a:buNone/>
+            </a:pPr>
+            <a:r>
+              <a:rPr lang="en-US" sz="1500" b="1" dirty="0">
+                <a:solidFill>
+                  <a:srgbClr val="FFFFFF"/>
+                </a:solidFill>
+                <a:latin typeface="Aptos" pitchFamily="34" charset="0"/>
+                <a:ea typeface="Aptos" pitchFamily="34" charset="-122"/>
+                <a:cs typeface="Aptos" pitchFamily="34" charset="-120"/>
+              </a:rPr>
+              <a:t>Tool</a:t>
+            </a:r>
+            <a:endParaRPr lang="en-US" sz="1500" dirty="0"/>
+          </a:p>
+        </p:txBody>
+      </p:sp>
+      <p:sp>
+        <p:nvSpPr>
+          <p:cNvPr id="18" name="Text 16"/>
+          <p:cNvSpPr/>
+          <p:nvPr/>
+        </p:nvSpPr>
+        <p:spPr>
+          <a:xfrm>
+            <a:off x="10046208" y="4187952"/>
+            <a:ext cx="201168" cy="256032"/>
+          </a:xfrm>
+          <a:prstGeom prst="rect">
+            <a:avLst/>
+          </a:prstGeom>
+          <a:noFill/>
+          <a:ln/>
+        </p:spPr>
+        <p:txBody>
+          <a:bodyPr wrap="square" lIns="0" tIns="0" rIns="0" bIns="0" rtlCol="0" anchor="ctr"/>
+          <a:lstStyle/>
+          <a:p>
+            <a:pPr algn="ctr" indent="0" marL="0">
+              <a:buNone/>
+            </a:pPr>
+            <a:r>
+              <a:rPr lang="en-US" sz="1800" b="1" dirty="0">
+                <a:solidFill>
+                  <a:srgbClr val="0068B7"/>
+                </a:solidFill>
+                <a:latin typeface="Aptos" pitchFamily="34" charset="0"/>
+                <a:ea typeface="Aptos" pitchFamily="34" charset="-122"/>
+                <a:cs typeface="Aptos" pitchFamily="34" charset="-120"/>
+              </a:rPr>
+              <a:t>â†’</a:t>
+            </a:r>
+            <a:endParaRPr lang="en-US" sz="1800" dirty="0"/>
+          </a:p>
+        </p:txBody>
+      </p:sp>
+      <p:sp>
+        <p:nvSpPr>
+          <p:cNvPr id="19" name="Shape 17"/>
+          <p:cNvSpPr/>
+          <p:nvPr/>
+        </p:nvSpPr>
+        <p:spPr>
+          <a:xfrm>
+            <a:off x="10274808" y="3977640"/>
+            <a:ext cx="972312" cy="749808"/>
+          </a:xfrm>
+          <a:prstGeom prst="roundRect">
+            <a:avLst>
+              <a:gd name="adj" fmla="val 14634"/>
+            </a:avLst>
+          </a:prstGeom>
+          <a:solidFill>
+            <a:srgbClr val="D69A2D"/>
+          </a:solidFill>
+          <a:ln w="12700">
+            <a:solidFill>
+              <a:srgbClr val="D69A2D"/>
+            </a:solidFill>
+            <a:prstDash val="solid"/>
+          </a:ln>
+        </p:spPr>
+      </p:sp>
+      <p:sp>
+        <p:nvSpPr>
+          <p:cNvPr id="20" name="Text 18"/>
+          <p:cNvSpPr/>
+          <p:nvPr/>
+        </p:nvSpPr>
+        <p:spPr>
+          <a:xfrm>
+            <a:off x="10347960" y="4169664"/>
+            <a:ext cx="826008" cy="310896"/>
+          </a:xfrm>
+          <a:prstGeom prst="rect">
+            <a:avLst/>
+          </a:prstGeom>
+          <a:noFill/>
+          <a:ln/>
+        </p:spPr>
+        <p:txBody>
+          <a:bodyPr wrap="square" lIns="0" tIns="0" rIns="0" bIns="0" rtlCol="0" anchor="ctr">
+            <a:normAutofit/>
+          </a:bodyPr>
+          <a:lstStyle/>
+          <a:p>
+            <a:pPr algn="ctr" indent="0" marL="0">
+              <a:buNone/>
+            </a:pPr>
+            <a:r>
+              <a:rPr lang="en-US" sz="1500" b="1" dirty="0">
+                <a:solidFill>
+                  <a:srgbClr val="FFFFFF"/>
+                </a:solidFill>
+                <a:latin typeface="Aptos" pitchFamily="34" charset="0"/>
+                <a:ea typeface="Aptos" pitchFamily="34" charset="-122"/>
+                <a:cs typeface="Aptos" pitchFamily="34" charset="-120"/>
+              </a:rPr>
+              <a:t>Artifact</a:t>
+            </a:r>
+            <a:endParaRPr lang="en-US" sz="1500" dirty="0"/>
           </a:p>
         </p:txBody>
       </p:sp>
@@ -11717,7 +12754,7 @@
                 <a:ea typeface="Aptos" pitchFamily="34" charset="-122"/>
                 <a:cs typeface="Aptos" pitchFamily="34" charset="-120"/>
               </a:rPr>
-              <a:t>© Paula Soper</a:t>
+              <a:t>Â© Paula Soper</a:t>
             </a:r>
             <a:endParaRPr lang="en-US" sz="800" dirty="0"/>
           </a:p>
@@ -11725,7 +12762,46 @@
       </p:sp>
       <p:sp>
         <p:nvSpPr>
-          <p:cNvPr id="7" name="Shape 5"/>
+          <p:cNvPr id="7" name="Text 5"/>
+          <p:cNvSpPr/>
+          <p:nvPr/>
+        </p:nvSpPr>
+        <p:spPr>
+          <a:xfrm>
+            <a:off x="11137392" y="6510528"/>
+            <a:ext cx="411480" cy="201168"/>
+          </a:xfrm>
+          <a:prstGeom prst="rect">
+            <a:avLst/>
+          </a:prstGeom>
+          <a:noFill/>
+          <a:ln/>
+        </p:spPr>
+        <p:txBody>
+          <a:bodyPr wrap="square" lIns="0" tIns="0" rIns="0" bIns="0" rtlCol="0" anchor="ctr"/>
+          <a:lstStyle/>
+          <a:p>
+            <a:pPr algn="r" indent="0" marL="0">
+              <a:buNone/>
+            </a:pPr>
+            <a:r>
+              <a:rPr lang="en-US" sz="900" dirty="0">
+                <a:solidFill>
+                  <a:srgbClr val="5F7181"/>
+                </a:solidFill>
+                <a:latin typeface="Aptos" pitchFamily="34" charset="0"/>
+                <a:ea typeface="Aptos" pitchFamily="34" charset="-122"/>
+                <a:cs typeface="Aptos" pitchFamily="34" charset="-120"/>
+              </a:rPr>
+              <a:t>5</a:t>
+            </a:r>
+            <a:endParaRPr lang="en-US" sz="900" dirty="0"/>
+          </a:p>
+        </p:txBody>
+      </p:sp>
+      <p:sp>
+        <p:nvSpPr>
+          <p:cNvPr id="8" name="Shape 6"/>
           <p:cNvSpPr/>
           <p:nvPr/>
         </p:nvSpPr>
@@ -11750,7 +12826,7 @@
       </p:sp>
       <p:sp>
         <p:nvSpPr>
-          <p:cNvPr id="8" name="Text 6"/>
+          <p:cNvPr id="9" name="Text 7"/>
           <p:cNvSpPr/>
           <p:nvPr/>
         </p:nvSpPr>
@@ -11789,14 +12865,14 @@
       </p:sp>
       <p:sp>
         <p:nvSpPr>
-          <p:cNvPr id="9" name="Text 7"/>
+          <p:cNvPr id="10" name="Text 8"/>
           <p:cNvSpPr/>
           <p:nvPr/>
         </p:nvSpPr>
         <p:spPr>
           <a:xfrm>
             <a:off x="640080" y="621792"/>
-            <a:ext cx="10881360" cy="566928"/>
+            <a:ext cx="10881360" cy="713232"/>
           </a:xfrm>
           <a:prstGeom prst="rect">
             <a:avLst/>
@@ -11814,7 +12890,7 @@
               <a:buNone/>
             </a:pPr>
             <a:r>
-              <a:rPr lang="en-US" sz="2700" b="1" dirty="0">
+              <a:rPr lang="en-US" sz="3400" b="1" dirty="0">
                 <a:solidFill>
                   <a:srgbClr val="003A63"/>
                 </a:solidFill>
@@ -11824,20 +12900,20 @@
               </a:rPr>
               <a:t>Learning Objectives</a:t>
             </a:r>
-            <a:endParaRPr lang="en-US" sz="2700" dirty="0"/>
-          </a:p>
-        </p:txBody>
-      </p:sp>
-      <p:sp>
-        <p:nvSpPr>
-          <p:cNvPr id="10" name="Text 8"/>
-          <p:cNvSpPr/>
-          <p:nvPr/>
-        </p:nvSpPr>
-        <p:spPr>
-          <a:xfrm>
-            <a:off x="868680" y="1417320"/>
-            <a:ext cx="6675120" cy="4434840"/>
+            <a:endParaRPr lang="en-US" sz="3400" dirty="0"/>
+          </a:p>
+        </p:txBody>
+      </p:sp>
+      <p:sp>
+        <p:nvSpPr>
+          <p:cNvPr id="11" name="Text 9"/>
+          <p:cNvSpPr/>
+          <p:nvPr/>
+        </p:nvSpPr>
+        <p:spPr>
+          <a:xfrm>
+            <a:off x="868680" y="1508760"/>
+            <a:ext cx="6537960" cy="4160520"/>
           </a:xfrm>
           <a:prstGeom prst="rect">
             <a:avLst/>
@@ -11852,7 +12928,7 @@
           <a:lstStyle/>
           <a:p>
             <a:r>
-              <a:rPr lang="en-US" sz="1700" dirty="0">
+              <a:rPr lang="en-US" sz="2100" dirty="0">
                 <a:solidFill>
                   <a:srgbClr val="17364A"/>
                 </a:solidFill>
@@ -11862,11 +12938,11 @@
               </a:rPr>
               <a:t>Explain the purpose of business analysis for ai-enabled public health systems in public health AI work.</a:t>
             </a:r>
-            <a:endParaRPr lang="en-US" sz="1700" dirty="0"/>
-          </a:p>
-          <a:p>
-            <a:r>
-              <a:rPr lang="en-US" sz="1700" dirty="0">
+            <a:endParaRPr lang="en-US" sz="2100" dirty="0"/>
+          </a:p>
+          <a:p>
+            <a:r>
+              <a:rPr lang="en-US" sz="2100" dirty="0">
                 <a:solidFill>
                   <a:srgbClr val="17364A"/>
                 </a:solidFill>
@@ -11874,13 +12950,13 @@
                 <a:ea typeface="Aptos" pitchFamily="34" charset="-122"/>
                 <a:cs typeface="Aptos" pitchFamily="34" charset="-120"/>
               </a:rPr>
-              <a:t>Identify the technical, operational, privacy, security, equity, and governance issues associated with the topic.</a:t>
-            </a:r>
-            <a:endParaRPr lang="en-US" sz="1700" dirty="0"/>
-          </a:p>
-          <a:p>
-            <a:r>
-              <a:rPr lang="en-US" sz="1700" dirty="0">
+              <a:t>Identify the technical, operational, privacy, security, equity, and governance issues associated with.</a:t>
+            </a:r>
+            <a:endParaRPr lang="en-US" sz="2100" dirty="0"/>
+          </a:p>
+          <a:p>
+            <a:r>
+              <a:rPr lang="en-US" sz="2100" dirty="0">
                 <a:solidFill>
                   <a:srgbClr val="17364A"/>
                 </a:solidFill>
@@ -11890,27 +12966,13 @@
               </a:rPr>
               <a:t>Apply the topic to a real or realistic public health workflow, system, or implementation scenario.</a:t>
             </a:r>
-            <a:endParaRPr lang="en-US" sz="1700" dirty="0"/>
-          </a:p>
-          <a:p>
-            <a:r>
-              <a:rPr lang="en-US" sz="1700" dirty="0">
-                <a:solidFill>
-                  <a:srgbClr val="17364A"/>
-                </a:solidFill>
-                <a:latin typeface="Aptos" pitchFamily="34" charset="0"/>
-                <a:ea typeface="Aptos" pitchFamily="34" charset="-122"/>
-                <a:cs typeface="Aptos" pitchFamily="34" charset="-120"/>
-              </a:rPr>
-              <a:t>Recognize common failure modes that can affect safety, accuracy, trust, workflow fit, or sustainability.</a:t>
-            </a:r>
-            <a:endParaRPr lang="en-US" sz="1700" dirty="0"/>
-          </a:p>
-        </p:txBody>
-      </p:sp>
-      <p:sp>
-        <p:nvSpPr>
-          <p:cNvPr id="11" name="Shape 9"/>
+            <a:endParaRPr lang="en-US" sz="2100" dirty="0"/>
+          </a:p>
+        </p:txBody>
+      </p:sp>
+      <p:sp>
+        <p:nvSpPr>
+          <p:cNvPr id="12" name="Shape 10"/>
           <p:cNvSpPr/>
           <p:nvPr/>
         </p:nvSpPr>
@@ -11937,14 +12999,14 @@
       </p:sp>
       <p:sp>
         <p:nvSpPr>
-          <p:cNvPr id="12" name="Text 10"/>
+          <p:cNvPr id="13" name="Text 11"/>
           <p:cNvSpPr/>
           <p:nvPr/>
         </p:nvSpPr>
         <p:spPr>
           <a:xfrm>
             <a:off x="8074152" y="1563624"/>
-            <a:ext cx="2825496" cy="201168"/>
+            <a:ext cx="2825496" cy="256032"/>
           </a:xfrm>
           <a:prstGeom prst="rect">
             <a:avLst/>
@@ -11960,7 +13022,7 @@
               <a:buNone/>
             </a:pPr>
             <a:r>
-              <a:rPr lang="en-US" sz="950" b="1" dirty="0">
+              <a:rPr lang="en-US" sz="1300" b="1" dirty="0">
                 <a:solidFill>
                   <a:srgbClr val="0068B7"/>
                 </a:solidFill>
@@ -11970,20 +13032,20 @@
               </a:rPr>
               <a:t>Key idea</a:t>
             </a:r>
-            <a:endParaRPr lang="en-US" sz="950" dirty="0"/>
-          </a:p>
-        </p:txBody>
-      </p:sp>
-      <p:sp>
-        <p:nvSpPr>
-          <p:cNvPr id="13" name="Text 11"/>
-          <p:cNvSpPr/>
-          <p:nvPr/>
-        </p:nvSpPr>
-        <p:spPr>
-          <a:xfrm>
-            <a:off x="8074152" y="1856232"/>
-            <a:ext cx="2825496" cy="1261872"/>
+            <a:endParaRPr lang="en-US" sz="1300" dirty="0"/>
+          </a:p>
+        </p:txBody>
+      </p:sp>
+      <p:sp>
+        <p:nvSpPr>
+          <p:cNvPr id="14" name="Text 12"/>
+          <p:cNvSpPr/>
+          <p:nvPr/>
+        </p:nvSpPr>
+        <p:spPr>
+          <a:xfrm>
+            <a:off x="8074152" y="1920240"/>
+            <a:ext cx="2825496" cy="1188720"/>
           </a:xfrm>
           <a:prstGeom prst="rect">
             <a:avLst/>
@@ -12001,7 +13063,7 @@
               <a:buNone/>
             </a:pPr>
             <a:r>
-              <a:rPr lang="en-US" sz="1250" dirty="0">
+              <a:rPr lang="en-US" sz="1550" dirty="0">
                 <a:solidFill>
                   <a:srgbClr val="17364A"/>
                 </a:solidFill>
@@ -12011,13 +13073,13 @@
               </a:rPr>
               <a:t>Explain the purpose of business analysis for ai-enabled public health systems in public health AI work.</a:t>
             </a:r>
-            <a:endParaRPr lang="en-US" sz="1250" dirty="0"/>
-          </a:p>
-        </p:txBody>
-      </p:sp>
-      <p:sp>
-        <p:nvSpPr>
-          <p:cNvPr id="14" name="Shape 12"/>
+            <a:endParaRPr lang="en-US" sz="1550" dirty="0"/>
+          </a:p>
+        </p:txBody>
+      </p:sp>
+      <p:sp>
+        <p:nvSpPr>
+          <p:cNvPr id="15" name="Shape 13"/>
           <p:cNvSpPr/>
           <p:nvPr/>
         </p:nvSpPr>
@@ -12044,14 +13106,14 @@
       </p:sp>
       <p:sp>
         <p:nvSpPr>
-          <p:cNvPr id="15" name="Text 13"/>
+          <p:cNvPr id="16" name="Text 14"/>
           <p:cNvSpPr/>
           <p:nvPr/>
         </p:nvSpPr>
         <p:spPr>
           <a:xfrm>
             <a:off x="8074152" y="3666744"/>
-            <a:ext cx="2825496" cy="201168"/>
+            <a:ext cx="2825496" cy="256032"/>
           </a:xfrm>
           <a:prstGeom prst="rect">
             <a:avLst/>
@@ -12067,7 +13129,7 @@
               <a:buNone/>
             </a:pPr>
             <a:r>
-              <a:rPr lang="en-US" sz="950" b="1" dirty="0">
+              <a:rPr lang="en-US" sz="1300" b="1" dirty="0">
                 <a:solidFill>
                   <a:srgbClr val="0068B7"/>
                 </a:solidFill>
@@ -12077,20 +13139,20 @@
               </a:rPr>
               <a:t>Use this for</a:t>
             </a:r>
-            <a:endParaRPr lang="en-US" sz="950" dirty="0"/>
-          </a:p>
-        </p:txBody>
-      </p:sp>
-      <p:sp>
-        <p:nvSpPr>
-          <p:cNvPr id="16" name="Text 14"/>
-          <p:cNvSpPr/>
-          <p:nvPr/>
-        </p:nvSpPr>
-        <p:spPr>
-          <a:xfrm>
-            <a:off x="8074152" y="3959352"/>
-            <a:ext cx="2825496" cy="1170432"/>
+            <a:endParaRPr lang="en-US" sz="1300" dirty="0"/>
+          </a:p>
+        </p:txBody>
+      </p:sp>
+      <p:sp>
+        <p:nvSpPr>
+          <p:cNvPr id="17" name="Text 15"/>
+          <p:cNvSpPr/>
+          <p:nvPr/>
+        </p:nvSpPr>
+        <p:spPr>
+          <a:xfrm>
+            <a:off x="8074152" y="4023360"/>
+            <a:ext cx="2825496" cy="1097280"/>
           </a:xfrm>
           <a:prstGeom prst="rect">
             <a:avLst/>
@@ -12108,7 +13170,7 @@
               <a:buNone/>
             </a:pPr>
             <a:r>
-              <a:rPr lang="en-US" sz="1250" dirty="0">
+              <a:rPr lang="en-US" sz="1550" dirty="0">
                 <a:solidFill>
                   <a:srgbClr val="17364A"/>
                 </a:solidFill>
@@ -12118,7 +13180,7 @@
               </a:rPr>
               <a:t>Connect the concept to public health decisions, safeguards, documentation, or implementation work.</a:t>
             </a:r>
-            <a:endParaRPr lang="en-US" sz="1250" dirty="0"/>
+            <a:endParaRPr lang="en-US" sz="1550" dirty="0"/>
           </a:p>
         </p:txBody>
       </p:sp>
@@ -12315,7 +13377,7 @@
                 <a:ea typeface="Aptos" pitchFamily="34" charset="-122"/>
                 <a:cs typeface="Aptos" pitchFamily="34" charset="-120"/>
               </a:rPr>
-              <a:t>© Paula Soper</a:t>
+              <a:t>Â© Paula Soper</a:t>
             </a:r>
             <a:endParaRPr lang="en-US" sz="800" dirty="0"/>
           </a:p>
@@ -12329,8 +13391,47 @@
         </p:nvSpPr>
         <p:spPr>
           <a:xfrm>
+            <a:off x="11137392" y="6510528"/>
+            <a:ext cx="411480" cy="201168"/>
+          </a:xfrm>
+          <a:prstGeom prst="rect">
+            <a:avLst/>
+          </a:prstGeom>
+          <a:noFill/>
+          <a:ln/>
+        </p:spPr>
+        <p:txBody>
+          <a:bodyPr wrap="square" lIns="0" tIns="0" rIns="0" bIns="0" rtlCol="0" anchor="ctr"/>
+          <a:lstStyle/>
+          <a:p>
+            <a:pPr algn="r" indent="0" marL="0">
+              <a:buNone/>
+            </a:pPr>
+            <a:r>
+              <a:rPr lang="en-US" sz="900" dirty="0">
+                <a:solidFill>
+                  <a:srgbClr val="5F7181"/>
+                </a:solidFill>
+                <a:latin typeface="Aptos" pitchFamily="34" charset="0"/>
+                <a:ea typeface="Aptos" pitchFamily="34" charset="-122"/>
+                <a:cs typeface="Aptos" pitchFamily="34" charset="-120"/>
+              </a:rPr>
+              <a:t>6</a:t>
+            </a:r>
+            <a:endParaRPr lang="en-US" sz="900" dirty="0"/>
+          </a:p>
+        </p:txBody>
+      </p:sp>
+      <p:sp>
+        <p:nvSpPr>
+          <p:cNvPr id="8" name="Text 6"/>
+          <p:cNvSpPr/>
+          <p:nvPr/>
+        </p:nvSpPr>
+        <p:spPr>
+          <a:xfrm>
             <a:off x="640080" y="658368"/>
-            <a:ext cx="10881360" cy="566928"/>
+            <a:ext cx="10881360" cy="713232"/>
           </a:xfrm>
           <a:prstGeom prst="rect">
             <a:avLst/>
@@ -12348,7 +13449,7 @@
               <a:buNone/>
             </a:pPr>
             <a:r>
-              <a:rPr lang="en-US" sz="2700" b="1" dirty="0">
+              <a:rPr lang="en-US" sz="3400" b="1" dirty="0">
                 <a:solidFill>
                   <a:srgbClr val="003A63"/>
                 </a:solidFill>
@@ -12358,20 +13459,20 @@
               </a:rPr>
               <a:t>Learning Objectives Continued</a:t>
             </a:r>
-            <a:endParaRPr lang="en-US" sz="2700" dirty="0"/>
-          </a:p>
-        </p:txBody>
-      </p:sp>
-      <p:sp>
-        <p:nvSpPr>
-          <p:cNvPr id="8" name="Text 6"/>
-          <p:cNvSpPr/>
-          <p:nvPr/>
-        </p:nvSpPr>
-        <p:spPr>
-          <a:xfrm>
-            <a:off x="868680" y="1417320"/>
-            <a:ext cx="6675120" cy="4434840"/>
+            <a:endParaRPr lang="en-US" sz="3400" dirty="0"/>
+          </a:p>
+        </p:txBody>
+      </p:sp>
+      <p:sp>
+        <p:nvSpPr>
+          <p:cNvPr id="9" name="Text 7"/>
+          <p:cNvSpPr/>
+          <p:nvPr/>
+        </p:nvSpPr>
+        <p:spPr>
+          <a:xfrm>
+            <a:off x="868680" y="1508760"/>
+            <a:ext cx="6537960" cy="4160520"/>
           </a:xfrm>
           <a:prstGeom prst="rect">
             <a:avLst/>
@@ -12386,7 +13487,7 @@
           <a:lstStyle/>
           <a:p>
             <a:r>
-              <a:rPr lang="en-US" sz="1700" dirty="0">
+              <a:rPr lang="en-US" sz="2100" dirty="0">
                 <a:solidFill>
                   <a:srgbClr val="17364A"/>
                 </a:solidFill>
@@ -12394,15 +13495,15 @@
                 <a:ea typeface="Aptos" pitchFamily="34" charset="-122"/>
                 <a:cs typeface="Aptos" pitchFamily="34" charset="-120"/>
               </a:rPr>
-              <a:t>Produce a AI business analysis package that can support readiness assessment, governance review, procurement, implementation,.</a:t>
-            </a:r>
-            <a:endParaRPr lang="en-US" sz="1700" dirty="0"/>
-          </a:p>
-        </p:txBody>
-      </p:sp>
-      <p:sp>
-        <p:nvSpPr>
-          <p:cNvPr id="9" name="Shape 7"/>
+              <a:t>Produce a AI business analysis package that can support readiness assessment, governance review,.</a:t>
+            </a:r>
+            <a:endParaRPr lang="en-US" sz="2100" dirty="0"/>
+          </a:p>
+        </p:txBody>
+      </p:sp>
+      <p:sp>
+        <p:nvSpPr>
+          <p:cNvPr id="10" name="Shape 8"/>
           <p:cNvSpPr/>
           <p:nvPr/>
         </p:nvSpPr>
@@ -12429,14 +13530,14 @@
       </p:sp>
       <p:sp>
         <p:nvSpPr>
-          <p:cNvPr id="10" name="Text 8"/>
+          <p:cNvPr id="11" name="Text 9"/>
           <p:cNvSpPr/>
           <p:nvPr/>
         </p:nvSpPr>
         <p:spPr>
           <a:xfrm>
             <a:off x="8074152" y="1563624"/>
-            <a:ext cx="2825496" cy="201168"/>
+            <a:ext cx="2825496" cy="256032"/>
           </a:xfrm>
           <a:prstGeom prst="rect">
             <a:avLst/>
@@ -12452,7 +13553,7 @@
               <a:buNone/>
             </a:pPr>
             <a:r>
-              <a:rPr lang="en-US" sz="950" b="1" dirty="0">
+              <a:rPr lang="en-US" sz="1300" b="1" dirty="0">
                 <a:solidFill>
                   <a:srgbClr val="0068B7"/>
                 </a:solidFill>
@@ -12462,20 +13563,20 @@
               </a:rPr>
               <a:t>Key idea</a:t>
             </a:r>
-            <a:endParaRPr lang="en-US" sz="950" dirty="0"/>
-          </a:p>
-        </p:txBody>
-      </p:sp>
-      <p:sp>
-        <p:nvSpPr>
-          <p:cNvPr id="11" name="Text 9"/>
-          <p:cNvSpPr/>
-          <p:nvPr/>
-        </p:nvSpPr>
-        <p:spPr>
-          <a:xfrm>
-            <a:off x="8074152" y="1856232"/>
-            <a:ext cx="2825496" cy="1261872"/>
+            <a:endParaRPr lang="en-US" sz="1300" dirty="0"/>
+          </a:p>
+        </p:txBody>
+      </p:sp>
+      <p:sp>
+        <p:nvSpPr>
+          <p:cNvPr id="12" name="Text 10"/>
+          <p:cNvSpPr/>
+          <p:nvPr/>
+        </p:nvSpPr>
+        <p:spPr>
+          <a:xfrm>
+            <a:off x="8074152" y="1920240"/>
+            <a:ext cx="2825496" cy="1188720"/>
           </a:xfrm>
           <a:prstGeom prst="rect">
             <a:avLst/>
@@ -12493,7 +13594,7 @@
               <a:buNone/>
             </a:pPr>
             <a:r>
-              <a:rPr lang="en-US" sz="1250" dirty="0">
+              <a:rPr lang="en-US" sz="1550" dirty="0">
                 <a:solidFill>
                   <a:srgbClr val="17364A"/>
                 </a:solidFill>
@@ -12501,15 +13602,15 @@
                 <a:ea typeface="Aptos" pitchFamily="34" charset="-122"/>
                 <a:cs typeface="Aptos" pitchFamily="34" charset="-120"/>
               </a:rPr>
-              <a:t>Produce a AI business analysis package that can support readiness assessment, governance review, procurement, implementation,.</a:t>
-            </a:r>
-            <a:endParaRPr lang="en-US" sz="1250" dirty="0"/>
-          </a:p>
-        </p:txBody>
-      </p:sp>
-      <p:sp>
-        <p:nvSpPr>
-          <p:cNvPr id="12" name="Shape 10"/>
+              <a:t>Produce a AI business analysis package that can support readiness assessment, governance review,.</a:t>
+            </a:r>
+            <a:endParaRPr lang="en-US" sz="1550" dirty="0"/>
+          </a:p>
+        </p:txBody>
+      </p:sp>
+      <p:sp>
+        <p:nvSpPr>
+          <p:cNvPr id="13" name="Shape 11"/>
           <p:cNvSpPr/>
           <p:nvPr/>
         </p:nvSpPr>
@@ -12536,14 +13637,14 @@
       </p:sp>
       <p:sp>
         <p:nvSpPr>
-          <p:cNvPr id="13" name="Text 11"/>
+          <p:cNvPr id="14" name="Text 12"/>
           <p:cNvSpPr/>
           <p:nvPr/>
         </p:nvSpPr>
         <p:spPr>
           <a:xfrm>
             <a:off x="8074152" y="3666744"/>
-            <a:ext cx="2825496" cy="201168"/>
+            <a:ext cx="2825496" cy="256032"/>
           </a:xfrm>
           <a:prstGeom prst="rect">
             <a:avLst/>
@@ -12559,7 +13660,7 @@
               <a:buNone/>
             </a:pPr>
             <a:r>
-              <a:rPr lang="en-US" sz="950" b="1" dirty="0">
+              <a:rPr lang="en-US" sz="1300" b="1" dirty="0">
                 <a:solidFill>
                   <a:srgbClr val="0068B7"/>
                 </a:solidFill>
@@ -12569,20 +13670,20 @@
               </a:rPr>
               <a:t>Use this for</a:t>
             </a:r>
-            <a:endParaRPr lang="en-US" sz="950" dirty="0"/>
-          </a:p>
-        </p:txBody>
-      </p:sp>
-      <p:sp>
-        <p:nvSpPr>
-          <p:cNvPr id="14" name="Text 12"/>
-          <p:cNvSpPr/>
-          <p:nvPr/>
-        </p:nvSpPr>
-        <p:spPr>
-          <a:xfrm>
-            <a:off x="8074152" y="3959352"/>
-            <a:ext cx="2825496" cy="1170432"/>
+            <a:endParaRPr lang="en-US" sz="1300" dirty="0"/>
+          </a:p>
+        </p:txBody>
+      </p:sp>
+      <p:sp>
+        <p:nvSpPr>
+          <p:cNvPr id="15" name="Text 13"/>
+          <p:cNvSpPr/>
+          <p:nvPr/>
+        </p:nvSpPr>
+        <p:spPr>
+          <a:xfrm>
+            <a:off x="8074152" y="4023360"/>
+            <a:ext cx="2825496" cy="1097280"/>
           </a:xfrm>
           <a:prstGeom prst="rect">
             <a:avLst/>
@@ -12600,7 +13701,7 @@
               <a:buNone/>
             </a:pPr>
             <a:r>
-              <a:rPr lang="en-US" sz="1250" dirty="0">
+              <a:rPr lang="en-US" sz="1550" dirty="0">
                 <a:solidFill>
                   <a:srgbClr val="17364A"/>
                 </a:solidFill>
@@ -12610,7 +13711,7 @@
               </a:rPr>
               <a:t>Connect the concept to public health decisions, safeguards, documentation, or implementation work.</a:t>
             </a:r>
-            <a:endParaRPr lang="en-US" sz="1250" dirty="0"/>
+            <a:endParaRPr lang="en-US" sz="1550" dirty="0"/>
           </a:p>
         </p:txBody>
       </p:sp>
@@ -12807,7 +13908,7 @@
                 <a:ea typeface="Aptos" pitchFamily="34" charset="-122"/>
                 <a:cs typeface="Aptos" pitchFamily="34" charset="-120"/>
               </a:rPr>
-              <a:t>© Paula Soper</a:t>
+              <a:t>Â© Paula Soper</a:t>
             </a:r>
             <a:endParaRPr lang="en-US" sz="800" dirty="0"/>
           </a:p>
@@ -12815,7 +13916,46 @@
       </p:sp>
       <p:sp>
         <p:nvSpPr>
-          <p:cNvPr id="7" name="Shape 5"/>
+          <p:cNvPr id="7" name="Text 5"/>
+          <p:cNvSpPr/>
+          <p:nvPr/>
+        </p:nvSpPr>
+        <p:spPr>
+          <a:xfrm>
+            <a:off x="11137392" y="6510528"/>
+            <a:ext cx="411480" cy="201168"/>
+          </a:xfrm>
+          <a:prstGeom prst="rect">
+            <a:avLst/>
+          </a:prstGeom>
+          <a:noFill/>
+          <a:ln/>
+        </p:spPr>
+        <p:txBody>
+          <a:bodyPr wrap="square" lIns="0" tIns="0" rIns="0" bIns="0" rtlCol="0" anchor="ctr"/>
+          <a:lstStyle/>
+          <a:p>
+            <a:pPr algn="r" indent="0" marL="0">
+              <a:buNone/>
+            </a:pPr>
+            <a:r>
+              <a:rPr lang="en-US" sz="900" dirty="0">
+                <a:solidFill>
+                  <a:srgbClr val="5F7181"/>
+                </a:solidFill>
+                <a:latin typeface="Aptos" pitchFamily="34" charset="0"/>
+                <a:ea typeface="Aptos" pitchFamily="34" charset="-122"/>
+                <a:cs typeface="Aptos" pitchFamily="34" charset="-120"/>
+              </a:rPr>
+              <a:t>7</a:t>
+            </a:r>
+            <a:endParaRPr lang="en-US" sz="900" dirty="0"/>
+          </a:p>
+        </p:txBody>
+      </p:sp>
+      <p:sp>
+        <p:nvSpPr>
+          <p:cNvPr id="8" name="Shape 6"/>
           <p:cNvSpPr/>
           <p:nvPr/>
         </p:nvSpPr>
@@ -12840,7 +13980,7 @@
       </p:sp>
       <p:sp>
         <p:nvSpPr>
-          <p:cNvPr id="8" name="Text 6"/>
+          <p:cNvPr id="9" name="Text 7"/>
           <p:cNvSpPr/>
           <p:nvPr/>
         </p:nvSpPr>
@@ -12879,14 +14019,14 @@
       </p:sp>
       <p:sp>
         <p:nvSpPr>
-          <p:cNvPr id="9" name="Text 7"/>
+          <p:cNvPr id="10" name="Text 8"/>
           <p:cNvSpPr/>
           <p:nvPr/>
         </p:nvSpPr>
         <p:spPr>
           <a:xfrm>
             <a:off x="640080" y="621792"/>
-            <a:ext cx="10881360" cy="566928"/>
+            <a:ext cx="10881360" cy="713232"/>
           </a:xfrm>
           <a:prstGeom prst="rect">
             <a:avLst/>
@@ -12904,7 +14044,7 @@
               <a:buNone/>
             </a:pPr>
             <a:r>
-              <a:rPr lang="en-US" sz="2700" b="1" dirty="0">
+              <a:rPr lang="en-US" sz="3400" b="1" dirty="0">
                 <a:solidFill>
                   <a:srgbClr val="003A63"/>
                 </a:solidFill>
@@ -12914,20 +14054,20 @@
               </a:rPr>
               <a:t>Module Overview</a:t>
             </a:r>
-            <a:endParaRPr lang="en-US" sz="2700" dirty="0"/>
-          </a:p>
-        </p:txBody>
-      </p:sp>
-      <p:sp>
-        <p:nvSpPr>
-          <p:cNvPr id="10" name="Text 8"/>
-          <p:cNvSpPr/>
-          <p:nvPr/>
-        </p:nvSpPr>
-        <p:spPr>
-          <a:xfrm>
-            <a:off x="868680" y="1417320"/>
-            <a:ext cx="6675120" cy="4434840"/>
+            <a:endParaRPr lang="en-US" sz="3400" dirty="0"/>
+          </a:p>
+        </p:txBody>
+      </p:sp>
+      <p:sp>
+        <p:nvSpPr>
+          <p:cNvPr id="11" name="Text 9"/>
+          <p:cNvSpPr/>
+          <p:nvPr/>
+        </p:nvSpPr>
+        <p:spPr>
+          <a:xfrm>
+            <a:off x="868680" y="1508760"/>
+            <a:ext cx="6537960" cy="4160520"/>
           </a:xfrm>
           <a:prstGeom prst="rect">
             <a:avLst/>
@@ -12942,7 +14082,7 @@
           <a:lstStyle/>
           <a:p>
             <a:r>
-              <a:rPr lang="en-US" sz="1700" dirty="0">
+              <a:rPr lang="en-US" sz="2100" dirty="0">
                 <a:solidFill>
                   <a:srgbClr val="17364A"/>
                 </a:solidFill>
@@ -12950,13 +14090,13 @@
                 <a:ea typeface="Aptos" pitchFamily="34" charset="-122"/>
                 <a:cs typeface="Aptos" pitchFamily="34" charset="-120"/>
               </a:rPr>
-              <a:t>Business analysis translates public health needs into clear requirements, workflows, user stories, acceptance criteria,.</a:t>
-            </a:r>
-            <a:endParaRPr lang="en-US" sz="1700" dirty="0"/>
-          </a:p>
-          <a:p>
-            <a:r>
-              <a:rPr lang="en-US" sz="1700" dirty="0">
+              <a:t>Business analysis translates public health needs into clear requirements, workflows, user stories,.</a:t>
+            </a:r>
+            <a:endParaRPr lang="en-US" sz="2100" dirty="0"/>
+          </a:p>
+          <a:p>
+            <a:r>
+              <a:rPr lang="en-US" sz="2100" dirty="0">
                 <a:solidFill>
                   <a:srgbClr val="17364A"/>
                 </a:solidFill>
@@ -12964,13 +14104,13 @@
                 <a:ea typeface="Aptos" pitchFamily="34" charset="-122"/>
                 <a:cs typeface="Aptos" pitchFamily="34" charset="-120"/>
               </a:rPr>
-              <a:t>AI projects often fail when technical teams, vendors, and program staff do not share a precise understanding of the problem.</a:t>
-            </a:r>
-            <a:endParaRPr lang="en-US" sz="1700" dirty="0"/>
-          </a:p>
-          <a:p>
-            <a:r>
-              <a:rPr lang="en-US" sz="1700" dirty="0">
+              <a:t>AI projects often fail when technical teams, vendors, and program staff do not share a precise.</a:t>
+            </a:r>
+            <a:endParaRPr lang="en-US" sz="2100" dirty="0"/>
+          </a:p>
+          <a:p>
+            <a:r>
+              <a:rPr lang="en-US" sz="2100" dirty="0">
                 <a:solidFill>
                   <a:srgbClr val="17364A"/>
                 </a:solidFill>
@@ -12978,15 +14118,15 @@
                 <a:ea typeface="Aptos" pitchFamily="34" charset="-122"/>
                 <a:cs typeface="Aptos" pitchFamily="34" charset="-120"/>
               </a:rPr>
-              <a:t>This module gives informaticians and program leads a disciplined approach to defining AI-supported workflows before.</a:t>
-            </a:r>
-            <a:endParaRPr lang="en-US" sz="1700" dirty="0"/>
-          </a:p>
-        </p:txBody>
-      </p:sp>
-      <p:sp>
-        <p:nvSpPr>
-          <p:cNvPr id="11" name="Shape 9"/>
+              <a:t>This module gives informaticians and program leads a disciplined approach to defining AI-supported.</a:t>
+            </a:r>
+            <a:endParaRPr lang="en-US" sz="2100" dirty="0"/>
+          </a:p>
+        </p:txBody>
+      </p:sp>
+      <p:sp>
+        <p:nvSpPr>
+          <p:cNvPr id="12" name="Shape 10"/>
           <p:cNvSpPr/>
           <p:nvPr/>
         </p:nvSpPr>
@@ -13013,14 +14153,14 @@
       </p:sp>
       <p:sp>
         <p:nvSpPr>
-          <p:cNvPr id="12" name="Text 10"/>
+          <p:cNvPr id="13" name="Text 11"/>
           <p:cNvSpPr/>
           <p:nvPr/>
         </p:nvSpPr>
         <p:spPr>
           <a:xfrm>
             <a:off x="8074152" y="1563624"/>
-            <a:ext cx="2825496" cy="201168"/>
+            <a:ext cx="2825496" cy="256032"/>
           </a:xfrm>
           <a:prstGeom prst="rect">
             <a:avLst/>
@@ -13036,7 +14176,7 @@
               <a:buNone/>
             </a:pPr>
             <a:r>
-              <a:rPr lang="en-US" sz="950" b="1" dirty="0">
+              <a:rPr lang="en-US" sz="1300" b="1" dirty="0">
                 <a:solidFill>
                   <a:srgbClr val="0068B7"/>
                 </a:solidFill>
@@ -13046,20 +14186,20 @@
               </a:rPr>
               <a:t>Key idea</a:t>
             </a:r>
-            <a:endParaRPr lang="en-US" sz="950" dirty="0"/>
-          </a:p>
-        </p:txBody>
-      </p:sp>
-      <p:sp>
-        <p:nvSpPr>
-          <p:cNvPr id="13" name="Text 11"/>
-          <p:cNvSpPr/>
-          <p:nvPr/>
-        </p:nvSpPr>
-        <p:spPr>
-          <a:xfrm>
-            <a:off x="8074152" y="1856232"/>
-            <a:ext cx="2825496" cy="1261872"/>
+            <a:endParaRPr lang="en-US" sz="1300" dirty="0"/>
+          </a:p>
+        </p:txBody>
+      </p:sp>
+      <p:sp>
+        <p:nvSpPr>
+          <p:cNvPr id="14" name="Text 12"/>
+          <p:cNvSpPr/>
+          <p:nvPr/>
+        </p:nvSpPr>
+        <p:spPr>
+          <a:xfrm>
+            <a:off x="8074152" y="1920240"/>
+            <a:ext cx="2825496" cy="1188720"/>
           </a:xfrm>
           <a:prstGeom prst="rect">
             <a:avLst/>
@@ -13077,7 +14217,7 @@
               <a:buNone/>
             </a:pPr>
             <a:r>
-              <a:rPr lang="en-US" sz="1250" dirty="0">
+              <a:rPr lang="en-US" sz="1550" dirty="0">
                 <a:solidFill>
                   <a:srgbClr val="17364A"/>
                 </a:solidFill>
@@ -13085,15 +14225,15 @@
                 <a:ea typeface="Aptos" pitchFamily="34" charset="-122"/>
                 <a:cs typeface="Aptos" pitchFamily="34" charset="-120"/>
               </a:rPr>
-              <a:t>Business analysis translates public health needs into clear requirements, workflows, user stories, acceptance criteria,.</a:t>
-            </a:r>
-            <a:endParaRPr lang="en-US" sz="1250" dirty="0"/>
-          </a:p>
-        </p:txBody>
-      </p:sp>
-      <p:sp>
-        <p:nvSpPr>
-          <p:cNvPr id="14" name="Shape 12"/>
+              <a:t>Business analysis translates public health needs into clear requirements, workflows, user stories,.</a:t>
+            </a:r>
+            <a:endParaRPr lang="en-US" sz="1550" dirty="0"/>
+          </a:p>
+        </p:txBody>
+      </p:sp>
+      <p:sp>
+        <p:nvSpPr>
+          <p:cNvPr id="15" name="Shape 13"/>
           <p:cNvSpPr/>
           <p:nvPr/>
         </p:nvSpPr>
@@ -13120,14 +14260,14 @@
       </p:sp>
       <p:sp>
         <p:nvSpPr>
-          <p:cNvPr id="15" name="Text 13"/>
+          <p:cNvPr id="16" name="Text 14"/>
           <p:cNvSpPr/>
           <p:nvPr/>
         </p:nvSpPr>
         <p:spPr>
           <a:xfrm>
             <a:off x="8074152" y="3666744"/>
-            <a:ext cx="2825496" cy="201168"/>
+            <a:ext cx="2825496" cy="256032"/>
           </a:xfrm>
           <a:prstGeom prst="rect">
             <a:avLst/>
@@ -13143,7 +14283,7 @@
               <a:buNone/>
             </a:pPr>
             <a:r>
-              <a:rPr lang="en-US" sz="950" b="1" dirty="0">
+              <a:rPr lang="en-US" sz="1300" b="1" dirty="0">
                 <a:solidFill>
                   <a:srgbClr val="0068B7"/>
                 </a:solidFill>
@@ -13153,20 +14293,20 @@
               </a:rPr>
               <a:t>Use this for</a:t>
             </a:r>
-            <a:endParaRPr lang="en-US" sz="950" dirty="0"/>
-          </a:p>
-        </p:txBody>
-      </p:sp>
-      <p:sp>
-        <p:nvSpPr>
-          <p:cNvPr id="16" name="Text 14"/>
-          <p:cNvSpPr/>
-          <p:nvPr/>
-        </p:nvSpPr>
-        <p:spPr>
-          <a:xfrm>
-            <a:off x="8074152" y="3959352"/>
-            <a:ext cx="2825496" cy="1170432"/>
+            <a:endParaRPr lang="en-US" sz="1300" dirty="0"/>
+          </a:p>
+        </p:txBody>
+      </p:sp>
+      <p:sp>
+        <p:nvSpPr>
+          <p:cNvPr id="17" name="Text 15"/>
+          <p:cNvSpPr/>
+          <p:nvPr/>
+        </p:nvSpPr>
+        <p:spPr>
+          <a:xfrm>
+            <a:off x="8074152" y="4023360"/>
+            <a:ext cx="2825496" cy="1097280"/>
           </a:xfrm>
           <a:prstGeom prst="rect">
             <a:avLst/>
@@ -13184,7 +14324,7 @@
               <a:buNone/>
             </a:pPr>
             <a:r>
-              <a:rPr lang="en-US" sz="1250" dirty="0">
+              <a:rPr lang="en-US" sz="1550" dirty="0">
                 <a:solidFill>
                   <a:srgbClr val="17364A"/>
                 </a:solidFill>
@@ -13194,7 +14334,7 @@
               </a:rPr>
               <a:t>Connect the concept to public health decisions, safeguards, documentation, or implementation work.</a:t>
             </a:r>
-            <a:endParaRPr lang="en-US" sz="1250" dirty="0"/>
+            <a:endParaRPr lang="en-US" sz="1550" dirty="0"/>
           </a:p>
         </p:txBody>
       </p:sp>
@@ -13391,7 +14531,7 @@
                 <a:ea typeface="Aptos" pitchFamily="34" charset="-122"/>
                 <a:cs typeface="Aptos" pitchFamily="34" charset="-120"/>
               </a:rPr>
-              <a:t>© Paula Soper</a:t>
+              <a:t>Â© Paula Soper</a:t>
             </a:r>
             <a:endParaRPr lang="en-US" sz="800" dirty="0"/>
           </a:p>
@@ -13399,7 +14539,46 @@
       </p:sp>
       <p:sp>
         <p:nvSpPr>
-          <p:cNvPr id="7" name="Shape 5"/>
+          <p:cNvPr id="7" name="Text 5"/>
+          <p:cNvSpPr/>
+          <p:nvPr/>
+        </p:nvSpPr>
+        <p:spPr>
+          <a:xfrm>
+            <a:off x="11137392" y="6510528"/>
+            <a:ext cx="411480" cy="201168"/>
+          </a:xfrm>
+          <a:prstGeom prst="rect">
+            <a:avLst/>
+          </a:prstGeom>
+          <a:noFill/>
+          <a:ln/>
+        </p:spPr>
+        <p:txBody>
+          <a:bodyPr wrap="square" lIns="0" tIns="0" rIns="0" bIns="0" rtlCol="0" anchor="ctr"/>
+          <a:lstStyle/>
+          <a:p>
+            <a:pPr algn="r" indent="0" marL="0">
+              <a:buNone/>
+            </a:pPr>
+            <a:r>
+              <a:rPr lang="en-US" sz="900" dirty="0">
+                <a:solidFill>
+                  <a:srgbClr val="5F7181"/>
+                </a:solidFill>
+                <a:latin typeface="Aptos" pitchFamily="34" charset="0"/>
+                <a:ea typeface="Aptos" pitchFamily="34" charset="-122"/>
+                <a:cs typeface="Aptos" pitchFamily="34" charset="-120"/>
+              </a:rPr>
+              <a:t>8</a:t>
+            </a:r>
+            <a:endParaRPr lang="en-US" sz="900" dirty="0"/>
+          </a:p>
+        </p:txBody>
+      </p:sp>
+      <p:sp>
+        <p:nvSpPr>
+          <p:cNvPr id="8" name="Shape 6"/>
           <p:cNvSpPr/>
           <p:nvPr/>
         </p:nvSpPr>
@@ -13424,7 +14603,7 @@
       </p:sp>
       <p:sp>
         <p:nvSpPr>
-          <p:cNvPr id="8" name="Text 6"/>
+          <p:cNvPr id="9" name="Text 7"/>
           <p:cNvSpPr/>
           <p:nvPr/>
         </p:nvSpPr>
@@ -13463,14 +14642,14 @@
       </p:sp>
       <p:sp>
         <p:nvSpPr>
-          <p:cNvPr id="9" name="Text 7"/>
+          <p:cNvPr id="10" name="Text 8"/>
           <p:cNvSpPr/>
           <p:nvPr/>
         </p:nvSpPr>
         <p:spPr>
           <a:xfrm>
             <a:off x="640080" y="621792"/>
-            <a:ext cx="10881360" cy="566928"/>
+            <a:ext cx="10881360" cy="713232"/>
           </a:xfrm>
           <a:prstGeom prst="rect">
             <a:avLst/>
@@ -13488,7 +14667,7 @@
               <a:buNone/>
             </a:pPr>
             <a:r>
-              <a:rPr lang="en-US" sz="2700" b="1" dirty="0">
+              <a:rPr lang="en-US" sz="3400" b="1" dirty="0">
                 <a:solidFill>
                   <a:srgbClr val="003A63"/>
                 </a:solidFill>
@@ -13498,20 +14677,20 @@
               </a:rPr>
               <a:t>Jurisdiction and Agency Policy Note</a:t>
             </a:r>
-            <a:endParaRPr lang="en-US" sz="2700" dirty="0"/>
-          </a:p>
-        </p:txBody>
-      </p:sp>
-      <p:sp>
-        <p:nvSpPr>
-          <p:cNvPr id="10" name="Text 8"/>
-          <p:cNvSpPr/>
-          <p:nvPr/>
-        </p:nvSpPr>
-        <p:spPr>
-          <a:xfrm>
-            <a:off x="868680" y="1417320"/>
-            <a:ext cx="6675120" cy="4434840"/>
+            <a:endParaRPr lang="en-US" sz="3400" dirty="0"/>
+          </a:p>
+        </p:txBody>
+      </p:sp>
+      <p:sp>
+        <p:nvSpPr>
+          <p:cNvPr id="11" name="Text 9"/>
+          <p:cNvSpPr/>
+          <p:nvPr/>
+        </p:nvSpPr>
+        <p:spPr>
+          <a:xfrm>
+            <a:off x="868680" y="1508760"/>
+            <a:ext cx="6537960" cy="4160520"/>
           </a:xfrm>
           <a:prstGeom prst="rect">
             <a:avLst/>
@@ -13526,7 +14705,7 @@
           <a:lstStyle/>
           <a:p>
             <a:r>
-              <a:rPr lang="en-US" sz="1700" dirty="0">
+              <a:rPr lang="en-US" sz="2100" dirty="0">
                 <a:solidFill>
                   <a:srgbClr val="17364A"/>
                 </a:solidFill>
@@ -13536,11 +14715,11 @@
               </a:rPr>
               <a:t>This national-level module is intended for training and planning purposes.</a:t>
             </a:r>
-            <a:endParaRPr lang="en-US" sz="1700" dirty="0"/>
-          </a:p>
-          <a:p>
-            <a:r>
-              <a:rPr lang="en-US" sz="1700" dirty="0">
+            <a:endParaRPr lang="en-US" sz="2100" dirty="0"/>
+          </a:p>
+          <a:p>
+            <a:r>
+              <a:rPr lang="en-US" sz="2100" dirty="0">
                 <a:solidFill>
                   <a:srgbClr val="17364A"/>
                 </a:solidFill>
@@ -13550,11 +14729,11 @@
               </a:rPr>
               <a:t>It does not replace legal, privacy, procurement, civil rights, records, or agency policy review.</a:t>
             </a:r>
-            <a:endParaRPr lang="en-US" sz="1700" dirty="0"/>
-          </a:p>
-          <a:p>
-            <a:r>
-              <a:rPr lang="en-US" sz="1700" dirty="0">
+            <a:endParaRPr lang="en-US" sz="2100" dirty="0"/>
+          </a:p>
+          <a:p>
+            <a:r>
+              <a:rPr lang="en-US" sz="2100" dirty="0">
                 <a:solidFill>
                   <a:srgbClr val="17364A"/>
                 </a:solidFill>
@@ -13562,15 +14741,15 @@
                 <a:ea typeface="Aptos" pitchFamily="34" charset="-122"/>
                 <a:cs typeface="Aptos" pitchFamily="34" charset="-120"/>
               </a:rPr>
-              <a:t>Learners should confirm applicable requirements in their own jurisdiction and organization before implementing AI-supported.</a:t>
-            </a:r>
-            <a:endParaRPr lang="en-US" sz="1700" dirty="0"/>
-          </a:p>
-        </p:txBody>
-      </p:sp>
-      <p:sp>
-        <p:nvSpPr>
-          <p:cNvPr id="11" name="Shape 9"/>
+              <a:t>Learners should confirm applicable requirements in their own jurisdiction and organization before.</a:t>
+            </a:r>
+            <a:endParaRPr lang="en-US" sz="2100" dirty="0"/>
+          </a:p>
+        </p:txBody>
+      </p:sp>
+      <p:sp>
+        <p:nvSpPr>
+          <p:cNvPr id="12" name="Shape 10"/>
           <p:cNvSpPr/>
           <p:nvPr/>
         </p:nvSpPr>
@@ -13597,14 +14776,14 @@
       </p:sp>
       <p:sp>
         <p:nvSpPr>
-          <p:cNvPr id="12" name="Text 10"/>
+          <p:cNvPr id="13" name="Text 11"/>
           <p:cNvSpPr/>
           <p:nvPr/>
         </p:nvSpPr>
         <p:spPr>
           <a:xfrm>
             <a:off x="8074152" y="1563624"/>
-            <a:ext cx="2825496" cy="201168"/>
+            <a:ext cx="2825496" cy="256032"/>
           </a:xfrm>
           <a:prstGeom prst="rect">
             <a:avLst/>
@@ -13620,7 +14799,7 @@
               <a:buNone/>
             </a:pPr>
             <a:r>
-              <a:rPr lang="en-US" sz="950" b="1" dirty="0">
+              <a:rPr lang="en-US" sz="1300" b="1" dirty="0">
                 <a:solidFill>
                   <a:srgbClr val="0068B7"/>
                 </a:solidFill>
@@ -13630,20 +14809,20 @@
               </a:rPr>
               <a:t>Key idea</a:t>
             </a:r>
-            <a:endParaRPr lang="en-US" sz="950" dirty="0"/>
-          </a:p>
-        </p:txBody>
-      </p:sp>
-      <p:sp>
-        <p:nvSpPr>
-          <p:cNvPr id="13" name="Text 11"/>
-          <p:cNvSpPr/>
-          <p:nvPr/>
-        </p:nvSpPr>
-        <p:spPr>
-          <a:xfrm>
-            <a:off x="8074152" y="1856232"/>
-            <a:ext cx="2825496" cy="1261872"/>
+            <a:endParaRPr lang="en-US" sz="1300" dirty="0"/>
+          </a:p>
+        </p:txBody>
+      </p:sp>
+      <p:sp>
+        <p:nvSpPr>
+          <p:cNvPr id="14" name="Text 12"/>
+          <p:cNvSpPr/>
+          <p:nvPr/>
+        </p:nvSpPr>
+        <p:spPr>
+          <a:xfrm>
+            <a:off x="8074152" y="1920240"/>
+            <a:ext cx="2825496" cy="1188720"/>
           </a:xfrm>
           <a:prstGeom prst="rect">
             <a:avLst/>
@@ -13661,7 +14840,7 @@
               <a:buNone/>
             </a:pPr>
             <a:r>
-              <a:rPr lang="en-US" sz="1250" dirty="0">
+              <a:rPr lang="en-US" sz="1550" dirty="0">
                 <a:solidFill>
                   <a:srgbClr val="17364A"/>
                 </a:solidFill>
@@ -13671,13 +14850,13 @@
               </a:rPr>
               <a:t>This national-level module is intended for training and planning purposes.</a:t>
             </a:r>
-            <a:endParaRPr lang="en-US" sz="1250" dirty="0"/>
-          </a:p>
-        </p:txBody>
-      </p:sp>
-      <p:sp>
-        <p:nvSpPr>
-          <p:cNvPr id="14" name="Shape 12"/>
+            <a:endParaRPr lang="en-US" sz="1550" dirty="0"/>
+          </a:p>
+        </p:txBody>
+      </p:sp>
+      <p:sp>
+        <p:nvSpPr>
+          <p:cNvPr id="15" name="Shape 13"/>
           <p:cNvSpPr/>
           <p:nvPr/>
         </p:nvSpPr>
@@ -13704,14 +14883,14 @@
       </p:sp>
       <p:sp>
         <p:nvSpPr>
-          <p:cNvPr id="15" name="Text 13"/>
+          <p:cNvPr id="16" name="Text 14"/>
           <p:cNvSpPr/>
           <p:nvPr/>
         </p:nvSpPr>
         <p:spPr>
           <a:xfrm>
             <a:off x="8074152" y="3666744"/>
-            <a:ext cx="2825496" cy="201168"/>
+            <a:ext cx="2825496" cy="256032"/>
           </a:xfrm>
           <a:prstGeom prst="rect">
             <a:avLst/>
@@ -13727,7 +14906,7 @@
               <a:buNone/>
             </a:pPr>
             <a:r>
-              <a:rPr lang="en-US" sz="950" b="1" dirty="0">
+              <a:rPr lang="en-US" sz="1300" b="1" dirty="0">
                 <a:solidFill>
                   <a:srgbClr val="0068B7"/>
                 </a:solidFill>
@@ -13737,20 +14916,20 @@
               </a:rPr>
               <a:t>Use this for</a:t>
             </a:r>
-            <a:endParaRPr lang="en-US" sz="950" dirty="0"/>
-          </a:p>
-        </p:txBody>
-      </p:sp>
-      <p:sp>
-        <p:nvSpPr>
-          <p:cNvPr id="16" name="Text 14"/>
-          <p:cNvSpPr/>
-          <p:nvPr/>
-        </p:nvSpPr>
-        <p:spPr>
-          <a:xfrm>
-            <a:off x="8074152" y="3959352"/>
-            <a:ext cx="2825496" cy="1170432"/>
+            <a:endParaRPr lang="en-US" sz="1300" dirty="0"/>
+          </a:p>
+        </p:txBody>
+      </p:sp>
+      <p:sp>
+        <p:nvSpPr>
+          <p:cNvPr id="17" name="Text 15"/>
+          <p:cNvSpPr/>
+          <p:nvPr/>
+        </p:nvSpPr>
+        <p:spPr>
+          <a:xfrm>
+            <a:off x="8074152" y="4023360"/>
+            <a:ext cx="2825496" cy="1097280"/>
           </a:xfrm>
           <a:prstGeom prst="rect">
             <a:avLst/>
@@ -13768,7 +14947,7 @@
               <a:buNone/>
             </a:pPr>
             <a:r>
-              <a:rPr lang="en-US" sz="1250" dirty="0">
+              <a:rPr lang="en-US" sz="1550" dirty="0">
                 <a:solidFill>
                   <a:srgbClr val="17364A"/>
                 </a:solidFill>
@@ -13778,7 +14957,7 @@
               </a:rPr>
               <a:t>Connect the concept to public health decisions, safeguards, documentation, or implementation work.</a:t>
             </a:r>
-            <a:endParaRPr lang="en-US" sz="1250" dirty="0"/>
+            <a:endParaRPr lang="en-US" sz="1550" dirty="0"/>
           </a:p>
         </p:txBody>
       </p:sp>
@@ -13975,7 +15154,7 @@
                 <a:ea typeface="Aptos" pitchFamily="34" charset="-122"/>
                 <a:cs typeface="Aptos" pitchFamily="34" charset="-120"/>
               </a:rPr>
-              <a:t>© Paula Soper</a:t>
+              <a:t>Â© Paula Soper</a:t>
             </a:r>
             <a:endParaRPr lang="en-US" sz="800" dirty="0"/>
           </a:p>
@@ -13983,7 +15162,46 @@
       </p:sp>
       <p:sp>
         <p:nvSpPr>
-          <p:cNvPr id="7" name="Shape 5"/>
+          <p:cNvPr id="7" name="Text 5"/>
+          <p:cNvSpPr/>
+          <p:nvPr/>
+        </p:nvSpPr>
+        <p:spPr>
+          <a:xfrm>
+            <a:off x="11137392" y="6510528"/>
+            <a:ext cx="411480" cy="201168"/>
+          </a:xfrm>
+          <a:prstGeom prst="rect">
+            <a:avLst/>
+          </a:prstGeom>
+          <a:noFill/>
+          <a:ln/>
+        </p:spPr>
+        <p:txBody>
+          <a:bodyPr wrap="square" lIns="0" tIns="0" rIns="0" bIns="0" rtlCol="0" anchor="ctr"/>
+          <a:lstStyle/>
+          <a:p>
+            <a:pPr algn="r" indent="0" marL="0">
+              <a:buNone/>
+            </a:pPr>
+            <a:r>
+              <a:rPr lang="en-US" sz="900" dirty="0">
+                <a:solidFill>
+                  <a:srgbClr val="5F7181"/>
+                </a:solidFill>
+                <a:latin typeface="Aptos" pitchFamily="34" charset="0"/>
+                <a:ea typeface="Aptos" pitchFamily="34" charset="-122"/>
+                <a:cs typeface="Aptos" pitchFamily="34" charset="-120"/>
+              </a:rPr>
+              <a:t>9</a:t>
+            </a:r>
+            <a:endParaRPr lang="en-US" sz="900" dirty="0"/>
+          </a:p>
+        </p:txBody>
+      </p:sp>
+      <p:sp>
+        <p:nvSpPr>
+          <p:cNvPr id="8" name="Shape 6"/>
           <p:cNvSpPr/>
           <p:nvPr/>
         </p:nvSpPr>
@@ -14008,7 +15226,7 @@
       </p:sp>
       <p:sp>
         <p:nvSpPr>
-          <p:cNvPr id="8" name="Text 6"/>
+          <p:cNvPr id="9" name="Text 7"/>
           <p:cNvSpPr/>
           <p:nvPr/>
         </p:nvSpPr>
@@ -14047,14 +15265,14 @@
       </p:sp>
       <p:sp>
         <p:nvSpPr>
-          <p:cNvPr id="9" name="Text 7"/>
+          <p:cNvPr id="10" name="Text 8"/>
           <p:cNvSpPr/>
           <p:nvPr/>
         </p:nvSpPr>
         <p:spPr>
           <a:xfrm>
             <a:off x="640080" y="621792"/>
-            <a:ext cx="10881360" cy="566928"/>
+            <a:ext cx="10881360" cy="713232"/>
           </a:xfrm>
           <a:prstGeom prst="rect">
             <a:avLst/>
@@ -14072,7 +15290,7 @@
               <a:buNone/>
             </a:pPr>
             <a:r>
-              <a:rPr lang="en-US" sz="2700" b="1" dirty="0">
+              <a:rPr lang="en-US" sz="3400" b="1" dirty="0">
                 <a:solidFill>
                   <a:srgbClr val="003A63"/>
                 </a:solidFill>
@@ -14082,20 +15300,20 @@
               </a:rPr>
               <a:t>Why This Topic Matters for Public Health AI</a:t>
             </a:r>
-            <a:endParaRPr lang="en-US" sz="2700" dirty="0"/>
-          </a:p>
-        </p:txBody>
-      </p:sp>
-      <p:sp>
-        <p:nvSpPr>
-          <p:cNvPr id="10" name="Text 8"/>
-          <p:cNvSpPr/>
-          <p:nvPr/>
-        </p:nvSpPr>
-        <p:spPr>
-          <a:xfrm>
-            <a:off x="868680" y="1417320"/>
-            <a:ext cx="6675120" cy="4434840"/>
+            <a:endParaRPr lang="en-US" sz="3400" dirty="0"/>
+          </a:p>
+        </p:txBody>
+      </p:sp>
+      <p:sp>
+        <p:nvSpPr>
+          <p:cNvPr id="11" name="Text 9"/>
+          <p:cNvSpPr/>
+          <p:nvPr/>
+        </p:nvSpPr>
+        <p:spPr>
+          <a:xfrm>
+            <a:off x="868680" y="1508760"/>
+            <a:ext cx="6537960" cy="4160520"/>
           </a:xfrm>
           <a:prstGeom prst="rect">
             <a:avLst/>
@@ -14110,7 +15328,7 @@
           <a:lstStyle/>
           <a:p>
             <a:r>
-              <a:rPr lang="en-US" sz="1700" dirty="0">
+              <a:rPr lang="en-US" sz="2100" dirty="0">
                 <a:solidFill>
                   <a:srgbClr val="17364A"/>
                 </a:solidFill>
@@ -14118,13 +15336,13 @@
                 <a:ea typeface="Aptos" pitchFamily="34" charset="-122"/>
                 <a:cs typeface="Aptos" pitchFamily="34" charset="-120"/>
               </a:rPr>
-              <a:t>Business Analysis for AI-Enabled Public Health Systems matters because AI systems are embedded in public health programs,.</a:t>
-            </a:r>
-            <a:endParaRPr lang="en-US" sz="1700" dirty="0"/>
-          </a:p>
-          <a:p>
-            <a:r>
-              <a:rPr lang="en-US" sz="1700" dirty="0">
+              <a:t>Business Analysis for AI-Enabled Public Health Systems matters because AI systems are embedded in.</a:t>
+            </a:r>
+            <a:endParaRPr lang="en-US" sz="2100" dirty="0"/>
+          </a:p>
+          <a:p>
+            <a:r>
+              <a:rPr lang="en-US" sz="2100" dirty="0">
                 <a:solidFill>
                   <a:srgbClr val="17364A"/>
                 </a:solidFill>
@@ -14134,11 +15352,11 @@
               </a:rPr>
               <a:t>The topic affects whether AI outputs are accurate, explainable, safe, equitable, secure, and sustainable.</a:t>
             </a:r>
-            <a:endParaRPr lang="en-US" sz="1700" dirty="0"/>
-          </a:p>
-          <a:p>
-            <a:r>
-              <a:rPr lang="en-US" sz="1700" dirty="0">
+            <a:endParaRPr lang="en-US" sz="2100" dirty="0"/>
+          </a:p>
+          <a:p>
+            <a:r>
+              <a:rPr lang="en-US" sz="2100" dirty="0">
                 <a:solidFill>
                   <a:srgbClr val="17364A"/>
                 </a:solidFill>
@@ -14148,27 +15366,13 @@
               </a:rPr>
               <a:t>Agencies that ignore this area may create tools that work in a demonstration but fail in actual practice.</a:t>
             </a:r>
-            <a:endParaRPr lang="en-US" sz="1700" dirty="0"/>
-          </a:p>
-          <a:p>
-            <a:r>
-              <a:rPr lang="en-US" sz="1700" dirty="0">
-                <a:solidFill>
-                  <a:srgbClr val="17364A"/>
-                </a:solidFill>
-                <a:latin typeface="Aptos" pitchFamily="34" charset="0"/>
-                <a:ea typeface="Aptos" pitchFamily="34" charset="-122"/>
-                <a:cs typeface="Aptos" pitchFamily="34" charset="-120"/>
-              </a:rPr>
-              <a:t>The topic also affects accountability.</a:t>
-            </a:r>
-            <a:endParaRPr lang="en-US" sz="1700" dirty="0"/>
-          </a:p>
-        </p:txBody>
-      </p:sp>
-      <p:sp>
-        <p:nvSpPr>
-          <p:cNvPr id="11" name="Shape 9"/>
+            <a:endParaRPr lang="en-US" sz="2100" dirty="0"/>
+          </a:p>
+        </p:txBody>
+      </p:sp>
+      <p:sp>
+        <p:nvSpPr>
+          <p:cNvPr id="12" name="Shape 10"/>
           <p:cNvSpPr/>
           <p:nvPr/>
         </p:nvSpPr>
@@ -14195,14 +15399,14 @@
       </p:sp>
       <p:sp>
         <p:nvSpPr>
-          <p:cNvPr id="12" name="Text 10"/>
+          <p:cNvPr id="13" name="Text 11"/>
           <p:cNvSpPr/>
           <p:nvPr/>
         </p:nvSpPr>
         <p:spPr>
           <a:xfrm>
             <a:off x="8074152" y="1563624"/>
-            <a:ext cx="2825496" cy="201168"/>
+            <a:ext cx="2825496" cy="256032"/>
           </a:xfrm>
           <a:prstGeom prst="rect">
             <a:avLst/>
@@ -14218,7 +15422,7 @@
               <a:buNone/>
             </a:pPr>
             <a:r>
-              <a:rPr lang="en-US" sz="950" b="1" dirty="0">
+              <a:rPr lang="en-US" sz="1300" b="1" dirty="0">
                 <a:solidFill>
                   <a:srgbClr val="0068B7"/>
                 </a:solidFill>
@@ -14228,20 +15432,20 @@
               </a:rPr>
               <a:t>Key idea</a:t>
             </a:r>
-            <a:endParaRPr lang="en-US" sz="950" dirty="0"/>
-          </a:p>
-        </p:txBody>
-      </p:sp>
-      <p:sp>
-        <p:nvSpPr>
-          <p:cNvPr id="13" name="Text 11"/>
-          <p:cNvSpPr/>
-          <p:nvPr/>
-        </p:nvSpPr>
-        <p:spPr>
-          <a:xfrm>
-            <a:off x="8074152" y="1856232"/>
-            <a:ext cx="2825496" cy="1261872"/>
+            <a:endParaRPr lang="en-US" sz="1300" dirty="0"/>
+          </a:p>
+        </p:txBody>
+      </p:sp>
+      <p:sp>
+        <p:nvSpPr>
+          <p:cNvPr id="14" name="Text 12"/>
+          <p:cNvSpPr/>
+          <p:nvPr/>
+        </p:nvSpPr>
+        <p:spPr>
+          <a:xfrm>
+            <a:off x="8074152" y="1920240"/>
+            <a:ext cx="2825496" cy="1188720"/>
           </a:xfrm>
           <a:prstGeom prst="rect">
             <a:avLst/>
@@ -14259,7 +15463,7 @@
               <a:buNone/>
             </a:pPr>
             <a:r>
-              <a:rPr lang="en-US" sz="1250" dirty="0">
+              <a:rPr lang="en-US" sz="1550" dirty="0">
                 <a:solidFill>
                   <a:srgbClr val="17364A"/>
                 </a:solidFill>
@@ -14267,15 +15471,15 @@
                 <a:ea typeface="Aptos" pitchFamily="34" charset="-122"/>
                 <a:cs typeface="Aptos" pitchFamily="34" charset="-120"/>
               </a:rPr>
-              <a:t>Business Analysis for AI-Enabled Public Health Systems matters because AI systems are embedded in public health programs,.</a:t>
-            </a:r>
-            <a:endParaRPr lang="en-US" sz="1250" dirty="0"/>
-          </a:p>
-        </p:txBody>
-      </p:sp>
-      <p:sp>
-        <p:nvSpPr>
-          <p:cNvPr id="14" name="Shape 12"/>
+              <a:t>Business Analysis for AI-Enabled Public Health Systems matters because AI systems are embedded in.</a:t>
+            </a:r>
+            <a:endParaRPr lang="en-US" sz="1550" dirty="0"/>
+          </a:p>
+        </p:txBody>
+      </p:sp>
+      <p:sp>
+        <p:nvSpPr>
+          <p:cNvPr id="15" name="Shape 13"/>
           <p:cNvSpPr/>
           <p:nvPr/>
         </p:nvSpPr>
@@ -14302,14 +15506,14 @@
       </p:sp>
       <p:sp>
         <p:nvSpPr>
-          <p:cNvPr id="15" name="Text 13"/>
+          <p:cNvPr id="16" name="Text 14"/>
           <p:cNvSpPr/>
           <p:nvPr/>
         </p:nvSpPr>
         <p:spPr>
           <a:xfrm>
             <a:off x="8074152" y="3666744"/>
-            <a:ext cx="2825496" cy="201168"/>
+            <a:ext cx="2825496" cy="256032"/>
           </a:xfrm>
           <a:prstGeom prst="rect">
             <a:avLst/>
@@ -14325,7 +15529,7 @@
               <a:buNone/>
             </a:pPr>
             <a:r>
-              <a:rPr lang="en-US" sz="950" b="1" dirty="0">
+              <a:rPr lang="en-US" sz="1300" b="1" dirty="0">
                 <a:solidFill>
                   <a:srgbClr val="0068B7"/>
                 </a:solidFill>
@@ -14335,20 +15539,20 @@
               </a:rPr>
               <a:t>Use this for</a:t>
             </a:r>
-            <a:endParaRPr lang="en-US" sz="950" dirty="0"/>
-          </a:p>
-        </p:txBody>
-      </p:sp>
-      <p:sp>
-        <p:nvSpPr>
-          <p:cNvPr id="16" name="Text 14"/>
-          <p:cNvSpPr/>
-          <p:nvPr/>
-        </p:nvSpPr>
-        <p:spPr>
-          <a:xfrm>
-            <a:off x="8074152" y="3959352"/>
-            <a:ext cx="2825496" cy="1170432"/>
+            <a:endParaRPr lang="en-US" sz="1300" dirty="0"/>
+          </a:p>
+        </p:txBody>
+      </p:sp>
+      <p:sp>
+        <p:nvSpPr>
+          <p:cNvPr id="17" name="Text 15"/>
+          <p:cNvSpPr/>
+          <p:nvPr/>
+        </p:nvSpPr>
+        <p:spPr>
+          <a:xfrm>
+            <a:off x="8074152" y="4023360"/>
+            <a:ext cx="2825496" cy="1097280"/>
           </a:xfrm>
           <a:prstGeom prst="rect">
             <a:avLst/>
@@ -14366,7 +15570,7 @@
               <a:buNone/>
             </a:pPr>
             <a:r>
-              <a:rPr lang="en-US" sz="1250" dirty="0">
+              <a:rPr lang="en-US" sz="1550" dirty="0">
                 <a:solidFill>
                   <a:srgbClr val="17364A"/>
                 </a:solidFill>
@@ -14376,7 +15580,7 @@
               </a:rPr>
               <a:t>Connect the concept to public health decisions, safeguards, documentation, or implementation work.</a:t>
             </a:r>
-            <a:endParaRPr lang="en-US" sz="1250" dirty="0"/>
+            <a:endParaRPr lang="en-US" sz="1550" dirty="0"/>
           </a:p>
         </p:txBody>
       </p:sp>
